--- a/docs/TicketTriage-presentation.pptx
+++ b/docs/TicketTriage-presentation.pptx
@@ -4,13 +4,16 @@
   <p:sldMasterIdLst>
     <p:sldMasterId id="2147483648" r:id="rId1"/>
   </p:sldMasterIdLst>
+  <p:notesMasterIdLst>
+    <p:notesMasterId r:id="rId6"/>
+  </p:notesMasterIdLst>
   <p:sldIdLst>
-    <p:sldId id="256" r:id="rId7"/>
-    <p:sldId id="257" r:id="rId9"/>
-    <p:sldId id="258" r:id="rId10"/>
-    <p:sldId id="259" r:id="rId11"/>
+    <p:sldId id="256" r:id="rId2"/>
+    <p:sldId id="257" r:id="rId3"/>
+    <p:sldId id="258" r:id="rId4"/>
+    <p:sldId id="259" r:id="rId5"/>
   </p:sldIdLst>
-  <p:sldSz cx="12191695" cy="6858000" type="screen4x3"/>
+  <p:sldSz cx="12192000" cy="6858000"/>
   <p:notesSz cx="6858000" cy="9144000"/>
   <p:defaultTextStyle>
     <a:defPPr>
@@ -107,11 +110,27 @@
       </a:defRPr>
     </a:lvl9pPr>
   </p:defaultTextStyle>
+  <p:extLst>
+    <p:ext uri="{EFAFB233-063F-42B5-8137-9DF3F51BA10A}">
+      <p15:sldGuideLst xmlns:p15="http://schemas.microsoft.com/office/powerpoint/2012/main">
+        <p15:guide id="1" orient="horz" pos="2160">
+          <p15:clr>
+            <a:srgbClr val="A4A3A4"/>
+          </p15:clr>
+        </p15:guide>
+        <p15:guide id="2" pos="2880">
+          <p15:clr>
+            <a:srgbClr val="A4A3A4"/>
+          </p15:clr>
+        </p15:guide>
+      </p15:sldGuideLst>
+    </p:ext>
+  </p:extLst>
 </p:presentation>
 </file>
 
 <file path=ppt/notesMasters/notesMaster1.xml><?xml version="1.0" encoding="utf-8"?>
-<p:notesMaster xmlns:a="http://schemas.openxmlformats.org/drawingml/2006/main" xmlns:p="http://schemas.openxmlformats.org/presentationml/2006/main" xmlns:r="http://schemas.openxmlformats.org/officeDocument/2006/relationships">
+<p:notesMaster xmlns:a="http://schemas.openxmlformats.org/drawingml/2006/main" xmlns:r="http://schemas.openxmlformats.org/officeDocument/2006/relationships" xmlns:p="http://schemas.openxmlformats.org/presentationml/2006/main">
   <p:cSld>
     <p:bg>
       <p:bgRef idx="1001">
@@ -132,241 +151,16 @@
           <a:chExt cx="0" cy="0"/>
         </a:xfrm>
       </p:grpSpPr>
-      <p:sp>
-        <p:nvSpPr>
-          <p:cNvPr id="2" name="Header Placeholder 1"/>
-          <p:cNvSpPr>
-            <a:spLocks noGrp="1"/>
-          </p:cNvSpPr>
-          <p:nvPr>
-            <p:ph type="hdr" sz="quarter"/>
-          </p:nvPr>
-        </p:nvSpPr>
-        <p:spPr>
-          <a:xfrm>
-            <a:off x="0" y="0"/>
-            <a:ext cx="2971800" cy="457200"/>
-          </a:xfrm>
-          <a:prstGeom prst="rect">
-            <a:avLst/>
-          </a:prstGeom>
-        </p:spPr>
-        <p:txBody>
-          <a:bodyPr vert="horz" lIns="91440" tIns="45720" rIns="91440" bIns="45720" rtlCol="0"/>
-          <a:lstStyle>
-            <a:lvl1pPr algn="l">
-              <a:defRPr sz="1200"/>
-            </a:lvl1pPr>
-          </a:lstStyle>
-          <a:p>
-            <a:endParaRPr lang="en-US"/>
-          </a:p>
-        </p:txBody>
-      </p:sp>
-      <p:sp>
-        <p:nvSpPr>
-          <p:cNvPr id="3" name="Date Placeholder 2"/>
-          <p:cNvSpPr>
-            <a:spLocks noGrp="1"/>
-          </p:cNvSpPr>
-          <p:nvPr>
-            <p:ph type="dt" idx="1"/>
-          </p:nvPr>
-        </p:nvSpPr>
-        <p:spPr>
-          <a:xfrm>
-            <a:off x="3884613" y="0"/>
-            <a:ext cx="2971800" cy="457200"/>
-          </a:xfrm>
-          <a:prstGeom prst="rect">
-            <a:avLst/>
-          </a:prstGeom>
-        </p:spPr>
-        <p:txBody>
-          <a:bodyPr vert="horz" lIns="91440" tIns="45720" rIns="91440" bIns="45720" rtlCol="0"/>
-          <a:lstStyle>
-            <a:lvl1pPr algn="r">
-              <a:defRPr sz="1200"/>
-            </a:lvl1pPr>
-          </a:lstStyle>
-          <a:p>
-            <a:fld id="{0F89C1C7-3DCD-1040-A9CF-14679D8B5DDD}" type="datetimeFigureOut">
-              <a:rPr lang="en-US" smtClean="0"/>
-              <a:t>10/17/16</a:t>
-            </a:fld>
-            <a:endParaRPr lang="en-US"/>
-          </a:p>
-        </p:txBody>
-      </p:sp>
-      <p:sp>
-        <p:nvSpPr>
-          <p:cNvPr id="4" name="Slide Image Placeholder 3"/>
-          <p:cNvSpPr>
-            <a:spLocks noGrp="1" noRot="1" noChangeAspect="1"/>
-          </p:cNvSpPr>
-          <p:nvPr>
-            <p:ph type="sldImg" idx="2"/>
-          </p:nvPr>
-        </p:nvSpPr>
-        <p:spPr>
-          <a:xfrm>
-            <a:off x="1143000" y="685800"/>
-            <a:ext cx="4572000" cy="3429000"/>
-          </a:xfrm>
-          <a:prstGeom prst="rect">
-            <a:avLst/>
-          </a:prstGeom>
-          <a:noFill/>
-          <a:ln w="12700">
-            <a:solidFill>
-              <a:prstClr val="black"/>
-            </a:solidFill>
-          </a:ln>
-        </p:spPr>
-        <p:txBody>
-          <a:bodyPr vert="horz" lIns="91440" tIns="45720" rIns="91440" bIns="45720" rtlCol="0" anchor="ctr"/>
-          <a:lstStyle/>
-          <a:p>
-            <a:endParaRPr lang="en-US"/>
-          </a:p>
-        </p:txBody>
-      </p:sp>
-      <p:sp>
-        <p:nvSpPr>
-          <p:cNvPr id="5" name="Notes Placeholder 4"/>
-          <p:cNvSpPr>
-            <a:spLocks noGrp="1"/>
-          </p:cNvSpPr>
-          <p:nvPr>
-            <p:ph type="body" sz="quarter" idx="3"/>
-          </p:nvPr>
-        </p:nvSpPr>
-        <p:spPr>
-          <a:xfrm>
-            <a:off x="685800" y="4343400"/>
-            <a:ext cx="5486400" cy="4114800"/>
-          </a:xfrm>
-          <a:prstGeom prst="rect">
-            <a:avLst/>
-          </a:prstGeom>
-        </p:spPr>
-        <p:txBody>
-          <a:bodyPr vert="horz" lIns="91440" tIns="45720" rIns="91440" bIns="45720" rtlCol="0"/>
-          <a:lstStyle/>
-          <a:p>
-            <a:pPr lvl="0"/>
-            <a:r>
-              <a:rPr lang="en-US" smtClean="0"/>
-              <a:t>Click to edit Master text styles</a:t>
-            </a:r>
-          </a:p>
-          <a:p>
-            <a:pPr lvl="1"/>
-            <a:r>
-              <a:rPr lang="en-US" smtClean="0"/>
-              <a:t>Second level</a:t>
-            </a:r>
-          </a:p>
-          <a:p>
-            <a:pPr lvl="2"/>
-            <a:r>
-              <a:rPr lang="en-US" smtClean="0"/>
-              <a:t>Third level</a:t>
-            </a:r>
-          </a:p>
-          <a:p>
-            <a:pPr lvl="3"/>
-            <a:r>
-              <a:rPr lang="en-US" smtClean="0"/>
-              <a:t>Fourth level</a:t>
-            </a:r>
-          </a:p>
-          <a:p>
-            <a:pPr lvl="4"/>
-            <a:r>
-              <a:rPr lang="en-US" smtClean="0"/>
-              <a:t>Fifth level</a:t>
-            </a:r>
-            <a:endParaRPr lang="en-US"/>
-          </a:p>
-        </p:txBody>
-      </p:sp>
-      <p:sp>
-        <p:nvSpPr>
-          <p:cNvPr id="6" name="Footer Placeholder 5"/>
-          <p:cNvSpPr>
-            <a:spLocks noGrp="1"/>
-          </p:cNvSpPr>
-          <p:nvPr>
-            <p:ph type="ftr" sz="quarter" idx="4"/>
-          </p:nvPr>
-        </p:nvSpPr>
-        <p:spPr>
-          <a:xfrm>
-            <a:off x="0" y="8685213"/>
-            <a:ext cx="2971800" cy="457200"/>
-          </a:xfrm>
-          <a:prstGeom prst="rect">
-            <a:avLst/>
-          </a:prstGeom>
-        </p:spPr>
-        <p:txBody>
-          <a:bodyPr vert="horz" lIns="91440" tIns="45720" rIns="91440" bIns="45720" rtlCol="0" anchor="b"/>
-          <a:lstStyle>
-            <a:lvl1pPr algn="l">
-              <a:defRPr sz="1200"/>
-            </a:lvl1pPr>
-          </a:lstStyle>
-          <a:p>
-            <a:endParaRPr lang="en-US"/>
-          </a:p>
-        </p:txBody>
-      </p:sp>
-      <p:sp>
-        <p:nvSpPr>
-          <p:cNvPr id="7" name="Slide Number Placeholder 6"/>
-          <p:cNvSpPr>
-            <a:spLocks noGrp="1"/>
-          </p:cNvSpPr>
-          <p:nvPr>
-            <p:ph type="sldNum" sz="quarter" idx="5"/>
-          </p:nvPr>
-        </p:nvSpPr>
-        <p:spPr>
-          <a:xfrm>
-            <a:off x="3884613" y="8685213"/>
-            <a:ext cx="2971800" cy="457200"/>
-          </a:xfrm>
-          <a:prstGeom prst="rect">
-            <a:avLst/>
-          </a:prstGeom>
-        </p:spPr>
-        <p:txBody>
-          <a:bodyPr vert="horz" lIns="91440" tIns="45720" rIns="91440" bIns="45720" rtlCol="0" anchor="b"/>
-          <a:lstStyle>
-            <a:lvl1pPr algn="r">
-              <a:defRPr sz="1200"/>
-            </a:lvl1pPr>
-          </a:lstStyle>
-          <a:p>
-            <a:fld id="{BB5E49A5-4136-284D-997B-48E1D791AD67}" type="slidenum">
-              <a:rPr lang="en-US" smtClean="0"/>
-              <a:t>‹#›</a:t>
-            </a:fld>
-            <a:endParaRPr lang="en-US"/>
-          </a:p>
-        </p:txBody>
-      </p:sp>
     </p:spTree>
     <p:extLst>
       <p:ext uri="{BB962C8B-B14F-4D97-AF65-F5344CB8AC3E}">
-        <p14:creationId xmlns:p14="http://schemas.microsoft.com/office/powerpoint/2010/main" val="2623252185"/>
+        <p14:creationId xmlns:p14="http://schemas.microsoft.com/office/powerpoint/2010/main" val="2346250809"/>
       </p:ext>
     </p:extLst>
   </p:cSld>
   <p:clrMap bg1="lt1" tx1="dk1" bg2="lt2" tx2="dk2" accent1="accent1" accent2="accent2" accent3="accent3" accent4="accent4" accent5="accent5" accent6="accent6" hlink="hlink" folHlink="folHlink"/>
   <p:notesStyle>
-    <a:lvl1pPr marL="0" algn="l" defTabSz="457200" rtl="0" eaLnBrk="1" latinLnBrk="0" hangingPunct="1">
+    <a:lvl1pPr marL="0" algn="l" defTabSz="914400" rtl="0" eaLnBrk="1" latinLnBrk="0" hangingPunct="1">
       <a:defRPr sz="1200" kern="1200">
         <a:solidFill>
           <a:schemeClr val="tx1"/>
@@ -376,7 +170,7 @@
         <a:cs typeface="+mn-cs"/>
       </a:defRPr>
     </a:lvl1pPr>
-    <a:lvl2pPr marL="457200" algn="l" defTabSz="457200" rtl="0" eaLnBrk="1" latinLnBrk="0" hangingPunct="1">
+    <a:lvl2pPr marL="457200" algn="l" defTabSz="914400" rtl="0" eaLnBrk="1" latinLnBrk="0" hangingPunct="1">
       <a:defRPr sz="1200" kern="1200">
         <a:solidFill>
           <a:schemeClr val="tx1"/>
@@ -386,7 +180,7 @@
         <a:cs typeface="+mn-cs"/>
       </a:defRPr>
     </a:lvl2pPr>
-    <a:lvl3pPr marL="914400" algn="l" defTabSz="457200" rtl="0" eaLnBrk="1" latinLnBrk="0" hangingPunct="1">
+    <a:lvl3pPr marL="914400" algn="l" defTabSz="914400" rtl="0" eaLnBrk="1" latinLnBrk="0" hangingPunct="1">
       <a:defRPr sz="1200" kern="1200">
         <a:solidFill>
           <a:schemeClr val="tx1"/>
@@ -396,7 +190,7 @@
         <a:cs typeface="+mn-cs"/>
       </a:defRPr>
     </a:lvl3pPr>
-    <a:lvl4pPr marL="1371600" algn="l" defTabSz="457200" rtl="0" eaLnBrk="1" latinLnBrk="0" hangingPunct="1">
+    <a:lvl4pPr marL="1371600" algn="l" defTabSz="914400" rtl="0" eaLnBrk="1" latinLnBrk="0" hangingPunct="1">
       <a:defRPr sz="1200" kern="1200">
         <a:solidFill>
           <a:schemeClr val="tx1"/>
@@ -406,7 +200,7 @@
         <a:cs typeface="+mn-cs"/>
       </a:defRPr>
     </a:lvl4pPr>
-    <a:lvl5pPr marL="1828800" algn="l" defTabSz="457200" rtl="0" eaLnBrk="1" latinLnBrk="0" hangingPunct="1">
+    <a:lvl5pPr marL="1828800" algn="l" defTabSz="914400" rtl="0" eaLnBrk="1" latinLnBrk="0" hangingPunct="1">
       <a:defRPr sz="1200" kern="1200">
         <a:solidFill>
           <a:schemeClr val="tx1"/>
@@ -416,7 +210,7 @@
         <a:cs typeface="+mn-cs"/>
       </a:defRPr>
     </a:lvl5pPr>
-    <a:lvl6pPr marL="2286000" algn="l" defTabSz="457200" rtl="0" eaLnBrk="1" latinLnBrk="0" hangingPunct="1">
+    <a:lvl6pPr marL="2286000" algn="l" defTabSz="914400" rtl="0" eaLnBrk="1" latinLnBrk="0" hangingPunct="1">
       <a:defRPr sz="1200" kern="1200">
         <a:solidFill>
           <a:schemeClr val="tx1"/>
@@ -426,7 +220,7 @@
         <a:cs typeface="+mn-cs"/>
       </a:defRPr>
     </a:lvl6pPr>
-    <a:lvl7pPr marL="2743200" algn="l" defTabSz="457200" rtl="0" eaLnBrk="1" latinLnBrk="0" hangingPunct="1">
+    <a:lvl7pPr marL="2743200" algn="l" defTabSz="914400" rtl="0" eaLnBrk="1" latinLnBrk="0" hangingPunct="1">
       <a:defRPr sz="1200" kern="1200">
         <a:solidFill>
           <a:schemeClr val="tx1"/>
@@ -436,7 +230,7 @@
         <a:cs typeface="+mn-cs"/>
       </a:defRPr>
     </a:lvl7pPr>
-    <a:lvl8pPr marL="3200400" algn="l" defTabSz="457200" rtl="0" eaLnBrk="1" latinLnBrk="0" hangingPunct="1">
+    <a:lvl8pPr marL="3200400" algn="l" defTabSz="914400" rtl="0" eaLnBrk="1" latinLnBrk="0" hangingPunct="1">
       <a:defRPr sz="1200" kern="1200">
         <a:solidFill>
           <a:schemeClr val="tx1"/>
@@ -446,7 +240,7 @@
         <a:cs typeface="+mn-cs"/>
       </a:defRPr>
     </a:lvl8pPr>
-    <a:lvl9pPr marL="3657600" algn="l" defTabSz="457200" rtl="0" eaLnBrk="1" latinLnBrk="0" hangingPunct="1">
+    <a:lvl9pPr marL="3657600" algn="l" defTabSz="914400" rtl="0" eaLnBrk="1" latinLnBrk="0" hangingPunct="1">
       <a:defRPr sz="1200" kern="1200">
         <a:solidFill>
           <a:schemeClr val="tx1"/>
@@ -461,7 +255,7 @@
 </file>
 
 <file path=ppt/notesSlides/notesSlide1.xml><?xml version="1.0" encoding="utf-8"?>
-<p:notes xmlns:a="http://schemas.openxmlformats.org/drawingml/2006/main" xmlns:p="http://schemas.openxmlformats.org/presentationml/2006/main" xmlns:r="http://schemas.openxmlformats.org/officeDocument/2006/relationships">
+<p:notes xmlns:a="http://schemas.openxmlformats.org/drawingml/2006/main" xmlns:r="http://schemas.openxmlformats.org/officeDocument/2006/relationships" xmlns:p="http://schemas.openxmlformats.org/presentationml/2006/main">
   <p:cSld>
     <p:spTree>
       <p:nvGrpSpPr>
@@ -481,7 +275,7 @@
         <p:nvSpPr>
           <p:cNvPr id="2" name="Slide Image Placeholder 1"/>
           <p:cNvSpPr>
-            <a:spLocks noGrp="1"/>
+            <a:spLocks noGrp="1" noRot="1" noChangeAspect="1"/>
           </p:cNvSpPr>
           <p:nvPr>
             <p:ph type="sldImg" idx="2"/>
@@ -496,7 +290,7 @@
             <a:spLocks noGrp="1"/>
           </p:cNvSpPr>
           <p:nvPr>
-            <p:ph type="body" idx="3" sz="quarter"/>
+            <p:ph type="body" sz="quarter" idx="3"/>
           </p:nvPr>
         </p:nvSpPr>
         <p:spPr/>
@@ -517,7 +311,7 @@
             <a:spLocks noGrp="1"/>
           </p:cNvSpPr>
           <p:nvPr>
-            <p:ph type="sldNum" idx="5" sz="quarter"/>
+            <p:ph type="sldNum" sz="quarter" idx="5"/>
           </p:nvPr>
         </p:nvSpPr>
         <p:spPr/>
@@ -531,7 +325,7 @@
 </file>
 
 <file path=ppt/notesSlides/notesSlide2.xml><?xml version="1.0" encoding="utf-8"?>
-<p:notes xmlns:a="http://schemas.openxmlformats.org/drawingml/2006/main" xmlns:p="http://schemas.openxmlformats.org/presentationml/2006/main" xmlns:r="http://schemas.openxmlformats.org/officeDocument/2006/relationships">
+<p:notes xmlns:a="http://schemas.openxmlformats.org/drawingml/2006/main" xmlns:r="http://schemas.openxmlformats.org/officeDocument/2006/relationships" xmlns:p="http://schemas.openxmlformats.org/presentationml/2006/main">
   <p:cSld>
     <p:spTree>
       <p:nvGrpSpPr>
@@ -551,7 +345,7 @@
         <p:nvSpPr>
           <p:cNvPr id="2" name="Slide Image Placeholder 1"/>
           <p:cNvSpPr>
-            <a:spLocks noGrp="1"/>
+            <a:spLocks noGrp="1" noRot="1" noChangeAspect="1"/>
           </p:cNvSpPr>
           <p:nvPr>
             <p:ph type="sldImg" idx="2"/>
@@ -566,7 +360,7 @@
             <a:spLocks noGrp="1"/>
           </p:cNvSpPr>
           <p:nvPr>
-            <p:ph type="body" idx="3" sz="quarter"/>
+            <p:ph type="body" sz="quarter" idx="3"/>
           </p:nvPr>
         </p:nvSpPr>
         <p:spPr/>
@@ -587,7 +381,7 @@
             <a:spLocks noGrp="1"/>
           </p:cNvSpPr>
           <p:nvPr>
-            <p:ph type="sldNum" idx="5" sz="quarter"/>
+            <p:ph type="sldNum" sz="quarter" idx="5"/>
           </p:nvPr>
         </p:nvSpPr>
         <p:spPr/>
@@ -601,7 +395,7 @@
 </file>
 
 <file path=ppt/notesSlides/notesSlide3.xml><?xml version="1.0" encoding="utf-8"?>
-<p:notes xmlns:a="http://schemas.openxmlformats.org/drawingml/2006/main" xmlns:p="http://schemas.openxmlformats.org/presentationml/2006/main" xmlns:r="http://schemas.openxmlformats.org/officeDocument/2006/relationships">
+<p:notes xmlns:a="http://schemas.openxmlformats.org/drawingml/2006/main" xmlns:r="http://schemas.openxmlformats.org/officeDocument/2006/relationships" xmlns:p="http://schemas.openxmlformats.org/presentationml/2006/main">
   <p:cSld>
     <p:spTree>
       <p:nvGrpSpPr>
@@ -621,7 +415,7 @@
         <p:nvSpPr>
           <p:cNvPr id="2" name="Slide Image Placeholder 1"/>
           <p:cNvSpPr>
-            <a:spLocks noGrp="1"/>
+            <a:spLocks noGrp="1" noRot="1" noChangeAspect="1"/>
           </p:cNvSpPr>
           <p:nvPr>
             <p:ph type="sldImg" idx="2"/>
@@ -636,7 +430,7 @@
             <a:spLocks noGrp="1"/>
           </p:cNvSpPr>
           <p:nvPr>
-            <p:ph type="body" idx="3" sz="quarter"/>
+            <p:ph type="body" sz="quarter" idx="3"/>
           </p:nvPr>
         </p:nvSpPr>
         <p:spPr/>
@@ -657,7 +451,7 @@
             <a:spLocks noGrp="1"/>
           </p:cNvSpPr>
           <p:nvPr>
-            <p:ph type="sldNum" idx="5" sz="quarter"/>
+            <p:ph type="sldNum" sz="quarter" idx="5"/>
           </p:nvPr>
         </p:nvSpPr>
         <p:spPr/>
@@ -671,7 +465,7 @@
 </file>
 
 <file path=ppt/notesSlides/notesSlide4.xml><?xml version="1.0" encoding="utf-8"?>
-<p:notes xmlns:a="http://schemas.openxmlformats.org/drawingml/2006/main" xmlns:p="http://schemas.openxmlformats.org/presentationml/2006/main" xmlns:r="http://schemas.openxmlformats.org/officeDocument/2006/relationships">
+<p:notes xmlns:a="http://schemas.openxmlformats.org/drawingml/2006/main" xmlns:r="http://schemas.openxmlformats.org/officeDocument/2006/relationships" xmlns:p="http://schemas.openxmlformats.org/presentationml/2006/main">
   <p:cSld>
     <p:spTree>
       <p:nvGrpSpPr>
@@ -691,7 +485,7 @@
         <p:nvSpPr>
           <p:cNvPr id="2" name="Slide Image Placeholder 1"/>
           <p:cNvSpPr>
-            <a:spLocks noGrp="1"/>
+            <a:spLocks noGrp="1" noRot="1" noChangeAspect="1"/>
           </p:cNvSpPr>
           <p:nvPr>
             <p:ph type="sldImg" idx="2"/>
@@ -706,7 +500,7 @@
             <a:spLocks noGrp="1"/>
           </p:cNvSpPr>
           <p:nvPr>
-            <p:ph type="body" idx="3" sz="quarter"/>
+            <p:ph type="body" sz="quarter" idx="3"/>
           </p:nvPr>
         </p:nvSpPr>
         <p:spPr/>
@@ -727,7 +521,7 @@
             <a:spLocks noGrp="1"/>
           </p:cNvSpPr>
           <p:nvPr>
-            <p:ph type="sldNum" idx="5" sz="quarter"/>
+            <p:ph type="sldNum" sz="quarter" idx="5"/>
           </p:nvPr>
         </p:nvSpPr>
         <p:spPr/>
@@ -778,10 +572,9 @@
           <a:lstStyle/>
           <a:p>
             <a:r>
-              <a:rPr lang="en-US" smtClean="0"/>
+              <a:rPr lang="en-US"/>
               <a:t>Click to edit Master title style</a:t>
             </a:r>
-            <a:endParaRPr lang="en-US"/>
           </a:p>
         </p:txBody>
       </p:sp>
@@ -897,10 +690,9 @@
           </a:lstStyle>
           <a:p>
             <a:r>
-              <a:rPr lang="en-US" smtClean="0"/>
+              <a:rPr lang="en-US"/>
               <a:t>Click to edit Master subtitle style</a:t>
             </a:r>
-            <a:endParaRPr lang="en-US"/>
           </a:p>
         </p:txBody>
       </p:sp>
@@ -921,7 +713,7 @@
           <a:p>
             <a:fld id="{5BCAD085-E8A6-8845-BD4E-CB4CCA059FC4}" type="datetimeFigureOut">
               <a:rPr lang="en-US" smtClean="0"/>
-              <a:t>1/27/13</a:t>
+              <a:t>9/25/2026</a:t>
             </a:fld>
             <a:endParaRPr lang="en-US"/>
           </a:p>
@@ -963,7 +755,7 @@
           <a:p>
             <a:fld id="{C1FF6DA9-008F-8B48-92A6-B652298478BF}" type="slidenum">
               <a:rPr lang="en-US" smtClean="0"/>
-              <a:t>‹#›</a:t>
+              <a:t>‹Nr.›</a:t>
             </a:fld>
             <a:endParaRPr lang="en-US"/>
           </a:p>
@@ -1015,10 +807,9 @@
           <a:lstStyle/>
           <a:p>
             <a:r>
-              <a:rPr lang="en-US" smtClean="0"/>
+              <a:rPr lang="en-US"/>
               <a:t>Click to edit Master title style</a:t>
             </a:r>
-            <a:endParaRPr lang="en-US"/>
           </a:p>
         </p:txBody>
       </p:sp>
@@ -1039,38 +830,37 @@
           <a:p>
             <a:pPr lvl="0"/>
             <a:r>
-              <a:rPr lang="en-US" smtClean="0"/>
+              <a:rPr lang="en-US"/>
               <a:t>Click to edit Master text styles</a:t>
             </a:r>
           </a:p>
           <a:p>
             <a:pPr lvl="1"/>
             <a:r>
-              <a:rPr lang="en-US" smtClean="0"/>
+              <a:rPr lang="en-US"/>
               <a:t>Second level</a:t>
             </a:r>
           </a:p>
           <a:p>
             <a:pPr lvl="2"/>
             <a:r>
-              <a:rPr lang="en-US" smtClean="0"/>
+              <a:rPr lang="en-US"/>
               <a:t>Third level</a:t>
             </a:r>
           </a:p>
           <a:p>
             <a:pPr lvl="3"/>
             <a:r>
-              <a:rPr lang="en-US" smtClean="0"/>
+              <a:rPr lang="en-US"/>
               <a:t>Fourth level</a:t>
             </a:r>
           </a:p>
           <a:p>
             <a:pPr lvl="4"/>
             <a:r>
-              <a:rPr lang="en-US" smtClean="0"/>
+              <a:rPr lang="en-US"/>
               <a:t>Fifth level</a:t>
             </a:r>
-            <a:endParaRPr lang="en-US"/>
           </a:p>
         </p:txBody>
       </p:sp>
@@ -1091,7 +881,7 @@
           <a:p>
             <a:fld id="{5BCAD085-E8A6-8845-BD4E-CB4CCA059FC4}" type="datetimeFigureOut">
               <a:rPr lang="en-US" smtClean="0"/>
-              <a:t>1/27/13</a:t>
+              <a:t>9/25/2026</a:t>
             </a:fld>
             <a:endParaRPr lang="en-US"/>
           </a:p>
@@ -1133,7 +923,7 @@
           <a:p>
             <a:fld id="{C1FF6DA9-008F-8B48-92A6-B652298478BF}" type="slidenum">
               <a:rPr lang="en-US" smtClean="0"/>
-              <a:t>‹#›</a:t>
+              <a:t>‹Nr.›</a:t>
             </a:fld>
             <a:endParaRPr lang="en-US"/>
           </a:p>
@@ -1190,10 +980,9 @@
           <a:lstStyle/>
           <a:p>
             <a:r>
-              <a:rPr lang="en-US" smtClean="0"/>
+              <a:rPr lang="en-US"/>
               <a:t>Click to edit Master title style</a:t>
             </a:r>
-            <a:endParaRPr lang="en-US"/>
           </a:p>
         </p:txBody>
       </p:sp>
@@ -1219,38 +1008,37 @@
           <a:p>
             <a:pPr lvl="0"/>
             <a:r>
-              <a:rPr lang="en-US" smtClean="0"/>
+              <a:rPr lang="en-US"/>
               <a:t>Click to edit Master text styles</a:t>
             </a:r>
           </a:p>
           <a:p>
             <a:pPr lvl="1"/>
             <a:r>
-              <a:rPr lang="en-US" smtClean="0"/>
+              <a:rPr lang="en-US"/>
               <a:t>Second level</a:t>
             </a:r>
           </a:p>
           <a:p>
             <a:pPr lvl="2"/>
             <a:r>
-              <a:rPr lang="en-US" smtClean="0"/>
+              <a:rPr lang="en-US"/>
               <a:t>Third level</a:t>
             </a:r>
           </a:p>
           <a:p>
             <a:pPr lvl="3"/>
             <a:r>
-              <a:rPr lang="en-US" smtClean="0"/>
+              <a:rPr lang="en-US"/>
               <a:t>Fourth level</a:t>
             </a:r>
           </a:p>
           <a:p>
             <a:pPr lvl="4"/>
             <a:r>
-              <a:rPr lang="en-US" smtClean="0"/>
+              <a:rPr lang="en-US"/>
               <a:t>Fifth level</a:t>
             </a:r>
-            <a:endParaRPr lang="en-US"/>
           </a:p>
         </p:txBody>
       </p:sp>
@@ -1271,7 +1059,7 @@
           <a:p>
             <a:fld id="{5BCAD085-E8A6-8845-BD4E-CB4CCA059FC4}" type="datetimeFigureOut">
               <a:rPr lang="en-US" smtClean="0"/>
-              <a:t>1/27/13</a:t>
+              <a:t>9/25/2026</a:t>
             </a:fld>
             <a:endParaRPr lang="en-US"/>
           </a:p>
@@ -1313,7 +1101,7 @@
           <a:p>
             <a:fld id="{C1FF6DA9-008F-8B48-92A6-B652298478BF}" type="slidenum">
               <a:rPr lang="en-US" smtClean="0"/>
-              <a:t>‹#›</a:t>
+              <a:t>‹Nr.›</a:t>
             </a:fld>
             <a:endParaRPr lang="en-US"/>
           </a:p>
@@ -1365,10 +1153,9 @@
           <a:lstStyle/>
           <a:p>
             <a:r>
-              <a:rPr lang="en-US" smtClean="0"/>
+              <a:rPr lang="en-US"/>
               <a:t>Click to edit Master title style</a:t>
             </a:r>
-            <a:endParaRPr lang="en-US"/>
           </a:p>
         </p:txBody>
       </p:sp>
@@ -1389,38 +1176,37 @@
           <a:p>
             <a:pPr lvl="0"/>
             <a:r>
-              <a:rPr lang="en-US" smtClean="0"/>
+              <a:rPr lang="en-US"/>
               <a:t>Click to edit Master text styles</a:t>
             </a:r>
           </a:p>
           <a:p>
             <a:pPr lvl="1"/>
             <a:r>
-              <a:rPr lang="en-US" smtClean="0"/>
+              <a:rPr lang="en-US"/>
               <a:t>Second level</a:t>
             </a:r>
           </a:p>
           <a:p>
             <a:pPr lvl="2"/>
             <a:r>
-              <a:rPr lang="en-US" smtClean="0"/>
+              <a:rPr lang="en-US"/>
               <a:t>Third level</a:t>
             </a:r>
           </a:p>
           <a:p>
             <a:pPr lvl="3"/>
             <a:r>
-              <a:rPr lang="en-US" smtClean="0"/>
+              <a:rPr lang="en-US"/>
               <a:t>Fourth level</a:t>
             </a:r>
           </a:p>
           <a:p>
             <a:pPr lvl="4"/>
             <a:r>
-              <a:rPr lang="en-US" smtClean="0"/>
+              <a:rPr lang="en-US"/>
               <a:t>Fifth level</a:t>
             </a:r>
-            <a:endParaRPr lang="en-US"/>
           </a:p>
         </p:txBody>
       </p:sp>
@@ -1441,7 +1227,7 @@
           <a:p>
             <a:fld id="{5BCAD085-E8A6-8845-BD4E-CB4CCA059FC4}" type="datetimeFigureOut">
               <a:rPr lang="en-US" smtClean="0"/>
-              <a:t>1/27/13</a:t>
+              <a:t>9/25/2026</a:t>
             </a:fld>
             <a:endParaRPr lang="en-US"/>
           </a:p>
@@ -1483,7 +1269,7 @@
           <a:p>
             <a:fld id="{C1FF6DA9-008F-8B48-92A6-B652298478BF}" type="slidenum">
               <a:rPr lang="en-US" smtClean="0"/>
-              <a:t>‹#›</a:t>
+              <a:t>‹Nr.›</a:t>
             </a:fld>
             <a:endParaRPr lang="en-US"/>
           </a:p>
@@ -1544,10 +1330,9 @@
           </a:lstStyle>
           <a:p>
             <a:r>
-              <a:rPr lang="en-US" smtClean="0"/>
+              <a:rPr lang="en-US"/>
               <a:t>Click to edit Master title style</a:t>
             </a:r>
-            <a:endParaRPr lang="en-US"/>
           </a:p>
         </p:txBody>
       </p:sp>
@@ -1664,7 +1449,7 @@
           <a:p>
             <a:pPr lvl="0"/>
             <a:r>
-              <a:rPr lang="en-US" smtClean="0"/>
+              <a:rPr lang="en-US"/>
               <a:t>Click to edit Master text styles</a:t>
             </a:r>
           </a:p>
@@ -1687,7 +1472,7 @@
           <a:p>
             <a:fld id="{5BCAD085-E8A6-8845-BD4E-CB4CCA059FC4}" type="datetimeFigureOut">
               <a:rPr lang="en-US" smtClean="0"/>
-              <a:t>1/27/13</a:t>
+              <a:t>9/25/2026</a:t>
             </a:fld>
             <a:endParaRPr lang="en-US"/>
           </a:p>
@@ -1729,7 +1514,7 @@
           <a:p>
             <a:fld id="{C1FF6DA9-008F-8B48-92A6-B652298478BF}" type="slidenum">
               <a:rPr lang="en-US" smtClean="0"/>
-              <a:t>‹#›</a:t>
+              <a:t>‹Nr.›</a:t>
             </a:fld>
             <a:endParaRPr lang="en-US"/>
           </a:p>
@@ -1781,10 +1566,9 @@
           <a:lstStyle/>
           <a:p>
             <a:r>
-              <a:rPr lang="en-US" smtClean="0"/>
+              <a:rPr lang="en-US"/>
               <a:t>Click to edit Master title style</a:t>
             </a:r>
-            <a:endParaRPr lang="en-US"/>
           </a:p>
         </p:txBody>
       </p:sp>
@@ -1838,38 +1622,37 @@
           <a:p>
             <a:pPr lvl="0"/>
             <a:r>
-              <a:rPr lang="en-US" smtClean="0"/>
+              <a:rPr lang="en-US"/>
               <a:t>Click to edit Master text styles</a:t>
             </a:r>
           </a:p>
           <a:p>
             <a:pPr lvl="1"/>
             <a:r>
-              <a:rPr lang="en-US" smtClean="0"/>
+              <a:rPr lang="en-US"/>
               <a:t>Second level</a:t>
             </a:r>
           </a:p>
           <a:p>
             <a:pPr lvl="2"/>
             <a:r>
-              <a:rPr lang="en-US" smtClean="0"/>
+              <a:rPr lang="en-US"/>
               <a:t>Third level</a:t>
             </a:r>
           </a:p>
           <a:p>
             <a:pPr lvl="3"/>
             <a:r>
-              <a:rPr lang="en-US" smtClean="0"/>
+              <a:rPr lang="en-US"/>
               <a:t>Fourth level</a:t>
             </a:r>
           </a:p>
           <a:p>
             <a:pPr lvl="4"/>
             <a:r>
-              <a:rPr lang="en-US" smtClean="0"/>
+              <a:rPr lang="en-US"/>
               <a:t>Fifth level</a:t>
             </a:r>
-            <a:endParaRPr lang="en-US"/>
           </a:p>
         </p:txBody>
       </p:sp>
@@ -1923,38 +1706,37 @@
           <a:p>
             <a:pPr lvl="0"/>
             <a:r>
-              <a:rPr lang="en-US" smtClean="0"/>
+              <a:rPr lang="en-US"/>
               <a:t>Click to edit Master text styles</a:t>
             </a:r>
           </a:p>
           <a:p>
             <a:pPr lvl="1"/>
             <a:r>
-              <a:rPr lang="en-US" smtClean="0"/>
+              <a:rPr lang="en-US"/>
               <a:t>Second level</a:t>
             </a:r>
           </a:p>
           <a:p>
             <a:pPr lvl="2"/>
             <a:r>
-              <a:rPr lang="en-US" smtClean="0"/>
+              <a:rPr lang="en-US"/>
               <a:t>Third level</a:t>
             </a:r>
           </a:p>
           <a:p>
             <a:pPr lvl="3"/>
             <a:r>
-              <a:rPr lang="en-US" smtClean="0"/>
+              <a:rPr lang="en-US"/>
               <a:t>Fourth level</a:t>
             </a:r>
           </a:p>
           <a:p>
             <a:pPr lvl="4"/>
             <a:r>
-              <a:rPr lang="en-US" smtClean="0"/>
+              <a:rPr lang="en-US"/>
               <a:t>Fifth level</a:t>
             </a:r>
-            <a:endParaRPr lang="en-US"/>
           </a:p>
         </p:txBody>
       </p:sp>
@@ -1975,7 +1757,7 @@
           <a:p>
             <a:fld id="{5BCAD085-E8A6-8845-BD4E-CB4CCA059FC4}" type="datetimeFigureOut">
               <a:rPr lang="en-US" smtClean="0"/>
-              <a:t>1/27/13</a:t>
+              <a:t>9/25/2026</a:t>
             </a:fld>
             <a:endParaRPr lang="en-US"/>
           </a:p>
@@ -2017,7 +1799,7 @@
           <a:p>
             <a:fld id="{C1FF6DA9-008F-8B48-92A6-B652298478BF}" type="slidenum">
               <a:rPr lang="en-US" smtClean="0"/>
-              <a:t>‹#›</a:t>
+              <a:t>‹Nr.›</a:t>
             </a:fld>
             <a:endParaRPr lang="en-US"/>
           </a:p>
@@ -2073,10 +1855,9 @@
           </a:lstStyle>
           <a:p>
             <a:r>
-              <a:rPr lang="en-US" smtClean="0"/>
+              <a:rPr lang="en-US"/>
               <a:t>Click to edit Master title style</a:t>
             </a:r>
-            <a:endParaRPr lang="en-US"/>
           </a:p>
         </p:txBody>
       </p:sp>
@@ -2139,7 +1920,7 @@
           <a:p>
             <a:pPr lvl="0"/>
             <a:r>
-              <a:rPr lang="en-US" smtClean="0"/>
+              <a:rPr lang="en-US"/>
               <a:t>Click to edit Master text styles</a:t>
             </a:r>
           </a:p>
@@ -2195,38 +1976,37 @@
           <a:p>
             <a:pPr lvl="0"/>
             <a:r>
-              <a:rPr lang="en-US" smtClean="0"/>
+              <a:rPr lang="en-US"/>
               <a:t>Click to edit Master text styles</a:t>
             </a:r>
           </a:p>
           <a:p>
             <a:pPr lvl="1"/>
             <a:r>
-              <a:rPr lang="en-US" smtClean="0"/>
+              <a:rPr lang="en-US"/>
               <a:t>Second level</a:t>
             </a:r>
           </a:p>
           <a:p>
             <a:pPr lvl="2"/>
             <a:r>
-              <a:rPr lang="en-US" smtClean="0"/>
+              <a:rPr lang="en-US"/>
               <a:t>Third level</a:t>
             </a:r>
           </a:p>
           <a:p>
             <a:pPr lvl="3"/>
             <a:r>
-              <a:rPr lang="en-US" smtClean="0"/>
+              <a:rPr lang="en-US"/>
               <a:t>Fourth level</a:t>
             </a:r>
           </a:p>
           <a:p>
             <a:pPr lvl="4"/>
             <a:r>
-              <a:rPr lang="en-US" smtClean="0"/>
+              <a:rPr lang="en-US"/>
               <a:t>Fifth level</a:t>
             </a:r>
-            <a:endParaRPr lang="en-US"/>
           </a:p>
         </p:txBody>
       </p:sp>
@@ -2289,7 +2069,7 @@
           <a:p>
             <a:pPr lvl="0"/>
             <a:r>
-              <a:rPr lang="en-US" smtClean="0"/>
+              <a:rPr lang="en-US"/>
               <a:t>Click to edit Master text styles</a:t>
             </a:r>
           </a:p>
@@ -2345,38 +2125,37 @@
           <a:p>
             <a:pPr lvl="0"/>
             <a:r>
-              <a:rPr lang="en-US" smtClean="0"/>
+              <a:rPr lang="en-US"/>
               <a:t>Click to edit Master text styles</a:t>
             </a:r>
           </a:p>
           <a:p>
             <a:pPr lvl="1"/>
             <a:r>
-              <a:rPr lang="en-US" smtClean="0"/>
+              <a:rPr lang="en-US"/>
               <a:t>Second level</a:t>
             </a:r>
           </a:p>
           <a:p>
             <a:pPr lvl="2"/>
             <a:r>
-              <a:rPr lang="en-US" smtClean="0"/>
+              <a:rPr lang="en-US"/>
               <a:t>Third level</a:t>
             </a:r>
           </a:p>
           <a:p>
             <a:pPr lvl="3"/>
             <a:r>
-              <a:rPr lang="en-US" smtClean="0"/>
+              <a:rPr lang="en-US"/>
               <a:t>Fourth level</a:t>
             </a:r>
           </a:p>
           <a:p>
             <a:pPr lvl="4"/>
             <a:r>
-              <a:rPr lang="en-US" smtClean="0"/>
+              <a:rPr lang="en-US"/>
               <a:t>Fifth level</a:t>
             </a:r>
-            <a:endParaRPr lang="en-US"/>
           </a:p>
         </p:txBody>
       </p:sp>
@@ -2397,7 +2176,7 @@
           <a:p>
             <a:fld id="{5BCAD085-E8A6-8845-BD4E-CB4CCA059FC4}" type="datetimeFigureOut">
               <a:rPr lang="en-US" smtClean="0"/>
-              <a:t>1/27/13</a:t>
+              <a:t>9/25/2026</a:t>
             </a:fld>
             <a:endParaRPr lang="en-US"/>
           </a:p>
@@ -2439,7 +2218,7 @@
           <a:p>
             <a:fld id="{C1FF6DA9-008F-8B48-92A6-B652298478BF}" type="slidenum">
               <a:rPr lang="en-US" smtClean="0"/>
-              <a:t>‹#›</a:t>
+              <a:t>‹Nr.›</a:t>
             </a:fld>
             <a:endParaRPr lang="en-US"/>
           </a:p>
@@ -2491,10 +2270,9 @@
           <a:lstStyle/>
           <a:p>
             <a:r>
-              <a:rPr lang="en-US" smtClean="0"/>
+              <a:rPr lang="en-US"/>
               <a:t>Click to edit Master title style</a:t>
             </a:r>
-            <a:endParaRPr lang="en-US"/>
           </a:p>
         </p:txBody>
       </p:sp>
@@ -2515,7 +2293,7 @@
           <a:p>
             <a:fld id="{5BCAD085-E8A6-8845-BD4E-CB4CCA059FC4}" type="datetimeFigureOut">
               <a:rPr lang="en-US" smtClean="0"/>
-              <a:t>1/27/13</a:t>
+              <a:t>9/25/2026</a:t>
             </a:fld>
             <a:endParaRPr lang="en-US"/>
           </a:p>
@@ -2557,7 +2335,7 @@
           <a:p>
             <a:fld id="{C1FF6DA9-008F-8B48-92A6-B652298478BF}" type="slidenum">
               <a:rPr lang="en-US" smtClean="0"/>
-              <a:t>‹#›</a:t>
+              <a:t>‹Nr.›</a:t>
             </a:fld>
             <a:endParaRPr lang="en-US"/>
           </a:p>
@@ -2610,7 +2388,7 @@
           <a:p>
             <a:fld id="{5BCAD085-E8A6-8845-BD4E-CB4CCA059FC4}" type="datetimeFigureOut">
               <a:rPr lang="en-US" smtClean="0"/>
-              <a:t>1/27/13</a:t>
+              <a:t>9/25/2026</a:t>
             </a:fld>
             <a:endParaRPr lang="en-US"/>
           </a:p>
@@ -2652,7 +2430,7 @@
           <a:p>
             <a:fld id="{C1FF6DA9-008F-8B48-92A6-B652298478BF}" type="slidenum">
               <a:rPr lang="en-US" smtClean="0"/>
-              <a:t>‹#›</a:t>
+              <a:t>‹Nr.›</a:t>
             </a:fld>
             <a:endParaRPr lang="en-US"/>
           </a:p>
@@ -2713,10 +2491,9 @@
           </a:lstStyle>
           <a:p>
             <a:r>
-              <a:rPr lang="en-US" smtClean="0"/>
+              <a:rPr lang="en-US"/>
               <a:t>Click to edit Master title style</a:t>
             </a:r>
-            <a:endParaRPr lang="en-US"/>
           </a:p>
         </p:txBody>
       </p:sp>
@@ -2770,38 +2547,37 @@
           <a:p>
             <a:pPr lvl="0"/>
             <a:r>
-              <a:rPr lang="en-US" smtClean="0"/>
+              <a:rPr lang="en-US"/>
               <a:t>Click to edit Master text styles</a:t>
             </a:r>
           </a:p>
           <a:p>
             <a:pPr lvl="1"/>
             <a:r>
-              <a:rPr lang="en-US" smtClean="0"/>
+              <a:rPr lang="en-US"/>
               <a:t>Second level</a:t>
             </a:r>
           </a:p>
           <a:p>
             <a:pPr lvl="2"/>
             <a:r>
-              <a:rPr lang="en-US" smtClean="0"/>
+              <a:rPr lang="en-US"/>
               <a:t>Third level</a:t>
             </a:r>
           </a:p>
           <a:p>
             <a:pPr lvl="3"/>
             <a:r>
-              <a:rPr lang="en-US" smtClean="0"/>
+              <a:rPr lang="en-US"/>
               <a:t>Fourth level</a:t>
             </a:r>
           </a:p>
           <a:p>
             <a:pPr lvl="4"/>
             <a:r>
-              <a:rPr lang="en-US" smtClean="0"/>
+              <a:rPr lang="en-US"/>
               <a:t>Fifth level</a:t>
             </a:r>
-            <a:endParaRPr lang="en-US"/>
           </a:p>
         </p:txBody>
       </p:sp>
@@ -2864,7 +2640,7 @@
           <a:p>
             <a:pPr lvl="0"/>
             <a:r>
-              <a:rPr lang="en-US" smtClean="0"/>
+              <a:rPr lang="en-US"/>
               <a:t>Click to edit Master text styles</a:t>
             </a:r>
           </a:p>
@@ -2887,7 +2663,7 @@
           <a:p>
             <a:fld id="{5BCAD085-E8A6-8845-BD4E-CB4CCA059FC4}" type="datetimeFigureOut">
               <a:rPr lang="en-US" smtClean="0"/>
-              <a:t>1/27/13</a:t>
+              <a:t>9/25/2026</a:t>
             </a:fld>
             <a:endParaRPr lang="en-US"/>
           </a:p>
@@ -2929,7 +2705,7 @@
           <a:p>
             <a:fld id="{C1FF6DA9-008F-8B48-92A6-B652298478BF}" type="slidenum">
               <a:rPr lang="en-US" smtClean="0"/>
-              <a:t>‹#›</a:t>
+              <a:t>‹Nr.›</a:t>
             </a:fld>
             <a:endParaRPr lang="en-US"/>
           </a:p>
@@ -2990,10 +2766,9 @@
           </a:lstStyle>
           <a:p>
             <a:r>
-              <a:rPr lang="en-US" smtClean="0"/>
+              <a:rPr lang="en-US"/>
               <a:t>Click to edit Master title style</a:t>
             </a:r>
-            <a:endParaRPr lang="en-US"/>
           </a:p>
         </p:txBody>
       </p:sp>
@@ -3117,7 +2892,7 @@
           <a:p>
             <a:pPr lvl="0"/>
             <a:r>
-              <a:rPr lang="en-US" smtClean="0"/>
+              <a:rPr lang="en-US"/>
               <a:t>Click to edit Master text styles</a:t>
             </a:r>
           </a:p>
@@ -3140,7 +2915,7 @@
           <a:p>
             <a:fld id="{5BCAD085-E8A6-8845-BD4E-CB4CCA059FC4}" type="datetimeFigureOut">
               <a:rPr lang="en-US" smtClean="0"/>
-              <a:t>1/27/13</a:t>
+              <a:t>9/25/2026</a:t>
             </a:fld>
             <a:endParaRPr lang="en-US"/>
           </a:p>
@@ -3182,7 +2957,7 @@
           <a:p>
             <a:fld id="{C1FF6DA9-008F-8B48-92A6-B652298478BF}" type="slidenum">
               <a:rPr lang="en-US" smtClean="0"/>
-              <a:t>‹#›</a:t>
+              <a:t>‹Nr.›</a:t>
             </a:fld>
             <a:endParaRPr lang="en-US"/>
           </a:p>
@@ -3249,10 +3024,9 @@
           <a:lstStyle/>
           <a:p>
             <a:r>
-              <a:rPr lang="en-US" smtClean="0"/>
+              <a:rPr lang="en-US"/>
               <a:t>Click to edit Master title style</a:t>
             </a:r>
-            <a:endParaRPr lang="en-US"/>
           </a:p>
         </p:txBody>
       </p:sp>
@@ -3283,38 +3057,37 @@
           <a:p>
             <a:pPr lvl="0"/>
             <a:r>
-              <a:rPr lang="en-US" smtClean="0"/>
+              <a:rPr lang="en-US"/>
               <a:t>Click to edit Master text styles</a:t>
             </a:r>
           </a:p>
           <a:p>
             <a:pPr lvl="1"/>
             <a:r>
-              <a:rPr lang="en-US" smtClean="0"/>
+              <a:rPr lang="en-US"/>
               <a:t>Second level</a:t>
             </a:r>
           </a:p>
           <a:p>
             <a:pPr lvl="2"/>
             <a:r>
-              <a:rPr lang="en-US" smtClean="0"/>
+              <a:rPr lang="en-US"/>
               <a:t>Third level</a:t>
             </a:r>
           </a:p>
           <a:p>
             <a:pPr lvl="3"/>
             <a:r>
-              <a:rPr lang="en-US" smtClean="0"/>
+              <a:rPr lang="en-US"/>
               <a:t>Fourth level</a:t>
             </a:r>
           </a:p>
           <a:p>
             <a:pPr lvl="4"/>
             <a:r>
-              <a:rPr lang="en-US" smtClean="0"/>
+              <a:rPr lang="en-US"/>
               <a:t>Fifth level</a:t>
             </a:r>
-            <a:endParaRPr lang="en-US"/>
           </a:p>
         </p:txBody>
       </p:sp>
@@ -3353,7 +3126,7 @@
           <a:p>
             <a:fld id="{5BCAD085-E8A6-8845-BD4E-CB4CCA059FC4}" type="datetimeFigureOut">
               <a:rPr lang="en-US" smtClean="0"/>
-              <a:t>1/27/13</a:t>
+              <a:t>9/25/2026</a:t>
             </a:fld>
             <a:endParaRPr lang="en-US"/>
           </a:p>
@@ -3431,7 +3204,7 @@
           <a:p>
             <a:fld id="{C1FF6DA9-008F-8B48-92A6-B652298478BF}" type="slidenum">
               <a:rPr lang="en-US" smtClean="0"/>
-              <a:t>‹#›</a:t>
+              <a:t>‹Nr.›</a:t>
             </a:fld>
             <a:endParaRPr lang="en-US"/>
           </a:p>
@@ -3712,7 +3485,7 @@
 </file>
 
 <file path=ppt/slides/slide1.xml><?xml version="1.0" encoding="utf-8"?>
-<p:sld xmlns:a="http://schemas.openxmlformats.org/drawingml/2006/main" xmlns:p="http://schemas.openxmlformats.org/presentationml/2006/main" xmlns:r="http://schemas.openxmlformats.org/officeDocument/2006/relationships">
+<p:sld xmlns:a="http://schemas.openxmlformats.org/drawingml/2006/main" xmlns:r="http://schemas.openxmlformats.org/officeDocument/2006/relationships" xmlns:p="http://schemas.openxmlformats.org/presentationml/2006/main">
   <p:cSld>
     <p:spTree>
       <p:nvGrpSpPr>
@@ -3720,7 +3493,14 @@
         <p:cNvGrpSpPr/>
         <p:nvPr/>
       </p:nvGrpSpPr>
-      <p:grpSpPr/>
+      <p:grpSpPr>
+        <a:xfrm>
+          <a:off x="0" y="0"/>
+          <a:ext cx="0" cy="0"/>
+          <a:chOff x="0" y="0"/>
+          <a:chExt cx="0" cy="0"/>
+        </a:xfrm>
+      </p:grpSpPr>
       <p:sp>
         <p:nvSpPr>
           <p:cNvPr id="2" name="Oval 1"/>
@@ -3758,7 +3538,7 @@
           </a:fontRef>
         </p:style>
         <p:txBody>
-          <a:bodyPr rtlCol="0" anchor="ctr" lIns="0" rIns="0" tIns="0" bIns="0"/>
+          <a:bodyPr lIns="0" tIns="0" rIns="0" bIns="0" rtlCol="0" anchor="ctr"/>
           <a:lstStyle/>
           <a:p>
             <a:pPr algn="ctr"/>
@@ -3791,7 +3571,7 @@
           <a:noFill/>
         </p:spPr>
         <p:txBody>
-          <a:bodyPr wrap="square" anchor="ctr" lIns="0" rIns="0" tIns="0" bIns="0">
+          <a:bodyPr wrap="square" lIns="0" tIns="0" rIns="0" bIns="0" anchor="ctr">
             <a:spAutoFit/>
           </a:bodyPr>
           <a:lstStyle/>
@@ -3826,7 +3606,7 @@
           <a:noFill/>
         </p:spPr>
         <p:txBody>
-          <a:bodyPr wrap="square" anchor="t" lIns="0" rIns="0" tIns="0" bIns="0">
+          <a:bodyPr wrap="square" lIns="0" tIns="0" rIns="0" bIns="0" anchor="t">
             <a:spAutoFit/>
           </a:bodyPr>
           <a:lstStyle/>
@@ -3887,6 +3667,7 @@
           <a:lstStyle/>
           <a:p>
             <a:pPr algn="ctr"/>
+            <a:endParaRPr/>
           </a:p>
         </p:txBody>
       </p:sp>
@@ -3907,7 +3688,7 @@
           <a:noFill/>
         </p:spPr>
         <p:txBody>
-          <a:bodyPr wrap="square" anchor="t" lIns="0" rIns="0" tIns="0" bIns="0">
+          <a:bodyPr wrap="square" lIns="0" tIns="0" rIns="0" bIns="0" anchor="t">
             <a:spAutoFit/>
           </a:bodyPr>
           <a:lstStyle/>
@@ -3942,7 +3723,7 @@
           <a:noFill/>
         </p:spPr>
         <p:txBody>
-          <a:bodyPr wrap="square" anchor="t" lIns="0" rIns="0" tIns="0" bIns="0">
+          <a:bodyPr wrap="square" lIns="0" tIns="0" rIns="0" bIns="0" anchor="t">
             <a:spAutoFit/>
           </a:bodyPr>
           <a:lstStyle/>
@@ -4003,6 +3784,7 @@
           <a:lstStyle/>
           <a:p>
             <a:pPr algn="ctr"/>
+            <a:endParaRPr/>
           </a:p>
         </p:txBody>
       </p:sp>
@@ -4023,7 +3805,7 @@
           <a:noFill/>
         </p:spPr>
         <p:txBody>
-          <a:bodyPr wrap="square" anchor="t" lIns="0" rIns="0" tIns="0" bIns="0">
+          <a:bodyPr wrap="square" lIns="0" tIns="0" rIns="0" bIns="0" anchor="t">
             <a:spAutoFit/>
           </a:bodyPr>
           <a:lstStyle/>
@@ -4058,7 +3840,7 @@
           <a:noFill/>
         </p:spPr>
         <p:txBody>
-          <a:bodyPr wrap="square" anchor="t" lIns="0" rIns="0" tIns="0" bIns="0">
+          <a:bodyPr wrap="square" lIns="0" tIns="0" rIns="0" bIns="0" anchor="t">
             <a:spAutoFit/>
           </a:bodyPr>
           <a:lstStyle/>
@@ -4119,6 +3901,7 @@
           <a:lstStyle/>
           <a:p>
             <a:pPr algn="ctr"/>
+            <a:endParaRPr/>
           </a:p>
         </p:txBody>
       </p:sp>
@@ -4139,7 +3922,7 @@
           <a:noFill/>
         </p:spPr>
         <p:txBody>
-          <a:bodyPr wrap="square" anchor="t" lIns="0" rIns="0" tIns="0" bIns="0">
+          <a:bodyPr wrap="square" lIns="0" tIns="0" rIns="0" bIns="0" anchor="t">
             <a:spAutoFit/>
           </a:bodyPr>
           <a:lstStyle/>
@@ -4174,7 +3957,7 @@
           <a:noFill/>
         </p:spPr>
         <p:txBody>
-          <a:bodyPr wrap="square" anchor="t" lIns="0" rIns="0" tIns="0" bIns="0">
+          <a:bodyPr wrap="square" lIns="0" tIns="0" rIns="0" bIns="0" anchor="t">
             <a:spAutoFit/>
           </a:bodyPr>
           <a:lstStyle/>
@@ -4235,6 +4018,7 @@
           <a:lstStyle/>
           <a:p>
             <a:pPr algn="ctr"/>
+            <a:endParaRPr/>
           </a:p>
         </p:txBody>
       </p:sp>
@@ -4255,7 +4039,7 @@
           <a:noFill/>
         </p:spPr>
         <p:txBody>
-          <a:bodyPr wrap="square" anchor="ctr" lIns="0" rIns="0" tIns="0" bIns="0">
+          <a:bodyPr wrap="square" lIns="0" tIns="0" rIns="0" bIns="0" anchor="ctr">
             <a:spAutoFit/>
           </a:bodyPr>
           <a:lstStyle/>
@@ -4282,7 +4066,7 @@
           <p:nvPr/>
         </p:nvPicPr>
         <p:blipFill>
-          <a:blip r:embed="rId2"/>
+          <a:blip r:embed="rId3"/>
           <a:stretch>
             <a:fillRect/>
           </a:stretch>
@@ -4311,7 +4095,7 @@
           <p:nvPr/>
         </p:nvPicPr>
         <p:blipFill>
-          <a:blip r:embed="rId3"/>
+          <a:blip r:embed="rId4"/>
           <a:stretch>
             <a:fillRect/>
           </a:stretch>
@@ -4340,7 +4124,7 @@
           <p:nvPr/>
         </p:nvPicPr>
         <p:blipFill>
-          <a:blip r:embed="rId4"/>
+          <a:blip r:embed="rId5"/>
           <a:stretch>
             <a:fillRect/>
           </a:stretch>
@@ -4377,7 +4161,7 @@
           <a:noFill/>
         </p:spPr>
         <p:txBody>
-          <a:bodyPr wrap="square" anchor="ctr" lIns="0" rIns="0" tIns="0" bIns="0">
+          <a:bodyPr wrap="square" lIns="0" tIns="0" rIns="0" bIns="0" anchor="ctr">
             <a:spAutoFit/>
           </a:bodyPr>
           <a:lstStyle/>
@@ -4432,7 +4216,7 @@
           <a:noFill/>
         </p:spPr>
         <p:txBody>
-          <a:bodyPr wrap="square" anchor="t" lIns="0" rIns="0" tIns="0" bIns="0">
+          <a:bodyPr wrap="square" lIns="0" tIns="0" rIns="0" bIns="0" anchor="t">
             <a:spAutoFit/>
           </a:bodyPr>
           <a:lstStyle/>
@@ -4459,7 +4243,7 @@
 </file>
 
 <file path=ppt/slides/slide2.xml><?xml version="1.0" encoding="utf-8"?>
-<p:sld xmlns:a="http://schemas.openxmlformats.org/drawingml/2006/main" xmlns:p="http://schemas.openxmlformats.org/presentationml/2006/main" xmlns:r="http://schemas.openxmlformats.org/officeDocument/2006/relationships">
+<p:sld xmlns:a="http://schemas.openxmlformats.org/drawingml/2006/main" xmlns:r="http://schemas.openxmlformats.org/officeDocument/2006/relationships" xmlns:p="http://schemas.openxmlformats.org/presentationml/2006/main">
   <p:cSld>
     <p:spTree>
       <p:nvGrpSpPr>
@@ -4467,7 +4251,14 @@
         <p:cNvGrpSpPr/>
         <p:nvPr/>
       </p:nvGrpSpPr>
-      <p:grpSpPr/>
+      <p:grpSpPr>
+        <a:xfrm>
+          <a:off x="0" y="0"/>
+          <a:ext cx="0" cy="0"/>
+          <a:chOff x="0" y="0"/>
+          <a:chExt cx="0" cy="0"/>
+        </a:xfrm>
+      </p:grpSpPr>
       <p:sp>
         <p:nvSpPr>
           <p:cNvPr id="2" name="Oval 1"/>
@@ -4505,7 +4296,7 @@
           </a:fontRef>
         </p:style>
         <p:txBody>
-          <a:bodyPr rtlCol="0" anchor="ctr" lIns="0" rIns="0" tIns="0" bIns="0"/>
+          <a:bodyPr lIns="0" tIns="0" rIns="0" bIns="0" rtlCol="0" anchor="ctr"/>
           <a:lstStyle/>
           <a:p>
             <a:pPr algn="ctr"/>
@@ -4538,7 +4329,7 @@
           <a:noFill/>
         </p:spPr>
         <p:txBody>
-          <a:bodyPr wrap="square" anchor="ctr" lIns="0" rIns="0" tIns="0" bIns="0">
+          <a:bodyPr wrap="square" lIns="0" tIns="0" rIns="0" bIns="0" anchor="ctr">
             <a:spAutoFit/>
           </a:bodyPr>
           <a:lstStyle/>
@@ -4573,7 +4364,7 @@
           <a:noFill/>
         </p:spPr>
         <p:txBody>
-          <a:bodyPr wrap="square" anchor="t" lIns="0" rIns="0" tIns="0" bIns="0">
+          <a:bodyPr wrap="square" lIns="0" tIns="0" rIns="0" bIns="0" anchor="t">
             <a:spAutoFit/>
           </a:bodyPr>
           <a:lstStyle/>
@@ -4608,7 +4399,7 @@
           <a:noFill/>
         </p:spPr>
         <p:txBody>
-          <a:bodyPr wrap="square" anchor="t" lIns="0" rIns="0" tIns="0" bIns="0">
+          <a:bodyPr wrap="square" lIns="0" tIns="0" rIns="0" bIns="0" anchor="t">
             <a:spAutoFit/>
           </a:bodyPr>
           <a:lstStyle/>
@@ -4671,6 +4462,7 @@
           <a:lstStyle/>
           <a:p>
             <a:pPr algn="ctr"/>
+            <a:endParaRPr/>
           </a:p>
         </p:txBody>
       </p:sp>
@@ -4691,7 +4483,7 @@
           <a:noFill/>
         </p:spPr>
         <p:txBody>
-          <a:bodyPr wrap="square" anchor="t" lIns="0" rIns="0" tIns="0" bIns="0">
+          <a:bodyPr wrap="square" lIns="0" tIns="0" rIns="0" bIns="0" anchor="t">
             <a:spAutoFit/>
           </a:bodyPr>
           <a:lstStyle/>
@@ -4726,7 +4518,7 @@
           <a:noFill/>
         </p:spPr>
         <p:txBody>
-          <a:bodyPr wrap="square" anchor="t" lIns="0" rIns="0" tIns="0" bIns="0">
+          <a:bodyPr wrap="square" lIns="0" tIns="0" rIns="0" bIns="0" anchor="t">
             <a:spAutoFit/>
           </a:bodyPr>
           <a:lstStyle/>
@@ -4785,6 +4577,7 @@
           <a:lstStyle/>
           <a:p>
             <a:pPr algn="ctr"/>
+            <a:endParaRPr/>
           </a:p>
         </p:txBody>
       </p:sp>
@@ -4833,6 +4626,7 @@
           <a:lstStyle/>
           <a:p>
             <a:pPr algn="ctr"/>
+            <a:endParaRPr/>
           </a:p>
         </p:txBody>
       </p:sp>
@@ -4853,7 +4647,7 @@
           <a:noFill/>
         </p:spPr>
         <p:txBody>
-          <a:bodyPr wrap="square" anchor="t" lIns="0" rIns="0" tIns="0" bIns="0">
+          <a:bodyPr wrap="square" lIns="0" tIns="0" rIns="0" bIns="0" anchor="t">
             <a:spAutoFit/>
           </a:bodyPr>
           <a:lstStyle/>
@@ -4888,7 +4682,7 @@
           <a:noFill/>
         </p:spPr>
         <p:txBody>
-          <a:bodyPr wrap="square" anchor="t" lIns="0" rIns="0" tIns="0" bIns="0">
+          <a:bodyPr wrap="square" lIns="0" tIns="0" rIns="0" bIns="0" anchor="t">
             <a:spAutoFit/>
           </a:bodyPr>
           <a:lstStyle/>
@@ -4947,6 +4741,7 @@
           <a:lstStyle/>
           <a:p>
             <a:pPr algn="ctr"/>
+            <a:endParaRPr/>
           </a:p>
         </p:txBody>
       </p:sp>
@@ -4995,6 +4790,7 @@
           <a:lstStyle/>
           <a:p>
             <a:pPr algn="ctr"/>
+            <a:endParaRPr/>
           </a:p>
         </p:txBody>
       </p:sp>
@@ -5015,7 +4811,7 @@
           <a:noFill/>
         </p:spPr>
         <p:txBody>
-          <a:bodyPr wrap="square" anchor="t" lIns="0" rIns="0" tIns="0" bIns="0">
+          <a:bodyPr wrap="square" lIns="0" tIns="0" rIns="0" bIns="0" anchor="t">
             <a:spAutoFit/>
           </a:bodyPr>
           <a:lstStyle/>
@@ -5050,7 +4846,7 @@
           <a:noFill/>
         </p:spPr>
         <p:txBody>
-          <a:bodyPr wrap="square" anchor="t" lIns="0" rIns="0" tIns="0" bIns="0">
+          <a:bodyPr wrap="square" lIns="0" tIns="0" rIns="0" bIns="0" anchor="t">
             <a:spAutoFit/>
           </a:bodyPr>
           <a:lstStyle/>
@@ -5109,6 +4905,7 @@
           <a:lstStyle/>
           <a:p>
             <a:pPr algn="ctr"/>
+            <a:endParaRPr/>
           </a:p>
         </p:txBody>
       </p:sp>
@@ -5157,6 +4954,7 @@
           <a:lstStyle/>
           <a:p>
             <a:pPr algn="ctr"/>
+            <a:endParaRPr/>
           </a:p>
         </p:txBody>
       </p:sp>
@@ -5177,7 +4975,7 @@
           <a:noFill/>
         </p:spPr>
         <p:txBody>
-          <a:bodyPr wrap="square" anchor="t" lIns="0" rIns="0" tIns="0" bIns="0">
+          <a:bodyPr wrap="square" lIns="0" tIns="0" rIns="0" bIns="0" anchor="t">
             <a:spAutoFit/>
           </a:bodyPr>
           <a:lstStyle/>
@@ -5212,7 +5010,7 @@
           <a:noFill/>
         </p:spPr>
         <p:txBody>
-          <a:bodyPr wrap="square" anchor="t" lIns="0" rIns="0" tIns="0" bIns="0">
+          <a:bodyPr wrap="square" lIns="0" tIns="0" rIns="0" bIns="0" anchor="t">
             <a:spAutoFit/>
           </a:bodyPr>
           <a:lstStyle/>
@@ -5271,6 +5069,7 @@
           <a:lstStyle/>
           <a:p>
             <a:pPr algn="ctr"/>
+            <a:endParaRPr/>
           </a:p>
         </p:txBody>
       </p:sp>
@@ -5319,6 +5118,7 @@
           <a:lstStyle/>
           <a:p>
             <a:pPr algn="ctr"/>
+            <a:endParaRPr/>
           </a:p>
         </p:txBody>
       </p:sp>
@@ -5339,7 +5139,7 @@
           <a:noFill/>
         </p:spPr>
         <p:txBody>
-          <a:bodyPr wrap="square" anchor="t" lIns="0" rIns="0" tIns="0" bIns="0">
+          <a:bodyPr wrap="square" lIns="0" tIns="0" rIns="0" bIns="0" anchor="t">
             <a:spAutoFit/>
           </a:bodyPr>
           <a:lstStyle/>
@@ -5374,7 +5174,7 @@
           <a:noFill/>
         </p:spPr>
         <p:txBody>
-          <a:bodyPr wrap="square" anchor="t" lIns="0" rIns="0" tIns="0" bIns="0">
+          <a:bodyPr wrap="square" lIns="0" tIns="0" rIns="0" bIns="0" anchor="t">
             <a:spAutoFit/>
           </a:bodyPr>
           <a:lstStyle/>
@@ -5433,6 +5233,7 @@
           <a:lstStyle/>
           <a:p>
             <a:pPr algn="ctr"/>
+            <a:endParaRPr/>
           </a:p>
         </p:txBody>
       </p:sp>
@@ -5481,6 +5282,7 @@
           <a:lstStyle/>
           <a:p>
             <a:pPr algn="ctr"/>
+            <a:endParaRPr/>
           </a:p>
         </p:txBody>
       </p:sp>
@@ -5501,7 +5303,7 @@
           <a:noFill/>
         </p:spPr>
         <p:txBody>
-          <a:bodyPr wrap="square" anchor="t" lIns="0" rIns="0" tIns="0" bIns="0">
+          <a:bodyPr wrap="square" lIns="0" tIns="0" rIns="0" bIns="0" anchor="t">
             <a:spAutoFit/>
           </a:bodyPr>
           <a:lstStyle/>
@@ -5536,7 +5338,7 @@
           <a:noFill/>
         </p:spPr>
         <p:txBody>
-          <a:bodyPr wrap="square" anchor="t" lIns="0" rIns="0" tIns="0" bIns="0">
+          <a:bodyPr wrap="square" lIns="0" tIns="0" rIns="0" bIns="0" anchor="t">
             <a:spAutoFit/>
           </a:bodyPr>
           <a:lstStyle/>
@@ -5597,6 +5399,7 @@
           <a:lstStyle/>
           <a:p>
             <a:pPr algn="ctr"/>
+            <a:endParaRPr/>
           </a:p>
         </p:txBody>
       </p:sp>
@@ -5617,7 +5420,7 @@
           <a:noFill/>
         </p:spPr>
         <p:txBody>
-          <a:bodyPr wrap="square" anchor="ctr" lIns="0" rIns="0" tIns="0" bIns="0">
+          <a:bodyPr wrap="square" lIns="0" tIns="0" rIns="0" bIns="0" anchor="ctr">
             <a:spAutoFit/>
           </a:bodyPr>
           <a:lstStyle/>
@@ -5652,7 +5455,7 @@
           <a:noFill/>
         </p:spPr>
         <p:txBody>
-          <a:bodyPr wrap="square" anchor="t" lIns="0" rIns="0" tIns="0" bIns="0">
+          <a:bodyPr wrap="square" lIns="0" tIns="0" rIns="0" bIns="0" anchor="t">
             <a:spAutoFit/>
           </a:bodyPr>
           <a:lstStyle/>
@@ -5715,6 +5518,7 @@
           <a:lstStyle/>
           <a:p>
             <a:pPr algn="ctr"/>
+            <a:endParaRPr/>
           </a:p>
         </p:txBody>
       </p:sp>
@@ -5735,7 +5539,7 @@
           <a:noFill/>
         </p:spPr>
         <p:txBody>
-          <a:bodyPr wrap="square" anchor="ctr" lIns="0" rIns="0" tIns="0" bIns="0">
+          <a:bodyPr wrap="square" lIns="0" tIns="0" rIns="0" bIns="0" anchor="ctr">
             <a:spAutoFit/>
           </a:bodyPr>
           <a:lstStyle/>
@@ -5798,6 +5602,7 @@
           <a:lstStyle/>
           <a:p>
             <a:pPr algn="ctr"/>
+            <a:endParaRPr/>
           </a:p>
         </p:txBody>
       </p:sp>
@@ -5818,7 +5623,7 @@
           <a:noFill/>
         </p:spPr>
         <p:txBody>
-          <a:bodyPr wrap="square" anchor="ctr" lIns="0" rIns="0" tIns="0" bIns="0">
+          <a:bodyPr wrap="square" lIns="0" tIns="0" rIns="0" bIns="0" anchor="ctr">
             <a:spAutoFit/>
           </a:bodyPr>
           <a:lstStyle/>
@@ -5881,6 +5686,7 @@
           <a:lstStyle/>
           <a:p>
             <a:pPr algn="ctr"/>
+            <a:endParaRPr/>
           </a:p>
         </p:txBody>
       </p:sp>
@@ -5901,7 +5707,7 @@
           <a:noFill/>
         </p:spPr>
         <p:txBody>
-          <a:bodyPr wrap="square" anchor="t" lIns="0" rIns="0" tIns="0" bIns="0">
+          <a:bodyPr wrap="square" lIns="0" tIns="0" rIns="0" bIns="0" anchor="t">
             <a:spAutoFit/>
           </a:bodyPr>
           <a:lstStyle/>
@@ -5936,7 +5742,7 @@
           <a:noFill/>
         </p:spPr>
         <p:txBody>
-          <a:bodyPr wrap="square" anchor="t" lIns="0" rIns="0" tIns="0" bIns="0">
+          <a:bodyPr wrap="square" lIns="0" tIns="0" rIns="0" bIns="0" anchor="t">
             <a:spAutoFit/>
           </a:bodyPr>
           <a:lstStyle/>
@@ -5995,6 +5801,7 @@
           <a:lstStyle/>
           <a:p>
             <a:pPr algn="ctr"/>
+            <a:endParaRPr/>
           </a:p>
         </p:txBody>
       </p:sp>
@@ -6043,6 +5850,7 @@
           <a:lstStyle/>
           <a:p>
             <a:pPr algn="ctr"/>
+            <a:endParaRPr/>
           </a:p>
         </p:txBody>
       </p:sp>
@@ -6063,7 +5871,7 @@
           <a:noFill/>
         </p:spPr>
         <p:txBody>
-          <a:bodyPr wrap="square" anchor="t" lIns="0" rIns="0" tIns="0" bIns="0">
+          <a:bodyPr wrap="square" lIns="0" tIns="0" rIns="0" bIns="0" anchor="t">
             <a:spAutoFit/>
           </a:bodyPr>
           <a:lstStyle/>
@@ -6098,7 +5906,7 @@
           <a:noFill/>
         </p:spPr>
         <p:txBody>
-          <a:bodyPr wrap="square" anchor="t" lIns="0" rIns="0" tIns="0" bIns="0">
+          <a:bodyPr wrap="square" lIns="0" tIns="0" rIns="0" bIns="0" anchor="t">
             <a:spAutoFit/>
           </a:bodyPr>
           <a:lstStyle/>
@@ -6157,6 +5965,7 @@
           <a:lstStyle/>
           <a:p>
             <a:pPr algn="ctr"/>
+            <a:endParaRPr/>
           </a:p>
         </p:txBody>
       </p:sp>
@@ -6205,6 +6014,7 @@
           <a:lstStyle/>
           <a:p>
             <a:pPr algn="ctr"/>
+            <a:endParaRPr/>
           </a:p>
         </p:txBody>
       </p:sp>
@@ -6225,7 +6035,7 @@
           <a:noFill/>
         </p:spPr>
         <p:txBody>
-          <a:bodyPr wrap="square" anchor="t" lIns="0" rIns="0" tIns="0" bIns="0">
+          <a:bodyPr wrap="square" lIns="0" tIns="0" rIns="0" bIns="0" anchor="t">
             <a:spAutoFit/>
           </a:bodyPr>
           <a:lstStyle/>
@@ -6260,7 +6070,7 @@
           <a:noFill/>
         </p:spPr>
         <p:txBody>
-          <a:bodyPr wrap="square" anchor="t" lIns="0" rIns="0" tIns="0" bIns="0">
+          <a:bodyPr wrap="square" lIns="0" tIns="0" rIns="0" bIns="0" anchor="t">
             <a:spAutoFit/>
           </a:bodyPr>
           <a:lstStyle/>
@@ -6319,6 +6129,7 @@
           <a:lstStyle/>
           <a:p>
             <a:pPr algn="ctr"/>
+            <a:endParaRPr/>
           </a:p>
         </p:txBody>
       </p:sp>
@@ -6367,6 +6178,7 @@
           <a:lstStyle/>
           <a:p>
             <a:pPr algn="ctr"/>
+            <a:endParaRPr/>
           </a:p>
         </p:txBody>
       </p:sp>
@@ -6387,7 +6199,7 @@
           <a:noFill/>
         </p:spPr>
         <p:txBody>
-          <a:bodyPr wrap="square" anchor="t" lIns="0" rIns="0" tIns="0" bIns="0">
+          <a:bodyPr wrap="square" lIns="0" tIns="0" rIns="0" bIns="0" anchor="t">
             <a:spAutoFit/>
           </a:bodyPr>
           <a:lstStyle/>
@@ -6422,7 +6234,7 @@
           <a:noFill/>
         </p:spPr>
         <p:txBody>
-          <a:bodyPr wrap="square" anchor="t" lIns="0" rIns="0" tIns="0" bIns="0">
+          <a:bodyPr wrap="square" lIns="0" tIns="0" rIns="0" bIns="0" anchor="t">
             <a:spAutoFit/>
           </a:bodyPr>
           <a:lstStyle/>
@@ -6481,6 +6293,7 @@
           <a:lstStyle/>
           <a:p>
             <a:pPr algn="ctr"/>
+            <a:endParaRPr/>
           </a:p>
         </p:txBody>
       </p:sp>
@@ -6529,6 +6342,7 @@
           <a:lstStyle/>
           <a:p>
             <a:pPr algn="ctr"/>
+            <a:endParaRPr/>
           </a:p>
         </p:txBody>
       </p:sp>
@@ -6549,7 +6363,7 @@
           <a:noFill/>
         </p:spPr>
         <p:txBody>
-          <a:bodyPr wrap="square" anchor="t" lIns="0" rIns="0" tIns="0" bIns="0">
+          <a:bodyPr wrap="square" lIns="0" tIns="0" rIns="0" bIns="0" anchor="t">
             <a:spAutoFit/>
           </a:bodyPr>
           <a:lstStyle/>
@@ -6584,7 +6398,7 @@
           <a:noFill/>
         </p:spPr>
         <p:txBody>
-          <a:bodyPr wrap="square" anchor="t" lIns="0" rIns="0" tIns="0" bIns="0">
+          <a:bodyPr wrap="square" lIns="0" tIns="0" rIns="0" bIns="0" anchor="t">
             <a:spAutoFit/>
           </a:bodyPr>
           <a:lstStyle/>
@@ -6643,6 +6457,7 @@
           <a:lstStyle/>
           <a:p>
             <a:pPr algn="ctr"/>
+            <a:endParaRPr/>
           </a:p>
         </p:txBody>
       </p:sp>
@@ -6691,6 +6506,7 @@
           <a:lstStyle/>
           <a:p>
             <a:pPr algn="ctr"/>
+            <a:endParaRPr/>
           </a:p>
         </p:txBody>
       </p:sp>
@@ -6711,7 +6527,7 @@
           <a:noFill/>
         </p:spPr>
         <p:txBody>
-          <a:bodyPr wrap="square" anchor="t" lIns="0" rIns="0" tIns="0" bIns="0">
+          <a:bodyPr wrap="square" lIns="0" tIns="0" rIns="0" bIns="0" anchor="t">
             <a:spAutoFit/>
           </a:bodyPr>
           <a:lstStyle/>
@@ -6746,7 +6562,7 @@
           <a:noFill/>
         </p:spPr>
         <p:txBody>
-          <a:bodyPr wrap="square" anchor="t" lIns="0" rIns="0" tIns="0" bIns="0">
+          <a:bodyPr wrap="square" lIns="0" tIns="0" rIns="0" bIns="0" anchor="t">
             <a:spAutoFit/>
           </a:bodyPr>
           <a:lstStyle/>
@@ -6781,7 +6597,7 @@
           <a:noFill/>
         </p:spPr>
         <p:txBody>
-          <a:bodyPr wrap="square" anchor="t" lIns="0" rIns="0" tIns="0" bIns="0">
+          <a:bodyPr wrap="square" lIns="0" tIns="0" rIns="0" bIns="0" anchor="t">
             <a:spAutoFit/>
           </a:bodyPr>
           <a:lstStyle/>
@@ -6844,6 +6660,7 @@
           <a:lstStyle/>
           <a:p>
             <a:pPr algn="ctr"/>
+            <a:endParaRPr/>
           </a:p>
         </p:txBody>
       </p:sp>
@@ -6864,7 +6681,7 @@
           <a:noFill/>
         </p:spPr>
         <p:txBody>
-          <a:bodyPr wrap="square" anchor="t" lIns="0" rIns="0" tIns="0" bIns="0">
+          <a:bodyPr wrap="square" lIns="0" tIns="0" rIns="0" bIns="0" anchor="t">
             <a:spAutoFit/>
           </a:bodyPr>
           <a:lstStyle/>
@@ -6899,7 +6716,7 @@
           <a:noFill/>
         </p:spPr>
         <p:txBody>
-          <a:bodyPr wrap="square" anchor="t" lIns="0" rIns="0" tIns="0" bIns="0">
+          <a:bodyPr wrap="square" lIns="0" tIns="0" rIns="0" bIns="0" anchor="t">
             <a:spAutoFit/>
           </a:bodyPr>
           <a:lstStyle/>
@@ -6958,6 +6775,7 @@
           <a:lstStyle/>
           <a:p>
             <a:pPr algn="ctr"/>
+            <a:endParaRPr/>
           </a:p>
         </p:txBody>
       </p:sp>
@@ -7006,6 +6824,7 @@
           <a:lstStyle/>
           <a:p>
             <a:pPr algn="ctr"/>
+            <a:endParaRPr/>
           </a:p>
         </p:txBody>
       </p:sp>
@@ -7026,7 +6845,7 @@
           <a:noFill/>
         </p:spPr>
         <p:txBody>
-          <a:bodyPr wrap="square" anchor="t" lIns="0" rIns="0" tIns="0" bIns="0">
+          <a:bodyPr wrap="square" lIns="0" tIns="0" rIns="0" bIns="0" anchor="t">
             <a:spAutoFit/>
           </a:bodyPr>
           <a:lstStyle/>
@@ -7061,7 +6880,7 @@
           <a:noFill/>
         </p:spPr>
         <p:txBody>
-          <a:bodyPr wrap="square" anchor="t" lIns="0" rIns="0" tIns="0" bIns="0">
+          <a:bodyPr wrap="square" lIns="0" tIns="0" rIns="0" bIns="0" anchor="t">
             <a:spAutoFit/>
           </a:bodyPr>
           <a:lstStyle/>
@@ -7120,6 +6939,7 @@
           <a:lstStyle/>
           <a:p>
             <a:pPr algn="ctr"/>
+            <a:endParaRPr/>
           </a:p>
         </p:txBody>
       </p:sp>
@@ -7168,6 +6988,7 @@
           <a:lstStyle/>
           <a:p>
             <a:pPr algn="ctr"/>
+            <a:endParaRPr/>
           </a:p>
         </p:txBody>
       </p:sp>
@@ -7188,7 +7009,7 @@
           <a:noFill/>
         </p:spPr>
         <p:txBody>
-          <a:bodyPr wrap="square" anchor="t" lIns="0" rIns="0" tIns="0" bIns="0">
+          <a:bodyPr wrap="square" lIns="0" tIns="0" rIns="0" bIns="0" anchor="t">
             <a:spAutoFit/>
           </a:bodyPr>
           <a:lstStyle/>
@@ -7223,7 +7044,7 @@
           <a:noFill/>
         </p:spPr>
         <p:txBody>
-          <a:bodyPr wrap="square" anchor="t" lIns="0" rIns="0" tIns="0" bIns="0">
+          <a:bodyPr wrap="square" lIns="0" tIns="0" rIns="0" bIns="0" anchor="t">
             <a:spAutoFit/>
           </a:bodyPr>
           <a:lstStyle/>
@@ -7282,6 +7103,7 @@
           <a:lstStyle/>
           <a:p>
             <a:pPr algn="ctr"/>
+            <a:endParaRPr/>
           </a:p>
         </p:txBody>
       </p:sp>
@@ -7330,6 +7152,7 @@
           <a:lstStyle/>
           <a:p>
             <a:pPr algn="ctr"/>
+            <a:endParaRPr/>
           </a:p>
         </p:txBody>
       </p:sp>
@@ -7350,7 +7173,7 @@
           <a:noFill/>
         </p:spPr>
         <p:txBody>
-          <a:bodyPr wrap="square" anchor="t" lIns="0" rIns="0" tIns="0" bIns="0">
+          <a:bodyPr wrap="square" lIns="0" tIns="0" rIns="0" bIns="0" anchor="t">
             <a:spAutoFit/>
           </a:bodyPr>
           <a:lstStyle/>
@@ -7385,7 +7208,7 @@
           <a:noFill/>
         </p:spPr>
         <p:txBody>
-          <a:bodyPr wrap="square" anchor="t" lIns="0" rIns="0" tIns="0" bIns="0">
+          <a:bodyPr wrap="square" lIns="0" tIns="0" rIns="0" bIns="0" anchor="t">
             <a:spAutoFit/>
           </a:bodyPr>
           <a:lstStyle/>
@@ -7420,7 +7243,7 @@
           <a:noFill/>
         </p:spPr>
         <p:txBody>
-          <a:bodyPr wrap="square" anchor="t" lIns="0" rIns="0" tIns="0" bIns="0">
+          <a:bodyPr wrap="square" lIns="0" tIns="0" rIns="0" bIns="0" anchor="t">
             <a:spAutoFit/>
           </a:bodyPr>
           <a:lstStyle/>
@@ -7447,7 +7270,7 @@
 </file>
 
 <file path=ppt/slides/slide3.xml><?xml version="1.0" encoding="utf-8"?>
-<p:sld xmlns:a="http://schemas.openxmlformats.org/drawingml/2006/main" xmlns:p="http://schemas.openxmlformats.org/presentationml/2006/main" xmlns:r="http://schemas.openxmlformats.org/officeDocument/2006/relationships">
+<p:sld xmlns:a="http://schemas.openxmlformats.org/drawingml/2006/main" xmlns:r="http://schemas.openxmlformats.org/officeDocument/2006/relationships" xmlns:p="http://schemas.openxmlformats.org/presentationml/2006/main">
   <p:cSld>
     <p:spTree>
       <p:nvGrpSpPr>
@@ -7455,7 +7278,14 @@
         <p:cNvGrpSpPr/>
         <p:nvPr/>
       </p:nvGrpSpPr>
-      <p:grpSpPr/>
+      <p:grpSpPr>
+        <a:xfrm>
+          <a:off x="0" y="0"/>
+          <a:ext cx="0" cy="0"/>
+          <a:chOff x="0" y="0"/>
+          <a:chExt cx="0" cy="0"/>
+        </a:xfrm>
+      </p:grpSpPr>
       <p:sp>
         <p:nvSpPr>
           <p:cNvPr id="2" name="Oval 1"/>
@@ -7493,7 +7323,7 @@
           </a:fontRef>
         </p:style>
         <p:txBody>
-          <a:bodyPr rtlCol="0" anchor="ctr" lIns="0" rIns="0" tIns="0" bIns="0"/>
+          <a:bodyPr lIns="0" tIns="0" rIns="0" bIns="0" rtlCol="0" anchor="ctr"/>
           <a:lstStyle/>
           <a:p>
             <a:pPr algn="ctr"/>
@@ -7526,7 +7356,7 @@
           <a:noFill/>
         </p:spPr>
         <p:txBody>
-          <a:bodyPr wrap="square" anchor="ctr" lIns="0" rIns="0" tIns="0" bIns="0">
+          <a:bodyPr wrap="square" lIns="0" tIns="0" rIns="0" bIns="0" anchor="ctr">
             <a:spAutoFit/>
           </a:bodyPr>
           <a:lstStyle/>
@@ -7561,7 +7391,7 @@
           <a:noFill/>
         </p:spPr>
         <p:txBody>
-          <a:bodyPr wrap="square" anchor="t" lIns="0" rIns="0" tIns="0" bIns="0">
+          <a:bodyPr wrap="square" lIns="0" tIns="0" rIns="0" bIns="0" anchor="t">
             <a:spAutoFit/>
           </a:bodyPr>
           <a:lstStyle/>
@@ -7598,9 +7428,27 @@
                 <a:tableStyleId>{5C22544A-7EE6-4342-B048-85BDC9FD1C3A}</a:tableStyleId>
               </a:tblPr>
               <a:tblGrid>
-                <a:gridCol w="1874519"/>
-                <a:gridCol w="960120"/>
-                <a:gridCol w="3291840"/>
+                <a:gridCol w="1874519">
+                  <a:extLst>
+                    <a:ext uri="{9D8B030D-6E8A-4147-A177-3AD203B41FA5}">
+                      <a16:colId xmlns:a16="http://schemas.microsoft.com/office/drawing/2014/main" val="20000"/>
+                    </a:ext>
+                  </a:extLst>
+                </a:gridCol>
+                <a:gridCol w="960120">
+                  <a:extLst>
+                    <a:ext uri="{9D8B030D-6E8A-4147-A177-3AD203B41FA5}">
+                      <a16:colId xmlns:a16="http://schemas.microsoft.com/office/drawing/2014/main" val="20001"/>
+                    </a:ext>
+                  </a:extLst>
+                </a:gridCol>
+                <a:gridCol w="3291840">
+                  <a:extLst>
+                    <a:ext uri="{9D8B030D-6E8A-4147-A177-3AD203B41FA5}">
+                      <a16:colId xmlns:a16="http://schemas.microsoft.com/office/drawing/2014/main" val="20002"/>
+                    </a:ext>
+                  </a:extLst>
+                </a:gridCol>
               </a:tblGrid>
               <a:tr h="402336">
                 <a:tc>
@@ -7619,7 +7467,7 @@
                       </a:r>
                     </a:p>
                   </a:txBody>
-                  <a:tcPr marL="91440" marR="91440" marT="27432" marB="27432" anchor="ctr">
+                  <a:tcPr marT="27432" marB="27432" anchor="ctr">
                     <a:solidFill>
                       <a:srgbClr val="1B2A49"/>
                     </a:solidFill>
@@ -7641,7 +7489,7 @@
                       </a:r>
                     </a:p>
                   </a:txBody>
-                  <a:tcPr marL="91440" marR="91440" marT="27432" marB="27432" anchor="ctr">
+                  <a:tcPr marT="27432" marB="27432" anchor="ctr">
                     <a:solidFill>
                       <a:srgbClr val="1B2A49"/>
                     </a:solidFill>
@@ -7663,12 +7511,17 @@
                       </a:r>
                     </a:p>
                   </a:txBody>
-                  <a:tcPr marL="91440" marR="91440" marT="27432" marB="27432" anchor="ctr">
+                  <a:tcPr marT="27432" marB="27432" anchor="ctr">
                     <a:solidFill>
                       <a:srgbClr val="1B2A49"/>
                     </a:solidFill>
                   </a:tcPr>
                 </a:tc>
+                <a:extLst>
+                  <a:ext uri="{0D108BD9-81ED-4DB2-BD59-A6C34878D82A}">
+                    <a16:rowId xmlns:a16="http://schemas.microsoft.com/office/drawing/2014/main" val="10000"/>
+                  </a:ext>
+                </a:extLst>
               </a:tr>
               <a:tr h="402336">
                 <a:tc>
@@ -7687,7 +7540,7 @@
                       </a:r>
                     </a:p>
                   </a:txBody>
-                  <a:tcPr marL="91440" marR="91440" marT="27432" marB="27432" anchor="ctr">
+                  <a:tcPr marT="27432" marB="27432" anchor="ctr">
                     <a:solidFill>
                       <a:srgbClr val="FFFFFF"/>
                     </a:solidFill>
@@ -7709,7 +7562,7 @@
                       </a:r>
                     </a:p>
                   </a:txBody>
-                  <a:tcPr marL="91440" marR="91440" marT="27432" marB="27432" anchor="ctr">
+                  <a:tcPr marT="27432" marB="27432" anchor="ctr">
                     <a:solidFill>
                       <a:srgbClr val="FFFFFF"/>
                     </a:solidFill>
@@ -7731,12 +7584,17 @@
                       </a:r>
                     </a:p>
                   </a:txBody>
-                  <a:tcPr marL="91440" marR="91440" marT="27432" marB="27432" anchor="ctr">
+                  <a:tcPr marT="27432" marB="27432" anchor="ctr">
                     <a:solidFill>
                       <a:srgbClr val="FFFFFF"/>
                     </a:solidFill>
                   </a:tcPr>
                 </a:tc>
+                <a:extLst>
+                  <a:ext uri="{0D108BD9-81ED-4DB2-BD59-A6C34878D82A}">
+                    <a16:rowId xmlns:a16="http://schemas.microsoft.com/office/drawing/2014/main" val="10001"/>
+                  </a:ext>
+                </a:extLst>
               </a:tr>
               <a:tr h="402336">
                 <a:tc>
@@ -7755,7 +7613,7 @@
                       </a:r>
                     </a:p>
                   </a:txBody>
-                  <a:tcPr marL="91440" marR="91440" marT="27432" marB="27432" anchor="ctr">
+                  <a:tcPr marT="27432" marB="27432" anchor="ctr">
                     <a:solidFill>
                       <a:srgbClr val="F3F5F9"/>
                     </a:solidFill>
@@ -7777,7 +7635,7 @@
                       </a:r>
                     </a:p>
                   </a:txBody>
-                  <a:tcPr marL="91440" marR="91440" marT="27432" marB="27432" anchor="ctr">
+                  <a:tcPr marT="27432" marB="27432" anchor="ctr">
                     <a:solidFill>
                       <a:srgbClr val="F3F5F9"/>
                     </a:solidFill>
@@ -7799,12 +7657,17 @@
                       </a:r>
                     </a:p>
                   </a:txBody>
-                  <a:tcPr marL="91440" marR="91440" marT="27432" marB="27432" anchor="ctr">
+                  <a:tcPr marT="27432" marB="27432" anchor="ctr">
                     <a:solidFill>
                       <a:srgbClr val="F3F5F9"/>
                     </a:solidFill>
                   </a:tcPr>
                 </a:tc>
+                <a:extLst>
+                  <a:ext uri="{0D108BD9-81ED-4DB2-BD59-A6C34878D82A}">
+                    <a16:rowId xmlns:a16="http://schemas.microsoft.com/office/drawing/2014/main" val="10002"/>
+                  </a:ext>
+                </a:extLst>
               </a:tr>
               <a:tr h="402336">
                 <a:tc>
@@ -7823,7 +7686,7 @@
                       </a:r>
                     </a:p>
                   </a:txBody>
-                  <a:tcPr marL="91440" marR="91440" marT="27432" marB="27432" anchor="ctr">
+                  <a:tcPr marT="27432" marB="27432" anchor="ctr">
                     <a:solidFill>
                       <a:srgbClr val="FFFFFF"/>
                     </a:solidFill>
@@ -7845,7 +7708,7 @@
                       </a:r>
                     </a:p>
                   </a:txBody>
-                  <a:tcPr marL="91440" marR="91440" marT="27432" marB="27432" anchor="ctr">
+                  <a:tcPr marT="27432" marB="27432" anchor="ctr">
                     <a:solidFill>
                       <a:srgbClr val="FFFFFF"/>
                     </a:solidFill>
@@ -7867,12 +7730,17 @@
                       </a:r>
                     </a:p>
                   </a:txBody>
-                  <a:tcPr marL="91440" marR="91440" marT="27432" marB="27432" anchor="ctr">
+                  <a:tcPr marT="27432" marB="27432" anchor="ctr">
                     <a:solidFill>
                       <a:srgbClr val="FFFFFF"/>
                     </a:solidFill>
                   </a:tcPr>
                 </a:tc>
+                <a:extLst>
+                  <a:ext uri="{0D108BD9-81ED-4DB2-BD59-A6C34878D82A}">
+                    <a16:rowId xmlns:a16="http://schemas.microsoft.com/office/drawing/2014/main" val="10003"/>
+                  </a:ext>
+                </a:extLst>
               </a:tr>
               <a:tr h="402336">
                 <a:tc>
@@ -7891,7 +7759,7 @@
                       </a:r>
                     </a:p>
                   </a:txBody>
-                  <a:tcPr marL="91440" marR="91440" marT="27432" marB="27432" anchor="ctr">
+                  <a:tcPr marT="27432" marB="27432" anchor="ctr">
                     <a:solidFill>
                       <a:srgbClr val="F3F5F9"/>
                     </a:solidFill>
@@ -7913,7 +7781,7 @@
                       </a:r>
                     </a:p>
                   </a:txBody>
-                  <a:tcPr marL="91440" marR="91440" marT="27432" marB="27432" anchor="ctr">
+                  <a:tcPr marT="27432" marB="27432" anchor="ctr">
                     <a:solidFill>
                       <a:srgbClr val="F3F5F9"/>
                     </a:solidFill>
@@ -7935,12 +7803,17 @@
                       </a:r>
                     </a:p>
                   </a:txBody>
-                  <a:tcPr marL="91440" marR="91440" marT="27432" marB="27432" anchor="ctr">
+                  <a:tcPr marT="27432" marB="27432" anchor="ctr">
                     <a:solidFill>
                       <a:srgbClr val="F3F5F9"/>
                     </a:solidFill>
                   </a:tcPr>
                 </a:tc>
+                <a:extLst>
+                  <a:ext uri="{0D108BD9-81ED-4DB2-BD59-A6C34878D82A}">
+                    <a16:rowId xmlns:a16="http://schemas.microsoft.com/office/drawing/2014/main" val="10004"/>
+                  </a:ext>
+                </a:extLst>
               </a:tr>
               <a:tr h="402336">
                 <a:tc>
@@ -7959,7 +7832,7 @@
                       </a:r>
                     </a:p>
                   </a:txBody>
-                  <a:tcPr marL="91440" marR="91440" marT="27432" marB="27432" anchor="ctr">
+                  <a:tcPr marT="27432" marB="27432" anchor="ctr">
                     <a:solidFill>
                       <a:srgbClr val="FFFFFF"/>
                     </a:solidFill>
@@ -7981,7 +7854,7 @@
                       </a:r>
                     </a:p>
                   </a:txBody>
-                  <a:tcPr marL="91440" marR="91440" marT="27432" marB="27432" anchor="ctr">
+                  <a:tcPr marT="27432" marB="27432" anchor="ctr">
                     <a:solidFill>
                       <a:srgbClr val="FFFFFF"/>
                     </a:solidFill>
@@ -8003,12 +7876,17 @@
                       </a:r>
                     </a:p>
                   </a:txBody>
-                  <a:tcPr marL="91440" marR="91440" marT="27432" marB="27432" anchor="ctr">
+                  <a:tcPr marT="27432" marB="27432" anchor="ctr">
                     <a:solidFill>
                       <a:srgbClr val="FFFFFF"/>
                     </a:solidFill>
                   </a:tcPr>
                 </a:tc>
+                <a:extLst>
+                  <a:ext uri="{0D108BD9-81ED-4DB2-BD59-A6C34878D82A}">
+                    <a16:rowId xmlns:a16="http://schemas.microsoft.com/office/drawing/2014/main" val="10005"/>
+                  </a:ext>
+                </a:extLst>
               </a:tr>
               <a:tr h="402336">
                 <a:tc>
@@ -8027,7 +7905,7 @@
                       </a:r>
                     </a:p>
                   </a:txBody>
-                  <a:tcPr marL="91440" marR="91440" marT="27432" marB="27432" anchor="ctr">
+                  <a:tcPr marT="27432" marB="27432" anchor="ctr">
                     <a:solidFill>
                       <a:srgbClr val="F3F5F9"/>
                     </a:solidFill>
@@ -8049,7 +7927,7 @@
                       </a:r>
                     </a:p>
                   </a:txBody>
-                  <a:tcPr marL="91440" marR="91440" marT="27432" marB="27432" anchor="ctr">
+                  <a:tcPr marT="27432" marB="27432" anchor="ctr">
                     <a:solidFill>
                       <a:srgbClr val="F3F5F9"/>
                     </a:solidFill>
@@ -8071,12 +7949,17 @@
                       </a:r>
                     </a:p>
                   </a:txBody>
-                  <a:tcPr marL="91440" marR="91440" marT="27432" marB="27432" anchor="ctr">
+                  <a:tcPr marT="27432" marB="27432" anchor="ctr">
                     <a:solidFill>
                       <a:srgbClr val="F3F5F9"/>
                     </a:solidFill>
                   </a:tcPr>
                 </a:tc>
+                <a:extLst>
+                  <a:ext uri="{0D108BD9-81ED-4DB2-BD59-A6C34878D82A}">
+                    <a16:rowId xmlns:a16="http://schemas.microsoft.com/office/drawing/2014/main" val="10006"/>
+                  </a:ext>
+                </a:extLst>
               </a:tr>
               <a:tr h="402336">
                 <a:tc>
@@ -8095,7 +7978,7 @@
                       </a:r>
                     </a:p>
                   </a:txBody>
-                  <a:tcPr marL="91440" marR="91440" marT="27432" marB="27432" anchor="ctr">
+                  <a:tcPr marT="27432" marB="27432" anchor="ctr">
                     <a:solidFill>
                       <a:srgbClr val="FFFFFF"/>
                     </a:solidFill>
@@ -8117,7 +8000,7 @@
                       </a:r>
                     </a:p>
                   </a:txBody>
-                  <a:tcPr marL="91440" marR="91440" marT="27432" marB="27432" anchor="ctr">
+                  <a:tcPr marT="27432" marB="27432" anchor="ctr">
                     <a:solidFill>
                       <a:srgbClr val="FFFFFF"/>
                     </a:solidFill>
@@ -8139,12 +8022,17 @@
                       </a:r>
                     </a:p>
                   </a:txBody>
-                  <a:tcPr marL="91440" marR="91440" marT="27432" marB="27432" anchor="ctr">
+                  <a:tcPr marT="27432" marB="27432" anchor="ctr">
                     <a:solidFill>
                       <a:srgbClr val="FFFFFF"/>
                     </a:solidFill>
                   </a:tcPr>
                 </a:tc>
+                <a:extLst>
+                  <a:ext uri="{0D108BD9-81ED-4DB2-BD59-A6C34878D82A}">
+                    <a16:rowId xmlns:a16="http://schemas.microsoft.com/office/drawing/2014/main" val="10007"/>
+                  </a:ext>
+                </a:extLst>
               </a:tr>
             </a:tbl>
           </a:graphicData>
@@ -8193,6 +8081,7 @@
           <a:lstStyle/>
           <a:p>
             <a:pPr algn="ctr"/>
+            <a:endParaRPr/>
           </a:p>
         </p:txBody>
       </p:sp>
@@ -8213,7 +8102,7 @@
           <a:noFill/>
         </p:spPr>
         <p:txBody>
-          <a:bodyPr wrap="square" anchor="t" lIns="0" rIns="0" tIns="0" bIns="0">
+          <a:bodyPr wrap="square" lIns="0" tIns="0" rIns="0" bIns="0" anchor="t">
             <a:spAutoFit/>
           </a:bodyPr>
           <a:lstStyle/>
@@ -8248,7 +8137,7 @@
           <a:noFill/>
         </p:spPr>
         <p:txBody>
-          <a:bodyPr wrap="square" anchor="t" lIns="0" rIns="0" tIns="0" bIns="0">
+          <a:bodyPr wrap="square" lIns="0" tIns="0" rIns="0" bIns="0" anchor="t">
             <a:spAutoFit/>
           </a:bodyPr>
           <a:lstStyle/>
@@ -8309,6 +8198,7 @@
           <a:lstStyle/>
           <a:p>
             <a:pPr algn="ctr"/>
+            <a:endParaRPr/>
           </a:p>
         </p:txBody>
       </p:sp>
@@ -8329,7 +8219,7 @@
           <a:noFill/>
         </p:spPr>
         <p:txBody>
-          <a:bodyPr wrap="square" anchor="t" lIns="0" rIns="0" tIns="0" bIns="0">
+          <a:bodyPr wrap="square" lIns="0" tIns="0" rIns="0" bIns="0" anchor="t">
             <a:spAutoFit/>
           </a:bodyPr>
           <a:lstStyle/>
@@ -8364,7 +8254,7 @@
           <a:noFill/>
         </p:spPr>
         <p:txBody>
-          <a:bodyPr wrap="square" anchor="t" lIns="0" rIns="0" tIns="0" bIns="0">
+          <a:bodyPr wrap="square" lIns="0" tIns="0" rIns="0" bIns="0" anchor="t">
             <a:spAutoFit/>
           </a:bodyPr>
           <a:lstStyle/>
@@ -8425,6 +8315,7 @@
           <a:lstStyle/>
           <a:p>
             <a:pPr algn="ctr"/>
+            <a:endParaRPr/>
           </a:p>
         </p:txBody>
       </p:sp>
@@ -8445,7 +8336,7 @@
           <a:noFill/>
         </p:spPr>
         <p:txBody>
-          <a:bodyPr wrap="square" anchor="t" lIns="0" rIns="0" tIns="0" bIns="0">
+          <a:bodyPr wrap="square" lIns="0" tIns="0" rIns="0" bIns="0" anchor="t">
             <a:spAutoFit/>
           </a:bodyPr>
           <a:lstStyle/>
@@ -8480,7 +8371,7 @@
           <a:noFill/>
         </p:spPr>
         <p:txBody>
-          <a:bodyPr wrap="square" anchor="t" lIns="0" rIns="0" tIns="0" bIns="0">
+          <a:bodyPr wrap="square" lIns="0" tIns="0" rIns="0" bIns="0" anchor="t">
             <a:spAutoFit/>
           </a:bodyPr>
           <a:lstStyle/>
@@ -8544,76 +8435,7 @@
           <a:lstStyle/>
           <a:p>
             <a:pPr algn="ctr"/>
-          </a:p>
-        </p:txBody>
-      </p:sp>
-      <p:sp>
-        <p:nvSpPr>
-          <p:cNvPr id="16" name="TextBox 15"/>
-          <p:cNvSpPr txBox="1"/>
-          <p:nvPr/>
-        </p:nvSpPr>
-        <p:spPr>
-          <a:xfrm>
-            <a:off x="6858000" y="2240280"/>
-            <a:ext cx="4873752" cy="365760"/>
-          </a:xfrm>
-          <a:prstGeom prst="rect">
-            <a:avLst/>
-          </a:prstGeom>
-          <a:noFill/>
-        </p:spPr>
-        <p:txBody>
-          <a:bodyPr wrap="square" anchor="t" lIns="0" rIns="0" tIns="0" bIns="0">
-            <a:spAutoFit/>
-          </a:bodyPr>
-          <a:lstStyle/>
-          <a:p>
-            <a:pPr algn="ctr"/>
-            <a:r>
-              <a:rPr sz="1600" b="1">
-                <a:solidFill>
-                  <a:srgbClr val="6B7280"/>
-                </a:solidFill>
-                <a:latin typeface="Calibri"/>
-              </a:rPr>
-              <a:t>Screenshot: review page</a:t>
-            </a:r>
-          </a:p>
-        </p:txBody>
-      </p:sp>
-      <p:sp>
-        <p:nvSpPr>
-          <p:cNvPr id="17" name="TextBox 16"/>
-          <p:cNvSpPr txBox="1"/>
-          <p:nvPr/>
-        </p:nvSpPr>
-        <p:spPr>
-          <a:xfrm>
-            <a:off x="6858000" y="2651760"/>
-            <a:ext cx="4873752" cy="365760"/>
-          </a:xfrm>
-          <a:prstGeom prst="rect">
-            <a:avLst/>
-          </a:prstGeom>
-          <a:noFill/>
-        </p:spPr>
-        <p:txBody>
-          <a:bodyPr wrap="square" anchor="t" lIns="0" rIns="0" tIns="0" bIns="0">
-            <a:spAutoFit/>
-          </a:bodyPr>
-          <a:lstStyle/>
-          <a:p>
-            <a:pPr algn="ctr"/>
-            <a:r>
-              <a:rPr sz="1200" b="0">
-                <a:solidFill>
-                  <a:srgbClr val="6B7280"/>
-                </a:solidFill>
-                <a:latin typeface="Calibri"/>
-              </a:rPr>
-              <a:t>suggestion next to the original, approve / edit / reject</a:t>
-            </a:r>
+            <a:endParaRPr/>
           </a:p>
         </p:txBody>
       </p:sp>
@@ -8663,76 +8485,7 @@
           <a:lstStyle/>
           <a:p>
             <a:pPr algn="ctr"/>
-          </a:p>
-        </p:txBody>
-      </p:sp>
-      <p:sp>
-        <p:nvSpPr>
-          <p:cNvPr id="19" name="TextBox 18"/>
-          <p:cNvSpPr txBox="1"/>
-          <p:nvPr/>
-        </p:nvSpPr>
-        <p:spPr>
-          <a:xfrm>
-            <a:off x="6858000" y="4754879"/>
-            <a:ext cx="4873752" cy="365760"/>
-          </a:xfrm>
-          <a:prstGeom prst="rect">
-            <a:avLst/>
-          </a:prstGeom>
-          <a:noFill/>
-        </p:spPr>
-        <p:txBody>
-          <a:bodyPr wrap="square" anchor="t" lIns="0" rIns="0" tIns="0" bIns="0">
-            <a:spAutoFit/>
-          </a:bodyPr>
-          <a:lstStyle/>
-          <a:p>
-            <a:pPr algn="ctr"/>
-            <a:r>
-              <a:rPr sz="1600" b="1">
-                <a:solidFill>
-                  <a:srgbClr val="6B7280"/>
-                </a:solidFill>
-                <a:latin typeface="Calibri"/>
-              </a:rPr>
-              <a:t>Screenshot: ticket list or upload</a:t>
-            </a:r>
-          </a:p>
-        </p:txBody>
-      </p:sp>
-      <p:sp>
-        <p:nvSpPr>
-          <p:cNvPr id="20" name="TextBox 19"/>
-          <p:cNvSpPr txBox="1"/>
-          <p:nvPr/>
-        </p:nvSpPr>
-        <p:spPr>
-          <a:xfrm>
-            <a:off x="6858000" y="5166359"/>
-            <a:ext cx="4873752" cy="365760"/>
-          </a:xfrm>
-          <a:prstGeom prst="rect">
-            <a:avLst/>
-          </a:prstGeom>
-          <a:noFill/>
-        </p:spPr>
-        <p:txBody>
-          <a:bodyPr wrap="square" anchor="t" lIns="0" rIns="0" tIns="0" bIns="0">
-            <a:spAutoFit/>
-          </a:bodyPr>
-          <a:lstStyle/>
-          <a:p>
-            <a:pPr algn="ctr"/>
-            <a:r>
-              <a:rPr sz="1200" b="0">
-                <a:solidFill>
-                  <a:srgbClr val="6B7280"/>
-                </a:solidFill>
-                <a:latin typeface="Calibri"/>
-              </a:rPr>
-              <a:t>queue, states, result.json download</a:t>
-            </a:r>
+            <a:endParaRPr/>
           </a:p>
         </p:txBody>
       </p:sp>
@@ -8753,7 +8506,7 @@
           <a:noFill/>
         </p:spPr>
         <p:txBody>
-          <a:bodyPr wrap="square" anchor="t" lIns="0" rIns="0" tIns="0" bIns="0">
+          <a:bodyPr wrap="square" lIns="0" tIns="0" rIns="0" bIns="0" anchor="t">
             <a:spAutoFit/>
           </a:bodyPr>
           <a:lstStyle/>
@@ -8771,6 +8524,66 @@
           </a:p>
         </p:txBody>
       </p:sp>
+      <p:pic>
+        <p:nvPicPr>
+          <p:cNvPr id="23" name="Grafik 22">
+            <a:extLst>
+              <a:ext uri="{FF2B5EF4-FFF2-40B4-BE49-F238E27FC236}">
+                <a16:creationId xmlns:a16="http://schemas.microsoft.com/office/drawing/2014/main" id="{3D02D3A7-18F3-BF6B-71E1-AA4669E1ECCD}"/>
+              </a:ext>
+            </a:extLst>
+          </p:cNvPr>
+          <p:cNvPicPr>
+            <a:picLocks noChangeAspect="1"/>
+          </p:cNvPicPr>
+          <p:nvPr/>
+        </p:nvPicPr>
+        <p:blipFill>
+          <a:blip r:embed="rId3"/>
+          <a:stretch>
+            <a:fillRect/>
+          </a:stretch>
+        </p:blipFill>
+        <p:spPr>
+          <a:xfrm>
+            <a:off x="6937452" y="1793619"/>
+            <a:ext cx="4645670" cy="1635381"/>
+          </a:xfrm>
+          <a:prstGeom prst="rect">
+            <a:avLst/>
+          </a:prstGeom>
+        </p:spPr>
+      </p:pic>
+      <p:pic>
+        <p:nvPicPr>
+          <p:cNvPr id="25" name="Grafik 24">
+            <a:extLst>
+              <a:ext uri="{FF2B5EF4-FFF2-40B4-BE49-F238E27FC236}">
+                <a16:creationId xmlns:a16="http://schemas.microsoft.com/office/drawing/2014/main" id="{E1886568-3626-768E-DDCD-0DA6D11F4C15}"/>
+              </a:ext>
+            </a:extLst>
+          </p:cNvPr>
+          <p:cNvPicPr>
+            <a:picLocks noChangeAspect="1"/>
+          </p:cNvPicPr>
+          <p:nvPr/>
+        </p:nvPicPr>
+        <p:blipFill>
+          <a:blip r:embed="rId4"/>
+          <a:stretch>
+            <a:fillRect/>
+          </a:stretch>
+        </p:blipFill>
+        <p:spPr>
+          <a:xfrm>
+            <a:off x="6937452" y="4275522"/>
+            <a:ext cx="4669332" cy="1767581"/>
+          </a:xfrm>
+          <a:prstGeom prst="rect">
+            <a:avLst/>
+          </a:prstGeom>
+        </p:spPr>
+      </p:pic>
     </p:spTree>
   </p:cSld>
   <p:clrMapOvr>
@@ -8780,7 +8593,7 @@
 </file>
 
 <file path=ppt/slides/slide4.xml><?xml version="1.0" encoding="utf-8"?>
-<p:sld xmlns:a="http://schemas.openxmlformats.org/drawingml/2006/main" xmlns:p="http://schemas.openxmlformats.org/presentationml/2006/main" xmlns:r="http://schemas.openxmlformats.org/officeDocument/2006/relationships">
+<p:sld xmlns:a="http://schemas.openxmlformats.org/drawingml/2006/main" xmlns:r="http://schemas.openxmlformats.org/officeDocument/2006/relationships" xmlns:p="http://schemas.openxmlformats.org/presentationml/2006/main">
   <p:cSld>
     <p:spTree>
       <p:nvGrpSpPr>
@@ -8788,7 +8601,14 @@
         <p:cNvGrpSpPr/>
         <p:nvPr/>
       </p:nvGrpSpPr>
-      <p:grpSpPr/>
+      <p:grpSpPr>
+        <a:xfrm>
+          <a:off x="0" y="0"/>
+          <a:ext cx="0" cy="0"/>
+          <a:chOff x="0" y="0"/>
+          <a:chExt cx="0" cy="0"/>
+        </a:xfrm>
+      </p:grpSpPr>
       <p:sp>
         <p:nvSpPr>
           <p:cNvPr id="2" name="Oval 1"/>
@@ -8826,7 +8646,7 @@
           </a:fontRef>
         </p:style>
         <p:txBody>
-          <a:bodyPr rtlCol="0" anchor="ctr" lIns="0" rIns="0" tIns="0" bIns="0"/>
+          <a:bodyPr lIns="0" tIns="0" rIns="0" bIns="0" rtlCol="0" anchor="ctr"/>
           <a:lstStyle/>
           <a:p>
             <a:pPr algn="ctr"/>
@@ -8859,7 +8679,7 @@
           <a:noFill/>
         </p:spPr>
         <p:txBody>
-          <a:bodyPr wrap="square" anchor="ctr" lIns="0" rIns="0" tIns="0" bIns="0">
+          <a:bodyPr wrap="square" lIns="0" tIns="0" rIns="0" bIns="0" anchor="ctr">
             <a:spAutoFit/>
           </a:bodyPr>
           <a:lstStyle/>
@@ -8894,7 +8714,7 @@
           <a:noFill/>
         </p:spPr>
         <p:txBody>
-          <a:bodyPr wrap="square" anchor="t" lIns="0" rIns="0" tIns="0" bIns="0">
+          <a:bodyPr wrap="square" lIns="0" tIns="0" rIns="0" bIns="0" anchor="t">
             <a:spAutoFit/>
           </a:bodyPr>
           <a:lstStyle/>
@@ -8957,6 +8777,7 @@
           <a:lstStyle/>
           <a:p>
             <a:pPr algn="ctr"/>
+            <a:endParaRPr/>
           </a:p>
         </p:txBody>
       </p:sp>
@@ -8977,7 +8798,7 @@
           <a:noFill/>
         </p:spPr>
         <p:txBody>
-          <a:bodyPr wrap="square" anchor="t" lIns="0" rIns="0" tIns="0" bIns="0">
+          <a:bodyPr wrap="square" lIns="0" tIns="0" rIns="0" bIns="0" anchor="t">
             <a:spAutoFit/>
           </a:bodyPr>
           <a:lstStyle/>
@@ -9012,7 +8833,7 @@
           <a:noFill/>
         </p:spPr>
         <p:txBody>
-          <a:bodyPr wrap="square" anchor="t" lIns="0" rIns="0" tIns="0" bIns="0">
+          <a:bodyPr wrap="square" lIns="0" tIns="0" rIns="0" bIns="0" anchor="t">
             <a:spAutoFit/>
           </a:bodyPr>
           <a:lstStyle/>
@@ -9075,6 +8896,7 @@
           <a:lstStyle/>
           <a:p>
             <a:pPr algn="ctr"/>
+            <a:endParaRPr/>
           </a:p>
         </p:txBody>
       </p:sp>
@@ -9095,7 +8917,7 @@
           <a:noFill/>
         </p:spPr>
         <p:txBody>
-          <a:bodyPr wrap="square" anchor="ctr" lIns="0" rIns="0" tIns="0" bIns="0">
+          <a:bodyPr wrap="square" lIns="0" tIns="0" rIns="0" bIns="0" anchor="ctr">
             <a:spAutoFit/>
           </a:bodyPr>
           <a:lstStyle/>
@@ -9158,6 +8980,7 @@
           <a:lstStyle/>
           <a:p>
             <a:pPr algn="ctr"/>
+            <a:endParaRPr/>
           </a:p>
         </p:txBody>
       </p:sp>
@@ -9178,7 +9001,7 @@
           <a:noFill/>
         </p:spPr>
         <p:txBody>
-          <a:bodyPr wrap="square" anchor="ctr" lIns="0" rIns="0" tIns="0" bIns="0">
+          <a:bodyPr wrap="square" lIns="0" tIns="0" rIns="0" bIns="0" anchor="ctr">
             <a:spAutoFit/>
           </a:bodyPr>
           <a:lstStyle/>
@@ -9241,6 +9064,7 @@
           <a:lstStyle/>
           <a:p>
             <a:pPr algn="ctr"/>
+            <a:endParaRPr/>
           </a:p>
         </p:txBody>
       </p:sp>
@@ -9261,7 +9085,7 @@
           <a:noFill/>
         </p:spPr>
         <p:txBody>
-          <a:bodyPr wrap="square" anchor="ctr" lIns="0" rIns="0" tIns="0" bIns="0">
+          <a:bodyPr wrap="square" lIns="0" tIns="0" rIns="0" bIns="0" anchor="ctr">
             <a:spAutoFit/>
           </a:bodyPr>
           <a:lstStyle/>
@@ -9324,6 +9148,7 @@
           <a:lstStyle/>
           <a:p>
             <a:pPr algn="ctr"/>
+            <a:endParaRPr/>
           </a:p>
         </p:txBody>
       </p:sp>
@@ -9344,7 +9169,7 @@
           <a:noFill/>
         </p:spPr>
         <p:txBody>
-          <a:bodyPr wrap="square" anchor="t" lIns="0" rIns="0" tIns="0" bIns="0">
+          <a:bodyPr wrap="square" lIns="0" tIns="0" rIns="0" bIns="0" anchor="t">
             <a:spAutoFit/>
           </a:bodyPr>
           <a:lstStyle/>
@@ -9379,7 +9204,7 @@
           <a:noFill/>
         </p:spPr>
         <p:txBody>
-          <a:bodyPr wrap="square" anchor="t" lIns="0" rIns="0" tIns="0" bIns="0">
+          <a:bodyPr wrap="square" lIns="0" tIns="0" rIns="0" bIns="0" anchor="t">
             <a:spAutoFit/>
           </a:bodyPr>
           <a:lstStyle/>
@@ -9442,6 +9267,7 @@
           <a:lstStyle/>
           <a:p>
             <a:pPr algn="ctr"/>
+            <a:endParaRPr/>
           </a:p>
         </p:txBody>
       </p:sp>
@@ -9462,7 +9288,7 @@
           <a:noFill/>
         </p:spPr>
         <p:txBody>
-          <a:bodyPr wrap="square" anchor="ctr" lIns="0" rIns="0" tIns="0" bIns="0">
+          <a:bodyPr wrap="square" lIns="0" tIns="0" rIns="0" bIns="0" anchor="ctr">
             <a:spAutoFit/>
           </a:bodyPr>
           <a:lstStyle/>
@@ -9525,6 +9351,7 @@
           <a:lstStyle/>
           <a:p>
             <a:pPr algn="ctr"/>
+            <a:endParaRPr/>
           </a:p>
         </p:txBody>
       </p:sp>
@@ -9545,7 +9372,7 @@
           <a:noFill/>
         </p:spPr>
         <p:txBody>
-          <a:bodyPr wrap="square" anchor="ctr" lIns="0" rIns="0" tIns="0" bIns="0">
+          <a:bodyPr wrap="square" lIns="0" tIns="0" rIns="0" bIns="0" anchor="ctr">
             <a:spAutoFit/>
           </a:bodyPr>
           <a:lstStyle/>
@@ -9608,6 +9435,7 @@
           <a:lstStyle/>
           <a:p>
             <a:pPr algn="ctr"/>
+            <a:endParaRPr/>
           </a:p>
         </p:txBody>
       </p:sp>
@@ -9628,7 +9456,7 @@
           <a:noFill/>
         </p:spPr>
         <p:txBody>
-          <a:bodyPr wrap="square" anchor="ctr" lIns="0" rIns="0" tIns="0" bIns="0">
+          <a:bodyPr wrap="square" lIns="0" tIns="0" rIns="0" bIns="0" anchor="ctr">
             <a:spAutoFit/>
           </a:bodyPr>
           <a:lstStyle/>
@@ -9691,6 +9519,7 @@
           <a:lstStyle/>
           <a:p>
             <a:pPr algn="ctr"/>
+            <a:endParaRPr/>
           </a:p>
         </p:txBody>
       </p:sp>
@@ -9711,7 +9540,7 @@
           <a:noFill/>
         </p:spPr>
         <p:txBody>
-          <a:bodyPr wrap="square" anchor="t" lIns="0" rIns="0" tIns="0" bIns="0">
+          <a:bodyPr wrap="square" lIns="0" tIns="0" rIns="0" bIns="0" anchor="t">
             <a:spAutoFit/>
           </a:bodyPr>
           <a:lstStyle/>
@@ -9746,7 +9575,7 @@
           <a:noFill/>
         </p:spPr>
         <p:txBody>
-          <a:bodyPr wrap="square" anchor="t" lIns="0" rIns="0" tIns="0" bIns="0">
+          <a:bodyPr wrap="square" lIns="0" tIns="0" rIns="0" bIns="0" anchor="t">
             <a:spAutoFit/>
           </a:bodyPr>
           <a:lstStyle/>
@@ -9809,6 +9638,7 @@
           <a:lstStyle/>
           <a:p>
             <a:pPr algn="ctr"/>
+            <a:endParaRPr/>
           </a:p>
         </p:txBody>
       </p:sp>
@@ -9829,7 +9659,7 @@
           <a:noFill/>
         </p:spPr>
         <p:txBody>
-          <a:bodyPr wrap="square" anchor="ctr" lIns="0" rIns="0" tIns="0" bIns="0">
+          <a:bodyPr wrap="square" lIns="0" tIns="0" rIns="0" bIns="0" anchor="ctr">
             <a:spAutoFit/>
           </a:bodyPr>
           <a:lstStyle/>
@@ -9892,6 +9722,7 @@
           <a:lstStyle/>
           <a:p>
             <a:pPr algn="ctr"/>
+            <a:endParaRPr/>
           </a:p>
         </p:txBody>
       </p:sp>
@@ -9912,7 +9743,7 @@
           <a:noFill/>
         </p:spPr>
         <p:txBody>
-          <a:bodyPr wrap="square" anchor="ctr" lIns="0" rIns="0" tIns="0" bIns="0">
+          <a:bodyPr wrap="square" lIns="0" tIns="0" rIns="0" bIns="0" anchor="ctr">
             <a:spAutoFit/>
           </a:bodyPr>
           <a:lstStyle/>
@@ -9975,6 +9806,7 @@
           <a:lstStyle/>
           <a:p>
             <a:pPr algn="ctr"/>
+            <a:endParaRPr/>
           </a:p>
         </p:txBody>
       </p:sp>
@@ -9995,7 +9827,7 @@
           <a:noFill/>
         </p:spPr>
         <p:txBody>
-          <a:bodyPr wrap="square" anchor="ctr" lIns="0" rIns="0" tIns="0" bIns="0">
+          <a:bodyPr wrap="square" lIns="0" tIns="0" rIns="0" bIns="0" anchor="ctr">
             <a:spAutoFit/>
           </a:bodyPr>
           <a:lstStyle/>
@@ -10058,6 +9890,7 @@
           <a:lstStyle/>
           <a:p>
             <a:pPr algn="ctr"/>
+            <a:endParaRPr/>
           </a:p>
         </p:txBody>
       </p:sp>
@@ -10078,7 +9911,7 @@
           <a:noFill/>
         </p:spPr>
         <p:txBody>
-          <a:bodyPr wrap="square" anchor="t" lIns="0" rIns="0" tIns="0" bIns="0">
+          <a:bodyPr wrap="square" lIns="0" tIns="0" rIns="0" bIns="0" anchor="t">
             <a:spAutoFit/>
           </a:bodyPr>
           <a:lstStyle/>
@@ -10113,7 +9946,7 @@
           <a:noFill/>
         </p:spPr>
         <p:txBody>
-          <a:bodyPr wrap="square" anchor="t" lIns="0" rIns="0" tIns="0" bIns="0">
+          <a:bodyPr wrap="square" lIns="0" tIns="0" rIns="0" bIns="0" anchor="t">
             <a:spAutoFit/>
           </a:bodyPr>
           <a:lstStyle/>
@@ -10176,6 +10009,7 @@
           <a:lstStyle/>
           <a:p>
             <a:pPr algn="ctr"/>
+            <a:endParaRPr/>
           </a:p>
         </p:txBody>
       </p:sp>
@@ -10196,7 +10030,7 @@
           <a:noFill/>
         </p:spPr>
         <p:txBody>
-          <a:bodyPr wrap="square" anchor="ctr" lIns="0" rIns="0" tIns="0" bIns="0">
+          <a:bodyPr wrap="square" lIns="0" tIns="0" rIns="0" bIns="0" anchor="ctr">
             <a:spAutoFit/>
           </a:bodyPr>
           <a:lstStyle/>
@@ -10259,6 +10093,7 @@
           <a:lstStyle/>
           <a:p>
             <a:pPr algn="ctr"/>
+            <a:endParaRPr/>
           </a:p>
         </p:txBody>
       </p:sp>
@@ -10279,7 +10114,7 @@
           <a:noFill/>
         </p:spPr>
         <p:txBody>
-          <a:bodyPr wrap="square" anchor="ctr" lIns="0" rIns="0" tIns="0" bIns="0">
+          <a:bodyPr wrap="square" lIns="0" tIns="0" rIns="0" bIns="0" anchor="ctr">
             <a:spAutoFit/>
           </a:bodyPr>
           <a:lstStyle/>
@@ -10342,6 +10177,7 @@
           <a:lstStyle/>
           <a:p>
             <a:pPr algn="ctr"/>
+            <a:endParaRPr/>
           </a:p>
         </p:txBody>
       </p:sp>
@@ -10362,7 +10198,7 @@
           <a:noFill/>
         </p:spPr>
         <p:txBody>
-          <a:bodyPr wrap="square" anchor="ctr" lIns="0" rIns="0" tIns="0" bIns="0">
+          <a:bodyPr wrap="square" lIns="0" tIns="0" rIns="0" bIns="0" anchor="ctr">
             <a:spAutoFit/>
           </a:bodyPr>
           <a:lstStyle/>
@@ -10425,6 +10261,7 @@
           <a:lstStyle/>
           <a:p>
             <a:pPr algn="ctr"/>
+            <a:endParaRPr/>
           </a:p>
         </p:txBody>
       </p:sp>
@@ -10445,7 +10282,7 @@
           <a:noFill/>
         </p:spPr>
         <p:txBody>
-          <a:bodyPr wrap="square" anchor="t" lIns="0" rIns="0" tIns="0" bIns="0">
+          <a:bodyPr wrap="square" lIns="0" tIns="0" rIns="0" bIns="0" anchor="t">
             <a:spAutoFit/>
           </a:bodyPr>
           <a:lstStyle/>
@@ -10480,7 +10317,7 @@
           <a:noFill/>
         </p:spPr>
         <p:txBody>
-          <a:bodyPr wrap="square" anchor="t" lIns="0" rIns="0" tIns="0" bIns="0">
+          <a:bodyPr wrap="square" lIns="0" tIns="0" rIns="0" bIns="0" anchor="t">
             <a:spAutoFit/>
           </a:bodyPr>
           <a:lstStyle/>
@@ -10543,6 +10380,7 @@
           <a:lstStyle/>
           <a:p>
             <a:pPr algn="ctr"/>
+            <a:endParaRPr/>
           </a:p>
         </p:txBody>
       </p:sp>
@@ -10563,7 +10401,7 @@
           <a:noFill/>
         </p:spPr>
         <p:txBody>
-          <a:bodyPr wrap="square" anchor="ctr" lIns="0" rIns="0" tIns="0" bIns="0">
+          <a:bodyPr wrap="square" lIns="0" tIns="0" rIns="0" bIns="0" anchor="ctr">
             <a:spAutoFit/>
           </a:bodyPr>
           <a:lstStyle/>
@@ -10626,6 +10464,7 @@
           <a:lstStyle/>
           <a:p>
             <a:pPr algn="ctr"/>
+            <a:endParaRPr/>
           </a:p>
         </p:txBody>
       </p:sp>
@@ -10646,7 +10485,7 @@
           <a:noFill/>
         </p:spPr>
         <p:txBody>
-          <a:bodyPr wrap="square" anchor="ctr" lIns="0" rIns="0" tIns="0" bIns="0">
+          <a:bodyPr wrap="square" lIns="0" tIns="0" rIns="0" bIns="0" anchor="ctr">
             <a:spAutoFit/>
           </a:bodyPr>
           <a:lstStyle/>
@@ -10709,6 +10548,7 @@
           <a:lstStyle/>
           <a:p>
             <a:pPr algn="ctr"/>
+            <a:endParaRPr/>
           </a:p>
         </p:txBody>
       </p:sp>
@@ -10729,7 +10569,7 @@
           <a:noFill/>
         </p:spPr>
         <p:txBody>
-          <a:bodyPr wrap="square" anchor="ctr" lIns="0" rIns="0" tIns="0" bIns="0">
+          <a:bodyPr wrap="square" lIns="0" tIns="0" rIns="0" bIns="0" anchor="ctr">
             <a:spAutoFit/>
           </a:bodyPr>
           <a:lstStyle/>
@@ -10792,6 +10632,7 @@
           <a:lstStyle/>
           <a:p>
             <a:pPr algn="ctr"/>
+            <a:endParaRPr/>
           </a:p>
         </p:txBody>
       </p:sp>
@@ -10812,7 +10653,7 @@
           <a:noFill/>
         </p:spPr>
         <p:txBody>
-          <a:bodyPr wrap="square" anchor="t" lIns="0" rIns="0" tIns="0" bIns="0">
+          <a:bodyPr wrap="square" lIns="0" tIns="0" rIns="0" bIns="0" anchor="t">
             <a:spAutoFit/>
           </a:bodyPr>
           <a:lstStyle/>
@@ -10847,7 +10688,7 @@
           <a:noFill/>
         </p:spPr>
         <p:txBody>
-          <a:bodyPr wrap="square" anchor="t" lIns="0" rIns="0" tIns="0" bIns="0">
+          <a:bodyPr wrap="square" lIns="0" tIns="0" rIns="0" bIns="0" anchor="t">
             <a:spAutoFit/>
           </a:bodyPr>
           <a:lstStyle/>
@@ -10910,6 +10751,7 @@
           <a:lstStyle/>
           <a:p>
             <a:pPr algn="ctr"/>
+            <a:endParaRPr/>
           </a:p>
         </p:txBody>
       </p:sp>
@@ -10930,7 +10772,7 @@
           <a:noFill/>
         </p:spPr>
         <p:txBody>
-          <a:bodyPr wrap="square" anchor="ctr" lIns="0" rIns="0" tIns="0" bIns="0">
+          <a:bodyPr wrap="square" lIns="0" tIns="0" rIns="0" bIns="0" anchor="ctr">
             <a:spAutoFit/>
           </a:bodyPr>
           <a:lstStyle/>
@@ -10993,6 +10835,7 @@
           <a:lstStyle/>
           <a:p>
             <a:pPr algn="ctr"/>
+            <a:endParaRPr/>
           </a:p>
         </p:txBody>
       </p:sp>
@@ -11013,7 +10856,7 @@
           <a:noFill/>
         </p:spPr>
         <p:txBody>
-          <a:bodyPr wrap="square" anchor="ctr" lIns="0" rIns="0" tIns="0" bIns="0">
+          <a:bodyPr wrap="square" lIns="0" tIns="0" rIns="0" bIns="0" anchor="ctr">
             <a:spAutoFit/>
           </a:bodyPr>
           <a:lstStyle/>
@@ -11076,6 +10919,7 @@
           <a:lstStyle/>
           <a:p>
             <a:pPr algn="ctr"/>
+            <a:endParaRPr/>
           </a:p>
         </p:txBody>
       </p:sp>
@@ -11096,7 +10940,7 @@
           <a:noFill/>
         </p:spPr>
         <p:txBody>
-          <a:bodyPr wrap="square" anchor="ctr" lIns="0" rIns="0" tIns="0" bIns="0">
+          <a:bodyPr wrap="square" lIns="0" tIns="0" rIns="0" bIns="0" anchor="ctr">
             <a:spAutoFit/>
           </a:bodyPr>
           <a:lstStyle/>
@@ -11157,6 +11001,7 @@
           <a:lstStyle/>
           <a:p>
             <a:pPr algn="ctr"/>
+            <a:endParaRPr/>
           </a:p>
         </p:txBody>
       </p:sp>
@@ -11177,7 +11022,7 @@
           <a:noFill/>
         </p:spPr>
         <p:txBody>
-          <a:bodyPr wrap="square" anchor="ctr" lIns="0" rIns="0" tIns="0" bIns="0">
+          <a:bodyPr wrap="square" lIns="0" tIns="0" rIns="0" bIns="0" anchor="ctr">
             <a:spAutoFit/>
           </a:bodyPr>
           <a:lstStyle/>
@@ -11221,7 +11066,7 @@
           <a:noFill/>
         </p:spPr>
         <p:txBody>
-          <a:bodyPr wrap="square" anchor="t" lIns="0" rIns="0" tIns="0" bIns="0">
+          <a:bodyPr wrap="square" lIns="0" tIns="0" rIns="0" bIns="0" anchor="t">
             <a:spAutoFit/>
           </a:bodyPr>
           <a:lstStyle/>
@@ -11568,7 +11413,7 @@
 </file>
 
 <file path=ppt/theme/theme2.xml><?xml version="1.0" encoding="utf-8"?>
-<a:theme xmlns:a="http://schemas.openxmlformats.org/drawingml/2006/main" name="Office Theme">
+<a:theme xmlns:a="http://schemas.openxmlformats.org/drawingml/2006/main" name="Office">
   <a:themeElements>
     <a:clrScheme name="Office">
       <a:dk1>
@@ -11578,44 +11423,44 @@
         <a:sysClr val="window" lastClr="FFFFFF"/>
       </a:lt1>
       <a:dk2>
-        <a:srgbClr val="1F497D"/>
+        <a:srgbClr val="0E2841"/>
       </a:dk2>
       <a:lt2>
-        <a:srgbClr val="EEECE1"/>
+        <a:srgbClr val="E8E8E8"/>
       </a:lt2>
       <a:accent1>
-        <a:srgbClr val="4F81BD"/>
+        <a:srgbClr val="156082"/>
       </a:accent1>
       <a:accent2>
-        <a:srgbClr val="C0504D"/>
+        <a:srgbClr val="E97132"/>
       </a:accent2>
       <a:accent3>
-        <a:srgbClr val="9BBB59"/>
+        <a:srgbClr val="196B24"/>
       </a:accent3>
       <a:accent4>
-        <a:srgbClr val="8064A2"/>
+        <a:srgbClr val="0F9ED5"/>
       </a:accent4>
       <a:accent5>
-        <a:srgbClr val="4BACC6"/>
+        <a:srgbClr val="A02B93"/>
       </a:accent5>
       <a:accent6>
-        <a:srgbClr val="F79646"/>
+        <a:srgbClr val="4EA72E"/>
       </a:accent6>
       <a:hlink>
-        <a:srgbClr val="0000FF"/>
+        <a:srgbClr val="467886"/>
       </a:hlink>
       <a:folHlink>
-        <a:srgbClr val="800080"/>
+        <a:srgbClr val="96607D"/>
       </a:folHlink>
     </a:clrScheme>
     <a:fontScheme name="Office">
       <a:majorFont>
-        <a:latin typeface="Calibri"/>
+        <a:latin typeface="Aptos Display" panose="02110004020202020204"/>
         <a:ea typeface=""/>
         <a:cs typeface=""/>
-        <a:font script="Jpan" typeface="ＭＳ Ｐゴシック"/>
+        <a:font script="Jpan" typeface="游ゴシック Light"/>
         <a:font script="Hang" typeface="맑은 고딕"/>
-        <a:font script="Hans" typeface="宋体"/>
+        <a:font script="Hans" typeface="等线 Light"/>
         <a:font script="Hant" typeface="新細明體"/>
         <a:font script="Arab" typeface="Times New Roman"/>
         <a:font script="Hebr" typeface="Times New Roman"/>
@@ -11643,14 +11488,31 @@
         <a:font script="Viet" typeface="Times New Roman"/>
         <a:font script="Uigh" typeface="Microsoft Uighur"/>
         <a:font script="Geor" typeface="Sylfaen"/>
+        <a:font script="Armn" typeface="Arial"/>
+        <a:font script="Bugi" typeface="Leelawadee UI"/>
+        <a:font script="Bopo" typeface="Microsoft JhengHei"/>
+        <a:font script="Java" typeface="Javanese Text"/>
+        <a:font script="Lisu" typeface="Segoe UI"/>
+        <a:font script="Mymr" typeface="Myanmar Text"/>
+        <a:font script="Nkoo" typeface="Ebrima"/>
+        <a:font script="Olck" typeface="Nirmala UI"/>
+        <a:font script="Osma" typeface="Ebrima"/>
+        <a:font script="Phag" typeface="Phagspa"/>
+        <a:font script="Syrn" typeface="Estrangelo Edessa"/>
+        <a:font script="Syrj" typeface="Estrangelo Edessa"/>
+        <a:font script="Syre" typeface="Estrangelo Edessa"/>
+        <a:font script="Sora" typeface="Nirmala UI"/>
+        <a:font script="Tale" typeface="Microsoft Tai Le"/>
+        <a:font script="Talu" typeface="Microsoft New Tai Lue"/>
+        <a:font script="Tfng" typeface="Ebrima"/>
       </a:majorFont>
       <a:minorFont>
-        <a:latin typeface="Calibri"/>
+        <a:latin typeface="Aptos" panose="02110004020202020204"/>
         <a:ea typeface=""/>
         <a:cs typeface=""/>
-        <a:font script="Jpan" typeface="ＭＳ Ｐゴシック"/>
+        <a:font script="Jpan" typeface="游ゴシック"/>
         <a:font script="Hang" typeface="맑은 고딕"/>
-        <a:font script="Hans" typeface="宋体"/>
+        <a:font script="Hans" typeface="等线"/>
         <a:font script="Hant" typeface="新細明體"/>
         <a:font script="Arab" typeface="Arial"/>
         <a:font script="Hebr" typeface="Arial"/>
@@ -11678,6 +11540,23 @@
         <a:font script="Viet" typeface="Arial"/>
         <a:font script="Uigh" typeface="Microsoft Uighur"/>
         <a:font script="Geor" typeface="Sylfaen"/>
+        <a:font script="Armn" typeface="Arial"/>
+        <a:font script="Bugi" typeface="Leelawadee UI"/>
+        <a:font script="Bopo" typeface="Microsoft JhengHei"/>
+        <a:font script="Java" typeface="Javanese Text"/>
+        <a:font script="Lisu" typeface="Segoe UI"/>
+        <a:font script="Mymr" typeface="Myanmar Text"/>
+        <a:font script="Nkoo" typeface="Ebrima"/>
+        <a:font script="Olck" typeface="Nirmala UI"/>
+        <a:font script="Osma" typeface="Ebrima"/>
+        <a:font script="Phag" typeface="Phagspa"/>
+        <a:font script="Syrn" typeface="Estrangelo Edessa"/>
+        <a:font script="Syrj" typeface="Estrangelo Edessa"/>
+        <a:font script="Syre" typeface="Estrangelo Edessa"/>
+        <a:font script="Sora" typeface="Nirmala UI"/>
+        <a:font script="Tale" typeface="Microsoft Tai Le"/>
+        <a:font script="Talu" typeface="Microsoft New Tai Lue"/>
+        <a:font script="Tfng" typeface="Ebrima"/>
       </a:minorFont>
     </a:fontScheme>
     <a:fmtScheme name="Office">
@@ -11689,180 +11568,136 @@
           <a:gsLst>
             <a:gs pos="0">
               <a:schemeClr val="phClr">
-                <a:tint val="50000"/>
-                <a:satMod val="300000"/>
+                <a:lumMod val="110000"/>
+                <a:satMod val="105000"/>
+                <a:tint val="67000"/>
               </a:schemeClr>
             </a:gs>
-            <a:gs pos="35000">
+            <a:gs pos="50000">
               <a:schemeClr val="phClr">
-                <a:tint val="37000"/>
-                <a:satMod val="300000"/>
+                <a:lumMod val="105000"/>
+                <a:satMod val="103000"/>
+                <a:tint val="73000"/>
               </a:schemeClr>
             </a:gs>
             <a:gs pos="100000">
               <a:schemeClr val="phClr">
-                <a:tint val="15000"/>
-                <a:satMod val="350000"/>
+                <a:lumMod val="105000"/>
+                <a:satMod val="109000"/>
+                <a:tint val="81000"/>
               </a:schemeClr>
             </a:gs>
           </a:gsLst>
-          <a:lin ang="16200000" scaled="1"/>
+          <a:lin ang="5400000" scaled="0"/>
         </a:gradFill>
         <a:gradFill rotWithShape="1">
           <a:gsLst>
             <a:gs pos="0">
               <a:schemeClr val="phClr">
-                <a:tint val="100000"/>
+                <a:satMod val="103000"/>
+                <a:lumMod val="102000"/>
+                <a:tint val="94000"/>
+              </a:schemeClr>
+            </a:gs>
+            <a:gs pos="50000">
+              <a:schemeClr val="phClr">
+                <a:satMod val="110000"/>
+                <a:lumMod val="100000"/>
                 <a:shade val="100000"/>
-                <a:satMod val="130000"/>
               </a:schemeClr>
             </a:gs>
             <a:gs pos="100000">
               <a:schemeClr val="phClr">
-                <a:tint val="50000"/>
-                <a:shade val="100000"/>
-                <a:satMod val="350000"/>
+                <a:lumMod val="99000"/>
+                <a:satMod val="120000"/>
+                <a:shade val="78000"/>
               </a:schemeClr>
             </a:gs>
           </a:gsLst>
-          <a:lin ang="16200000" scaled="0"/>
+          <a:lin ang="5400000" scaled="0"/>
         </a:gradFill>
       </a:fillStyleLst>
       <a:lnStyleLst>
-        <a:ln w="9525" cap="flat" cmpd="sng" algn="ctr">
+        <a:ln w="12700" cap="flat" cmpd="sng" algn="ctr">
           <a:solidFill>
-            <a:schemeClr val="phClr">
-              <a:shade val="95000"/>
-              <a:satMod val="105000"/>
-            </a:schemeClr>
+            <a:schemeClr val="phClr"/>
           </a:solidFill>
           <a:prstDash val="solid"/>
+          <a:miter lim="800000"/>
+        </a:ln>
+        <a:ln w="19050" cap="flat" cmpd="sng" algn="ctr">
+          <a:solidFill>
+            <a:schemeClr val="phClr"/>
+          </a:solidFill>
+          <a:prstDash val="solid"/>
+          <a:miter lim="800000"/>
         </a:ln>
         <a:ln w="25400" cap="flat" cmpd="sng" algn="ctr">
           <a:solidFill>
             <a:schemeClr val="phClr"/>
           </a:solidFill>
           <a:prstDash val="solid"/>
-        </a:ln>
-        <a:ln w="38100" cap="flat" cmpd="sng" algn="ctr">
-          <a:solidFill>
-            <a:schemeClr val="phClr"/>
-          </a:solidFill>
-          <a:prstDash val="solid"/>
+          <a:miter lim="800000"/>
         </a:ln>
       </a:lnStyleLst>
       <a:effectStyleLst>
         <a:effectStyle>
+          <a:effectLst/>
+        </a:effectStyle>
+        <a:effectStyle>
+          <a:effectLst/>
+        </a:effectStyle>
+        <a:effectStyle>
           <a:effectLst>
-            <a:outerShdw blurRad="40000" dist="20000" dir="5400000" rotWithShape="0">
+            <a:outerShdw blurRad="57150" dist="19050" dir="5400000" algn="ctr" rotWithShape="0">
               <a:srgbClr val="000000">
-                <a:alpha val="38000"/>
+                <a:alpha val="63000"/>
               </a:srgbClr>
             </a:outerShdw>
           </a:effectLst>
-        </a:effectStyle>
-        <a:effectStyle>
-          <a:effectLst>
-            <a:outerShdw blurRad="40000" dist="23000" dir="5400000" rotWithShape="0">
-              <a:srgbClr val="000000">
-                <a:alpha val="35000"/>
-              </a:srgbClr>
-            </a:outerShdw>
-          </a:effectLst>
-        </a:effectStyle>
-        <a:effectStyle>
-          <a:effectLst>
-            <a:outerShdw blurRad="40000" dist="23000" dir="5400000" rotWithShape="0">
-              <a:srgbClr val="000000">
-                <a:alpha val="35000"/>
-              </a:srgbClr>
-            </a:outerShdw>
-          </a:effectLst>
-          <a:scene3d>
-            <a:camera prst="orthographicFront">
-              <a:rot lat="0" lon="0" rev="0"/>
-            </a:camera>
-            <a:lightRig rig="threePt" dir="t">
-              <a:rot lat="0" lon="0" rev="1200000"/>
-            </a:lightRig>
-          </a:scene3d>
-          <a:sp3d>
-            <a:bevelT w="63500" h="25400"/>
-          </a:sp3d>
         </a:effectStyle>
       </a:effectStyleLst>
       <a:bgFillStyleLst>
         <a:solidFill>
           <a:schemeClr val="phClr"/>
         </a:solidFill>
+        <a:solidFill>
+          <a:schemeClr val="phClr">
+            <a:tint val="95000"/>
+            <a:satMod val="170000"/>
+          </a:schemeClr>
+        </a:solidFill>
         <a:gradFill rotWithShape="1">
           <a:gsLst>
             <a:gs pos="0">
               <a:schemeClr val="phClr">
-                <a:tint val="40000"/>
-                <a:satMod val="350000"/>
+                <a:tint val="93000"/>
+                <a:satMod val="150000"/>
+                <a:shade val="98000"/>
+                <a:lumMod val="102000"/>
               </a:schemeClr>
             </a:gs>
-            <a:gs pos="40000">
+            <a:gs pos="50000">
               <a:schemeClr val="phClr">
-                <a:tint val="45000"/>
-                <a:shade val="99000"/>
-                <a:satMod val="350000"/>
+                <a:tint val="98000"/>
+                <a:satMod val="130000"/>
+                <a:shade val="90000"/>
+                <a:lumMod val="103000"/>
               </a:schemeClr>
             </a:gs>
             <a:gs pos="100000">
               <a:schemeClr val="phClr">
-                <a:shade val="20000"/>
-                <a:satMod val="255000"/>
+                <a:shade val="63000"/>
+                <a:satMod val="120000"/>
               </a:schemeClr>
             </a:gs>
           </a:gsLst>
-          <a:path path="circle">
-            <a:fillToRect l="50000" t="-80000" r="50000" b="180000"/>
-          </a:path>
-        </a:gradFill>
-        <a:gradFill rotWithShape="1">
-          <a:gsLst>
-            <a:gs pos="0">
-              <a:schemeClr val="phClr">
-                <a:tint val="80000"/>
-                <a:satMod val="300000"/>
-              </a:schemeClr>
-            </a:gs>
-            <a:gs pos="100000">
-              <a:schemeClr val="phClr">
-                <a:shade val="30000"/>
-                <a:satMod val="200000"/>
-              </a:schemeClr>
-            </a:gs>
-          </a:gsLst>
-          <a:path path="circle">
-            <a:fillToRect l="50000" t="50000" r="50000" b="50000"/>
-          </a:path>
+          <a:lin ang="5400000" scaled="0"/>
         </a:gradFill>
       </a:bgFillStyleLst>
     </a:fmtScheme>
   </a:themeElements>
   <a:objectDefaults>
-    <a:spDef>
-      <a:spPr/>
-      <a:bodyPr/>
-      <a:lstStyle/>
-      <a:style>
-        <a:lnRef idx="1">
-          <a:schemeClr val="accent1"/>
-        </a:lnRef>
-        <a:fillRef idx="3">
-          <a:schemeClr val="accent1"/>
-        </a:fillRef>
-        <a:effectRef idx="2">
-          <a:schemeClr val="accent1"/>
-        </a:effectRef>
-        <a:fontRef idx="minor">
-          <a:schemeClr val="lt1"/>
-        </a:fontRef>
-      </a:style>
-    </a:spDef>
     <a:lnDef>
       <a:spPr/>
       <a:bodyPr/>
@@ -11884,5 +11719,10 @@
     </a:lnDef>
   </a:objectDefaults>
   <a:extraClrSchemeLst/>
+  <a:extLst>
+    <a:ext uri="{05A4C25C-085E-4340-85A3-A5531E510DB2}">
+      <thm15:themeFamily xmlns:thm15="http://schemas.microsoft.com/office/thememl/2012/main" name="Office Theme" id="{2E142A2C-CD16-42D6-873A-C26D2A0506FA}" vid="{1BDDFF52-6CD6-40A5-AB3C-68EB2F1E4D0A}"/>
+    </a:ext>
+  </a:extLst>
 </a:theme>
 </file>
--- a/docs/TicketTriage-presentation.pptx
+++ b/docs/TicketTriage-presentation.pptx
@@ -4,16 +4,14 @@
   <p:sldMasterIdLst>
     <p:sldMasterId id="2147483648" r:id="rId1"/>
   </p:sldMasterIdLst>
-  <p:notesMasterIdLst>
-    <p:notesMasterId r:id="rId6"/>
-  </p:notesMasterIdLst>
   <p:sldIdLst>
-    <p:sldId id="256" r:id="rId2"/>
-    <p:sldId id="257" r:id="rId3"/>
-    <p:sldId id="258" r:id="rId4"/>
-    <p:sldId id="259" r:id="rId5"/>
+    <p:sldId id="256" r:id="rId7"/>
+    <p:sldId id="257" r:id="rId9"/>
+    <p:sldId id="258" r:id="rId10"/>
+    <p:sldId id="259" r:id="rId11"/>
+    <p:sldId id="260" r:id="rId12"/>
   </p:sldIdLst>
-  <p:sldSz cx="12192000" cy="6858000"/>
+  <p:sldSz cx="12191695" cy="6858000" type="screen4x3"/>
   <p:notesSz cx="6858000" cy="9144000"/>
   <p:defaultTextStyle>
     <a:defPPr>
@@ -110,27 +108,11 @@
       </a:defRPr>
     </a:lvl9pPr>
   </p:defaultTextStyle>
-  <p:extLst>
-    <p:ext uri="{EFAFB233-063F-42B5-8137-9DF3F51BA10A}">
-      <p15:sldGuideLst xmlns:p15="http://schemas.microsoft.com/office/powerpoint/2012/main">
-        <p15:guide id="1" orient="horz" pos="2160">
-          <p15:clr>
-            <a:srgbClr val="A4A3A4"/>
-          </p15:clr>
-        </p15:guide>
-        <p15:guide id="2" pos="2880">
-          <p15:clr>
-            <a:srgbClr val="A4A3A4"/>
-          </p15:clr>
-        </p15:guide>
-      </p15:sldGuideLst>
-    </p:ext>
-  </p:extLst>
 </p:presentation>
 </file>
 
 <file path=ppt/notesMasters/notesMaster1.xml><?xml version="1.0" encoding="utf-8"?>
-<p:notesMaster xmlns:a="http://schemas.openxmlformats.org/drawingml/2006/main" xmlns:r="http://schemas.openxmlformats.org/officeDocument/2006/relationships" xmlns:p="http://schemas.openxmlformats.org/presentationml/2006/main">
+<p:notesMaster xmlns:a="http://schemas.openxmlformats.org/drawingml/2006/main" xmlns:p="http://schemas.openxmlformats.org/presentationml/2006/main" xmlns:r="http://schemas.openxmlformats.org/officeDocument/2006/relationships">
   <p:cSld>
     <p:bg>
       <p:bgRef idx="1001">
@@ -151,16 +133,241 @@
           <a:chExt cx="0" cy="0"/>
         </a:xfrm>
       </p:grpSpPr>
+      <p:sp>
+        <p:nvSpPr>
+          <p:cNvPr id="2" name="Header Placeholder 1"/>
+          <p:cNvSpPr>
+            <a:spLocks noGrp="1"/>
+          </p:cNvSpPr>
+          <p:nvPr>
+            <p:ph type="hdr" sz="quarter"/>
+          </p:nvPr>
+        </p:nvSpPr>
+        <p:spPr>
+          <a:xfrm>
+            <a:off x="0" y="0"/>
+            <a:ext cx="2971800" cy="457200"/>
+          </a:xfrm>
+          <a:prstGeom prst="rect">
+            <a:avLst/>
+          </a:prstGeom>
+        </p:spPr>
+        <p:txBody>
+          <a:bodyPr vert="horz" lIns="91440" tIns="45720" rIns="91440" bIns="45720" rtlCol="0"/>
+          <a:lstStyle>
+            <a:lvl1pPr algn="l">
+              <a:defRPr sz="1200"/>
+            </a:lvl1pPr>
+          </a:lstStyle>
+          <a:p>
+            <a:endParaRPr lang="en-US"/>
+          </a:p>
+        </p:txBody>
+      </p:sp>
+      <p:sp>
+        <p:nvSpPr>
+          <p:cNvPr id="3" name="Date Placeholder 2"/>
+          <p:cNvSpPr>
+            <a:spLocks noGrp="1"/>
+          </p:cNvSpPr>
+          <p:nvPr>
+            <p:ph type="dt" idx="1"/>
+          </p:nvPr>
+        </p:nvSpPr>
+        <p:spPr>
+          <a:xfrm>
+            <a:off x="3884613" y="0"/>
+            <a:ext cx="2971800" cy="457200"/>
+          </a:xfrm>
+          <a:prstGeom prst="rect">
+            <a:avLst/>
+          </a:prstGeom>
+        </p:spPr>
+        <p:txBody>
+          <a:bodyPr vert="horz" lIns="91440" tIns="45720" rIns="91440" bIns="45720" rtlCol="0"/>
+          <a:lstStyle>
+            <a:lvl1pPr algn="r">
+              <a:defRPr sz="1200"/>
+            </a:lvl1pPr>
+          </a:lstStyle>
+          <a:p>
+            <a:fld id="{0F89C1C7-3DCD-1040-A9CF-14679D8B5DDD}" type="datetimeFigureOut">
+              <a:rPr lang="en-US" smtClean="0"/>
+              <a:t>10/17/16</a:t>
+            </a:fld>
+            <a:endParaRPr lang="en-US"/>
+          </a:p>
+        </p:txBody>
+      </p:sp>
+      <p:sp>
+        <p:nvSpPr>
+          <p:cNvPr id="4" name="Slide Image Placeholder 3"/>
+          <p:cNvSpPr>
+            <a:spLocks noGrp="1" noRot="1" noChangeAspect="1"/>
+          </p:cNvSpPr>
+          <p:nvPr>
+            <p:ph type="sldImg" idx="2"/>
+          </p:nvPr>
+        </p:nvSpPr>
+        <p:spPr>
+          <a:xfrm>
+            <a:off x="1143000" y="685800"/>
+            <a:ext cx="4572000" cy="3429000"/>
+          </a:xfrm>
+          <a:prstGeom prst="rect">
+            <a:avLst/>
+          </a:prstGeom>
+          <a:noFill/>
+          <a:ln w="12700">
+            <a:solidFill>
+              <a:prstClr val="black"/>
+            </a:solidFill>
+          </a:ln>
+        </p:spPr>
+        <p:txBody>
+          <a:bodyPr vert="horz" lIns="91440" tIns="45720" rIns="91440" bIns="45720" rtlCol="0" anchor="ctr"/>
+          <a:lstStyle/>
+          <a:p>
+            <a:endParaRPr lang="en-US"/>
+          </a:p>
+        </p:txBody>
+      </p:sp>
+      <p:sp>
+        <p:nvSpPr>
+          <p:cNvPr id="5" name="Notes Placeholder 4"/>
+          <p:cNvSpPr>
+            <a:spLocks noGrp="1"/>
+          </p:cNvSpPr>
+          <p:nvPr>
+            <p:ph type="body" sz="quarter" idx="3"/>
+          </p:nvPr>
+        </p:nvSpPr>
+        <p:spPr>
+          <a:xfrm>
+            <a:off x="685800" y="4343400"/>
+            <a:ext cx="5486400" cy="4114800"/>
+          </a:xfrm>
+          <a:prstGeom prst="rect">
+            <a:avLst/>
+          </a:prstGeom>
+        </p:spPr>
+        <p:txBody>
+          <a:bodyPr vert="horz" lIns="91440" tIns="45720" rIns="91440" bIns="45720" rtlCol="0"/>
+          <a:lstStyle/>
+          <a:p>
+            <a:pPr lvl="0"/>
+            <a:r>
+              <a:rPr lang="en-US" smtClean="0"/>
+              <a:t>Click to edit Master text styles</a:t>
+            </a:r>
+          </a:p>
+          <a:p>
+            <a:pPr lvl="1"/>
+            <a:r>
+              <a:rPr lang="en-US" smtClean="0"/>
+              <a:t>Second level</a:t>
+            </a:r>
+          </a:p>
+          <a:p>
+            <a:pPr lvl="2"/>
+            <a:r>
+              <a:rPr lang="en-US" smtClean="0"/>
+              <a:t>Third level</a:t>
+            </a:r>
+          </a:p>
+          <a:p>
+            <a:pPr lvl="3"/>
+            <a:r>
+              <a:rPr lang="en-US" smtClean="0"/>
+              <a:t>Fourth level</a:t>
+            </a:r>
+          </a:p>
+          <a:p>
+            <a:pPr lvl="4"/>
+            <a:r>
+              <a:rPr lang="en-US" smtClean="0"/>
+              <a:t>Fifth level</a:t>
+            </a:r>
+            <a:endParaRPr lang="en-US"/>
+          </a:p>
+        </p:txBody>
+      </p:sp>
+      <p:sp>
+        <p:nvSpPr>
+          <p:cNvPr id="6" name="Footer Placeholder 5"/>
+          <p:cNvSpPr>
+            <a:spLocks noGrp="1"/>
+          </p:cNvSpPr>
+          <p:nvPr>
+            <p:ph type="ftr" sz="quarter" idx="4"/>
+          </p:nvPr>
+        </p:nvSpPr>
+        <p:spPr>
+          <a:xfrm>
+            <a:off x="0" y="8685213"/>
+            <a:ext cx="2971800" cy="457200"/>
+          </a:xfrm>
+          <a:prstGeom prst="rect">
+            <a:avLst/>
+          </a:prstGeom>
+        </p:spPr>
+        <p:txBody>
+          <a:bodyPr vert="horz" lIns="91440" tIns="45720" rIns="91440" bIns="45720" rtlCol="0" anchor="b"/>
+          <a:lstStyle>
+            <a:lvl1pPr algn="l">
+              <a:defRPr sz="1200"/>
+            </a:lvl1pPr>
+          </a:lstStyle>
+          <a:p>
+            <a:endParaRPr lang="en-US"/>
+          </a:p>
+        </p:txBody>
+      </p:sp>
+      <p:sp>
+        <p:nvSpPr>
+          <p:cNvPr id="7" name="Slide Number Placeholder 6"/>
+          <p:cNvSpPr>
+            <a:spLocks noGrp="1"/>
+          </p:cNvSpPr>
+          <p:nvPr>
+            <p:ph type="sldNum" sz="quarter" idx="5"/>
+          </p:nvPr>
+        </p:nvSpPr>
+        <p:spPr>
+          <a:xfrm>
+            <a:off x="3884613" y="8685213"/>
+            <a:ext cx="2971800" cy="457200"/>
+          </a:xfrm>
+          <a:prstGeom prst="rect">
+            <a:avLst/>
+          </a:prstGeom>
+        </p:spPr>
+        <p:txBody>
+          <a:bodyPr vert="horz" lIns="91440" tIns="45720" rIns="91440" bIns="45720" rtlCol="0" anchor="b"/>
+          <a:lstStyle>
+            <a:lvl1pPr algn="r">
+              <a:defRPr sz="1200"/>
+            </a:lvl1pPr>
+          </a:lstStyle>
+          <a:p>
+            <a:fld id="{BB5E49A5-4136-284D-997B-48E1D791AD67}" type="slidenum">
+              <a:rPr lang="en-US" smtClean="0"/>
+              <a:t>‹#›</a:t>
+            </a:fld>
+            <a:endParaRPr lang="en-US"/>
+          </a:p>
+        </p:txBody>
+      </p:sp>
     </p:spTree>
     <p:extLst>
       <p:ext uri="{BB962C8B-B14F-4D97-AF65-F5344CB8AC3E}">
-        <p14:creationId xmlns:p14="http://schemas.microsoft.com/office/powerpoint/2010/main" val="2346250809"/>
+        <p14:creationId xmlns:p14="http://schemas.microsoft.com/office/powerpoint/2010/main" val="2623252185"/>
       </p:ext>
     </p:extLst>
   </p:cSld>
   <p:clrMap bg1="lt1" tx1="dk1" bg2="lt2" tx2="dk2" accent1="accent1" accent2="accent2" accent3="accent3" accent4="accent4" accent5="accent5" accent6="accent6" hlink="hlink" folHlink="folHlink"/>
   <p:notesStyle>
-    <a:lvl1pPr marL="0" algn="l" defTabSz="914400" rtl="0" eaLnBrk="1" latinLnBrk="0" hangingPunct="1">
+    <a:lvl1pPr marL="0" algn="l" defTabSz="457200" rtl="0" eaLnBrk="1" latinLnBrk="0" hangingPunct="1">
       <a:defRPr sz="1200" kern="1200">
         <a:solidFill>
           <a:schemeClr val="tx1"/>
@@ -170,7 +377,7 @@
         <a:cs typeface="+mn-cs"/>
       </a:defRPr>
     </a:lvl1pPr>
-    <a:lvl2pPr marL="457200" algn="l" defTabSz="914400" rtl="0" eaLnBrk="1" latinLnBrk="0" hangingPunct="1">
+    <a:lvl2pPr marL="457200" algn="l" defTabSz="457200" rtl="0" eaLnBrk="1" latinLnBrk="0" hangingPunct="1">
       <a:defRPr sz="1200" kern="1200">
         <a:solidFill>
           <a:schemeClr val="tx1"/>
@@ -180,7 +387,7 @@
         <a:cs typeface="+mn-cs"/>
       </a:defRPr>
     </a:lvl2pPr>
-    <a:lvl3pPr marL="914400" algn="l" defTabSz="914400" rtl="0" eaLnBrk="1" latinLnBrk="0" hangingPunct="1">
+    <a:lvl3pPr marL="914400" algn="l" defTabSz="457200" rtl="0" eaLnBrk="1" latinLnBrk="0" hangingPunct="1">
       <a:defRPr sz="1200" kern="1200">
         <a:solidFill>
           <a:schemeClr val="tx1"/>
@@ -190,7 +397,7 @@
         <a:cs typeface="+mn-cs"/>
       </a:defRPr>
     </a:lvl3pPr>
-    <a:lvl4pPr marL="1371600" algn="l" defTabSz="914400" rtl="0" eaLnBrk="1" latinLnBrk="0" hangingPunct="1">
+    <a:lvl4pPr marL="1371600" algn="l" defTabSz="457200" rtl="0" eaLnBrk="1" latinLnBrk="0" hangingPunct="1">
       <a:defRPr sz="1200" kern="1200">
         <a:solidFill>
           <a:schemeClr val="tx1"/>
@@ -200,7 +407,7 @@
         <a:cs typeface="+mn-cs"/>
       </a:defRPr>
     </a:lvl4pPr>
-    <a:lvl5pPr marL="1828800" algn="l" defTabSz="914400" rtl="0" eaLnBrk="1" latinLnBrk="0" hangingPunct="1">
+    <a:lvl5pPr marL="1828800" algn="l" defTabSz="457200" rtl="0" eaLnBrk="1" latinLnBrk="0" hangingPunct="1">
       <a:defRPr sz="1200" kern="1200">
         <a:solidFill>
           <a:schemeClr val="tx1"/>
@@ -210,7 +417,7 @@
         <a:cs typeface="+mn-cs"/>
       </a:defRPr>
     </a:lvl5pPr>
-    <a:lvl6pPr marL="2286000" algn="l" defTabSz="914400" rtl="0" eaLnBrk="1" latinLnBrk="0" hangingPunct="1">
+    <a:lvl6pPr marL="2286000" algn="l" defTabSz="457200" rtl="0" eaLnBrk="1" latinLnBrk="0" hangingPunct="1">
       <a:defRPr sz="1200" kern="1200">
         <a:solidFill>
           <a:schemeClr val="tx1"/>
@@ -220,7 +427,7 @@
         <a:cs typeface="+mn-cs"/>
       </a:defRPr>
     </a:lvl6pPr>
-    <a:lvl7pPr marL="2743200" algn="l" defTabSz="914400" rtl="0" eaLnBrk="1" latinLnBrk="0" hangingPunct="1">
+    <a:lvl7pPr marL="2743200" algn="l" defTabSz="457200" rtl="0" eaLnBrk="1" latinLnBrk="0" hangingPunct="1">
       <a:defRPr sz="1200" kern="1200">
         <a:solidFill>
           <a:schemeClr val="tx1"/>
@@ -230,7 +437,7 @@
         <a:cs typeface="+mn-cs"/>
       </a:defRPr>
     </a:lvl7pPr>
-    <a:lvl8pPr marL="3200400" algn="l" defTabSz="914400" rtl="0" eaLnBrk="1" latinLnBrk="0" hangingPunct="1">
+    <a:lvl8pPr marL="3200400" algn="l" defTabSz="457200" rtl="0" eaLnBrk="1" latinLnBrk="0" hangingPunct="1">
       <a:defRPr sz="1200" kern="1200">
         <a:solidFill>
           <a:schemeClr val="tx1"/>
@@ -240,7 +447,7 @@
         <a:cs typeface="+mn-cs"/>
       </a:defRPr>
     </a:lvl8pPr>
-    <a:lvl9pPr marL="3657600" algn="l" defTabSz="914400" rtl="0" eaLnBrk="1" latinLnBrk="0" hangingPunct="1">
+    <a:lvl9pPr marL="3657600" algn="l" defTabSz="457200" rtl="0" eaLnBrk="1" latinLnBrk="0" hangingPunct="1">
       <a:defRPr sz="1200" kern="1200">
         <a:solidFill>
           <a:schemeClr val="tx1"/>
@@ -255,7 +462,7 @@
 </file>
 
 <file path=ppt/notesSlides/notesSlide1.xml><?xml version="1.0" encoding="utf-8"?>
-<p:notes xmlns:a="http://schemas.openxmlformats.org/drawingml/2006/main" xmlns:r="http://schemas.openxmlformats.org/officeDocument/2006/relationships" xmlns:p="http://schemas.openxmlformats.org/presentationml/2006/main">
+<p:notes xmlns:a="http://schemas.openxmlformats.org/drawingml/2006/main" xmlns:p="http://schemas.openxmlformats.org/presentationml/2006/main" xmlns:r="http://schemas.openxmlformats.org/officeDocument/2006/relationships">
   <p:cSld>
     <p:spTree>
       <p:nvGrpSpPr>
@@ -275,7 +482,7 @@
         <p:nvSpPr>
           <p:cNvPr id="2" name="Slide Image Placeholder 1"/>
           <p:cNvSpPr>
-            <a:spLocks noGrp="1" noRot="1" noChangeAspect="1"/>
+            <a:spLocks noGrp="1"/>
           </p:cNvSpPr>
           <p:nvPr>
             <p:ph type="sldImg" idx="2"/>
@@ -290,7 +497,7 @@
             <a:spLocks noGrp="1"/>
           </p:cNvSpPr>
           <p:nvPr>
-            <p:ph type="body" sz="quarter" idx="3"/>
+            <p:ph type="body" idx="3" sz="quarter"/>
           </p:nvPr>
         </p:nvSpPr>
         <p:spPr/>
@@ -299,7 +506,7 @@
           <a:lstStyle/>
           <a:p>
             <a:r>
-              <a:t>The training export looks big (20,000 tickets) but is 11 text templates with 20 service names filled in: 173 distinct texts. Work type, service and team can be read off the text, so those are easy. Priority, urgency, impact, resolution status and assignee are random: the text lookup, a logistic regression on every field, even the ordering of tickets do not beat the most-common-value baseline (assignee 3.6 % against 3.3 % chance for 30 people; a shuffled-label control scores the same). Priority does not follow urgency and impact (rank correlation 0.00). Consequence: we do not train on this data. It serves as a retrieval index for similar tickets and as the service to team table.</a:t>
+              <a:t>The order from Swiss Life: service desks lose a lot of time with manual triage, searching scattered documentation and rewriting similar answers, and quality depends on the individual analyst. We get 20,000 historical tickets that are deliberately noisy, and 20 new tickets with fields that are partly empty or wrong. For each new ticket we must get seven fields right: work type, affected service, service team, assignee, priority (which must be consistent with urgency and impact), resolution status and a concrete resolution comment in the assignee's voice. The human stays in control. Swiss Life will look at classification accuracy, the draft acceptance rate (how many suggestions are approved unchanged) and the time to resolution.</a:t>
             </a:r>
           </a:p>
         </p:txBody>
@@ -311,7 +518,7 @@
             <a:spLocks noGrp="1"/>
           </p:cNvSpPr>
           <p:nvPr>
-            <p:ph type="sldNum" sz="quarter" idx="5"/>
+            <p:ph type="sldNum" idx="5" sz="quarter"/>
           </p:nvPr>
         </p:nvSpPr>
         <p:spPr/>
@@ -325,7 +532,7 @@
 </file>
 
 <file path=ppt/notesSlides/notesSlide2.xml><?xml version="1.0" encoding="utf-8"?>
-<p:notes xmlns:a="http://schemas.openxmlformats.org/drawingml/2006/main" xmlns:r="http://schemas.openxmlformats.org/officeDocument/2006/relationships" xmlns:p="http://schemas.openxmlformats.org/presentationml/2006/main">
+<p:notes xmlns:a="http://schemas.openxmlformats.org/drawingml/2006/main" xmlns:p="http://schemas.openxmlformats.org/presentationml/2006/main" xmlns:r="http://schemas.openxmlformats.org/officeDocument/2006/relationships">
   <p:cSld>
     <p:spTree>
       <p:nvGrpSpPr>
@@ -345,7 +552,7 @@
         <p:nvSpPr>
           <p:cNvPr id="2" name="Slide Image Placeholder 1"/>
           <p:cNvSpPr>
-            <a:spLocks noGrp="1" noRot="1" noChangeAspect="1"/>
+            <a:spLocks noGrp="1"/>
           </p:cNvSpPr>
           <p:nvPr>
             <p:ph type="sldImg" idx="2"/>
@@ -360,7 +567,7 @@
             <a:spLocks noGrp="1"/>
           </p:cNvSpPr>
           <p:nvPr>
-            <p:ph type="body" sz="quarter" idx="3"/>
+            <p:ph type="body" idx="3" sz="quarter"/>
           </p:nvPr>
         </p:nvSpPr>
         <p:spPr/>
@@ -369,7 +576,7 @@
           <a:lstStyle/>
           <a:p>
             <a:r>
-              <a:t>Tickets enter through the Upload page or Batch, are saved as New, and a background worker in the Web app claims them and runs the pipeline one ticket at a time. The suggestions are stored in SQLite, so opening a ticket in the UI is instant and never calls the LLM. The analyst approves, edits or rejects; the result file is exported from the stored suggestions. The pipeline has six steps. Blue steps are decided by code: retrieval, routing (team by statistics, assignee by workload), the priority matrix and the validation. Amber steps use the LLM: classification and the resolution draft. The LLM never invents team or assignee names, and priority is never model output. Retries, a timeout and a deterministic fallback mean a ticket always gets a suggestion. The code is layered so that Core knows nothing about the rest; Web and Batch sit on top.</a:t>
+              <a:t>The training export looks big (20,000 tickets) but is 11 text templates with 20 service names filled in: 173 distinct texts. Work type, service and team can be read off the text, so those are easy. Priority, urgency, impact, resolution status and assignee are random: the text lookup, a logistic regression on every field, even the ordering of tickets do not beat the most-common-value baseline (assignee 3.6 % against 3.3 % chance for 30 people; a shuffled-label control scores the same). Priority does not follow urgency and impact (rank correlation 0.00). Consequence: we do not train on this data. It serves as a retrieval index for similar tickets and as the service to team table.</a:t>
             </a:r>
           </a:p>
         </p:txBody>
@@ -381,7 +588,7 @@
             <a:spLocks noGrp="1"/>
           </p:cNvSpPr>
           <p:nvPr>
-            <p:ph type="sldNum" sz="quarter" idx="5"/>
+            <p:ph type="sldNum" idx="5" sz="quarter"/>
           </p:nvPr>
         </p:nvSpPr>
         <p:spPr/>
@@ -395,7 +602,7 @@
 </file>
 
 <file path=ppt/notesSlides/notesSlide3.xml><?xml version="1.0" encoding="utf-8"?>
-<p:notes xmlns:a="http://schemas.openxmlformats.org/drawingml/2006/main" xmlns:r="http://schemas.openxmlformats.org/officeDocument/2006/relationships" xmlns:p="http://schemas.openxmlformats.org/presentationml/2006/main">
+<p:notes xmlns:a="http://schemas.openxmlformats.org/drawingml/2006/main" xmlns:p="http://schemas.openxmlformats.org/presentationml/2006/main" xmlns:r="http://schemas.openxmlformats.org/officeDocument/2006/relationships">
   <p:cSld>
     <p:spTree>
       <p:nvGrpSpPr>
@@ -415,7 +622,7 @@
         <p:nvSpPr>
           <p:cNvPr id="2" name="Slide Image Placeholder 1"/>
           <p:cNvSpPr>
-            <a:spLocks noGrp="1" noRot="1" noChangeAspect="1"/>
+            <a:spLocks noGrp="1"/>
           </p:cNvSpPr>
           <p:nvPr>
             <p:ph type="sldImg" idx="2"/>
@@ -430,7 +637,7 @@
             <a:spLocks noGrp="1"/>
           </p:cNvSpPr>
           <p:nvPr>
-            <p:ph type="body" sz="quarter" idx="3"/>
+            <p:ph type="body" idx="3" sz="quarter"/>
           </p:nvPr>
         </p:nvSpPr>
         <p:spPr/>
@@ -439,7 +646,7 @@
           <a:lstStyle/>
           <a:p>
             <a:r>
-              <a:t>Design rule: every output field has exactly one owner. Code owns everything it can decide reliably: team from the service (100 % deterministic in the data), priority from the matrix, assignee by workload. The LLM owns only what needs reading the text: work type, service, urgency, impact and the resolution draft. Because the history is noise for priority, urgency, impact, status and assignee, the LLM judges from the ticket text and never copies values from similar tickets. The assignee is spread evenly: the person with the fewest tickets so far, since no rule beats chance. Screenshots of the review page and the ticket list / upload page go into the two placeholders on the right.</a:t>
+              <a:t>Tickets enter through the Upload page or Batch, are saved as New, and a background worker in the Web app claims them and runs the pipeline one ticket at a time. The suggestions are stored in SQLite, so opening a ticket in the UI is instant and never calls the LLM. The analyst approves, edits or rejects; the result file is exported from the stored suggestions. The pipeline has six steps. Blue steps are decided by code: retrieval, routing (team by statistics, assignee by workload), the priority matrix and the validation. Amber steps use the LLM: classification and the resolution draft. The LLM never invents team or assignee names, and priority is never model output. Retries, a timeout and a deterministic fallback mean a ticket always gets a suggestion. The code is layered so that Core knows nothing about the rest; Web and Batch sit on top.</a:t>
             </a:r>
           </a:p>
         </p:txBody>
@@ -451,7 +658,7 @@
             <a:spLocks noGrp="1"/>
           </p:cNvSpPr>
           <p:nvPr>
-            <p:ph type="sldNum" sz="quarter" idx="5"/>
+            <p:ph type="sldNum" idx="5" sz="quarter"/>
           </p:nvPr>
         </p:nvSpPr>
         <p:spPr/>
@@ -465,7 +672,7 @@
 </file>
 
 <file path=ppt/notesSlides/notesSlide4.xml><?xml version="1.0" encoding="utf-8"?>
-<p:notes xmlns:a="http://schemas.openxmlformats.org/drawingml/2006/main" xmlns:r="http://schemas.openxmlformats.org/officeDocument/2006/relationships" xmlns:p="http://schemas.openxmlformats.org/presentationml/2006/main">
+<p:notes xmlns:a="http://schemas.openxmlformats.org/drawingml/2006/main" xmlns:p="http://schemas.openxmlformats.org/presentationml/2006/main" xmlns:r="http://schemas.openxmlformats.org/officeDocument/2006/relationships">
   <p:cSld>
     <p:spTree>
       <p:nvGrpSpPr>
@@ -485,7 +692,7 @@
         <p:nvSpPr>
           <p:cNvPr id="2" name="Slide Image Placeholder 1"/>
           <p:cNvSpPr>
-            <a:spLocks noGrp="1" noRot="1" noChangeAspect="1"/>
+            <a:spLocks noGrp="1"/>
           </p:cNvSpPr>
           <p:nvPr>
             <p:ph type="sldImg" idx="2"/>
@@ -500,7 +707,7 @@
             <a:spLocks noGrp="1"/>
           </p:cNvSpPr>
           <p:nvPr>
-            <p:ph type="body" sz="quarter" idx="3"/>
+            <p:ph type="body" idx="3" sz="quarter"/>
           </p:nvPr>
         </p:nvSpPr>
         <p:spPr/>
@@ -509,7 +716,7 @@
           <a:lstStyle/>
           <a:p>
             <a:r>
-              <a:t>Stack: .NET 10 with a Blazor Server UI, Aspire as the orchestrator, SQLite with EF Core, and the Microsoft Agent Framework on Microsoft.Extensions.AI. The LLM provider is a configuration switch, so we can run on Azure OpenAI, OpenAI, Apertus or a local Ollama without code changes. Aspire starts everything and provides the dashboard with traces and logs, and it keeps the API keys in user secrets, never in code. Quality: about 580 automated tests, warnings are errors, central package management. Documentation is part of the work: requirements, architecture with diagrams, ADRs for the key decisions and a README per feature. We built the project with Claude Code: a CLAUDE.md with the rules, skills for the stack, review and test agents, and hooks that protect secrets and format code.</a:t>
+              <a:t>Design rule: every output field has exactly one owner. Code owns everything it can decide reliably: team from the service (100 % deterministic in the data), priority from the matrix, assignee by workload. The LLM owns only what needs reading the text: work type, service, urgency, impact and the resolution draft. Because the history is noise for priority, urgency, impact, status and assignee, the LLM judges from the ticket text and never copies values from similar tickets. The assignee is spread evenly: the person with the fewest tickets so far, since no rule beats chance. Screenshots of the review page and the ticket list / upload page go into the two placeholders on the right.</a:t>
             </a:r>
           </a:p>
         </p:txBody>
@@ -521,7 +728,77 @@
             <a:spLocks noGrp="1"/>
           </p:cNvSpPr>
           <p:nvPr>
-            <p:ph type="sldNum" sz="quarter" idx="5"/>
+            <p:ph type="sldNum" idx="5" sz="quarter"/>
+          </p:nvPr>
+        </p:nvSpPr>
+        <p:spPr/>
+      </p:sp>
+    </p:spTree>
+  </p:cSld>
+  <p:clrMapOvr>
+    <a:masterClrMapping/>
+  </p:clrMapOvr>
+</p:notes>
+</file>
+
+<file path=ppt/notesSlides/notesSlide5.xml><?xml version="1.0" encoding="utf-8"?>
+<p:notes xmlns:a="http://schemas.openxmlformats.org/drawingml/2006/main" xmlns:p="http://schemas.openxmlformats.org/presentationml/2006/main" xmlns:r="http://schemas.openxmlformats.org/officeDocument/2006/relationships">
+  <p:cSld>
+    <p:spTree>
+      <p:nvGrpSpPr>
+        <p:cNvPr id="1" name=""/>
+        <p:cNvGrpSpPr/>
+        <p:nvPr/>
+      </p:nvGrpSpPr>
+      <p:grpSpPr>
+        <a:xfrm>
+          <a:off x="0" y="0"/>
+          <a:ext cx="0" cy="0"/>
+          <a:chOff x="0" y="0"/>
+          <a:chExt cx="0" cy="0"/>
+        </a:xfrm>
+      </p:grpSpPr>
+      <p:sp>
+        <p:nvSpPr>
+          <p:cNvPr id="2" name="Slide Image Placeholder 1"/>
+          <p:cNvSpPr>
+            <a:spLocks noGrp="1"/>
+          </p:cNvSpPr>
+          <p:nvPr>
+            <p:ph type="sldImg" idx="2"/>
+          </p:nvPr>
+        </p:nvSpPr>
+        <p:spPr/>
+      </p:sp>
+      <p:sp>
+        <p:nvSpPr>
+          <p:cNvPr id="3" name="Notes Placeholder 2"/>
+          <p:cNvSpPr>
+            <a:spLocks noGrp="1"/>
+          </p:cNvSpPr>
+          <p:nvPr>
+            <p:ph type="body" idx="3" sz="quarter"/>
+          </p:nvPr>
+        </p:nvSpPr>
+        <p:spPr/>
+        <p:txBody>
+          <a:bodyPr/>
+          <a:lstStyle/>
+          <a:p>
+            <a:r>
+              <a:t>Stack: .NET 10 with a Blazor Server UI, Aspire as the orchestrator, SQLite with EF Core, and the Microsoft Agent Framework on Microsoft.Extensions.AI. The LLM provider is a configuration switch, so we can run on Azure OpenAI, OpenAI, Apertus or a local Ollama without code changes. Aspire starts everything and provides the dashboard with traces and logs, and it keeps the API keys in user secrets, never in code. Quality: about 580 automated tests, warnings are errors, central package management. Documentation is part of the work: requirements, architecture with diagrams, ADRs for the key decisions and a README per feature. We built the project with Claude Code: a CLAUDE.md with the rules, skills for the stack, review and test agents, and hooks that protect secrets and format code.</a:t>
+            </a:r>
+          </a:p>
+        </p:txBody>
+      </p:sp>
+      <p:sp>
+        <p:nvSpPr>
+          <p:cNvPr id="4" name="Slide Number Placeholder 3"/>
+          <p:cNvSpPr>
+            <a:spLocks noGrp="1"/>
+          </p:cNvSpPr>
+          <p:nvPr>
+            <p:ph type="sldNum" idx="5" sz="quarter"/>
           </p:nvPr>
         </p:nvSpPr>
         <p:spPr/>
@@ -572,9 +849,10 @@
           <a:lstStyle/>
           <a:p>
             <a:r>
-              <a:rPr lang="en-US"/>
+              <a:rPr lang="en-US" smtClean="0"/>
               <a:t>Click to edit Master title style</a:t>
             </a:r>
+            <a:endParaRPr lang="en-US"/>
           </a:p>
         </p:txBody>
       </p:sp>
@@ -690,9 +968,10 @@
           </a:lstStyle>
           <a:p>
             <a:r>
-              <a:rPr lang="en-US"/>
+              <a:rPr lang="en-US" smtClean="0"/>
               <a:t>Click to edit Master subtitle style</a:t>
             </a:r>
+            <a:endParaRPr lang="en-US"/>
           </a:p>
         </p:txBody>
       </p:sp>
@@ -713,7 +992,7 @@
           <a:p>
             <a:fld id="{5BCAD085-E8A6-8845-BD4E-CB4CCA059FC4}" type="datetimeFigureOut">
               <a:rPr lang="en-US" smtClean="0"/>
-              <a:t>9/25/2026</a:t>
+              <a:t>1/27/13</a:t>
             </a:fld>
             <a:endParaRPr lang="en-US"/>
           </a:p>
@@ -755,7 +1034,7 @@
           <a:p>
             <a:fld id="{C1FF6DA9-008F-8B48-92A6-B652298478BF}" type="slidenum">
               <a:rPr lang="en-US" smtClean="0"/>
-              <a:t>‹Nr.›</a:t>
+              <a:t>‹#›</a:t>
             </a:fld>
             <a:endParaRPr lang="en-US"/>
           </a:p>
@@ -807,9 +1086,10 @@
           <a:lstStyle/>
           <a:p>
             <a:r>
-              <a:rPr lang="en-US"/>
+              <a:rPr lang="en-US" smtClean="0"/>
               <a:t>Click to edit Master title style</a:t>
             </a:r>
+            <a:endParaRPr lang="en-US"/>
           </a:p>
         </p:txBody>
       </p:sp>
@@ -830,37 +1110,38 @@
           <a:p>
             <a:pPr lvl="0"/>
             <a:r>
-              <a:rPr lang="en-US"/>
+              <a:rPr lang="en-US" smtClean="0"/>
               <a:t>Click to edit Master text styles</a:t>
             </a:r>
           </a:p>
           <a:p>
             <a:pPr lvl="1"/>
             <a:r>
-              <a:rPr lang="en-US"/>
+              <a:rPr lang="en-US" smtClean="0"/>
               <a:t>Second level</a:t>
             </a:r>
           </a:p>
           <a:p>
             <a:pPr lvl="2"/>
             <a:r>
-              <a:rPr lang="en-US"/>
+              <a:rPr lang="en-US" smtClean="0"/>
               <a:t>Third level</a:t>
             </a:r>
           </a:p>
           <a:p>
             <a:pPr lvl="3"/>
             <a:r>
-              <a:rPr lang="en-US"/>
+              <a:rPr lang="en-US" smtClean="0"/>
               <a:t>Fourth level</a:t>
             </a:r>
           </a:p>
           <a:p>
             <a:pPr lvl="4"/>
             <a:r>
-              <a:rPr lang="en-US"/>
+              <a:rPr lang="en-US" smtClean="0"/>
               <a:t>Fifth level</a:t>
             </a:r>
+            <a:endParaRPr lang="en-US"/>
           </a:p>
         </p:txBody>
       </p:sp>
@@ -881,7 +1162,7 @@
           <a:p>
             <a:fld id="{5BCAD085-E8A6-8845-BD4E-CB4CCA059FC4}" type="datetimeFigureOut">
               <a:rPr lang="en-US" smtClean="0"/>
-              <a:t>9/25/2026</a:t>
+              <a:t>1/27/13</a:t>
             </a:fld>
             <a:endParaRPr lang="en-US"/>
           </a:p>
@@ -923,7 +1204,7 @@
           <a:p>
             <a:fld id="{C1FF6DA9-008F-8B48-92A6-B652298478BF}" type="slidenum">
               <a:rPr lang="en-US" smtClean="0"/>
-              <a:t>‹Nr.›</a:t>
+              <a:t>‹#›</a:t>
             </a:fld>
             <a:endParaRPr lang="en-US"/>
           </a:p>
@@ -980,9 +1261,10 @@
           <a:lstStyle/>
           <a:p>
             <a:r>
-              <a:rPr lang="en-US"/>
+              <a:rPr lang="en-US" smtClean="0"/>
               <a:t>Click to edit Master title style</a:t>
             </a:r>
+            <a:endParaRPr lang="en-US"/>
           </a:p>
         </p:txBody>
       </p:sp>
@@ -1008,37 +1290,38 @@
           <a:p>
             <a:pPr lvl="0"/>
             <a:r>
-              <a:rPr lang="en-US"/>
+              <a:rPr lang="en-US" smtClean="0"/>
               <a:t>Click to edit Master text styles</a:t>
             </a:r>
           </a:p>
           <a:p>
             <a:pPr lvl="1"/>
             <a:r>
-              <a:rPr lang="en-US"/>
+              <a:rPr lang="en-US" smtClean="0"/>
               <a:t>Second level</a:t>
             </a:r>
           </a:p>
           <a:p>
             <a:pPr lvl="2"/>
             <a:r>
-              <a:rPr lang="en-US"/>
+              <a:rPr lang="en-US" smtClean="0"/>
               <a:t>Third level</a:t>
             </a:r>
           </a:p>
           <a:p>
             <a:pPr lvl="3"/>
             <a:r>
-              <a:rPr lang="en-US"/>
+              <a:rPr lang="en-US" smtClean="0"/>
               <a:t>Fourth level</a:t>
             </a:r>
           </a:p>
           <a:p>
             <a:pPr lvl="4"/>
             <a:r>
-              <a:rPr lang="en-US"/>
+              <a:rPr lang="en-US" smtClean="0"/>
               <a:t>Fifth level</a:t>
             </a:r>
+            <a:endParaRPr lang="en-US"/>
           </a:p>
         </p:txBody>
       </p:sp>
@@ -1059,7 +1342,7 @@
           <a:p>
             <a:fld id="{5BCAD085-E8A6-8845-BD4E-CB4CCA059FC4}" type="datetimeFigureOut">
               <a:rPr lang="en-US" smtClean="0"/>
-              <a:t>9/25/2026</a:t>
+              <a:t>1/27/13</a:t>
             </a:fld>
             <a:endParaRPr lang="en-US"/>
           </a:p>
@@ -1101,7 +1384,7 @@
           <a:p>
             <a:fld id="{C1FF6DA9-008F-8B48-92A6-B652298478BF}" type="slidenum">
               <a:rPr lang="en-US" smtClean="0"/>
-              <a:t>‹Nr.›</a:t>
+              <a:t>‹#›</a:t>
             </a:fld>
             <a:endParaRPr lang="en-US"/>
           </a:p>
@@ -1153,9 +1436,10 @@
           <a:lstStyle/>
           <a:p>
             <a:r>
-              <a:rPr lang="en-US"/>
+              <a:rPr lang="en-US" smtClean="0"/>
               <a:t>Click to edit Master title style</a:t>
             </a:r>
+            <a:endParaRPr lang="en-US"/>
           </a:p>
         </p:txBody>
       </p:sp>
@@ -1176,37 +1460,38 @@
           <a:p>
             <a:pPr lvl="0"/>
             <a:r>
-              <a:rPr lang="en-US"/>
+              <a:rPr lang="en-US" smtClean="0"/>
               <a:t>Click to edit Master text styles</a:t>
             </a:r>
           </a:p>
           <a:p>
             <a:pPr lvl="1"/>
             <a:r>
-              <a:rPr lang="en-US"/>
+              <a:rPr lang="en-US" smtClean="0"/>
               <a:t>Second level</a:t>
             </a:r>
           </a:p>
           <a:p>
             <a:pPr lvl="2"/>
             <a:r>
-              <a:rPr lang="en-US"/>
+              <a:rPr lang="en-US" smtClean="0"/>
               <a:t>Third level</a:t>
             </a:r>
           </a:p>
           <a:p>
             <a:pPr lvl="3"/>
             <a:r>
-              <a:rPr lang="en-US"/>
+              <a:rPr lang="en-US" smtClean="0"/>
               <a:t>Fourth level</a:t>
             </a:r>
           </a:p>
           <a:p>
             <a:pPr lvl="4"/>
             <a:r>
-              <a:rPr lang="en-US"/>
+              <a:rPr lang="en-US" smtClean="0"/>
               <a:t>Fifth level</a:t>
             </a:r>
+            <a:endParaRPr lang="en-US"/>
           </a:p>
         </p:txBody>
       </p:sp>
@@ -1227,7 +1512,7 @@
           <a:p>
             <a:fld id="{5BCAD085-E8A6-8845-BD4E-CB4CCA059FC4}" type="datetimeFigureOut">
               <a:rPr lang="en-US" smtClean="0"/>
-              <a:t>9/25/2026</a:t>
+              <a:t>1/27/13</a:t>
             </a:fld>
             <a:endParaRPr lang="en-US"/>
           </a:p>
@@ -1269,7 +1554,7 @@
           <a:p>
             <a:fld id="{C1FF6DA9-008F-8B48-92A6-B652298478BF}" type="slidenum">
               <a:rPr lang="en-US" smtClean="0"/>
-              <a:t>‹Nr.›</a:t>
+              <a:t>‹#›</a:t>
             </a:fld>
             <a:endParaRPr lang="en-US"/>
           </a:p>
@@ -1330,9 +1615,10 @@
           </a:lstStyle>
           <a:p>
             <a:r>
-              <a:rPr lang="en-US"/>
+              <a:rPr lang="en-US" smtClean="0"/>
               <a:t>Click to edit Master title style</a:t>
             </a:r>
+            <a:endParaRPr lang="en-US"/>
           </a:p>
         </p:txBody>
       </p:sp>
@@ -1449,7 +1735,7 @@
           <a:p>
             <a:pPr lvl="0"/>
             <a:r>
-              <a:rPr lang="en-US"/>
+              <a:rPr lang="en-US" smtClean="0"/>
               <a:t>Click to edit Master text styles</a:t>
             </a:r>
           </a:p>
@@ -1472,7 +1758,7 @@
           <a:p>
             <a:fld id="{5BCAD085-E8A6-8845-BD4E-CB4CCA059FC4}" type="datetimeFigureOut">
               <a:rPr lang="en-US" smtClean="0"/>
-              <a:t>9/25/2026</a:t>
+              <a:t>1/27/13</a:t>
             </a:fld>
             <a:endParaRPr lang="en-US"/>
           </a:p>
@@ -1514,7 +1800,7 @@
           <a:p>
             <a:fld id="{C1FF6DA9-008F-8B48-92A6-B652298478BF}" type="slidenum">
               <a:rPr lang="en-US" smtClean="0"/>
-              <a:t>‹Nr.›</a:t>
+              <a:t>‹#›</a:t>
             </a:fld>
             <a:endParaRPr lang="en-US"/>
           </a:p>
@@ -1566,9 +1852,10 @@
           <a:lstStyle/>
           <a:p>
             <a:r>
-              <a:rPr lang="en-US"/>
+              <a:rPr lang="en-US" smtClean="0"/>
               <a:t>Click to edit Master title style</a:t>
             </a:r>
+            <a:endParaRPr lang="en-US"/>
           </a:p>
         </p:txBody>
       </p:sp>
@@ -1622,37 +1909,38 @@
           <a:p>
             <a:pPr lvl="0"/>
             <a:r>
-              <a:rPr lang="en-US"/>
+              <a:rPr lang="en-US" smtClean="0"/>
               <a:t>Click to edit Master text styles</a:t>
             </a:r>
           </a:p>
           <a:p>
             <a:pPr lvl="1"/>
             <a:r>
-              <a:rPr lang="en-US"/>
+              <a:rPr lang="en-US" smtClean="0"/>
               <a:t>Second level</a:t>
             </a:r>
           </a:p>
           <a:p>
             <a:pPr lvl="2"/>
             <a:r>
-              <a:rPr lang="en-US"/>
+              <a:rPr lang="en-US" smtClean="0"/>
               <a:t>Third level</a:t>
             </a:r>
           </a:p>
           <a:p>
             <a:pPr lvl="3"/>
             <a:r>
-              <a:rPr lang="en-US"/>
+              <a:rPr lang="en-US" smtClean="0"/>
               <a:t>Fourth level</a:t>
             </a:r>
           </a:p>
           <a:p>
             <a:pPr lvl="4"/>
             <a:r>
-              <a:rPr lang="en-US"/>
+              <a:rPr lang="en-US" smtClean="0"/>
               <a:t>Fifth level</a:t>
             </a:r>
+            <a:endParaRPr lang="en-US"/>
           </a:p>
         </p:txBody>
       </p:sp>
@@ -1706,37 +1994,38 @@
           <a:p>
             <a:pPr lvl="0"/>
             <a:r>
-              <a:rPr lang="en-US"/>
+              <a:rPr lang="en-US" smtClean="0"/>
               <a:t>Click to edit Master text styles</a:t>
             </a:r>
           </a:p>
           <a:p>
             <a:pPr lvl="1"/>
             <a:r>
-              <a:rPr lang="en-US"/>
+              <a:rPr lang="en-US" smtClean="0"/>
               <a:t>Second level</a:t>
             </a:r>
           </a:p>
           <a:p>
             <a:pPr lvl="2"/>
             <a:r>
-              <a:rPr lang="en-US"/>
+              <a:rPr lang="en-US" smtClean="0"/>
               <a:t>Third level</a:t>
             </a:r>
           </a:p>
           <a:p>
             <a:pPr lvl="3"/>
             <a:r>
-              <a:rPr lang="en-US"/>
+              <a:rPr lang="en-US" smtClean="0"/>
               <a:t>Fourth level</a:t>
             </a:r>
           </a:p>
           <a:p>
             <a:pPr lvl="4"/>
             <a:r>
-              <a:rPr lang="en-US"/>
+              <a:rPr lang="en-US" smtClean="0"/>
               <a:t>Fifth level</a:t>
             </a:r>
+            <a:endParaRPr lang="en-US"/>
           </a:p>
         </p:txBody>
       </p:sp>
@@ -1757,7 +2046,7 @@
           <a:p>
             <a:fld id="{5BCAD085-E8A6-8845-BD4E-CB4CCA059FC4}" type="datetimeFigureOut">
               <a:rPr lang="en-US" smtClean="0"/>
-              <a:t>9/25/2026</a:t>
+              <a:t>1/27/13</a:t>
             </a:fld>
             <a:endParaRPr lang="en-US"/>
           </a:p>
@@ -1799,7 +2088,7 @@
           <a:p>
             <a:fld id="{C1FF6DA9-008F-8B48-92A6-B652298478BF}" type="slidenum">
               <a:rPr lang="en-US" smtClean="0"/>
-              <a:t>‹Nr.›</a:t>
+              <a:t>‹#›</a:t>
             </a:fld>
             <a:endParaRPr lang="en-US"/>
           </a:p>
@@ -1855,9 +2144,10 @@
           </a:lstStyle>
           <a:p>
             <a:r>
-              <a:rPr lang="en-US"/>
+              <a:rPr lang="en-US" smtClean="0"/>
               <a:t>Click to edit Master title style</a:t>
             </a:r>
+            <a:endParaRPr lang="en-US"/>
           </a:p>
         </p:txBody>
       </p:sp>
@@ -1920,7 +2210,7 @@
           <a:p>
             <a:pPr lvl="0"/>
             <a:r>
-              <a:rPr lang="en-US"/>
+              <a:rPr lang="en-US" smtClean="0"/>
               <a:t>Click to edit Master text styles</a:t>
             </a:r>
           </a:p>
@@ -1976,37 +2266,38 @@
           <a:p>
             <a:pPr lvl="0"/>
             <a:r>
-              <a:rPr lang="en-US"/>
+              <a:rPr lang="en-US" smtClean="0"/>
               <a:t>Click to edit Master text styles</a:t>
             </a:r>
           </a:p>
           <a:p>
             <a:pPr lvl="1"/>
             <a:r>
-              <a:rPr lang="en-US"/>
+              <a:rPr lang="en-US" smtClean="0"/>
               <a:t>Second level</a:t>
             </a:r>
           </a:p>
           <a:p>
             <a:pPr lvl="2"/>
             <a:r>
-              <a:rPr lang="en-US"/>
+              <a:rPr lang="en-US" smtClean="0"/>
               <a:t>Third level</a:t>
             </a:r>
           </a:p>
           <a:p>
             <a:pPr lvl="3"/>
             <a:r>
-              <a:rPr lang="en-US"/>
+              <a:rPr lang="en-US" smtClean="0"/>
               <a:t>Fourth level</a:t>
             </a:r>
           </a:p>
           <a:p>
             <a:pPr lvl="4"/>
             <a:r>
-              <a:rPr lang="en-US"/>
+              <a:rPr lang="en-US" smtClean="0"/>
               <a:t>Fifth level</a:t>
             </a:r>
+            <a:endParaRPr lang="en-US"/>
           </a:p>
         </p:txBody>
       </p:sp>
@@ -2069,7 +2360,7 @@
           <a:p>
             <a:pPr lvl="0"/>
             <a:r>
-              <a:rPr lang="en-US"/>
+              <a:rPr lang="en-US" smtClean="0"/>
               <a:t>Click to edit Master text styles</a:t>
             </a:r>
           </a:p>
@@ -2125,37 +2416,38 @@
           <a:p>
             <a:pPr lvl="0"/>
             <a:r>
-              <a:rPr lang="en-US"/>
+              <a:rPr lang="en-US" smtClean="0"/>
               <a:t>Click to edit Master text styles</a:t>
             </a:r>
           </a:p>
           <a:p>
             <a:pPr lvl="1"/>
             <a:r>
-              <a:rPr lang="en-US"/>
+              <a:rPr lang="en-US" smtClean="0"/>
               <a:t>Second level</a:t>
             </a:r>
           </a:p>
           <a:p>
             <a:pPr lvl="2"/>
             <a:r>
-              <a:rPr lang="en-US"/>
+              <a:rPr lang="en-US" smtClean="0"/>
               <a:t>Third level</a:t>
             </a:r>
           </a:p>
           <a:p>
             <a:pPr lvl="3"/>
             <a:r>
-              <a:rPr lang="en-US"/>
+              <a:rPr lang="en-US" smtClean="0"/>
               <a:t>Fourth level</a:t>
             </a:r>
           </a:p>
           <a:p>
             <a:pPr lvl="4"/>
             <a:r>
-              <a:rPr lang="en-US"/>
+              <a:rPr lang="en-US" smtClean="0"/>
               <a:t>Fifth level</a:t>
             </a:r>
+            <a:endParaRPr lang="en-US"/>
           </a:p>
         </p:txBody>
       </p:sp>
@@ -2176,7 +2468,7 @@
           <a:p>
             <a:fld id="{5BCAD085-E8A6-8845-BD4E-CB4CCA059FC4}" type="datetimeFigureOut">
               <a:rPr lang="en-US" smtClean="0"/>
-              <a:t>9/25/2026</a:t>
+              <a:t>1/27/13</a:t>
             </a:fld>
             <a:endParaRPr lang="en-US"/>
           </a:p>
@@ -2218,7 +2510,7 @@
           <a:p>
             <a:fld id="{C1FF6DA9-008F-8B48-92A6-B652298478BF}" type="slidenum">
               <a:rPr lang="en-US" smtClean="0"/>
-              <a:t>‹Nr.›</a:t>
+              <a:t>‹#›</a:t>
             </a:fld>
             <a:endParaRPr lang="en-US"/>
           </a:p>
@@ -2270,9 +2562,10 @@
           <a:lstStyle/>
           <a:p>
             <a:r>
-              <a:rPr lang="en-US"/>
+              <a:rPr lang="en-US" smtClean="0"/>
               <a:t>Click to edit Master title style</a:t>
             </a:r>
+            <a:endParaRPr lang="en-US"/>
           </a:p>
         </p:txBody>
       </p:sp>
@@ -2293,7 +2586,7 @@
           <a:p>
             <a:fld id="{5BCAD085-E8A6-8845-BD4E-CB4CCA059FC4}" type="datetimeFigureOut">
               <a:rPr lang="en-US" smtClean="0"/>
-              <a:t>9/25/2026</a:t>
+              <a:t>1/27/13</a:t>
             </a:fld>
             <a:endParaRPr lang="en-US"/>
           </a:p>
@@ -2335,7 +2628,7 @@
           <a:p>
             <a:fld id="{C1FF6DA9-008F-8B48-92A6-B652298478BF}" type="slidenum">
               <a:rPr lang="en-US" smtClean="0"/>
-              <a:t>‹Nr.›</a:t>
+              <a:t>‹#›</a:t>
             </a:fld>
             <a:endParaRPr lang="en-US"/>
           </a:p>
@@ -2388,7 +2681,7 @@
           <a:p>
             <a:fld id="{5BCAD085-E8A6-8845-BD4E-CB4CCA059FC4}" type="datetimeFigureOut">
               <a:rPr lang="en-US" smtClean="0"/>
-              <a:t>9/25/2026</a:t>
+              <a:t>1/27/13</a:t>
             </a:fld>
             <a:endParaRPr lang="en-US"/>
           </a:p>
@@ -2430,7 +2723,7 @@
           <a:p>
             <a:fld id="{C1FF6DA9-008F-8B48-92A6-B652298478BF}" type="slidenum">
               <a:rPr lang="en-US" smtClean="0"/>
-              <a:t>‹Nr.›</a:t>
+              <a:t>‹#›</a:t>
             </a:fld>
             <a:endParaRPr lang="en-US"/>
           </a:p>
@@ -2491,9 +2784,10 @@
           </a:lstStyle>
           <a:p>
             <a:r>
-              <a:rPr lang="en-US"/>
+              <a:rPr lang="en-US" smtClean="0"/>
               <a:t>Click to edit Master title style</a:t>
             </a:r>
+            <a:endParaRPr lang="en-US"/>
           </a:p>
         </p:txBody>
       </p:sp>
@@ -2547,37 +2841,38 @@
           <a:p>
             <a:pPr lvl="0"/>
             <a:r>
-              <a:rPr lang="en-US"/>
+              <a:rPr lang="en-US" smtClean="0"/>
               <a:t>Click to edit Master text styles</a:t>
             </a:r>
           </a:p>
           <a:p>
             <a:pPr lvl="1"/>
             <a:r>
-              <a:rPr lang="en-US"/>
+              <a:rPr lang="en-US" smtClean="0"/>
               <a:t>Second level</a:t>
             </a:r>
           </a:p>
           <a:p>
             <a:pPr lvl="2"/>
             <a:r>
-              <a:rPr lang="en-US"/>
+              <a:rPr lang="en-US" smtClean="0"/>
               <a:t>Third level</a:t>
             </a:r>
           </a:p>
           <a:p>
             <a:pPr lvl="3"/>
             <a:r>
-              <a:rPr lang="en-US"/>
+              <a:rPr lang="en-US" smtClean="0"/>
               <a:t>Fourth level</a:t>
             </a:r>
           </a:p>
           <a:p>
             <a:pPr lvl="4"/>
             <a:r>
-              <a:rPr lang="en-US"/>
+              <a:rPr lang="en-US" smtClean="0"/>
               <a:t>Fifth level</a:t>
             </a:r>
+            <a:endParaRPr lang="en-US"/>
           </a:p>
         </p:txBody>
       </p:sp>
@@ -2640,7 +2935,7 @@
           <a:p>
             <a:pPr lvl="0"/>
             <a:r>
-              <a:rPr lang="en-US"/>
+              <a:rPr lang="en-US" smtClean="0"/>
               <a:t>Click to edit Master text styles</a:t>
             </a:r>
           </a:p>
@@ -2663,7 +2958,7 @@
           <a:p>
             <a:fld id="{5BCAD085-E8A6-8845-BD4E-CB4CCA059FC4}" type="datetimeFigureOut">
               <a:rPr lang="en-US" smtClean="0"/>
-              <a:t>9/25/2026</a:t>
+              <a:t>1/27/13</a:t>
             </a:fld>
             <a:endParaRPr lang="en-US"/>
           </a:p>
@@ -2705,7 +3000,7 @@
           <a:p>
             <a:fld id="{C1FF6DA9-008F-8B48-92A6-B652298478BF}" type="slidenum">
               <a:rPr lang="en-US" smtClean="0"/>
-              <a:t>‹Nr.›</a:t>
+              <a:t>‹#›</a:t>
             </a:fld>
             <a:endParaRPr lang="en-US"/>
           </a:p>
@@ -2766,9 +3061,10 @@
           </a:lstStyle>
           <a:p>
             <a:r>
-              <a:rPr lang="en-US"/>
+              <a:rPr lang="en-US" smtClean="0"/>
               <a:t>Click to edit Master title style</a:t>
             </a:r>
+            <a:endParaRPr lang="en-US"/>
           </a:p>
         </p:txBody>
       </p:sp>
@@ -2892,7 +3188,7 @@
           <a:p>
             <a:pPr lvl="0"/>
             <a:r>
-              <a:rPr lang="en-US"/>
+              <a:rPr lang="en-US" smtClean="0"/>
               <a:t>Click to edit Master text styles</a:t>
             </a:r>
           </a:p>
@@ -2915,7 +3211,7 @@
           <a:p>
             <a:fld id="{5BCAD085-E8A6-8845-BD4E-CB4CCA059FC4}" type="datetimeFigureOut">
               <a:rPr lang="en-US" smtClean="0"/>
-              <a:t>9/25/2026</a:t>
+              <a:t>1/27/13</a:t>
             </a:fld>
             <a:endParaRPr lang="en-US"/>
           </a:p>
@@ -2957,7 +3253,7 @@
           <a:p>
             <a:fld id="{C1FF6DA9-008F-8B48-92A6-B652298478BF}" type="slidenum">
               <a:rPr lang="en-US" smtClean="0"/>
-              <a:t>‹Nr.›</a:t>
+              <a:t>‹#›</a:t>
             </a:fld>
             <a:endParaRPr lang="en-US"/>
           </a:p>
@@ -3024,9 +3320,10 @@
           <a:lstStyle/>
           <a:p>
             <a:r>
-              <a:rPr lang="en-US"/>
+              <a:rPr lang="en-US" smtClean="0"/>
               <a:t>Click to edit Master title style</a:t>
             </a:r>
+            <a:endParaRPr lang="en-US"/>
           </a:p>
         </p:txBody>
       </p:sp>
@@ -3057,37 +3354,38 @@
           <a:p>
             <a:pPr lvl="0"/>
             <a:r>
-              <a:rPr lang="en-US"/>
+              <a:rPr lang="en-US" smtClean="0"/>
               <a:t>Click to edit Master text styles</a:t>
             </a:r>
           </a:p>
           <a:p>
             <a:pPr lvl="1"/>
             <a:r>
-              <a:rPr lang="en-US"/>
+              <a:rPr lang="en-US" smtClean="0"/>
               <a:t>Second level</a:t>
             </a:r>
           </a:p>
           <a:p>
             <a:pPr lvl="2"/>
             <a:r>
-              <a:rPr lang="en-US"/>
+              <a:rPr lang="en-US" smtClean="0"/>
               <a:t>Third level</a:t>
             </a:r>
           </a:p>
           <a:p>
             <a:pPr lvl="3"/>
             <a:r>
-              <a:rPr lang="en-US"/>
+              <a:rPr lang="en-US" smtClean="0"/>
               <a:t>Fourth level</a:t>
             </a:r>
           </a:p>
           <a:p>
             <a:pPr lvl="4"/>
             <a:r>
-              <a:rPr lang="en-US"/>
+              <a:rPr lang="en-US" smtClean="0"/>
               <a:t>Fifth level</a:t>
             </a:r>
+            <a:endParaRPr lang="en-US"/>
           </a:p>
         </p:txBody>
       </p:sp>
@@ -3126,7 +3424,7 @@
           <a:p>
             <a:fld id="{5BCAD085-E8A6-8845-BD4E-CB4CCA059FC4}" type="datetimeFigureOut">
               <a:rPr lang="en-US" smtClean="0"/>
-              <a:t>9/25/2026</a:t>
+              <a:t>1/27/13</a:t>
             </a:fld>
             <a:endParaRPr lang="en-US"/>
           </a:p>
@@ -3204,7 +3502,7 @@
           <a:p>
             <a:fld id="{C1FF6DA9-008F-8B48-92A6-B652298478BF}" type="slidenum">
               <a:rPr lang="en-US" smtClean="0"/>
-              <a:t>‹Nr.›</a:t>
+              <a:t>‹#›</a:t>
             </a:fld>
             <a:endParaRPr lang="en-US"/>
           </a:p>
@@ -3485,7 +3783,7 @@
 </file>
 
 <file path=ppt/slides/slide1.xml><?xml version="1.0" encoding="utf-8"?>
-<p:sld xmlns:a="http://schemas.openxmlformats.org/drawingml/2006/main" xmlns:r="http://schemas.openxmlformats.org/officeDocument/2006/relationships" xmlns:p="http://schemas.openxmlformats.org/presentationml/2006/main">
+<p:sld xmlns:a="http://schemas.openxmlformats.org/drawingml/2006/main" xmlns:p="http://schemas.openxmlformats.org/presentationml/2006/main" xmlns:r="http://schemas.openxmlformats.org/officeDocument/2006/relationships">
   <p:cSld>
     <p:spTree>
       <p:nvGrpSpPr>
@@ -3493,14 +3791,7 @@
         <p:cNvGrpSpPr/>
         <p:nvPr/>
       </p:nvGrpSpPr>
-      <p:grpSpPr>
-        <a:xfrm>
-          <a:off x="0" y="0"/>
-          <a:ext cx="0" cy="0"/>
-          <a:chOff x="0" y="0"/>
-          <a:chExt cx="0" cy="0"/>
-        </a:xfrm>
-      </p:grpSpPr>
+      <p:grpSpPr/>
       <p:sp>
         <p:nvSpPr>
           <p:cNvPr id="2" name="Oval 1"/>
@@ -3516,7 +3807,7 @@
             <a:avLst/>
           </a:prstGeom>
           <a:solidFill>
-            <a:srgbClr val="E4572E"/>
+            <a:srgbClr val="1B2A49"/>
           </a:solidFill>
           <a:ln>
             <a:noFill/>
@@ -3538,7 +3829,7 @@
           </a:fontRef>
         </p:style>
         <p:txBody>
-          <a:bodyPr lIns="0" tIns="0" rIns="0" bIns="0" rtlCol="0" anchor="ctr"/>
+          <a:bodyPr rtlCol="0" anchor="ctr" lIns="0" rIns="0" tIns="0" bIns="0"/>
           <a:lstStyle/>
           <a:p>
             <a:pPr algn="ctr"/>
@@ -3571,7 +3862,7 @@
           <a:noFill/>
         </p:spPr>
         <p:txBody>
-          <a:bodyPr wrap="square" lIns="0" tIns="0" rIns="0" bIns="0" anchor="ctr">
+          <a:bodyPr wrap="square" anchor="ctr" lIns="0" rIns="0" tIns="0" bIns="0">
             <a:spAutoFit/>
           </a:bodyPr>
           <a:lstStyle/>
@@ -3584,7 +3875,7 @@
                 </a:solidFill>
                 <a:latin typeface="Cambria"/>
               </a:rPr>
-              <a:t>The data: 20,000 tickets, almost no signal</a:t>
+              <a:t>The order: triage tickets like an experienced L2 agent</a:t>
             </a:r>
           </a:p>
         </p:txBody>
@@ -3606,7 +3897,7 @@
           <a:noFill/>
         </p:spPr>
         <p:txBody>
-          <a:bodyPr wrap="square" lIns="0" tIns="0" rIns="0" bIns="0" anchor="t">
+          <a:bodyPr wrap="square" anchor="t" lIns="0" rIns="0" tIns="0" bIns="0">
             <a:spAutoFit/>
           </a:bodyPr>
           <a:lstStyle/>
@@ -3619,7 +3910,7 @@
                 </a:solidFill>
                 <a:latin typeface="Calibri"/>
               </a:rPr>
-              <a:t>What the training export can and cannot teach a model</a:t>
+              <a:t>Swiss Life challenge at the Swiss {ai} Weeks: an AI support agent for operational service desks</a:t>
             </a:r>
           </a:p>
         </p:txBody>
@@ -3633,7 +3924,7 @@
         <p:spPr>
           <a:xfrm>
             <a:off x="457200" y="1463040"/>
-            <a:ext cx="3611880" cy="1325880"/>
+            <a:ext cx="3611880" cy="2331720"/>
           </a:xfrm>
           <a:prstGeom prst="roundRect">
             <a:avLst>
@@ -3667,7 +3958,6 @@
           <a:lstStyle/>
           <a:p>
             <a:pPr algn="ctr"/>
-            <a:endParaRPr/>
           </a:p>
         </p:txBody>
       </p:sp>
@@ -3680,7 +3970,7 @@
         <p:spPr>
           <a:xfrm>
             <a:off x="685800" y="1572768"/>
-            <a:ext cx="3200400" cy="502920"/>
+            <a:ext cx="3200400" cy="365760"/>
           </a:xfrm>
           <a:prstGeom prst="rect">
             <a:avLst/>
@@ -3688,20 +3978,20 @@
           <a:noFill/>
         </p:spPr>
         <p:txBody>
-          <a:bodyPr wrap="square" lIns="0" tIns="0" rIns="0" bIns="0" anchor="t">
+          <a:bodyPr wrap="square" anchor="t" lIns="0" rIns="0" tIns="0" bIns="0">
             <a:spAutoFit/>
           </a:bodyPr>
           <a:lstStyle/>
           <a:p>
             <a:pPr algn="l"/>
             <a:r>
-              <a:rPr sz="3000" b="1">
-                <a:solidFill>
-                  <a:srgbClr val="E4572E"/>
+              <a:rPr sz="1700" b="1">
+                <a:solidFill>
+                  <a:srgbClr val="1B2A49"/>
                 </a:solidFill>
                 <a:latin typeface="Cambria"/>
               </a:rPr>
-              <a:t>173</a:t>
+              <a:t>The problem</a:t>
             </a:r>
           </a:p>
         </p:txBody>
@@ -3714,8 +4004,8 @@
         </p:nvSpPr>
         <p:spPr>
           <a:xfrm>
-            <a:off x="685800" y="2084832"/>
-            <a:ext cx="3200400" cy="685800"/>
+            <a:off x="685800" y="2011680"/>
+            <a:ext cx="3200400" cy="1737360"/>
           </a:xfrm>
           <a:prstGeom prst="rect">
             <a:avLst/>
@@ -3723,20 +4013,56 @@
           <a:noFill/>
         </p:spPr>
         <p:txBody>
-          <a:bodyPr wrap="square" lIns="0" tIns="0" rIns="0" bIns="0" anchor="t">
+          <a:bodyPr wrap="square" anchor="t" lIns="0" rIns="0" tIns="0" bIns="0">
             <a:spAutoFit/>
           </a:bodyPr>
           <a:lstStyle/>
           <a:p>
-            <a:pPr algn="l"/>
-            <a:r>
-              <a:rPr sz="1250" b="0">
+            <a:pPr algn="l">
+              <a:spcAft>
+                <a:spcPts val="600"/>
+              </a:spcAft>
+            </a:pPr>
+            <a:r>
+              <a:rPr sz="1300" b="0">
                 <a:solidFill>
                   <a:srgbClr val="1F2937"/>
                 </a:solidFill>
                 <a:latin typeface="Calibri"/>
               </a:rPr>
-              <a:t>distinct texts in 20,000 tickets: 11 templates × 20 services. The work type follows from the template.</a:t>
+              <a:t>Manual triage eats time.</a:t>
+            </a:r>
+          </a:p>
+          <a:p>
+            <a:pPr algn="l">
+              <a:spcAft>
+                <a:spcPts val="600"/>
+              </a:spcAft>
+            </a:pPr>
+            <a:r>
+              <a:rPr sz="1300" b="0">
+                <a:solidFill>
+                  <a:srgbClr val="1F2937"/>
+                </a:solidFill>
+                <a:latin typeface="Calibri"/>
+              </a:rPr>
+              <a:t>Answers to similar tickets get rewritten again and again, and the documentation is scattered.</a:t>
+            </a:r>
+          </a:p>
+          <a:p>
+            <a:pPr algn="l">
+              <a:spcAft>
+                <a:spcPts val="600"/>
+              </a:spcAft>
+            </a:pPr>
+            <a:r>
+              <a:rPr sz="1300" b="0">
+                <a:solidFill>
+                  <a:srgbClr val="1F2937"/>
+                </a:solidFill>
+                <a:latin typeface="Calibri"/>
+              </a:rPr>
+              <a:t>Quality and speed depend on the single analyst.</a:t>
             </a:r>
           </a:p>
         </p:txBody>
@@ -3749,8 +4075,8 @@
         </p:nvSpPr>
         <p:spPr>
           <a:xfrm>
-            <a:off x="457200" y="2926080"/>
-            <a:ext cx="3611880" cy="1325880"/>
+            <a:off x="457200" y="3931920"/>
+            <a:ext cx="3611880" cy="2468880"/>
           </a:xfrm>
           <a:prstGeom prst="roundRect">
             <a:avLst>
@@ -3784,7 +4110,6 @@
           <a:lstStyle/>
           <a:p>
             <a:pPr algn="ctr"/>
-            <a:endParaRPr/>
           </a:p>
         </p:txBody>
       </p:sp>
@@ -3796,8 +4121,8 @@
         </p:nvSpPr>
         <p:spPr>
           <a:xfrm>
-            <a:off x="685800" y="3035808"/>
-            <a:ext cx="3200400" cy="502920"/>
+            <a:off x="685800" y="4041648"/>
+            <a:ext cx="3200400" cy="365760"/>
           </a:xfrm>
           <a:prstGeom prst="rect">
             <a:avLst/>
@@ -3805,20 +4130,20 @@
           <a:noFill/>
         </p:spPr>
         <p:txBody>
-          <a:bodyPr wrap="square" lIns="0" tIns="0" rIns="0" bIns="0" anchor="t">
+          <a:bodyPr wrap="square" anchor="t" lIns="0" rIns="0" tIns="0" bIns="0">
             <a:spAutoFit/>
           </a:bodyPr>
           <a:lstStyle/>
           <a:p>
             <a:pPr algn="l"/>
             <a:r>
-              <a:rPr sz="3000" b="1">
-                <a:solidFill>
-                  <a:srgbClr val="E4572E"/>
+              <a:rPr sz="1700" b="1">
+                <a:solidFill>
+                  <a:srgbClr val="1B2A49"/>
                 </a:solidFill>
                 <a:latin typeface="Cambria"/>
               </a:rPr>
-              <a:t>Random</a:t>
+              <a:t>What we get</a:t>
             </a:r>
           </a:p>
         </p:txBody>
@@ -3831,8 +4156,8 @@
         </p:nvSpPr>
         <p:spPr>
           <a:xfrm>
-            <a:off x="685800" y="3547872"/>
-            <a:ext cx="3200400" cy="685800"/>
+            <a:off x="685800" y="4480560"/>
+            <a:ext cx="3200400" cy="457200"/>
           </a:xfrm>
           <a:prstGeom prst="rect">
             <a:avLst/>
@@ -3840,34 +4165,174 @@
           <a:noFill/>
         </p:spPr>
         <p:txBody>
-          <a:bodyPr wrap="square" lIns="0" tIns="0" rIns="0" bIns="0" anchor="t">
+          <a:bodyPr wrap="square" anchor="t" lIns="0" rIns="0" tIns="0" bIns="0">
             <a:spAutoFit/>
           </a:bodyPr>
           <a:lstStyle/>
           <a:p>
             <a:pPr algn="l"/>
             <a:r>
+              <a:rPr sz="2600" b="1">
+                <a:solidFill>
+                  <a:srgbClr val="E4572E"/>
+                </a:solidFill>
+                <a:latin typeface="Cambria"/>
+              </a:rPr>
+              <a:t>20,000</a:t>
+            </a:r>
+          </a:p>
+        </p:txBody>
+      </p:sp>
+      <p:sp>
+        <p:nvSpPr>
+          <p:cNvPr id="11" name="TextBox 10"/>
+          <p:cNvSpPr txBox="1"/>
+          <p:nvPr/>
+        </p:nvSpPr>
+        <p:spPr>
+          <a:xfrm>
+            <a:off x="685800" y="4937760"/>
+            <a:ext cx="3200400" cy="457200"/>
+          </a:xfrm>
+          <a:prstGeom prst="rect">
+            <a:avLst/>
+          </a:prstGeom>
+          <a:noFill/>
+        </p:spPr>
+        <p:txBody>
+          <a:bodyPr wrap="square" anchor="t" lIns="0" rIns="0" tIns="0" bIns="0">
+            <a:spAutoFit/>
+          </a:bodyPr>
+          <a:lstStyle/>
+          <a:p>
+            <a:pPr algn="l"/>
+            <a:r>
               <a:rPr sz="1250" b="0">
                 <a:solidFill>
                   <a:srgbClr val="1F2937"/>
                 </a:solidFill>
                 <a:latin typeface="Calibri"/>
               </a:rPr>
-              <a:t>priority, urgency, impact, resolution status and assignee. Accuracy on unseen tickets equals guessing.</a:t>
-            </a:r>
-          </a:p>
-        </p:txBody>
-      </p:sp>
-      <p:sp>
-        <p:nvSpPr>
-          <p:cNvPr id="11" name="Rounded Rectangle 10"/>
+              <a:t>historical tickets, deliberately noisy</a:t>
+            </a:r>
+          </a:p>
+        </p:txBody>
+      </p:sp>
+      <p:sp>
+        <p:nvSpPr>
+          <p:cNvPr id="12" name="TextBox 11"/>
+          <p:cNvSpPr txBox="1"/>
+          <p:nvPr/>
+        </p:nvSpPr>
+        <p:spPr>
+          <a:xfrm>
+            <a:off x="685800" y="5440680"/>
+            <a:ext cx="3200400" cy="457200"/>
+          </a:xfrm>
+          <a:prstGeom prst="rect">
+            <a:avLst/>
+          </a:prstGeom>
+          <a:noFill/>
+        </p:spPr>
+        <p:txBody>
+          <a:bodyPr wrap="square" anchor="t" lIns="0" rIns="0" tIns="0" bIns="0">
+            <a:spAutoFit/>
+          </a:bodyPr>
+          <a:lstStyle/>
+          <a:p>
+            <a:pPr algn="l"/>
+            <a:r>
+              <a:rPr sz="2600" b="1">
+                <a:solidFill>
+                  <a:srgbClr val="E4572E"/>
+                </a:solidFill>
+                <a:latin typeface="Cambria"/>
+              </a:rPr>
+              <a:t>20</a:t>
+            </a:r>
+          </a:p>
+        </p:txBody>
+      </p:sp>
+      <p:sp>
+        <p:nvSpPr>
+          <p:cNvPr id="13" name="TextBox 12"/>
+          <p:cNvSpPr txBox="1"/>
+          <p:nvPr/>
+        </p:nvSpPr>
+        <p:spPr>
+          <a:xfrm>
+            <a:off x="685800" y="5897880"/>
+            <a:ext cx="3200400" cy="457200"/>
+          </a:xfrm>
+          <a:prstGeom prst="rect">
+            <a:avLst/>
+          </a:prstGeom>
+          <a:noFill/>
+        </p:spPr>
+        <p:txBody>
+          <a:bodyPr wrap="square" anchor="t" lIns="0" rIns="0" tIns="0" bIns="0">
+            <a:spAutoFit/>
+          </a:bodyPr>
+          <a:lstStyle/>
+          <a:p>
+            <a:pPr algn="l"/>
+            <a:r>
+              <a:rPr sz="1250" b="0">
+                <a:solidFill>
+                  <a:srgbClr val="1F2937"/>
+                </a:solidFill>
+                <a:latin typeface="Calibri"/>
+              </a:rPr>
+              <a:t>new tickets, fields partly empty or wrong, scored blind</a:t>
+            </a:r>
+          </a:p>
+        </p:txBody>
+      </p:sp>
+      <p:sp>
+        <p:nvSpPr>
+          <p:cNvPr id="14" name="TextBox 13"/>
+          <p:cNvSpPr txBox="1"/>
+          <p:nvPr/>
+        </p:nvSpPr>
+        <p:spPr>
+          <a:xfrm>
+            <a:off x="4343400" y="1371600"/>
+            <a:ext cx="7315200" cy="274320"/>
+          </a:xfrm>
+          <a:prstGeom prst="rect">
+            <a:avLst/>
+          </a:prstGeom>
+          <a:noFill/>
+        </p:spPr>
+        <p:txBody>
+          <a:bodyPr wrap="square" anchor="t" lIns="0" rIns="0" tIns="0" bIns="0">
+            <a:spAutoFit/>
+          </a:bodyPr>
+          <a:lstStyle/>
+          <a:p>
+            <a:pPr algn="l"/>
+            <a:r>
+              <a:rPr sz="1100" b="1">
+                <a:solidFill>
+                  <a:srgbClr val="6B7280"/>
+                </a:solidFill>
+                <a:latin typeface="Calibri"/>
+              </a:rPr>
+              <a:t>SEVEN FIELDS TO GET RIGHT, PER TICKET</a:t>
+            </a:r>
+          </a:p>
+        </p:txBody>
+      </p:sp>
+      <p:sp>
+        <p:nvSpPr>
+          <p:cNvPr id="15" name="Rounded Rectangle 14"/>
           <p:cNvSpPr/>
           <p:nvPr/>
         </p:nvSpPr>
         <p:spPr>
           <a:xfrm>
-            <a:off x="457200" y="4389120"/>
-            <a:ext cx="3611880" cy="1325880"/>
+            <a:off x="4343400" y="1691640"/>
+            <a:ext cx="3630168" cy="868680"/>
           </a:xfrm>
           <a:prstGeom prst="roundRect">
             <a:avLst>
@@ -3877,8 +4342,10 @@
           <a:solidFill>
             <a:srgbClr val="F3F5F9"/>
           </a:solidFill>
-          <a:ln>
-            <a:noFill/>
+          <a:ln w="12700">
+            <a:solidFill>
+              <a:srgbClr val="D9DEE7"/>
+            </a:solidFill>
           </a:ln>
           <a:effectLst/>
         </p:spPr>
@@ -3901,95 +4368,22 @@
           <a:lstStyle/>
           <a:p>
             <a:pPr algn="ctr"/>
-            <a:endParaRPr/>
-          </a:p>
-        </p:txBody>
-      </p:sp>
-      <p:sp>
-        <p:nvSpPr>
-          <p:cNvPr id="12" name="TextBox 11"/>
-          <p:cNvSpPr txBox="1"/>
-          <p:nvPr/>
-        </p:nvSpPr>
-        <p:spPr>
-          <a:xfrm>
-            <a:off x="685800" y="4498848"/>
-            <a:ext cx="3200400" cy="502920"/>
-          </a:xfrm>
-          <a:prstGeom prst="rect">
-            <a:avLst/>
-          </a:prstGeom>
-          <a:noFill/>
-        </p:spPr>
-        <p:txBody>
-          <a:bodyPr wrap="square" lIns="0" tIns="0" rIns="0" bIns="0" anchor="t">
-            <a:spAutoFit/>
-          </a:bodyPr>
-          <a:lstStyle/>
-          <a:p>
-            <a:pPr algn="l"/>
-            <a:r>
-              <a:rPr sz="3000" b="1">
-                <a:solidFill>
-                  <a:srgbClr val="E4572E"/>
-                </a:solidFill>
-                <a:latin typeface="Cambria"/>
-              </a:rPr>
-              <a:t>3.6 %</a:t>
-            </a:r>
-          </a:p>
-        </p:txBody>
-      </p:sp>
-      <p:sp>
-        <p:nvSpPr>
-          <p:cNvPr id="13" name="TextBox 12"/>
-          <p:cNvSpPr txBox="1"/>
-          <p:nvPr/>
-        </p:nvSpPr>
-        <p:spPr>
-          <a:xfrm>
-            <a:off x="685800" y="5010912"/>
-            <a:ext cx="3200400" cy="685800"/>
-          </a:xfrm>
-          <a:prstGeom prst="rect">
-            <a:avLst/>
-          </a:prstGeom>
-          <a:noFill/>
-        </p:spPr>
-        <p:txBody>
-          <a:bodyPr wrap="square" lIns="0" tIns="0" rIns="0" bIns="0" anchor="t">
-            <a:spAutoFit/>
-          </a:bodyPr>
-          <a:lstStyle/>
-          <a:p>
-            <a:pPr algn="l"/>
-            <a:r>
-              <a:rPr sz="1250" b="0">
-                <a:solidFill>
-                  <a:srgbClr val="1F2937"/>
-                </a:solidFill>
-                <a:latin typeface="Calibri"/>
-              </a:rPr>
-              <a:t>best accuracy for the assignee out of 30 people, over every field and model (chance: 3.3 %).</a:t>
-            </a:r>
-          </a:p>
-        </p:txBody>
-      </p:sp>
-      <p:sp>
-        <p:nvSpPr>
-          <p:cNvPr id="14" name="Rounded Rectangle 13"/>
+          </a:p>
+        </p:txBody>
+      </p:sp>
+      <p:sp>
+        <p:nvSpPr>
+          <p:cNvPr id="16" name="Oval 15"/>
           <p:cNvSpPr/>
           <p:nvPr/>
         </p:nvSpPr>
         <p:spPr>
           <a:xfrm>
-            <a:off x="457200" y="5852160"/>
-            <a:ext cx="3611880" cy="548640"/>
-          </a:xfrm>
-          <a:prstGeom prst="roundRect">
-            <a:avLst>
-              <a:gd name="adj" fmla="val 5000"/>
-            </a:avLst>
+            <a:off x="4480560" y="1929384"/>
+            <a:ext cx="384048" cy="384048"/>
+          </a:xfrm>
+          <a:prstGeom prst="ellipse">
+            <a:avLst/>
           </a:prstGeom>
           <a:solidFill>
             <a:srgbClr val="1B2A49"/>
@@ -4014,24 +4408,32 @@
           </a:fontRef>
         </p:style>
         <p:txBody>
-          <a:bodyPr rtlCol="0" anchor="ctr"/>
+          <a:bodyPr rtlCol="0" anchor="ctr" lIns="0" rIns="0" tIns="0" bIns="0"/>
           <a:lstStyle/>
           <a:p>
             <a:pPr algn="ctr"/>
-            <a:endParaRPr/>
-          </a:p>
-        </p:txBody>
-      </p:sp>
-      <p:sp>
-        <p:nvSpPr>
-          <p:cNvPr id="15" name="TextBox 14"/>
+            <a:r>
+              <a:rPr sz="1400" b="1">
+                <a:solidFill>
+                  <a:srgbClr val="FFFFFF"/>
+                </a:solidFill>
+                <a:latin typeface="Calibri"/>
+              </a:rPr>
+              <a:t>1</a:t>
+            </a:r>
+          </a:p>
+        </p:txBody>
+      </p:sp>
+      <p:sp>
+        <p:nvSpPr>
+          <p:cNvPr id="17" name="TextBox 16"/>
           <p:cNvSpPr txBox="1"/>
           <p:nvPr/>
         </p:nvSpPr>
         <p:spPr>
           <a:xfrm>
-            <a:off x="640080" y="5852160"/>
-            <a:ext cx="3291840" cy="548640"/>
+            <a:off x="5001768" y="1783080"/>
+            <a:ext cx="2852928" cy="292608"/>
           </a:xfrm>
           <a:prstGeom prst="rect">
             <a:avLst/>
@@ -4039,121 +4441,512 @@
           <a:noFill/>
         </p:spPr>
         <p:txBody>
-          <a:bodyPr wrap="square" lIns="0" tIns="0" rIns="0" bIns="0" anchor="ctr">
+          <a:bodyPr wrap="square" anchor="t" lIns="0" rIns="0" tIns="0" bIns="0">
             <a:spAutoFit/>
           </a:bodyPr>
           <a:lstStyle/>
           <a:p>
             <a:pPr algn="l"/>
             <a:r>
-              <a:rPr sz="1250" b="1">
-                <a:solidFill>
-                  <a:srgbClr val="FFFFFF"/>
+              <a:rPr sz="1400" b="1">
+                <a:solidFill>
+                  <a:srgbClr val="1B2A49"/>
+                </a:solidFill>
+                <a:latin typeface="Cambria"/>
+              </a:rPr>
+              <a:t>Work type</a:t>
+            </a:r>
+          </a:p>
+        </p:txBody>
+      </p:sp>
+      <p:sp>
+        <p:nvSpPr>
+          <p:cNvPr id="18" name="TextBox 17"/>
+          <p:cNvSpPr txBox="1"/>
+          <p:nvPr/>
+        </p:nvSpPr>
+        <p:spPr>
+          <a:xfrm>
+            <a:off x="5001768" y="2103120"/>
+            <a:ext cx="2852928" cy="411480"/>
+          </a:xfrm>
+          <a:prstGeom prst="rect">
+            <a:avLst/>
+          </a:prstGeom>
+          <a:noFill/>
+        </p:spPr>
+        <p:txBody>
+          <a:bodyPr wrap="square" anchor="t" lIns="0" rIns="0" tIns="0" bIns="0">
+            <a:spAutoFit/>
+          </a:bodyPr>
+          <a:lstStyle/>
+          <a:p>
+            <a:pPr algn="l"/>
+            <a:r>
+              <a:rPr sz="1150" b="0">
+                <a:solidFill>
+                  <a:srgbClr val="1F2937"/>
                 </a:solidFill>
                 <a:latin typeface="Calibri"/>
               </a:rPr>
-              <a:t>So the history is only good for retrieval and service → team.</a:t>
-            </a:r>
-          </a:p>
-        </p:txBody>
-      </p:sp>
-      <p:pic>
-        <p:nvPicPr>
-          <p:cNvPr id="16" name="Picture 15" descr="02_signal_vs_noise.png"/>
-          <p:cNvPicPr>
-            <a:picLocks noChangeAspect="1"/>
-          </p:cNvPicPr>
-          <p:nvPr/>
-        </p:nvPicPr>
-        <p:blipFill>
-          <a:blip r:embed="rId3"/>
-          <a:stretch>
-            <a:fillRect/>
-          </a:stretch>
-        </p:blipFill>
-        <p:spPr>
-          <a:xfrm>
-            <a:off x="4343400" y="1463040"/>
-            <a:ext cx="7388352" cy="3657687"/>
-          </a:xfrm>
-          <a:prstGeom prst="rect">
-            <a:avLst/>
-          </a:prstGeom>
-          <a:ln w="9525">
+              <a:t>Incident or Service Request, despite misleading titles</a:t>
+            </a:r>
+          </a:p>
+        </p:txBody>
+      </p:sp>
+      <p:sp>
+        <p:nvSpPr>
+          <p:cNvPr id="19" name="Rounded Rectangle 18"/>
+          <p:cNvSpPr/>
+          <p:nvPr/>
+        </p:nvSpPr>
+        <p:spPr>
+          <a:xfrm>
+            <a:off x="8101583" y="1691640"/>
+            <a:ext cx="3630168" cy="868680"/>
+          </a:xfrm>
+          <a:prstGeom prst="roundRect">
+            <a:avLst>
+              <a:gd name="adj" fmla="val 5000"/>
+            </a:avLst>
+          </a:prstGeom>
+          <a:solidFill>
+            <a:srgbClr val="F3F5F9"/>
+          </a:solidFill>
+          <a:ln w="12700">
             <a:solidFill>
               <a:srgbClr val="D9DEE7"/>
             </a:solidFill>
           </a:ln>
-        </p:spPr>
-      </p:pic>
-      <p:pic>
-        <p:nvPicPr>
-          <p:cNvPr id="17" name="Picture 16" descr="raw_record.png"/>
-          <p:cNvPicPr>
-            <a:picLocks noChangeAspect="1"/>
-          </p:cNvPicPr>
-          <p:nvPr/>
-        </p:nvPicPr>
-        <p:blipFill>
-          <a:blip r:embed="rId4"/>
-          <a:stretch>
-            <a:fillRect/>
-          </a:stretch>
-        </p:blipFill>
-        <p:spPr>
-          <a:xfrm>
-            <a:off x="4343400" y="5248743"/>
-            <a:ext cx="2414358" cy="1143000"/>
+          <a:effectLst/>
+        </p:spPr>
+        <p:style>
+          <a:lnRef idx="1">
+            <a:schemeClr val="accent1"/>
+          </a:lnRef>
+          <a:fillRef idx="3">
+            <a:schemeClr val="accent1"/>
+          </a:fillRef>
+          <a:effectRef idx="2">
+            <a:schemeClr val="accent1"/>
+          </a:effectRef>
+          <a:fontRef idx="minor">
+            <a:schemeClr val="lt1"/>
+          </a:fontRef>
+        </p:style>
+        <p:txBody>
+          <a:bodyPr rtlCol="0" anchor="ctr"/>
+          <a:lstStyle/>
+          <a:p>
+            <a:pPr algn="ctr"/>
+          </a:p>
+        </p:txBody>
+      </p:sp>
+      <p:sp>
+        <p:nvSpPr>
+          <p:cNvPr id="20" name="Oval 19"/>
+          <p:cNvSpPr/>
+          <p:nvPr/>
+        </p:nvSpPr>
+        <p:spPr>
+          <a:xfrm>
+            <a:off x="8238744" y="1929384"/>
+            <a:ext cx="384048" cy="384048"/>
+          </a:xfrm>
+          <a:prstGeom prst="ellipse">
+            <a:avLst/>
+          </a:prstGeom>
+          <a:solidFill>
+            <a:srgbClr val="1B2A49"/>
+          </a:solidFill>
+          <a:ln>
+            <a:noFill/>
+          </a:ln>
+          <a:effectLst/>
+        </p:spPr>
+        <p:style>
+          <a:lnRef idx="1">
+            <a:schemeClr val="accent1"/>
+          </a:lnRef>
+          <a:fillRef idx="3">
+            <a:schemeClr val="accent1"/>
+          </a:fillRef>
+          <a:effectRef idx="2">
+            <a:schemeClr val="accent1"/>
+          </a:effectRef>
+          <a:fontRef idx="minor">
+            <a:schemeClr val="lt1"/>
+          </a:fontRef>
+        </p:style>
+        <p:txBody>
+          <a:bodyPr rtlCol="0" anchor="ctr" lIns="0" rIns="0" tIns="0" bIns="0"/>
+          <a:lstStyle/>
+          <a:p>
+            <a:pPr algn="ctr"/>
+            <a:r>
+              <a:rPr sz="1400" b="1">
+                <a:solidFill>
+                  <a:srgbClr val="FFFFFF"/>
+                </a:solidFill>
+                <a:latin typeface="Calibri"/>
+              </a:rPr>
+              <a:t>2</a:t>
+            </a:r>
+          </a:p>
+        </p:txBody>
+      </p:sp>
+      <p:sp>
+        <p:nvSpPr>
+          <p:cNvPr id="21" name="TextBox 20"/>
+          <p:cNvSpPr txBox="1"/>
+          <p:nvPr/>
+        </p:nvSpPr>
+        <p:spPr>
+          <a:xfrm>
+            <a:off x="8759952" y="1783080"/>
+            <a:ext cx="2852928" cy="292608"/>
           </a:xfrm>
           <a:prstGeom prst="rect">
             <a:avLst/>
           </a:prstGeom>
-          <a:ln w="9525">
+          <a:noFill/>
+        </p:spPr>
+        <p:txBody>
+          <a:bodyPr wrap="square" anchor="t" lIns="0" rIns="0" tIns="0" bIns="0">
+            <a:spAutoFit/>
+          </a:bodyPr>
+          <a:lstStyle/>
+          <a:p>
+            <a:pPr algn="l"/>
+            <a:r>
+              <a:rPr sz="1400" b="1">
+                <a:solidFill>
+                  <a:srgbClr val="1B2A49"/>
+                </a:solidFill>
+                <a:latin typeface="Cambria"/>
+              </a:rPr>
+              <a:t>Affected service</a:t>
+            </a:r>
+          </a:p>
+        </p:txBody>
+      </p:sp>
+      <p:sp>
+        <p:nvSpPr>
+          <p:cNvPr id="22" name="TextBox 21"/>
+          <p:cNvSpPr txBox="1"/>
+          <p:nvPr/>
+        </p:nvSpPr>
+        <p:spPr>
+          <a:xfrm>
+            <a:off x="8759952" y="2103120"/>
+            <a:ext cx="2852928" cy="411480"/>
+          </a:xfrm>
+          <a:prstGeom prst="rect">
+            <a:avLst/>
+          </a:prstGeom>
+          <a:noFill/>
+        </p:spPr>
+        <p:txBody>
+          <a:bodyPr wrap="square" anchor="t" lIns="0" rIns="0" tIns="0" bIns="0">
+            <a:spAutoFit/>
+          </a:bodyPr>
+          <a:lstStyle/>
+          <a:p>
+            <a:pPr algn="l"/>
+            <a:r>
+              <a:rPr sz="1150" b="0">
+                <a:solidFill>
+                  <a:srgbClr val="1F2937"/>
+                </a:solidFill>
+                <a:latin typeface="Calibri"/>
+              </a:rPr>
+              <a:t>the real one, not the supplied value</a:t>
+            </a:r>
+          </a:p>
+        </p:txBody>
+      </p:sp>
+      <p:sp>
+        <p:nvSpPr>
+          <p:cNvPr id="23" name="Rounded Rectangle 22"/>
+          <p:cNvSpPr/>
+          <p:nvPr/>
+        </p:nvSpPr>
+        <p:spPr>
+          <a:xfrm>
+            <a:off x="4343400" y="2688336"/>
+            <a:ext cx="3630168" cy="868680"/>
+          </a:xfrm>
+          <a:prstGeom prst="roundRect">
+            <a:avLst>
+              <a:gd name="adj" fmla="val 5000"/>
+            </a:avLst>
+          </a:prstGeom>
+          <a:solidFill>
+            <a:srgbClr val="F3F5F9"/>
+          </a:solidFill>
+          <a:ln w="12700">
             <a:solidFill>
               <a:srgbClr val="D9DEE7"/>
             </a:solidFill>
           </a:ln>
-        </p:spPr>
-      </p:pic>
-      <p:pic>
-        <p:nvPicPr>
-          <p:cNvPr id="18" name="Picture 17" descr="03_priority.png"/>
-          <p:cNvPicPr>
-            <a:picLocks noChangeAspect="1"/>
-          </p:cNvPicPr>
-          <p:nvPr/>
-        </p:nvPicPr>
-        <p:blipFill>
-          <a:blip r:embed="rId5"/>
-          <a:stretch>
-            <a:fillRect/>
-          </a:stretch>
-        </p:blipFill>
-        <p:spPr>
-          <a:xfrm>
-            <a:off x="6940638" y="5248743"/>
-            <a:ext cx="2119377" cy="1143000"/>
+          <a:effectLst/>
+        </p:spPr>
+        <p:style>
+          <a:lnRef idx="1">
+            <a:schemeClr val="accent1"/>
+          </a:lnRef>
+          <a:fillRef idx="3">
+            <a:schemeClr val="accent1"/>
+          </a:fillRef>
+          <a:effectRef idx="2">
+            <a:schemeClr val="accent1"/>
+          </a:effectRef>
+          <a:fontRef idx="minor">
+            <a:schemeClr val="lt1"/>
+          </a:fontRef>
+        </p:style>
+        <p:txBody>
+          <a:bodyPr rtlCol="0" anchor="ctr"/>
+          <a:lstStyle/>
+          <a:p>
+            <a:pPr algn="ctr"/>
+          </a:p>
+        </p:txBody>
+      </p:sp>
+      <p:sp>
+        <p:nvSpPr>
+          <p:cNvPr id="24" name="Oval 23"/>
+          <p:cNvSpPr/>
+          <p:nvPr/>
+        </p:nvSpPr>
+        <p:spPr>
+          <a:xfrm>
+            <a:off x="4480560" y="2926080"/>
+            <a:ext cx="384048" cy="384048"/>
+          </a:xfrm>
+          <a:prstGeom prst="ellipse">
+            <a:avLst/>
+          </a:prstGeom>
+          <a:solidFill>
+            <a:srgbClr val="1B2A49"/>
+          </a:solidFill>
+          <a:ln>
+            <a:noFill/>
+          </a:ln>
+          <a:effectLst/>
+        </p:spPr>
+        <p:style>
+          <a:lnRef idx="1">
+            <a:schemeClr val="accent1"/>
+          </a:lnRef>
+          <a:fillRef idx="3">
+            <a:schemeClr val="accent1"/>
+          </a:fillRef>
+          <a:effectRef idx="2">
+            <a:schemeClr val="accent1"/>
+          </a:effectRef>
+          <a:fontRef idx="minor">
+            <a:schemeClr val="lt1"/>
+          </a:fontRef>
+        </p:style>
+        <p:txBody>
+          <a:bodyPr rtlCol="0" anchor="ctr" lIns="0" rIns="0" tIns="0" bIns="0"/>
+          <a:lstStyle/>
+          <a:p>
+            <a:pPr algn="ctr"/>
+            <a:r>
+              <a:rPr sz="1400" b="1">
+                <a:solidFill>
+                  <a:srgbClr val="FFFFFF"/>
+                </a:solidFill>
+                <a:latin typeface="Calibri"/>
+              </a:rPr>
+              <a:t>3</a:t>
+            </a:r>
+          </a:p>
+        </p:txBody>
+      </p:sp>
+      <p:sp>
+        <p:nvSpPr>
+          <p:cNvPr id="25" name="TextBox 24"/>
+          <p:cNvSpPr txBox="1"/>
+          <p:nvPr/>
+        </p:nvSpPr>
+        <p:spPr>
+          <a:xfrm>
+            <a:off x="5001768" y="2779776"/>
+            <a:ext cx="2852928" cy="292608"/>
           </a:xfrm>
           <a:prstGeom prst="rect">
             <a:avLst/>
           </a:prstGeom>
-          <a:ln w="9525">
+          <a:noFill/>
+        </p:spPr>
+        <p:txBody>
+          <a:bodyPr wrap="square" anchor="t" lIns="0" rIns="0" tIns="0" bIns="0">
+            <a:spAutoFit/>
+          </a:bodyPr>
+          <a:lstStyle/>
+          <a:p>
+            <a:pPr algn="l"/>
+            <a:r>
+              <a:rPr sz="1400" b="1">
+                <a:solidFill>
+                  <a:srgbClr val="1B2A49"/>
+                </a:solidFill>
+                <a:latin typeface="Cambria"/>
+              </a:rPr>
+              <a:t>Service team(s)</a:t>
+            </a:r>
+          </a:p>
+        </p:txBody>
+      </p:sp>
+      <p:sp>
+        <p:nvSpPr>
+          <p:cNvPr id="26" name="TextBox 25"/>
+          <p:cNvSpPr txBox="1"/>
+          <p:nvPr/>
+        </p:nvSpPr>
+        <p:spPr>
+          <a:xfrm>
+            <a:off x="5001768" y="3099816"/>
+            <a:ext cx="2852928" cy="411480"/>
+          </a:xfrm>
+          <a:prstGeom prst="rect">
+            <a:avLst/>
+          </a:prstGeom>
+          <a:noFill/>
+        </p:spPr>
+        <p:txBody>
+          <a:bodyPr wrap="square" anchor="t" lIns="0" rIns="0" tIns="0" bIns="0">
+            <a:spAutoFit/>
+          </a:bodyPr>
+          <a:lstStyle/>
+          <a:p>
+            <a:pPr algn="l"/>
+            <a:r>
+              <a:rPr sz="1150" b="0">
+                <a:solidFill>
+                  <a:srgbClr val="1F2937"/>
+                </a:solidFill>
+                <a:latin typeface="Calibri"/>
+              </a:rPr>
+              <a:t>the team that owns the service</a:t>
+            </a:r>
+          </a:p>
+        </p:txBody>
+      </p:sp>
+      <p:sp>
+        <p:nvSpPr>
+          <p:cNvPr id="27" name="Rounded Rectangle 26"/>
+          <p:cNvSpPr/>
+          <p:nvPr/>
+        </p:nvSpPr>
+        <p:spPr>
+          <a:xfrm>
+            <a:off x="8101583" y="2688336"/>
+            <a:ext cx="3630168" cy="868680"/>
+          </a:xfrm>
+          <a:prstGeom prst="roundRect">
+            <a:avLst>
+              <a:gd name="adj" fmla="val 5000"/>
+            </a:avLst>
+          </a:prstGeom>
+          <a:solidFill>
+            <a:srgbClr val="F3F5F9"/>
+          </a:solidFill>
+          <a:ln w="12700">
             <a:solidFill>
               <a:srgbClr val="D9DEE7"/>
             </a:solidFill>
           </a:ln>
-        </p:spPr>
-      </p:pic>
-      <p:sp>
-        <p:nvSpPr>
-          <p:cNvPr id="19" name="TextBox 18"/>
+          <a:effectLst/>
+        </p:spPr>
+        <p:style>
+          <a:lnRef idx="1">
+            <a:schemeClr val="accent1"/>
+          </a:lnRef>
+          <a:fillRef idx="3">
+            <a:schemeClr val="accent1"/>
+          </a:fillRef>
+          <a:effectRef idx="2">
+            <a:schemeClr val="accent1"/>
+          </a:effectRef>
+          <a:fontRef idx="minor">
+            <a:schemeClr val="lt1"/>
+          </a:fontRef>
+        </p:style>
+        <p:txBody>
+          <a:bodyPr rtlCol="0" anchor="ctr"/>
+          <a:lstStyle/>
+          <a:p>
+            <a:pPr algn="ctr"/>
+          </a:p>
+        </p:txBody>
+      </p:sp>
+      <p:sp>
+        <p:nvSpPr>
+          <p:cNvPr id="28" name="Oval 27"/>
+          <p:cNvSpPr/>
+          <p:nvPr/>
+        </p:nvSpPr>
+        <p:spPr>
+          <a:xfrm>
+            <a:off x="8238744" y="2926080"/>
+            <a:ext cx="384048" cy="384048"/>
+          </a:xfrm>
+          <a:prstGeom prst="ellipse">
+            <a:avLst/>
+          </a:prstGeom>
+          <a:solidFill>
+            <a:srgbClr val="1B2A49"/>
+          </a:solidFill>
+          <a:ln>
+            <a:noFill/>
+          </a:ln>
+          <a:effectLst/>
+        </p:spPr>
+        <p:style>
+          <a:lnRef idx="1">
+            <a:schemeClr val="accent1"/>
+          </a:lnRef>
+          <a:fillRef idx="3">
+            <a:schemeClr val="accent1"/>
+          </a:fillRef>
+          <a:effectRef idx="2">
+            <a:schemeClr val="accent1"/>
+          </a:effectRef>
+          <a:fontRef idx="minor">
+            <a:schemeClr val="lt1"/>
+          </a:fontRef>
+        </p:style>
+        <p:txBody>
+          <a:bodyPr rtlCol="0" anchor="ctr" lIns="0" rIns="0" tIns="0" bIns="0"/>
+          <a:lstStyle/>
+          <a:p>
+            <a:pPr algn="ctr"/>
+            <a:r>
+              <a:rPr sz="1400" b="1">
+                <a:solidFill>
+                  <a:srgbClr val="FFFFFF"/>
+                </a:solidFill>
+                <a:latin typeface="Calibri"/>
+              </a:rPr>
+              <a:t>4</a:t>
+            </a:r>
+          </a:p>
+        </p:txBody>
+      </p:sp>
+      <p:sp>
+        <p:nvSpPr>
+          <p:cNvPr id="29" name="TextBox 28"/>
           <p:cNvSpPr txBox="1"/>
           <p:nvPr/>
         </p:nvSpPr>
         <p:spPr>
           <a:xfrm>
-            <a:off x="9288615" y="5248743"/>
-            <a:ext cx="2443136" cy="1143000"/>
+            <a:off x="8759952" y="2779776"/>
+            <a:ext cx="2852928" cy="292608"/>
           </a:xfrm>
           <a:prstGeom prst="rect">
             <a:avLst/>
@@ -4161,47 +4954,766 @@
           <a:noFill/>
         </p:spPr>
         <p:txBody>
-          <a:bodyPr wrap="square" lIns="0" tIns="0" rIns="0" bIns="0" anchor="ctr">
+          <a:bodyPr wrap="square" anchor="t" lIns="0" rIns="0" tIns="0" bIns="0">
             <a:spAutoFit/>
           </a:bodyPr>
           <a:lstStyle/>
           <a:p>
+            <a:pPr algn="l"/>
+            <a:r>
+              <a:rPr sz="1400" b="1">
+                <a:solidFill>
+                  <a:srgbClr val="1B2A49"/>
+                </a:solidFill>
+                <a:latin typeface="Cambria"/>
+              </a:rPr>
+              <a:t>Assignee</a:t>
+            </a:r>
+          </a:p>
+        </p:txBody>
+      </p:sp>
+      <p:sp>
+        <p:nvSpPr>
+          <p:cNvPr id="30" name="TextBox 29"/>
+          <p:cNvSpPr txBox="1"/>
+          <p:nvPr/>
+        </p:nvSpPr>
+        <p:spPr>
+          <a:xfrm>
+            <a:off x="8759952" y="3099816"/>
+            <a:ext cx="2852928" cy="411480"/>
+          </a:xfrm>
+          <a:prstGeom prst="rect">
+            <a:avLst/>
+          </a:prstGeom>
+          <a:noFill/>
+        </p:spPr>
+        <p:txBody>
+          <a:bodyPr wrap="square" anchor="t" lIns="0" rIns="0" tIns="0" bIns="0">
+            <a:spAutoFit/>
+          </a:bodyPr>
+          <a:lstStyle/>
+          <a:p>
+            <a:pPr algn="l"/>
+            <a:r>
+              <a:rPr sz="1150" b="0">
+                <a:solidFill>
+                  <a:srgbClr val="1F2937"/>
+                </a:solidFill>
+                <a:latin typeface="Calibri"/>
+              </a:rPr>
+              <a:t>the actual routing person</a:t>
+            </a:r>
+          </a:p>
+        </p:txBody>
+      </p:sp>
+      <p:sp>
+        <p:nvSpPr>
+          <p:cNvPr id="31" name="Rounded Rectangle 30"/>
+          <p:cNvSpPr/>
+          <p:nvPr/>
+        </p:nvSpPr>
+        <p:spPr>
+          <a:xfrm>
+            <a:off x="4343400" y="3685031"/>
+            <a:ext cx="3630168" cy="868680"/>
+          </a:xfrm>
+          <a:prstGeom prst="roundRect">
+            <a:avLst>
+              <a:gd name="adj" fmla="val 5000"/>
+            </a:avLst>
+          </a:prstGeom>
+          <a:solidFill>
+            <a:srgbClr val="F3F5F9"/>
+          </a:solidFill>
+          <a:ln w="12700">
+            <a:solidFill>
+              <a:srgbClr val="D9DEE7"/>
+            </a:solidFill>
+          </a:ln>
+          <a:effectLst/>
+        </p:spPr>
+        <p:style>
+          <a:lnRef idx="1">
+            <a:schemeClr val="accent1"/>
+          </a:lnRef>
+          <a:fillRef idx="3">
+            <a:schemeClr val="accent1"/>
+          </a:fillRef>
+          <a:effectRef idx="2">
+            <a:schemeClr val="accent1"/>
+          </a:effectRef>
+          <a:fontRef idx="minor">
+            <a:schemeClr val="lt1"/>
+          </a:fontRef>
+        </p:style>
+        <p:txBody>
+          <a:bodyPr rtlCol="0" anchor="ctr"/>
+          <a:lstStyle/>
+          <a:p>
+            <a:pPr algn="ctr"/>
+          </a:p>
+        </p:txBody>
+      </p:sp>
+      <p:sp>
+        <p:nvSpPr>
+          <p:cNvPr id="32" name="Oval 31"/>
+          <p:cNvSpPr/>
+          <p:nvPr/>
+        </p:nvSpPr>
+        <p:spPr>
+          <a:xfrm>
+            <a:off x="4480560" y="3922775"/>
+            <a:ext cx="384048" cy="384048"/>
+          </a:xfrm>
+          <a:prstGeom prst="ellipse">
+            <a:avLst/>
+          </a:prstGeom>
+          <a:solidFill>
+            <a:srgbClr val="1B2A49"/>
+          </a:solidFill>
+          <a:ln>
+            <a:noFill/>
+          </a:ln>
+          <a:effectLst/>
+        </p:spPr>
+        <p:style>
+          <a:lnRef idx="1">
+            <a:schemeClr val="accent1"/>
+          </a:lnRef>
+          <a:fillRef idx="3">
+            <a:schemeClr val="accent1"/>
+          </a:fillRef>
+          <a:effectRef idx="2">
+            <a:schemeClr val="accent1"/>
+          </a:effectRef>
+          <a:fontRef idx="minor">
+            <a:schemeClr val="lt1"/>
+          </a:fontRef>
+        </p:style>
+        <p:txBody>
+          <a:bodyPr rtlCol="0" anchor="ctr" lIns="0" rIns="0" tIns="0" bIns="0"/>
+          <a:lstStyle/>
+          <a:p>
+            <a:pPr algn="ctr"/>
+            <a:r>
+              <a:rPr sz="1400" b="1">
+                <a:solidFill>
+                  <a:srgbClr val="FFFFFF"/>
+                </a:solidFill>
+                <a:latin typeface="Calibri"/>
+              </a:rPr>
+              <a:t>5</a:t>
+            </a:r>
+          </a:p>
+        </p:txBody>
+      </p:sp>
+      <p:sp>
+        <p:nvSpPr>
+          <p:cNvPr id="33" name="TextBox 32"/>
+          <p:cNvSpPr txBox="1"/>
+          <p:nvPr/>
+        </p:nvSpPr>
+        <p:spPr>
+          <a:xfrm>
+            <a:off x="5001768" y="3776471"/>
+            <a:ext cx="2852928" cy="292608"/>
+          </a:xfrm>
+          <a:prstGeom prst="rect">
+            <a:avLst/>
+          </a:prstGeom>
+          <a:noFill/>
+        </p:spPr>
+        <p:txBody>
+          <a:bodyPr wrap="square" anchor="t" lIns="0" rIns="0" tIns="0" bIns="0">
+            <a:spAutoFit/>
+          </a:bodyPr>
+          <a:lstStyle/>
+          <a:p>
+            <a:pPr algn="l"/>
+            <a:r>
+              <a:rPr sz="1400" b="1">
+                <a:solidFill>
+                  <a:srgbClr val="1B2A49"/>
+                </a:solidFill>
+                <a:latin typeface="Cambria"/>
+              </a:rPr>
+              <a:t>Priority</a:t>
+            </a:r>
+          </a:p>
+        </p:txBody>
+      </p:sp>
+      <p:sp>
+        <p:nvSpPr>
+          <p:cNvPr id="34" name="TextBox 33"/>
+          <p:cNvSpPr txBox="1"/>
+          <p:nvPr/>
+        </p:nvSpPr>
+        <p:spPr>
+          <a:xfrm>
+            <a:off x="5001768" y="4096511"/>
+            <a:ext cx="2852928" cy="411480"/>
+          </a:xfrm>
+          <a:prstGeom prst="rect">
+            <a:avLst/>
+          </a:prstGeom>
+          <a:noFill/>
+        </p:spPr>
+        <p:txBody>
+          <a:bodyPr wrap="square" anchor="t" lIns="0" rIns="0" tIns="0" bIns="0">
+            <a:spAutoFit/>
+          </a:bodyPr>
+          <a:lstStyle/>
+          <a:p>
+            <a:pPr algn="l"/>
+            <a:r>
+              <a:rPr sz="1150" b="0">
+                <a:solidFill>
+                  <a:srgbClr val="1F2937"/>
+                </a:solidFill>
+                <a:latin typeface="Calibri"/>
+              </a:rPr>
+              <a:t>must match urgency × impact (matrix)</a:t>
+            </a:r>
+          </a:p>
+        </p:txBody>
+      </p:sp>
+      <p:sp>
+        <p:nvSpPr>
+          <p:cNvPr id="35" name="Rounded Rectangle 34"/>
+          <p:cNvSpPr/>
+          <p:nvPr/>
+        </p:nvSpPr>
+        <p:spPr>
+          <a:xfrm>
+            <a:off x="8101583" y="3685031"/>
+            <a:ext cx="3630168" cy="868680"/>
+          </a:xfrm>
+          <a:prstGeom prst="roundRect">
+            <a:avLst>
+              <a:gd name="adj" fmla="val 5000"/>
+            </a:avLst>
+          </a:prstGeom>
+          <a:solidFill>
+            <a:srgbClr val="F3F5F9"/>
+          </a:solidFill>
+          <a:ln w="12700">
+            <a:solidFill>
+              <a:srgbClr val="D9DEE7"/>
+            </a:solidFill>
+          </a:ln>
+          <a:effectLst/>
+        </p:spPr>
+        <p:style>
+          <a:lnRef idx="1">
+            <a:schemeClr val="accent1"/>
+          </a:lnRef>
+          <a:fillRef idx="3">
+            <a:schemeClr val="accent1"/>
+          </a:fillRef>
+          <a:effectRef idx="2">
+            <a:schemeClr val="accent1"/>
+          </a:effectRef>
+          <a:fontRef idx="minor">
+            <a:schemeClr val="lt1"/>
+          </a:fontRef>
+        </p:style>
+        <p:txBody>
+          <a:bodyPr rtlCol="0" anchor="ctr"/>
+          <a:lstStyle/>
+          <a:p>
+            <a:pPr algn="ctr"/>
+          </a:p>
+        </p:txBody>
+      </p:sp>
+      <p:sp>
+        <p:nvSpPr>
+          <p:cNvPr id="36" name="Oval 35"/>
+          <p:cNvSpPr/>
+          <p:nvPr/>
+        </p:nvSpPr>
+        <p:spPr>
+          <a:xfrm>
+            <a:off x="8238744" y="3922775"/>
+            <a:ext cx="384048" cy="384048"/>
+          </a:xfrm>
+          <a:prstGeom prst="ellipse">
+            <a:avLst/>
+          </a:prstGeom>
+          <a:solidFill>
+            <a:srgbClr val="1B2A49"/>
+          </a:solidFill>
+          <a:ln>
+            <a:noFill/>
+          </a:ln>
+          <a:effectLst/>
+        </p:spPr>
+        <p:style>
+          <a:lnRef idx="1">
+            <a:schemeClr val="accent1"/>
+          </a:lnRef>
+          <a:fillRef idx="3">
+            <a:schemeClr val="accent1"/>
+          </a:fillRef>
+          <a:effectRef idx="2">
+            <a:schemeClr val="accent1"/>
+          </a:effectRef>
+          <a:fontRef idx="minor">
+            <a:schemeClr val="lt1"/>
+          </a:fontRef>
+        </p:style>
+        <p:txBody>
+          <a:bodyPr rtlCol="0" anchor="ctr" lIns="0" rIns="0" tIns="0" bIns="0"/>
+          <a:lstStyle/>
+          <a:p>
+            <a:pPr algn="ctr"/>
+            <a:r>
+              <a:rPr sz="1400" b="1">
+                <a:solidFill>
+                  <a:srgbClr val="FFFFFF"/>
+                </a:solidFill>
+                <a:latin typeface="Calibri"/>
+              </a:rPr>
+              <a:t>6</a:t>
+            </a:r>
+          </a:p>
+        </p:txBody>
+      </p:sp>
+      <p:sp>
+        <p:nvSpPr>
+          <p:cNvPr id="37" name="TextBox 36"/>
+          <p:cNvSpPr txBox="1"/>
+          <p:nvPr/>
+        </p:nvSpPr>
+        <p:spPr>
+          <a:xfrm>
+            <a:off x="8759952" y="3776471"/>
+            <a:ext cx="2852928" cy="292608"/>
+          </a:xfrm>
+          <a:prstGeom prst="rect">
+            <a:avLst/>
+          </a:prstGeom>
+          <a:noFill/>
+        </p:spPr>
+        <p:txBody>
+          <a:bodyPr wrap="square" anchor="t" lIns="0" rIns="0" tIns="0" bIns="0">
+            <a:spAutoFit/>
+          </a:bodyPr>
+          <a:lstStyle/>
+          <a:p>
+            <a:pPr algn="l"/>
+            <a:r>
+              <a:rPr sz="1400" b="1">
+                <a:solidFill>
+                  <a:srgbClr val="1B2A49"/>
+                </a:solidFill>
+                <a:latin typeface="Cambria"/>
+              </a:rPr>
+              <a:t>Resolution status</a:t>
+            </a:r>
+          </a:p>
+        </p:txBody>
+      </p:sp>
+      <p:sp>
+        <p:nvSpPr>
+          <p:cNvPr id="38" name="TextBox 37"/>
+          <p:cNvSpPr txBox="1"/>
+          <p:nvPr/>
+        </p:nvSpPr>
+        <p:spPr>
+          <a:xfrm>
+            <a:off x="8759952" y="4096511"/>
+            <a:ext cx="2852928" cy="411480"/>
+          </a:xfrm>
+          <a:prstGeom prst="rect">
+            <a:avLst/>
+          </a:prstGeom>
+          <a:noFill/>
+        </p:spPr>
+        <p:txBody>
+          <a:bodyPr wrap="square" anchor="t" lIns="0" rIns="0" tIns="0" bIns="0">
+            <a:spAutoFit/>
+          </a:bodyPr>
+          <a:lstStyle/>
+          <a:p>
+            <a:pPr algn="l"/>
+            <a:r>
+              <a:rPr sz="1150" b="0">
+                <a:solidFill>
+                  <a:srgbClr val="1F2937"/>
+                </a:solidFill>
+                <a:latin typeface="Calibri"/>
+              </a:rPr>
+              <a:t>done, cancelled, clarification, cannot reproduce</a:t>
+            </a:r>
+          </a:p>
+        </p:txBody>
+      </p:sp>
+      <p:sp>
+        <p:nvSpPr>
+          <p:cNvPr id="39" name="Rounded Rectangle 38"/>
+          <p:cNvSpPr/>
+          <p:nvPr/>
+        </p:nvSpPr>
+        <p:spPr>
+          <a:xfrm>
+            <a:off x="4343400" y="4681727"/>
+            <a:ext cx="3630168" cy="868680"/>
+          </a:xfrm>
+          <a:prstGeom prst="roundRect">
+            <a:avLst>
+              <a:gd name="adj" fmla="val 5000"/>
+            </a:avLst>
+          </a:prstGeom>
+          <a:solidFill>
+            <a:srgbClr val="F3F5F9"/>
+          </a:solidFill>
+          <a:ln w="12700">
+            <a:solidFill>
+              <a:srgbClr val="D9DEE7"/>
+            </a:solidFill>
+          </a:ln>
+          <a:effectLst/>
+        </p:spPr>
+        <p:style>
+          <a:lnRef idx="1">
+            <a:schemeClr val="accent1"/>
+          </a:lnRef>
+          <a:fillRef idx="3">
+            <a:schemeClr val="accent1"/>
+          </a:fillRef>
+          <a:effectRef idx="2">
+            <a:schemeClr val="accent1"/>
+          </a:effectRef>
+          <a:fontRef idx="minor">
+            <a:schemeClr val="lt1"/>
+          </a:fontRef>
+        </p:style>
+        <p:txBody>
+          <a:bodyPr rtlCol="0" anchor="ctr"/>
+          <a:lstStyle/>
+          <a:p>
+            <a:pPr algn="ctr"/>
+          </a:p>
+        </p:txBody>
+      </p:sp>
+      <p:sp>
+        <p:nvSpPr>
+          <p:cNvPr id="40" name="Oval 39"/>
+          <p:cNvSpPr/>
+          <p:nvPr/>
+        </p:nvSpPr>
+        <p:spPr>
+          <a:xfrm>
+            <a:off x="4480560" y="4919471"/>
+            <a:ext cx="384048" cy="384048"/>
+          </a:xfrm>
+          <a:prstGeom prst="ellipse">
+            <a:avLst/>
+          </a:prstGeom>
+          <a:solidFill>
+            <a:srgbClr val="1B2A49"/>
+          </a:solidFill>
+          <a:ln>
+            <a:noFill/>
+          </a:ln>
+          <a:effectLst/>
+        </p:spPr>
+        <p:style>
+          <a:lnRef idx="1">
+            <a:schemeClr val="accent1"/>
+          </a:lnRef>
+          <a:fillRef idx="3">
+            <a:schemeClr val="accent1"/>
+          </a:fillRef>
+          <a:effectRef idx="2">
+            <a:schemeClr val="accent1"/>
+          </a:effectRef>
+          <a:fontRef idx="minor">
+            <a:schemeClr val="lt1"/>
+          </a:fontRef>
+        </p:style>
+        <p:txBody>
+          <a:bodyPr rtlCol="0" anchor="ctr" lIns="0" rIns="0" tIns="0" bIns="0"/>
+          <a:lstStyle/>
+          <a:p>
+            <a:pPr algn="ctr"/>
+            <a:r>
+              <a:rPr sz="1400" b="1">
+                <a:solidFill>
+                  <a:srgbClr val="FFFFFF"/>
+                </a:solidFill>
+                <a:latin typeface="Calibri"/>
+              </a:rPr>
+              <a:t>7</a:t>
+            </a:r>
+          </a:p>
+        </p:txBody>
+      </p:sp>
+      <p:sp>
+        <p:nvSpPr>
+          <p:cNvPr id="41" name="TextBox 40"/>
+          <p:cNvSpPr txBox="1"/>
+          <p:nvPr/>
+        </p:nvSpPr>
+        <p:spPr>
+          <a:xfrm>
+            <a:off x="5001768" y="4773167"/>
+            <a:ext cx="2852928" cy="292608"/>
+          </a:xfrm>
+          <a:prstGeom prst="rect">
+            <a:avLst/>
+          </a:prstGeom>
+          <a:noFill/>
+        </p:spPr>
+        <p:txBody>
+          <a:bodyPr wrap="square" anchor="t" lIns="0" rIns="0" tIns="0" bIns="0">
+            <a:spAutoFit/>
+          </a:bodyPr>
+          <a:lstStyle/>
+          <a:p>
+            <a:pPr algn="l"/>
+            <a:r>
+              <a:rPr sz="1400" b="1">
+                <a:solidFill>
+                  <a:srgbClr val="1B2A49"/>
+                </a:solidFill>
+                <a:latin typeface="Cambria"/>
+              </a:rPr>
+              <a:t>Resolution comment</a:t>
+            </a:r>
+          </a:p>
+        </p:txBody>
+      </p:sp>
+      <p:sp>
+        <p:nvSpPr>
+          <p:cNvPr id="42" name="TextBox 41"/>
+          <p:cNvSpPr txBox="1"/>
+          <p:nvPr/>
+        </p:nvSpPr>
+        <p:spPr>
+          <a:xfrm>
+            <a:off x="5001768" y="5093207"/>
+            <a:ext cx="2852928" cy="411480"/>
+          </a:xfrm>
+          <a:prstGeom prst="rect">
+            <a:avLst/>
+          </a:prstGeom>
+          <a:noFill/>
+        </p:spPr>
+        <p:txBody>
+          <a:bodyPr wrap="square" anchor="t" lIns="0" rIns="0" tIns="0" bIns="0">
+            <a:spAutoFit/>
+          </a:bodyPr>
+          <a:lstStyle/>
+          <a:p>
+            <a:pPr algn="l"/>
+            <a:r>
+              <a:rPr sz="1150" b="0">
+                <a:solidFill>
+                  <a:srgbClr val="1F2937"/>
+                </a:solidFill>
+                <a:latin typeface="Calibri"/>
+              </a:rPr>
+              <a:t>concrete, plausible, in the assignee's voice</a:t>
+            </a:r>
+          </a:p>
+        </p:txBody>
+      </p:sp>
+      <p:sp>
+        <p:nvSpPr>
+          <p:cNvPr id="43" name="Rounded Rectangle 42"/>
+          <p:cNvSpPr/>
+          <p:nvPr/>
+        </p:nvSpPr>
+        <p:spPr>
+          <a:xfrm>
+            <a:off x="8101584" y="4681727"/>
+            <a:ext cx="3630168" cy="868680"/>
+          </a:xfrm>
+          <a:prstGeom prst="roundRect">
+            <a:avLst>
+              <a:gd name="adj" fmla="val 5000"/>
+            </a:avLst>
+          </a:prstGeom>
+          <a:solidFill>
+            <a:srgbClr val="0F8B8D"/>
+          </a:solidFill>
+          <a:ln>
+            <a:noFill/>
+          </a:ln>
+          <a:effectLst/>
+        </p:spPr>
+        <p:style>
+          <a:lnRef idx="1">
+            <a:schemeClr val="accent1"/>
+          </a:lnRef>
+          <a:fillRef idx="3">
+            <a:schemeClr val="accent1"/>
+          </a:fillRef>
+          <a:effectRef idx="2">
+            <a:schemeClr val="accent1"/>
+          </a:effectRef>
+          <a:fontRef idx="minor">
+            <a:schemeClr val="lt1"/>
+          </a:fontRef>
+        </p:style>
+        <p:txBody>
+          <a:bodyPr rtlCol="0" anchor="ctr"/>
+          <a:lstStyle/>
+          <a:p>
+            <a:pPr algn="ctr"/>
+          </a:p>
+        </p:txBody>
+      </p:sp>
+      <p:sp>
+        <p:nvSpPr>
+          <p:cNvPr id="44" name="TextBox 43"/>
+          <p:cNvSpPr txBox="1"/>
+          <p:nvPr/>
+        </p:nvSpPr>
+        <p:spPr>
+          <a:xfrm>
+            <a:off x="8284464" y="4681727"/>
+            <a:ext cx="3264408" cy="868680"/>
+          </a:xfrm>
+          <a:prstGeom prst="rect">
+            <a:avLst/>
+          </a:prstGeom>
+          <a:noFill/>
+        </p:spPr>
+        <p:txBody>
+          <a:bodyPr wrap="square" anchor="ctr" lIns="0" rIns="0" tIns="0" bIns="0">
+            <a:spAutoFit/>
+          </a:bodyPr>
+          <a:lstStyle/>
+          <a:p>
             <a:pPr algn="l">
               <a:spcAft>
-                <a:spcPts val="300"/>
+                <a:spcPts val="200"/>
               </a:spcAft>
             </a:pPr>
             <a:r>
-              <a:rPr sz="1150" b="0">
-                <a:solidFill>
-                  <a:srgbClr val="6B7280"/>
-                </a:solidFill>
-                <a:latin typeface="Calibri"/>
-              </a:rPr>
-              <a:t>Evidence</a:t>
+              <a:rPr sz="1450" b="1">
+                <a:solidFill>
+                  <a:srgbClr val="FFFFFF"/>
+                </a:solidFill>
+                <a:latin typeface="Cambria"/>
+              </a:rPr>
+              <a:t>Human stays in control</a:t>
             </a:r>
           </a:p>
           <a:p>
             <a:pPr algn="l">
               <a:spcAft>
-                <a:spcPts val="300"/>
+                <a:spcPts val="200"/>
               </a:spcAft>
             </a:pPr>
             <a:r>
               <a:rPr sz="1150" b="0">
                 <a:solidFill>
-                  <a:srgbClr val="6B7280"/>
+                  <a:srgbClr val="FFFFFF"/>
                 </a:solidFill>
                 <a:latin typeface="Calibri"/>
               </a:rPr>
-              <a:t>Left: a raw ticket, the random fields are marked. Right: priority against urgency and impact, flat.</a:t>
-            </a:r>
-          </a:p>
-        </p:txBody>
-      </p:sp>
-      <p:sp>
-        <p:nvSpPr>
-          <p:cNvPr id="20" name="TextBox 19"/>
+              <a:t>every suggestion is reviewed before it counts</a:t>
+            </a:r>
+          </a:p>
+        </p:txBody>
+      </p:sp>
+      <p:sp>
+        <p:nvSpPr>
+          <p:cNvPr id="45" name="Rounded Rectangle 44"/>
+          <p:cNvSpPr/>
+          <p:nvPr/>
+        </p:nvSpPr>
+        <p:spPr>
+          <a:xfrm>
+            <a:off x="4343400" y="5806440"/>
+            <a:ext cx="7388352" cy="594360"/>
+          </a:xfrm>
+          <a:prstGeom prst="roundRect">
+            <a:avLst>
+              <a:gd name="adj" fmla="val 5000"/>
+            </a:avLst>
+          </a:prstGeom>
+          <a:solidFill>
+            <a:srgbClr val="1B2A49"/>
+          </a:solidFill>
+          <a:ln>
+            <a:noFill/>
+          </a:ln>
+          <a:effectLst/>
+        </p:spPr>
+        <p:style>
+          <a:lnRef idx="1">
+            <a:schemeClr val="accent1"/>
+          </a:lnRef>
+          <a:fillRef idx="3">
+            <a:schemeClr val="accent1"/>
+          </a:fillRef>
+          <a:effectRef idx="2">
+            <a:schemeClr val="accent1"/>
+          </a:effectRef>
+          <a:fontRef idx="minor">
+            <a:schemeClr val="lt1"/>
+          </a:fontRef>
+        </p:style>
+        <p:txBody>
+          <a:bodyPr rtlCol="0" anchor="ctr"/>
+          <a:lstStyle/>
+          <a:p>
+            <a:pPr algn="ctr"/>
+          </a:p>
+        </p:txBody>
+      </p:sp>
+      <p:sp>
+        <p:nvSpPr>
+          <p:cNvPr id="46" name="TextBox 45"/>
+          <p:cNvSpPr txBox="1"/>
+          <p:nvPr/>
+        </p:nvSpPr>
+        <p:spPr>
+          <a:xfrm>
+            <a:off x="4572000" y="5806440"/>
+            <a:ext cx="6949440" cy="594360"/>
+          </a:xfrm>
+          <a:prstGeom prst="rect">
+            <a:avLst/>
+          </a:prstGeom>
+          <a:noFill/>
+        </p:spPr>
+        <p:txBody>
+          <a:bodyPr wrap="square" anchor="ctr" lIns="0" rIns="0" tIns="0" bIns="0">
+            <a:spAutoFit/>
+          </a:bodyPr>
+          <a:lstStyle/>
+          <a:p>
+            <a:pPr algn="l"/>
+            <a:r>
+              <a:rPr sz="1300" b="1">
+                <a:solidFill>
+                  <a:srgbClr val="FFFFFF"/>
+                </a:solidFill>
+                <a:latin typeface="Calibri"/>
+              </a:rPr>
+              <a:t>Demo metrics   </a:t>
+            </a:r>
+            <a:r>
+              <a:rPr sz="1300" b="0">
+                <a:solidFill>
+                  <a:srgbClr val="FFFFFF"/>
+                </a:solidFill>
+                <a:latin typeface="Calibri"/>
+              </a:rPr>
+              <a:t>classification accuracy  ·  draft acceptance rate  ·  time to resolution</a:t>
+            </a:r>
+          </a:p>
+        </p:txBody>
+      </p:sp>
+      <p:sp>
+        <p:nvSpPr>
+          <p:cNvPr id="47" name="TextBox 46"/>
           <p:cNvSpPr txBox="1"/>
           <p:nvPr/>
         </p:nvSpPr>
@@ -4216,7 +5728,7 @@
           <a:noFill/>
         </p:spPr>
         <p:txBody>
-          <a:bodyPr wrap="square" lIns="0" tIns="0" rIns="0" bIns="0" anchor="t">
+          <a:bodyPr wrap="square" anchor="t" lIns="0" rIns="0" tIns="0" bIns="0">
             <a:spAutoFit/>
           </a:bodyPr>
           <a:lstStyle/>
@@ -4229,7 +5741,7 @@
                 </a:solidFill>
                 <a:latin typeface="Calibri"/>
               </a:rPr>
-              <a:t>TicketTriage  ·  Swiss {ai} Weeks  ·  Data analysis (Notebooks/ticket_data_analysis.ipynb)</a:t>
+              <a:t>TicketTriage  ·  Swiss {ai} Weeks  ·  Challenge brief (docs/requirements.md)</a:t>
             </a:r>
           </a:p>
         </p:txBody>
@@ -4243,7 +5755,7 @@
 </file>
 
 <file path=ppt/slides/slide2.xml><?xml version="1.0" encoding="utf-8"?>
-<p:sld xmlns:a="http://schemas.openxmlformats.org/drawingml/2006/main" xmlns:r="http://schemas.openxmlformats.org/officeDocument/2006/relationships" xmlns:p="http://schemas.openxmlformats.org/presentationml/2006/main">
+<p:sld xmlns:a="http://schemas.openxmlformats.org/drawingml/2006/main" xmlns:p="http://schemas.openxmlformats.org/presentationml/2006/main" xmlns:r="http://schemas.openxmlformats.org/officeDocument/2006/relationships">
   <p:cSld>
     <p:spTree>
       <p:nvGrpSpPr>
@@ -4251,14 +5763,7 @@
         <p:cNvGrpSpPr/>
         <p:nvPr/>
       </p:nvGrpSpPr>
-      <p:grpSpPr>
-        <a:xfrm>
-          <a:off x="0" y="0"/>
-          <a:ext cx="0" cy="0"/>
-          <a:chOff x="0" y="0"/>
-          <a:chExt cx="0" cy="0"/>
-        </a:xfrm>
-      </p:grpSpPr>
+      <p:grpSpPr/>
       <p:sp>
         <p:nvSpPr>
           <p:cNvPr id="2" name="Oval 1"/>
@@ -4272,6 +5777,479 @@
           </a:xfrm>
           <a:prstGeom prst="ellipse">
             <a:avLst/>
+          </a:prstGeom>
+          <a:solidFill>
+            <a:srgbClr val="E4572E"/>
+          </a:solidFill>
+          <a:ln>
+            <a:noFill/>
+          </a:ln>
+          <a:effectLst/>
+        </p:spPr>
+        <p:style>
+          <a:lnRef idx="1">
+            <a:schemeClr val="accent1"/>
+          </a:lnRef>
+          <a:fillRef idx="3">
+            <a:schemeClr val="accent1"/>
+          </a:fillRef>
+          <a:effectRef idx="2">
+            <a:schemeClr val="accent1"/>
+          </a:effectRef>
+          <a:fontRef idx="minor">
+            <a:schemeClr val="lt1"/>
+          </a:fontRef>
+        </p:style>
+        <p:txBody>
+          <a:bodyPr rtlCol="0" anchor="ctr" lIns="0" rIns="0" tIns="0" bIns="0"/>
+          <a:lstStyle/>
+          <a:p>
+            <a:pPr algn="ctr"/>
+            <a:r>
+              <a:rPr sz="2200" b="1">
+                <a:solidFill>
+                  <a:srgbClr val="FFFFFF"/>
+                </a:solidFill>
+                <a:latin typeface="Cambria"/>
+              </a:rPr>
+              <a:t>2</a:t>
+            </a:r>
+          </a:p>
+        </p:txBody>
+      </p:sp>
+      <p:sp>
+        <p:nvSpPr>
+          <p:cNvPr id="3" name="TextBox 2"/>
+          <p:cNvSpPr txBox="1"/>
+          <p:nvPr/>
+        </p:nvSpPr>
+        <p:spPr>
+          <a:xfrm>
+            <a:off x="1234440" y="274320"/>
+            <a:ext cx="10515600" cy="548640"/>
+          </a:xfrm>
+          <a:prstGeom prst="rect">
+            <a:avLst/>
+          </a:prstGeom>
+          <a:noFill/>
+        </p:spPr>
+        <p:txBody>
+          <a:bodyPr wrap="square" anchor="ctr" lIns="0" rIns="0" tIns="0" bIns="0">
+            <a:spAutoFit/>
+          </a:bodyPr>
+          <a:lstStyle/>
+          <a:p>
+            <a:pPr algn="l"/>
+            <a:r>
+              <a:rPr sz="3000" b="1">
+                <a:solidFill>
+                  <a:srgbClr val="1B2A49"/>
+                </a:solidFill>
+                <a:latin typeface="Cambria"/>
+              </a:rPr>
+              <a:t>The data: 20,000 tickets, almost no signal</a:t>
+            </a:r>
+          </a:p>
+        </p:txBody>
+      </p:sp>
+      <p:sp>
+        <p:nvSpPr>
+          <p:cNvPr id="4" name="TextBox 3"/>
+          <p:cNvSpPr txBox="1"/>
+          <p:nvPr/>
+        </p:nvSpPr>
+        <p:spPr>
+          <a:xfrm>
+            <a:off x="1234440" y="841248"/>
+            <a:ext cx="10515600" cy="365760"/>
+          </a:xfrm>
+          <a:prstGeom prst="rect">
+            <a:avLst/>
+          </a:prstGeom>
+          <a:noFill/>
+        </p:spPr>
+        <p:txBody>
+          <a:bodyPr wrap="square" anchor="t" lIns="0" rIns="0" tIns="0" bIns="0">
+            <a:spAutoFit/>
+          </a:bodyPr>
+          <a:lstStyle/>
+          <a:p>
+            <a:pPr algn="l"/>
+            <a:r>
+              <a:rPr sz="1400" b="0">
+                <a:solidFill>
+                  <a:srgbClr val="6B7280"/>
+                </a:solidFill>
+                <a:latin typeface="Calibri"/>
+              </a:rPr>
+              <a:t>What the training export can and cannot teach a model</a:t>
+            </a:r>
+          </a:p>
+        </p:txBody>
+      </p:sp>
+      <p:sp>
+        <p:nvSpPr>
+          <p:cNvPr id="5" name="Rounded Rectangle 4"/>
+          <p:cNvSpPr/>
+          <p:nvPr/>
+        </p:nvSpPr>
+        <p:spPr>
+          <a:xfrm>
+            <a:off x="457200" y="1463040"/>
+            <a:ext cx="3611880" cy="1325880"/>
+          </a:xfrm>
+          <a:prstGeom prst="roundRect">
+            <a:avLst>
+              <a:gd name="adj" fmla="val 5000"/>
+            </a:avLst>
+          </a:prstGeom>
+          <a:solidFill>
+            <a:srgbClr val="F3F5F9"/>
+          </a:solidFill>
+          <a:ln>
+            <a:noFill/>
+          </a:ln>
+          <a:effectLst/>
+        </p:spPr>
+        <p:style>
+          <a:lnRef idx="1">
+            <a:schemeClr val="accent1"/>
+          </a:lnRef>
+          <a:fillRef idx="3">
+            <a:schemeClr val="accent1"/>
+          </a:fillRef>
+          <a:effectRef idx="2">
+            <a:schemeClr val="accent1"/>
+          </a:effectRef>
+          <a:fontRef idx="minor">
+            <a:schemeClr val="lt1"/>
+          </a:fontRef>
+        </p:style>
+        <p:txBody>
+          <a:bodyPr rtlCol="0" anchor="ctr"/>
+          <a:lstStyle/>
+          <a:p>
+            <a:pPr algn="ctr"/>
+          </a:p>
+        </p:txBody>
+      </p:sp>
+      <p:sp>
+        <p:nvSpPr>
+          <p:cNvPr id="6" name="TextBox 5"/>
+          <p:cNvSpPr txBox="1"/>
+          <p:nvPr/>
+        </p:nvSpPr>
+        <p:spPr>
+          <a:xfrm>
+            <a:off x="685800" y="1572768"/>
+            <a:ext cx="3200400" cy="502920"/>
+          </a:xfrm>
+          <a:prstGeom prst="rect">
+            <a:avLst/>
+          </a:prstGeom>
+          <a:noFill/>
+        </p:spPr>
+        <p:txBody>
+          <a:bodyPr wrap="square" anchor="t" lIns="0" rIns="0" tIns="0" bIns="0">
+            <a:spAutoFit/>
+          </a:bodyPr>
+          <a:lstStyle/>
+          <a:p>
+            <a:pPr algn="l"/>
+            <a:r>
+              <a:rPr sz="3000" b="1">
+                <a:solidFill>
+                  <a:srgbClr val="E4572E"/>
+                </a:solidFill>
+                <a:latin typeface="Cambria"/>
+              </a:rPr>
+              <a:t>173</a:t>
+            </a:r>
+          </a:p>
+        </p:txBody>
+      </p:sp>
+      <p:sp>
+        <p:nvSpPr>
+          <p:cNvPr id="7" name="TextBox 6"/>
+          <p:cNvSpPr txBox="1"/>
+          <p:nvPr/>
+        </p:nvSpPr>
+        <p:spPr>
+          <a:xfrm>
+            <a:off x="685800" y="2084832"/>
+            <a:ext cx="3200400" cy="685800"/>
+          </a:xfrm>
+          <a:prstGeom prst="rect">
+            <a:avLst/>
+          </a:prstGeom>
+          <a:noFill/>
+        </p:spPr>
+        <p:txBody>
+          <a:bodyPr wrap="square" anchor="t" lIns="0" rIns="0" tIns="0" bIns="0">
+            <a:spAutoFit/>
+          </a:bodyPr>
+          <a:lstStyle/>
+          <a:p>
+            <a:pPr algn="l"/>
+            <a:r>
+              <a:rPr sz="1250" b="0">
+                <a:solidFill>
+                  <a:srgbClr val="1F2937"/>
+                </a:solidFill>
+                <a:latin typeface="Calibri"/>
+              </a:rPr>
+              <a:t>distinct texts in 20,000 tickets: 11 templates × 20 services. The work type follows from the template.</a:t>
+            </a:r>
+          </a:p>
+        </p:txBody>
+      </p:sp>
+      <p:sp>
+        <p:nvSpPr>
+          <p:cNvPr id="8" name="Rounded Rectangle 7"/>
+          <p:cNvSpPr/>
+          <p:nvPr/>
+        </p:nvSpPr>
+        <p:spPr>
+          <a:xfrm>
+            <a:off x="457200" y="2926080"/>
+            <a:ext cx="3611880" cy="1325880"/>
+          </a:xfrm>
+          <a:prstGeom prst="roundRect">
+            <a:avLst>
+              <a:gd name="adj" fmla="val 5000"/>
+            </a:avLst>
+          </a:prstGeom>
+          <a:solidFill>
+            <a:srgbClr val="F3F5F9"/>
+          </a:solidFill>
+          <a:ln>
+            <a:noFill/>
+          </a:ln>
+          <a:effectLst/>
+        </p:spPr>
+        <p:style>
+          <a:lnRef idx="1">
+            <a:schemeClr val="accent1"/>
+          </a:lnRef>
+          <a:fillRef idx="3">
+            <a:schemeClr val="accent1"/>
+          </a:fillRef>
+          <a:effectRef idx="2">
+            <a:schemeClr val="accent1"/>
+          </a:effectRef>
+          <a:fontRef idx="minor">
+            <a:schemeClr val="lt1"/>
+          </a:fontRef>
+        </p:style>
+        <p:txBody>
+          <a:bodyPr rtlCol="0" anchor="ctr"/>
+          <a:lstStyle/>
+          <a:p>
+            <a:pPr algn="ctr"/>
+          </a:p>
+        </p:txBody>
+      </p:sp>
+      <p:sp>
+        <p:nvSpPr>
+          <p:cNvPr id="9" name="TextBox 8"/>
+          <p:cNvSpPr txBox="1"/>
+          <p:nvPr/>
+        </p:nvSpPr>
+        <p:spPr>
+          <a:xfrm>
+            <a:off x="685800" y="3035808"/>
+            <a:ext cx="3200400" cy="502920"/>
+          </a:xfrm>
+          <a:prstGeom prst="rect">
+            <a:avLst/>
+          </a:prstGeom>
+          <a:noFill/>
+        </p:spPr>
+        <p:txBody>
+          <a:bodyPr wrap="square" anchor="t" lIns="0" rIns="0" tIns="0" bIns="0">
+            <a:spAutoFit/>
+          </a:bodyPr>
+          <a:lstStyle/>
+          <a:p>
+            <a:pPr algn="l"/>
+            <a:r>
+              <a:rPr sz="3000" b="1">
+                <a:solidFill>
+                  <a:srgbClr val="E4572E"/>
+                </a:solidFill>
+                <a:latin typeface="Cambria"/>
+              </a:rPr>
+              <a:t>Random</a:t>
+            </a:r>
+          </a:p>
+        </p:txBody>
+      </p:sp>
+      <p:sp>
+        <p:nvSpPr>
+          <p:cNvPr id="10" name="TextBox 9"/>
+          <p:cNvSpPr txBox="1"/>
+          <p:nvPr/>
+        </p:nvSpPr>
+        <p:spPr>
+          <a:xfrm>
+            <a:off x="685800" y="3547872"/>
+            <a:ext cx="3200400" cy="685800"/>
+          </a:xfrm>
+          <a:prstGeom prst="rect">
+            <a:avLst/>
+          </a:prstGeom>
+          <a:noFill/>
+        </p:spPr>
+        <p:txBody>
+          <a:bodyPr wrap="square" anchor="t" lIns="0" rIns="0" tIns="0" bIns="0">
+            <a:spAutoFit/>
+          </a:bodyPr>
+          <a:lstStyle/>
+          <a:p>
+            <a:pPr algn="l"/>
+            <a:r>
+              <a:rPr sz="1250" b="0">
+                <a:solidFill>
+                  <a:srgbClr val="1F2937"/>
+                </a:solidFill>
+                <a:latin typeface="Calibri"/>
+              </a:rPr>
+              <a:t>priority, urgency, impact, resolution status and assignee. Accuracy on unseen tickets equals guessing.</a:t>
+            </a:r>
+          </a:p>
+        </p:txBody>
+      </p:sp>
+      <p:sp>
+        <p:nvSpPr>
+          <p:cNvPr id="11" name="Rounded Rectangle 10"/>
+          <p:cNvSpPr/>
+          <p:nvPr/>
+        </p:nvSpPr>
+        <p:spPr>
+          <a:xfrm>
+            <a:off x="457200" y="4389120"/>
+            <a:ext cx="3611880" cy="1325880"/>
+          </a:xfrm>
+          <a:prstGeom prst="roundRect">
+            <a:avLst>
+              <a:gd name="adj" fmla="val 5000"/>
+            </a:avLst>
+          </a:prstGeom>
+          <a:solidFill>
+            <a:srgbClr val="F3F5F9"/>
+          </a:solidFill>
+          <a:ln>
+            <a:noFill/>
+          </a:ln>
+          <a:effectLst/>
+        </p:spPr>
+        <p:style>
+          <a:lnRef idx="1">
+            <a:schemeClr val="accent1"/>
+          </a:lnRef>
+          <a:fillRef idx="3">
+            <a:schemeClr val="accent1"/>
+          </a:fillRef>
+          <a:effectRef idx="2">
+            <a:schemeClr val="accent1"/>
+          </a:effectRef>
+          <a:fontRef idx="minor">
+            <a:schemeClr val="lt1"/>
+          </a:fontRef>
+        </p:style>
+        <p:txBody>
+          <a:bodyPr rtlCol="0" anchor="ctr"/>
+          <a:lstStyle/>
+          <a:p>
+            <a:pPr algn="ctr"/>
+          </a:p>
+        </p:txBody>
+      </p:sp>
+      <p:sp>
+        <p:nvSpPr>
+          <p:cNvPr id="12" name="TextBox 11"/>
+          <p:cNvSpPr txBox="1"/>
+          <p:nvPr/>
+        </p:nvSpPr>
+        <p:spPr>
+          <a:xfrm>
+            <a:off x="685800" y="4498848"/>
+            <a:ext cx="3200400" cy="502920"/>
+          </a:xfrm>
+          <a:prstGeom prst="rect">
+            <a:avLst/>
+          </a:prstGeom>
+          <a:noFill/>
+        </p:spPr>
+        <p:txBody>
+          <a:bodyPr wrap="square" anchor="t" lIns="0" rIns="0" tIns="0" bIns="0">
+            <a:spAutoFit/>
+          </a:bodyPr>
+          <a:lstStyle/>
+          <a:p>
+            <a:pPr algn="l"/>
+            <a:r>
+              <a:rPr sz="3000" b="1">
+                <a:solidFill>
+                  <a:srgbClr val="E4572E"/>
+                </a:solidFill>
+                <a:latin typeface="Cambria"/>
+              </a:rPr>
+              <a:t>3.6 %</a:t>
+            </a:r>
+          </a:p>
+        </p:txBody>
+      </p:sp>
+      <p:sp>
+        <p:nvSpPr>
+          <p:cNvPr id="13" name="TextBox 12"/>
+          <p:cNvSpPr txBox="1"/>
+          <p:nvPr/>
+        </p:nvSpPr>
+        <p:spPr>
+          <a:xfrm>
+            <a:off x="685800" y="5010912"/>
+            <a:ext cx="3200400" cy="685800"/>
+          </a:xfrm>
+          <a:prstGeom prst="rect">
+            <a:avLst/>
+          </a:prstGeom>
+          <a:noFill/>
+        </p:spPr>
+        <p:txBody>
+          <a:bodyPr wrap="square" anchor="t" lIns="0" rIns="0" tIns="0" bIns="0">
+            <a:spAutoFit/>
+          </a:bodyPr>
+          <a:lstStyle/>
+          <a:p>
+            <a:pPr algn="l"/>
+            <a:r>
+              <a:rPr sz="1250" b="0">
+                <a:solidFill>
+                  <a:srgbClr val="1F2937"/>
+                </a:solidFill>
+                <a:latin typeface="Calibri"/>
+              </a:rPr>
+              <a:t>best accuracy for the assignee out of 30 people, over every field and model (chance: 3.3 %).</a:t>
+            </a:r>
+          </a:p>
+        </p:txBody>
+      </p:sp>
+      <p:sp>
+        <p:nvSpPr>
+          <p:cNvPr id="14" name="Rounded Rectangle 13"/>
+          <p:cNvSpPr/>
+          <p:nvPr/>
+        </p:nvSpPr>
+        <p:spPr>
+          <a:xfrm>
+            <a:off x="457200" y="5852160"/>
+            <a:ext cx="3611880" cy="548640"/>
+          </a:xfrm>
+          <a:prstGeom prst="roundRect">
+            <a:avLst>
+              <a:gd name="adj" fmla="val 5000"/>
+            </a:avLst>
           </a:prstGeom>
           <a:solidFill>
             <a:srgbClr val="1B2A49"/>
@@ -4296,10 +6274,284 @@
           </a:fontRef>
         </p:style>
         <p:txBody>
-          <a:bodyPr lIns="0" tIns="0" rIns="0" bIns="0" rtlCol="0" anchor="ctr"/>
+          <a:bodyPr rtlCol="0" anchor="ctr"/>
           <a:lstStyle/>
           <a:p>
             <a:pPr algn="ctr"/>
+          </a:p>
+        </p:txBody>
+      </p:sp>
+      <p:sp>
+        <p:nvSpPr>
+          <p:cNvPr id="15" name="TextBox 14"/>
+          <p:cNvSpPr txBox="1"/>
+          <p:nvPr/>
+        </p:nvSpPr>
+        <p:spPr>
+          <a:xfrm>
+            <a:off x="640080" y="5852160"/>
+            <a:ext cx="3291840" cy="548640"/>
+          </a:xfrm>
+          <a:prstGeom prst="rect">
+            <a:avLst/>
+          </a:prstGeom>
+          <a:noFill/>
+        </p:spPr>
+        <p:txBody>
+          <a:bodyPr wrap="square" anchor="ctr" lIns="0" rIns="0" tIns="0" bIns="0">
+            <a:spAutoFit/>
+          </a:bodyPr>
+          <a:lstStyle/>
+          <a:p>
+            <a:pPr algn="l"/>
+            <a:r>
+              <a:rPr sz="1250" b="1">
+                <a:solidFill>
+                  <a:srgbClr val="FFFFFF"/>
+                </a:solidFill>
+                <a:latin typeface="Calibri"/>
+              </a:rPr>
+              <a:t>So the history is only good for retrieval and service → team.</a:t>
+            </a:r>
+          </a:p>
+        </p:txBody>
+      </p:sp>
+      <p:pic>
+        <p:nvPicPr>
+          <p:cNvPr id="16" name="Picture 15" descr="02_signal_vs_noise.png"/>
+          <p:cNvPicPr>
+            <a:picLocks noChangeAspect="1"/>
+          </p:cNvPicPr>
+          <p:nvPr/>
+        </p:nvPicPr>
+        <p:blipFill>
+          <a:blip r:embed="rId2"/>
+          <a:stretch>
+            <a:fillRect/>
+          </a:stretch>
+        </p:blipFill>
+        <p:spPr>
+          <a:xfrm>
+            <a:off x="4343400" y="1463040"/>
+            <a:ext cx="7388352" cy="3657687"/>
+          </a:xfrm>
+          <a:prstGeom prst="rect">
+            <a:avLst/>
+          </a:prstGeom>
+          <a:ln w="9525">
+            <a:solidFill>
+              <a:srgbClr val="D9DEE7"/>
+            </a:solidFill>
+          </a:ln>
+        </p:spPr>
+      </p:pic>
+      <p:pic>
+        <p:nvPicPr>
+          <p:cNvPr id="17" name="Picture 16" descr="raw_record.png"/>
+          <p:cNvPicPr>
+            <a:picLocks noChangeAspect="1"/>
+          </p:cNvPicPr>
+          <p:nvPr/>
+        </p:nvPicPr>
+        <p:blipFill>
+          <a:blip r:embed="rId3"/>
+          <a:stretch>
+            <a:fillRect/>
+          </a:stretch>
+        </p:blipFill>
+        <p:spPr>
+          <a:xfrm>
+            <a:off x="4343400" y="5248743"/>
+            <a:ext cx="2414358" cy="1143000"/>
+          </a:xfrm>
+          <a:prstGeom prst="rect">
+            <a:avLst/>
+          </a:prstGeom>
+          <a:ln w="9525">
+            <a:solidFill>
+              <a:srgbClr val="D9DEE7"/>
+            </a:solidFill>
+          </a:ln>
+        </p:spPr>
+      </p:pic>
+      <p:pic>
+        <p:nvPicPr>
+          <p:cNvPr id="18" name="Picture 17" descr="03_priority.png"/>
+          <p:cNvPicPr>
+            <a:picLocks noChangeAspect="1"/>
+          </p:cNvPicPr>
+          <p:nvPr/>
+        </p:nvPicPr>
+        <p:blipFill>
+          <a:blip r:embed="rId4"/>
+          <a:stretch>
+            <a:fillRect/>
+          </a:stretch>
+        </p:blipFill>
+        <p:spPr>
+          <a:xfrm>
+            <a:off x="6940638" y="5248743"/>
+            <a:ext cx="2119377" cy="1143000"/>
+          </a:xfrm>
+          <a:prstGeom prst="rect">
+            <a:avLst/>
+          </a:prstGeom>
+          <a:ln w="9525">
+            <a:solidFill>
+              <a:srgbClr val="D9DEE7"/>
+            </a:solidFill>
+          </a:ln>
+        </p:spPr>
+      </p:pic>
+      <p:sp>
+        <p:nvSpPr>
+          <p:cNvPr id="19" name="TextBox 18"/>
+          <p:cNvSpPr txBox="1"/>
+          <p:nvPr/>
+        </p:nvSpPr>
+        <p:spPr>
+          <a:xfrm>
+            <a:off x="9288615" y="5248743"/>
+            <a:ext cx="2443136" cy="1143000"/>
+          </a:xfrm>
+          <a:prstGeom prst="rect">
+            <a:avLst/>
+          </a:prstGeom>
+          <a:noFill/>
+        </p:spPr>
+        <p:txBody>
+          <a:bodyPr wrap="square" anchor="ctr" lIns="0" rIns="0" tIns="0" bIns="0">
+            <a:spAutoFit/>
+          </a:bodyPr>
+          <a:lstStyle/>
+          <a:p>
+            <a:pPr algn="l">
+              <a:spcAft>
+                <a:spcPts val="300"/>
+              </a:spcAft>
+            </a:pPr>
+            <a:r>
+              <a:rPr sz="1150" b="0">
+                <a:solidFill>
+                  <a:srgbClr val="6B7280"/>
+                </a:solidFill>
+                <a:latin typeface="Calibri"/>
+              </a:rPr>
+              <a:t>Evidence</a:t>
+            </a:r>
+          </a:p>
+          <a:p>
+            <a:pPr algn="l">
+              <a:spcAft>
+                <a:spcPts val="300"/>
+              </a:spcAft>
+            </a:pPr>
+            <a:r>
+              <a:rPr sz="1150" b="0">
+                <a:solidFill>
+                  <a:srgbClr val="6B7280"/>
+                </a:solidFill>
+                <a:latin typeface="Calibri"/>
+              </a:rPr>
+              <a:t>Left: a raw ticket, the random fields are marked. Right: priority against urgency and impact, flat.</a:t>
+            </a:r>
+          </a:p>
+        </p:txBody>
+      </p:sp>
+      <p:sp>
+        <p:nvSpPr>
+          <p:cNvPr id="20" name="TextBox 19"/>
+          <p:cNvSpPr txBox="1"/>
+          <p:nvPr/>
+        </p:nvSpPr>
+        <p:spPr>
+          <a:xfrm>
+            <a:off x="457200" y="6510528"/>
+            <a:ext cx="8229600" cy="228600"/>
+          </a:xfrm>
+          <a:prstGeom prst="rect">
+            <a:avLst/>
+          </a:prstGeom>
+          <a:noFill/>
+        </p:spPr>
+        <p:txBody>
+          <a:bodyPr wrap="square" anchor="t" lIns="0" rIns="0" tIns="0" bIns="0">
+            <a:spAutoFit/>
+          </a:bodyPr>
+          <a:lstStyle/>
+          <a:p>
+            <a:pPr algn="l"/>
+            <a:r>
+              <a:rPr sz="1000" b="0">
+                <a:solidFill>
+                  <a:srgbClr val="6B7280"/>
+                </a:solidFill>
+                <a:latin typeface="Calibri"/>
+              </a:rPr>
+              <a:t>TicketTriage  ·  Swiss {ai} Weeks  ·  Data analysis (Notebooks/ticket_data_analysis.ipynb)</a:t>
+            </a:r>
+          </a:p>
+        </p:txBody>
+      </p:sp>
+    </p:spTree>
+  </p:cSld>
+  <p:clrMapOvr>
+    <a:masterClrMapping/>
+  </p:clrMapOvr>
+</p:sld>
+</file>
+
+<file path=ppt/slides/slide3.xml><?xml version="1.0" encoding="utf-8"?>
+<p:sld xmlns:a="http://schemas.openxmlformats.org/drawingml/2006/main" xmlns:p="http://schemas.openxmlformats.org/presentationml/2006/main" xmlns:r="http://schemas.openxmlformats.org/officeDocument/2006/relationships">
+  <p:cSld>
+    <p:spTree>
+      <p:nvGrpSpPr>
+        <p:cNvPr id="1" name=""/>
+        <p:cNvGrpSpPr/>
+        <p:nvPr/>
+      </p:nvGrpSpPr>
+      <p:grpSpPr/>
+      <p:sp>
+        <p:nvSpPr>
+          <p:cNvPr id="2" name="Oval 1"/>
+          <p:cNvSpPr/>
+          <p:nvPr/>
+        </p:nvSpPr>
+        <p:spPr>
+          <a:xfrm>
+            <a:off x="457200" y="384048"/>
+            <a:ext cx="566928" cy="566928"/>
+          </a:xfrm>
+          <a:prstGeom prst="ellipse">
+            <a:avLst/>
+          </a:prstGeom>
+          <a:solidFill>
+            <a:srgbClr val="1B2A49"/>
+          </a:solidFill>
+          <a:ln>
+            <a:noFill/>
+          </a:ln>
+          <a:effectLst/>
+        </p:spPr>
+        <p:style>
+          <a:lnRef idx="1">
+            <a:schemeClr val="accent1"/>
+          </a:lnRef>
+          <a:fillRef idx="3">
+            <a:schemeClr val="accent1"/>
+          </a:fillRef>
+          <a:effectRef idx="2">
+            <a:schemeClr val="accent1"/>
+          </a:effectRef>
+          <a:fontRef idx="minor">
+            <a:schemeClr val="lt1"/>
+          </a:fontRef>
+        </p:style>
+        <p:txBody>
+          <a:bodyPr rtlCol="0" anchor="ctr" lIns="0" rIns="0" tIns="0" bIns="0"/>
+          <a:lstStyle/>
+          <a:p>
+            <a:pPr algn="ctr"/>
             <a:r>
               <a:rPr sz="2200" b="1">
                 <a:solidFill>
@@ -4307,7 +6559,7 @@
                 </a:solidFill>
                 <a:latin typeface="Cambria"/>
               </a:rPr>
-              <a:t>2</a:t>
+              <a:t>3</a:t>
             </a:r>
           </a:p>
         </p:txBody>
@@ -4329,7 +6581,7 @@
           <a:noFill/>
         </p:spPr>
         <p:txBody>
-          <a:bodyPr wrap="square" lIns="0" tIns="0" rIns="0" bIns="0" anchor="ctr">
+          <a:bodyPr wrap="square" anchor="ctr" lIns="0" rIns="0" tIns="0" bIns="0">
             <a:spAutoFit/>
           </a:bodyPr>
           <a:lstStyle/>
@@ -4364,7 +6616,7 @@
           <a:noFill/>
         </p:spPr>
         <p:txBody>
-          <a:bodyPr wrap="square" lIns="0" tIns="0" rIns="0" bIns="0" anchor="t">
+          <a:bodyPr wrap="square" anchor="t" lIns="0" rIns="0" tIns="0" bIns="0">
             <a:spAutoFit/>
           </a:bodyPr>
           <a:lstStyle/>
@@ -4399,7 +6651,7 @@
           <a:noFill/>
         </p:spPr>
         <p:txBody>
-          <a:bodyPr wrap="square" lIns="0" tIns="0" rIns="0" bIns="0" anchor="t">
+          <a:bodyPr wrap="square" anchor="t" lIns="0" rIns="0" tIns="0" bIns="0">
             <a:spAutoFit/>
           </a:bodyPr>
           <a:lstStyle/>
@@ -4462,7 +6714,6 @@
           <a:lstStyle/>
           <a:p>
             <a:pPr algn="ctr"/>
-            <a:endParaRPr/>
           </a:p>
         </p:txBody>
       </p:sp>
@@ -4483,7 +6734,7 @@
           <a:noFill/>
         </p:spPr>
         <p:txBody>
-          <a:bodyPr wrap="square" lIns="0" tIns="0" rIns="0" bIns="0" anchor="t">
+          <a:bodyPr wrap="square" anchor="t" lIns="0" rIns="0" tIns="0" bIns="0">
             <a:spAutoFit/>
           </a:bodyPr>
           <a:lstStyle/>
@@ -4518,7 +6769,7 @@
           <a:noFill/>
         </p:spPr>
         <p:txBody>
-          <a:bodyPr wrap="square" lIns="0" tIns="0" rIns="0" bIns="0" anchor="t">
+          <a:bodyPr wrap="square" anchor="t" lIns="0" rIns="0" tIns="0" bIns="0">
             <a:spAutoFit/>
           </a:bodyPr>
           <a:lstStyle/>
@@ -4577,7 +6828,6 @@
           <a:lstStyle/>
           <a:p>
             <a:pPr algn="ctr"/>
-            <a:endParaRPr/>
           </a:p>
         </p:txBody>
       </p:sp>
@@ -4626,7 +6876,6 @@
           <a:lstStyle/>
           <a:p>
             <a:pPr algn="ctr"/>
-            <a:endParaRPr/>
           </a:p>
         </p:txBody>
       </p:sp>
@@ -4647,7 +6896,7 @@
           <a:noFill/>
         </p:spPr>
         <p:txBody>
-          <a:bodyPr wrap="square" lIns="0" tIns="0" rIns="0" bIns="0" anchor="t">
+          <a:bodyPr wrap="square" anchor="t" lIns="0" rIns="0" tIns="0" bIns="0">
             <a:spAutoFit/>
           </a:bodyPr>
           <a:lstStyle/>
@@ -4682,7 +6931,7 @@
           <a:noFill/>
         </p:spPr>
         <p:txBody>
-          <a:bodyPr wrap="square" lIns="0" tIns="0" rIns="0" bIns="0" anchor="t">
+          <a:bodyPr wrap="square" anchor="t" lIns="0" rIns="0" tIns="0" bIns="0">
             <a:spAutoFit/>
           </a:bodyPr>
           <a:lstStyle/>
@@ -4741,7 +6990,6 @@
           <a:lstStyle/>
           <a:p>
             <a:pPr algn="ctr"/>
-            <a:endParaRPr/>
           </a:p>
         </p:txBody>
       </p:sp>
@@ -4790,7 +7038,6 @@
           <a:lstStyle/>
           <a:p>
             <a:pPr algn="ctr"/>
-            <a:endParaRPr/>
           </a:p>
         </p:txBody>
       </p:sp>
@@ -4811,7 +7058,7 @@
           <a:noFill/>
         </p:spPr>
         <p:txBody>
-          <a:bodyPr wrap="square" lIns="0" tIns="0" rIns="0" bIns="0" anchor="t">
+          <a:bodyPr wrap="square" anchor="t" lIns="0" rIns="0" tIns="0" bIns="0">
             <a:spAutoFit/>
           </a:bodyPr>
           <a:lstStyle/>
@@ -4846,7 +7093,7 @@
           <a:noFill/>
         </p:spPr>
         <p:txBody>
-          <a:bodyPr wrap="square" lIns="0" tIns="0" rIns="0" bIns="0" anchor="t">
+          <a:bodyPr wrap="square" anchor="t" lIns="0" rIns="0" tIns="0" bIns="0">
             <a:spAutoFit/>
           </a:bodyPr>
           <a:lstStyle/>
@@ -4905,7 +7152,6 @@
           <a:lstStyle/>
           <a:p>
             <a:pPr algn="ctr"/>
-            <a:endParaRPr/>
           </a:p>
         </p:txBody>
       </p:sp>
@@ -4954,7 +7200,6 @@
           <a:lstStyle/>
           <a:p>
             <a:pPr algn="ctr"/>
-            <a:endParaRPr/>
           </a:p>
         </p:txBody>
       </p:sp>
@@ -4975,7 +7220,7 @@
           <a:noFill/>
         </p:spPr>
         <p:txBody>
-          <a:bodyPr wrap="square" lIns="0" tIns="0" rIns="0" bIns="0" anchor="t">
+          <a:bodyPr wrap="square" anchor="t" lIns="0" rIns="0" tIns="0" bIns="0">
             <a:spAutoFit/>
           </a:bodyPr>
           <a:lstStyle/>
@@ -5010,7 +7255,7 @@
           <a:noFill/>
         </p:spPr>
         <p:txBody>
-          <a:bodyPr wrap="square" lIns="0" tIns="0" rIns="0" bIns="0" anchor="t">
+          <a:bodyPr wrap="square" anchor="t" lIns="0" rIns="0" tIns="0" bIns="0">
             <a:spAutoFit/>
           </a:bodyPr>
           <a:lstStyle/>
@@ -5069,7 +7314,6 @@
           <a:lstStyle/>
           <a:p>
             <a:pPr algn="ctr"/>
-            <a:endParaRPr/>
           </a:p>
         </p:txBody>
       </p:sp>
@@ -5118,7 +7362,6 @@
           <a:lstStyle/>
           <a:p>
             <a:pPr algn="ctr"/>
-            <a:endParaRPr/>
           </a:p>
         </p:txBody>
       </p:sp>
@@ -5139,7 +7382,7 @@
           <a:noFill/>
         </p:spPr>
         <p:txBody>
-          <a:bodyPr wrap="square" lIns="0" tIns="0" rIns="0" bIns="0" anchor="t">
+          <a:bodyPr wrap="square" anchor="t" lIns="0" rIns="0" tIns="0" bIns="0">
             <a:spAutoFit/>
           </a:bodyPr>
           <a:lstStyle/>
@@ -5174,7 +7417,7 @@
           <a:noFill/>
         </p:spPr>
         <p:txBody>
-          <a:bodyPr wrap="square" lIns="0" tIns="0" rIns="0" bIns="0" anchor="t">
+          <a:bodyPr wrap="square" anchor="t" lIns="0" rIns="0" tIns="0" bIns="0">
             <a:spAutoFit/>
           </a:bodyPr>
           <a:lstStyle/>
@@ -5233,7 +7476,6 @@
           <a:lstStyle/>
           <a:p>
             <a:pPr algn="ctr"/>
-            <a:endParaRPr/>
           </a:p>
         </p:txBody>
       </p:sp>
@@ -5282,7 +7524,6 @@
           <a:lstStyle/>
           <a:p>
             <a:pPr algn="ctr"/>
-            <a:endParaRPr/>
           </a:p>
         </p:txBody>
       </p:sp>
@@ -5303,7 +7544,7 @@
           <a:noFill/>
         </p:spPr>
         <p:txBody>
-          <a:bodyPr wrap="square" lIns="0" tIns="0" rIns="0" bIns="0" anchor="t">
+          <a:bodyPr wrap="square" anchor="t" lIns="0" rIns="0" tIns="0" bIns="0">
             <a:spAutoFit/>
           </a:bodyPr>
           <a:lstStyle/>
@@ -5338,7 +7579,7 @@
           <a:noFill/>
         </p:spPr>
         <p:txBody>
-          <a:bodyPr wrap="square" lIns="0" tIns="0" rIns="0" bIns="0" anchor="t">
+          <a:bodyPr wrap="square" anchor="t" lIns="0" rIns="0" tIns="0" bIns="0">
             <a:spAutoFit/>
           </a:bodyPr>
           <a:lstStyle/>
@@ -5399,7 +7640,6 @@
           <a:lstStyle/>
           <a:p>
             <a:pPr algn="ctr"/>
-            <a:endParaRPr/>
           </a:p>
         </p:txBody>
       </p:sp>
@@ -5420,7 +7660,7 @@
           <a:noFill/>
         </p:spPr>
         <p:txBody>
-          <a:bodyPr wrap="square" lIns="0" tIns="0" rIns="0" bIns="0" anchor="ctr">
+          <a:bodyPr wrap="square" anchor="ctr" lIns="0" rIns="0" tIns="0" bIns="0">
             <a:spAutoFit/>
           </a:bodyPr>
           <a:lstStyle/>
@@ -5455,7 +7695,7 @@
           <a:noFill/>
         </p:spPr>
         <p:txBody>
-          <a:bodyPr wrap="square" lIns="0" tIns="0" rIns="0" bIns="0" anchor="t">
+          <a:bodyPr wrap="square" anchor="t" lIns="0" rIns="0" tIns="0" bIns="0">
             <a:spAutoFit/>
           </a:bodyPr>
           <a:lstStyle/>
@@ -5518,7 +7758,6 @@
           <a:lstStyle/>
           <a:p>
             <a:pPr algn="ctr"/>
-            <a:endParaRPr/>
           </a:p>
         </p:txBody>
       </p:sp>
@@ -5539,7 +7778,7 @@
           <a:noFill/>
         </p:spPr>
         <p:txBody>
-          <a:bodyPr wrap="square" lIns="0" tIns="0" rIns="0" bIns="0" anchor="ctr">
+          <a:bodyPr wrap="square" anchor="ctr" lIns="0" rIns="0" tIns="0" bIns="0">
             <a:spAutoFit/>
           </a:bodyPr>
           <a:lstStyle/>
@@ -5602,7 +7841,6 @@
           <a:lstStyle/>
           <a:p>
             <a:pPr algn="ctr"/>
-            <a:endParaRPr/>
           </a:p>
         </p:txBody>
       </p:sp>
@@ -5623,7 +7861,7 @@
           <a:noFill/>
         </p:spPr>
         <p:txBody>
-          <a:bodyPr wrap="square" lIns="0" tIns="0" rIns="0" bIns="0" anchor="ctr">
+          <a:bodyPr wrap="square" anchor="ctr" lIns="0" rIns="0" tIns="0" bIns="0">
             <a:spAutoFit/>
           </a:bodyPr>
           <a:lstStyle/>
@@ -5686,7 +7924,6 @@
           <a:lstStyle/>
           <a:p>
             <a:pPr algn="ctr"/>
-            <a:endParaRPr/>
           </a:p>
         </p:txBody>
       </p:sp>
@@ -5707,7 +7944,7 @@
           <a:noFill/>
         </p:spPr>
         <p:txBody>
-          <a:bodyPr wrap="square" lIns="0" tIns="0" rIns="0" bIns="0" anchor="t">
+          <a:bodyPr wrap="square" anchor="t" lIns="0" rIns="0" tIns="0" bIns="0">
             <a:spAutoFit/>
           </a:bodyPr>
           <a:lstStyle/>
@@ -5742,7 +7979,7 @@
           <a:noFill/>
         </p:spPr>
         <p:txBody>
-          <a:bodyPr wrap="square" lIns="0" tIns="0" rIns="0" bIns="0" anchor="t">
+          <a:bodyPr wrap="square" anchor="t" lIns="0" rIns="0" tIns="0" bIns="0">
             <a:spAutoFit/>
           </a:bodyPr>
           <a:lstStyle/>
@@ -5801,7 +8038,6 @@
           <a:lstStyle/>
           <a:p>
             <a:pPr algn="ctr"/>
-            <a:endParaRPr/>
           </a:p>
         </p:txBody>
       </p:sp>
@@ -5850,7 +8086,6 @@
           <a:lstStyle/>
           <a:p>
             <a:pPr algn="ctr"/>
-            <a:endParaRPr/>
           </a:p>
         </p:txBody>
       </p:sp>
@@ -5871,7 +8106,7 @@
           <a:noFill/>
         </p:spPr>
         <p:txBody>
-          <a:bodyPr wrap="square" lIns="0" tIns="0" rIns="0" bIns="0" anchor="t">
+          <a:bodyPr wrap="square" anchor="t" lIns="0" rIns="0" tIns="0" bIns="0">
             <a:spAutoFit/>
           </a:bodyPr>
           <a:lstStyle/>
@@ -5906,7 +8141,7 @@
           <a:noFill/>
         </p:spPr>
         <p:txBody>
-          <a:bodyPr wrap="square" lIns="0" tIns="0" rIns="0" bIns="0" anchor="t">
+          <a:bodyPr wrap="square" anchor="t" lIns="0" rIns="0" tIns="0" bIns="0">
             <a:spAutoFit/>
           </a:bodyPr>
           <a:lstStyle/>
@@ -5965,7 +8200,6 @@
           <a:lstStyle/>
           <a:p>
             <a:pPr algn="ctr"/>
-            <a:endParaRPr/>
           </a:p>
         </p:txBody>
       </p:sp>
@@ -6014,7 +8248,6 @@
           <a:lstStyle/>
           <a:p>
             <a:pPr algn="ctr"/>
-            <a:endParaRPr/>
           </a:p>
         </p:txBody>
       </p:sp>
@@ -6035,7 +8268,7 @@
           <a:noFill/>
         </p:spPr>
         <p:txBody>
-          <a:bodyPr wrap="square" lIns="0" tIns="0" rIns="0" bIns="0" anchor="t">
+          <a:bodyPr wrap="square" anchor="t" lIns="0" rIns="0" tIns="0" bIns="0">
             <a:spAutoFit/>
           </a:bodyPr>
           <a:lstStyle/>
@@ -6070,7 +8303,7 @@
           <a:noFill/>
         </p:spPr>
         <p:txBody>
-          <a:bodyPr wrap="square" lIns="0" tIns="0" rIns="0" bIns="0" anchor="t">
+          <a:bodyPr wrap="square" anchor="t" lIns="0" rIns="0" tIns="0" bIns="0">
             <a:spAutoFit/>
           </a:bodyPr>
           <a:lstStyle/>
@@ -6129,7 +8362,6 @@
           <a:lstStyle/>
           <a:p>
             <a:pPr algn="ctr"/>
-            <a:endParaRPr/>
           </a:p>
         </p:txBody>
       </p:sp>
@@ -6178,7 +8410,6 @@
           <a:lstStyle/>
           <a:p>
             <a:pPr algn="ctr"/>
-            <a:endParaRPr/>
           </a:p>
         </p:txBody>
       </p:sp>
@@ -6199,7 +8430,7 @@
           <a:noFill/>
         </p:spPr>
         <p:txBody>
-          <a:bodyPr wrap="square" lIns="0" tIns="0" rIns="0" bIns="0" anchor="t">
+          <a:bodyPr wrap="square" anchor="t" lIns="0" rIns="0" tIns="0" bIns="0">
             <a:spAutoFit/>
           </a:bodyPr>
           <a:lstStyle/>
@@ -6234,7 +8465,7 @@
           <a:noFill/>
         </p:spPr>
         <p:txBody>
-          <a:bodyPr wrap="square" lIns="0" tIns="0" rIns="0" bIns="0" anchor="t">
+          <a:bodyPr wrap="square" anchor="t" lIns="0" rIns="0" tIns="0" bIns="0">
             <a:spAutoFit/>
           </a:bodyPr>
           <a:lstStyle/>
@@ -6293,7 +8524,6 @@
           <a:lstStyle/>
           <a:p>
             <a:pPr algn="ctr"/>
-            <a:endParaRPr/>
           </a:p>
         </p:txBody>
       </p:sp>
@@ -6342,7 +8572,6 @@
           <a:lstStyle/>
           <a:p>
             <a:pPr algn="ctr"/>
-            <a:endParaRPr/>
           </a:p>
         </p:txBody>
       </p:sp>
@@ -6363,7 +8592,7 @@
           <a:noFill/>
         </p:spPr>
         <p:txBody>
-          <a:bodyPr wrap="square" lIns="0" tIns="0" rIns="0" bIns="0" anchor="t">
+          <a:bodyPr wrap="square" anchor="t" lIns="0" rIns="0" tIns="0" bIns="0">
             <a:spAutoFit/>
           </a:bodyPr>
           <a:lstStyle/>
@@ -6398,7 +8627,7 @@
           <a:noFill/>
         </p:spPr>
         <p:txBody>
-          <a:bodyPr wrap="square" lIns="0" tIns="0" rIns="0" bIns="0" anchor="t">
+          <a:bodyPr wrap="square" anchor="t" lIns="0" rIns="0" tIns="0" bIns="0">
             <a:spAutoFit/>
           </a:bodyPr>
           <a:lstStyle/>
@@ -6457,7 +8686,6 @@
           <a:lstStyle/>
           <a:p>
             <a:pPr algn="ctr"/>
-            <a:endParaRPr/>
           </a:p>
         </p:txBody>
       </p:sp>
@@ -6506,7 +8734,6 @@
           <a:lstStyle/>
           <a:p>
             <a:pPr algn="ctr"/>
-            <a:endParaRPr/>
           </a:p>
         </p:txBody>
       </p:sp>
@@ -6527,7 +8754,7 @@
           <a:noFill/>
         </p:spPr>
         <p:txBody>
-          <a:bodyPr wrap="square" lIns="0" tIns="0" rIns="0" bIns="0" anchor="t">
+          <a:bodyPr wrap="square" anchor="t" lIns="0" rIns="0" tIns="0" bIns="0">
             <a:spAutoFit/>
           </a:bodyPr>
           <a:lstStyle/>
@@ -6562,7 +8789,7 @@
           <a:noFill/>
         </p:spPr>
         <p:txBody>
-          <a:bodyPr wrap="square" lIns="0" tIns="0" rIns="0" bIns="0" anchor="t">
+          <a:bodyPr wrap="square" anchor="t" lIns="0" rIns="0" tIns="0" bIns="0">
             <a:spAutoFit/>
           </a:bodyPr>
           <a:lstStyle/>
@@ -6597,7 +8824,7 @@
           <a:noFill/>
         </p:spPr>
         <p:txBody>
-          <a:bodyPr wrap="square" lIns="0" tIns="0" rIns="0" bIns="0" anchor="t">
+          <a:bodyPr wrap="square" anchor="t" lIns="0" rIns="0" tIns="0" bIns="0">
             <a:spAutoFit/>
           </a:bodyPr>
           <a:lstStyle/>
@@ -6660,7 +8887,6 @@
           <a:lstStyle/>
           <a:p>
             <a:pPr algn="ctr"/>
-            <a:endParaRPr/>
           </a:p>
         </p:txBody>
       </p:sp>
@@ -6681,7 +8907,7 @@
           <a:noFill/>
         </p:spPr>
         <p:txBody>
-          <a:bodyPr wrap="square" lIns="0" tIns="0" rIns="0" bIns="0" anchor="t">
+          <a:bodyPr wrap="square" anchor="t" lIns="0" rIns="0" tIns="0" bIns="0">
             <a:spAutoFit/>
           </a:bodyPr>
           <a:lstStyle/>
@@ -6716,7 +8942,7 @@
           <a:noFill/>
         </p:spPr>
         <p:txBody>
-          <a:bodyPr wrap="square" lIns="0" tIns="0" rIns="0" bIns="0" anchor="t">
+          <a:bodyPr wrap="square" anchor="t" lIns="0" rIns="0" tIns="0" bIns="0">
             <a:spAutoFit/>
           </a:bodyPr>
           <a:lstStyle/>
@@ -6775,7 +9001,6 @@
           <a:lstStyle/>
           <a:p>
             <a:pPr algn="ctr"/>
-            <a:endParaRPr/>
           </a:p>
         </p:txBody>
       </p:sp>
@@ -6824,7 +9049,6 @@
           <a:lstStyle/>
           <a:p>
             <a:pPr algn="ctr"/>
-            <a:endParaRPr/>
           </a:p>
         </p:txBody>
       </p:sp>
@@ -6845,7 +9069,7 @@
           <a:noFill/>
         </p:spPr>
         <p:txBody>
-          <a:bodyPr wrap="square" lIns="0" tIns="0" rIns="0" bIns="0" anchor="t">
+          <a:bodyPr wrap="square" anchor="t" lIns="0" rIns="0" tIns="0" bIns="0">
             <a:spAutoFit/>
           </a:bodyPr>
           <a:lstStyle/>
@@ -6880,7 +9104,7 @@
           <a:noFill/>
         </p:spPr>
         <p:txBody>
-          <a:bodyPr wrap="square" lIns="0" tIns="0" rIns="0" bIns="0" anchor="t">
+          <a:bodyPr wrap="square" anchor="t" lIns="0" rIns="0" tIns="0" bIns="0">
             <a:spAutoFit/>
           </a:bodyPr>
           <a:lstStyle/>
@@ -6939,7 +9163,6 @@
           <a:lstStyle/>
           <a:p>
             <a:pPr algn="ctr"/>
-            <a:endParaRPr/>
           </a:p>
         </p:txBody>
       </p:sp>
@@ -6988,7 +9211,6 @@
           <a:lstStyle/>
           <a:p>
             <a:pPr algn="ctr"/>
-            <a:endParaRPr/>
           </a:p>
         </p:txBody>
       </p:sp>
@@ -7009,7 +9231,7 @@
           <a:noFill/>
         </p:spPr>
         <p:txBody>
-          <a:bodyPr wrap="square" lIns="0" tIns="0" rIns="0" bIns="0" anchor="t">
+          <a:bodyPr wrap="square" anchor="t" lIns="0" rIns="0" tIns="0" bIns="0">
             <a:spAutoFit/>
           </a:bodyPr>
           <a:lstStyle/>
@@ -7044,7 +9266,7 @@
           <a:noFill/>
         </p:spPr>
         <p:txBody>
-          <a:bodyPr wrap="square" lIns="0" tIns="0" rIns="0" bIns="0" anchor="t">
+          <a:bodyPr wrap="square" anchor="t" lIns="0" rIns="0" tIns="0" bIns="0">
             <a:spAutoFit/>
           </a:bodyPr>
           <a:lstStyle/>
@@ -7103,7 +9325,6 @@
           <a:lstStyle/>
           <a:p>
             <a:pPr algn="ctr"/>
-            <a:endParaRPr/>
           </a:p>
         </p:txBody>
       </p:sp>
@@ -7152,7 +9373,6 @@
           <a:lstStyle/>
           <a:p>
             <a:pPr algn="ctr"/>
-            <a:endParaRPr/>
           </a:p>
         </p:txBody>
       </p:sp>
@@ -7173,7 +9393,7 @@
           <a:noFill/>
         </p:spPr>
         <p:txBody>
-          <a:bodyPr wrap="square" lIns="0" tIns="0" rIns="0" bIns="0" anchor="t">
+          <a:bodyPr wrap="square" anchor="t" lIns="0" rIns="0" tIns="0" bIns="0">
             <a:spAutoFit/>
           </a:bodyPr>
           <a:lstStyle/>
@@ -7208,7 +9428,7 @@
           <a:noFill/>
         </p:spPr>
         <p:txBody>
-          <a:bodyPr wrap="square" lIns="0" tIns="0" rIns="0" bIns="0" anchor="t">
+          <a:bodyPr wrap="square" anchor="t" lIns="0" rIns="0" tIns="0" bIns="0">
             <a:spAutoFit/>
           </a:bodyPr>
           <a:lstStyle/>
@@ -7243,7 +9463,7 @@
           <a:noFill/>
         </p:spPr>
         <p:txBody>
-          <a:bodyPr wrap="square" lIns="0" tIns="0" rIns="0" bIns="0" anchor="t">
+          <a:bodyPr wrap="square" anchor="t" lIns="0" rIns="0" tIns="0" bIns="0">
             <a:spAutoFit/>
           </a:bodyPr>
           <a:lstStyle/>
@@ -7269,8 +9489,8 @@
 </p:sld>
 </file>
 
-<file path=ppt/slides/slide3.xml><?xml version="1.0" encoding="utf-8"?>
-<p:sld xmlns:a="http://schemas.openxmlformats.org/drawingml/2006/main" xmlns:r="http://schemas.openxmlformats.org/officeDocument/2006/relationships" xmlns:p="http://schemas.openxmlformats.org/presentationml/2006/main">
+<file path=ppt/slides/slide4.xml><?xml version="1.0" encoding="utf-8"?>
+<p:sld xmlns:a="http://schemas.openxmlformats.org/drawingml/2006/main" xmlns:p="http://schemas.openxmlformats.org/presentationml/2006/main" xmlns:r="http://schemas.openxmlformats.org/officeDocument/2006/relationships">
   <p:cSld>
     <p:spTree>
       <p:nvGrpSpPr>
@@ -7278,14 +9498,7 @@
         <p:cNvGrpSpPr/>
         <p:nvPr/>
       </p:nvGrpSpPr>
-      <p:grpSpPr>
-        <a:xfrm>
-          <a:off x="0" y="0"/>
-          <a:ext cx="0" cy="0"/>
-          <a:chOff x="0" y="0"/>
-          <a:chExt cx="0" cy="0"/>
-        </a:xfrm>
-      </p:grpSpPr>
+      <p:grpSpPr/>
       <p:sp>
         <p:nvSpPr>
           <p:cNvPr id="2" name="Oval 1"/>
@@ -7323,7 +9536,7 @@
           </a:fontRef>
         </p:style>
         <p:txBody>
-          <a:bodyPr lIns="0" tIns="0" rIns="0" bIns="0" rtlCol="0" anchor="ctr"/>
+          <a:bodyPr rtlCol="0" anchor="ctr" lIns="0" rIns="0" tIns="0" bIns="0"/>
           <a:lstStyle/>
           <a:p>
             <a:pPr algn="ctr"/>
@@ -7334,7 +9547,7 @@
                 </a:solidFill>
                 <a:latin typeface="Cambria"/>
               </a:rPr>
-              <a:t>3</a:t>
+              <a:t>4</a:t>
             </a:r>
           </a:p>
         </p:txBody>
@@ -7356,7 +9569,7 @@
           <a:noFill/>
         </p:spPr>
         <p:txBody>
-          <a:bodyPr wrap="square" lIns="0" tIns="0" rIns="0" bIns="0" anchor="ctr">
+          <a:bodyPr wrap="square" anchor="ctr" lIns="0" rIns="0" tIns="0" bIns="0">
             <a:spAutoFit/>
           </a:bodyPr>
           <a:lstStyle/>
@@ -7391,7 +9604,7 @@
           <a:noFill/>
         </p:spPr>
         <p:txBody>
-          <a:bodyPr wrap="square" lIns="0" tIns="0" rIns="0" bIns="0" anchor="t">
+          <a:bodyPr wrap="square" anchor="t" lIns="0" rIns="0" tIns="0" bIns="0">
             <a:spAutoFit/>
           </a:bodyPr>
           <a:lstStyle/>
@@ -7428,27 +9641,9 @@
                 <a:tableStyleId>{5C22544A-7EE6-4342-B048-85BDC9FD1C3A}</a:tableStyleId>
               </a:tblPr>
               <a:tblGrid>
-                <a:gridCol w="1874519">
-                  <a:extLst>
-                    <a:ext uri="{9D8B030D-6E8A-4147-A177-3AD203B41FA5}">
-                      <a16:colId xmlns:a16="http://schemas.microsoft.com/office/drawing/2014/main" val="20000"/>
-                    </a:ext>
-                  </a:extLst>
-                </a:gridCol>
-                <a:gridCol w="960120">
-                  <a:extLst>
-                    <a:ext uri="{9D8B030D-6E8A-4147-A177-3AD203B41FA5}">
-                      <a16:colId xmlns:a16="http://schemas.microsoft.com/office/drawing/2014/main" val="20001"/>
-                    </a:ext>
-                  </a:extLst>
-                </a:gridCol>
-                <a:gridCol w="3291840">
-                  <a:extLst>
-                    <a:ext uri="{9D8B030D-6E8A-4147-A177-3AD203B41FA5}">
-                      <a16:colId xmlns:a16="http://schemas.microsoft.com/office/drawing/2014/main" val="20002"/>
-                    </a:ext>
-                  </a:extLst>
-                </a:gridCol>
+                <a:gridCol w="1874519"/>
+                <a:gridCol w="960120"/>
+                <a:gridCol w="3291840"/>
               </a:tblGrid>
               <a:tr h="402336">
                 <a:tc>
@@ -7467,7 +9662,7 @@
                       </a:r>
                     </a:p>
                   </a:txBody>
-                  <a:tcPr marT="27432" marB="27432" anchor="ctr">
+                  <a:tcPr marL="91440" marR="91440" marT="27432" marB="27432" anchor="ctr">
                     <a:solidFill>
                       <a:srgbClr val="1B2A49"/>
                     </a:solidFill>
@@ -7489,7 +9684,7 @@
                       </a:r>
                     </a:p>
                   </a:txBody>
-                  <a:tcPr marT="27432" marB="27432" anchor="ctr">
+                  <a:tcPr marL="91440" marR="91440" marT="27432" marB="27432" anchor="ctr">
                     <a:solidFill>
                       <a:srgbClr val="1B2A49"/>
                     </a:solidFill>
@@ -7511,17 +9706,12 @@
                       </a:r>
                     </a:p>
                   </a:txBody>
-                  <a:tcPr marT="27432" marB="27432" anchor="ctr">
+                  <a:tcPr marL="91440" marR="91440" marT="27432" marB="27432" anchor="ctr">
                     <a:solidFill>
                       <a:srgbClr val="1B2A49"/>
                     </a:solidFill>
                   </a:tcPr>
                 </a:tc>
-                <a:extLst>
-                  <a:ext uri="{0D108BD9-81ED-4DB2-BD59-A6C34878D82A}">
-                    <a16:rowId xmlns:a16="http://schemas.microsoft.com/office/drawing/2014/main" val="10000"/>
-                  </a:ext>
-                </a:extLst>
               </a:tr>
               <a:tr h="402336">
                 <a:tc>
@@ -7540,7 +9730,7 @@
                       </a:r>
                     </a:p>
                   </a:txBody>
-                  <a:tcPr marT="27432" marB="27432" anchor="ctr">
+                  <a:tcPr marL="91440" marR="91440" marT="27432" marB="27432" anchor="ctr">
                     <a:solidFill>
                       <a:srgbClr val="FFFFFF"/>
                     </a:solidFill>
@@ -7562,7 +9752,7 @@
                       </a:r>
                     </a:p>
                   </a:txBody>
-                  <a:tcPr marT="27432" marB="27432" anchor="ctr">
+                  <a:tcPr marL="91440" marR="91440" marT="27432" marB="27432" anchor="ctr">
                     <a:solidFill>
                       <a:srgbClr val="FFFFFF"/>
                     </a:solidFill>
@@ -7584,17 +9774,12 @@
                       </a:r>
                     </a:p>
                   </a:txBody>
-                  <a:tcPr marT="27432" marB="27432" anchor="ctr">
+                  <a:tcPr marL="91440" marR="91440" marT="27432" marB="27432" anchor="ctr">
                     <a:solidFill>
                       <a:srgbClr val="FFFFFF"/>
                     </a:solidFill>
                   </a:tcPr>
                 </a:tc>
-                <a:extLst>
-                  <a:ext uri="{0D108BD9-81ED-4DB2-BD59-A6C34878D82A}">
-                    <a16:rowId xmlns:a16="http://schemas.microsoft.com/office/drawing/2014/main" val="10001"/>
-                  </a:ext>
-                </a:extLst>
               </a:tr>
               <a:tr h="402336">
                 <a:tc>
@@ -7613,7 +9798,7 @@
                       </a:r>
                     </a:p>
                   </a:txBody>
-                  <a:tcPr marT="27432" marB="27432" anchor="ctr">
+                  <a:tcPr marL="91440" marR="91440" marT="27432" marB="27432" anchor="ctr">
                     <a:solidFill>
                       <a:srgbClr val="F3F5F9"/>
                     </a:solidFill>
@@ -7635,7 +9820,7 @@
                       </a:r>
                     </a:p>
                   </a:txBody>
-                  <a:tcPr marT="27432" marB="27432" anchor="ctr">
+                  <a:tcPr marL="91440" marR="91440" marT="27432" marB="27432" anchor="ctr">
                     <a:solidFill>
                       <a:srgbClr val="F3F5F9"/>
                     </a:solidFill>
@@ -7657,17 +9842,12 @@
                       </a:r>
                     </a:p>
                   </a:txBody>
-                  <a:tcPr marT="27432" marB="27432" anchor="ctr">
+                  <a:tcPr marL="91440" marR="91440" marT="27432" marB="27432" anchor="ctr">
                     <a:solidFill>
                       <a:srgbClr val="F3F5F9"/>
                     </a:solidFill>
                   </a:tcPr>
                 </a:tc>
-                <a:extLst>
-                  <a:ext uri="{0D108BD9-81ED-4DB2-BD59-A6C34878D82A}">
-                    <a16:rowId xmlns:a16="http://schemas.microsoft.com/office/drawing/2014/main" val="10002"/>
-                  </a:ext>
-                </a:extLst>
               </a:tr>
               <a:tr h="402336">
                 <a:tc>
@@ -7686,7 +9866,7 @@
                       </a:r>
                     </a:p>
                   </a:txBody>
-                  <a:tcPr marT="27432" marB="27432" anchor="ctr">
+                  <a:tcPr marL="91440" marR="91440" marT="27432" marB="27432" anchor="ctr">
                     <a:solidFill>
                       <a:srgbClr val="FFFFFF"/>
                     </a:solidFill>
@@ -7708,7 +9888,7 @@
                       </a:r>
                     </a:p>
                   </a:txBody>
-                  <a:tcPr marT="27432" marB="27432" anchor="ctr">
+                  <a:tcPr marL="91440" marR="91440" marT="27432" marB="27432" anchor="ctr">
                     <a:solidFill>
                       <a:srgbClr val="FFFFFF"/>
                     </a:solidFill>
@@ -7730,17 +9910,12 @@
                       </a:r>
                     </a:p>
                   </a:txBody>
-                  <a:tcPr marT="27432" marB="27432" anchor="ctr">
+                  <a:tcPr marL="91440" marR="91440" marT="27432" marB="27432" anchor="ctr">
                     <a:solidFill>
                       <a:srgbClr val="FFFFFF"/>
                     </a:solidFill>
                   </a:tcPr>
                 </a:tc>
-                <a:extLst>
-                  <a:ext uri="{0D108BD9-81ED-4DB2-BD59-A6C34878D82A}">
-                    <a16:rowId xmlns:a16="http://schemas.microsoft.com/office/drawing/2014/main" val="10003"/>
-                  </a:ext>
-                </a:extLst>
               </a:tr>
               <a:tr h="402336">
                 <a:tc>
@@ -7759,7 +9934,7 @@
                       </a:r>
                     </a:p>
                   </a:txBody>
-                  <a:tcPr marT="27432" marB="27432" anchor="ctr">
+                  <a:tcPr marL="91440" marR="91440" marT="27432" marB="27432" anchor="ctr">
                     <a:solidFill>
                       <a:srgbClr val="F3F5F9"/>
                     </a:solidFill>
@@ -7781,7 +9956,7 @@
                       </a:r>
                     </a:p>
                   </a:txBody>
-                  <a:tcPr marT="27432" marB="27432" anchor="ctr">
+                  <a:tcPr marL="91440" marR="91440" marT="27432" marB="27432" anchor="ctr">
                     <a:solidFill>
                       <a:srgbClr val="F3F5F9"/>
                     </a:solidFill>
@@ -7803,17 +9978,12 @@
                       </a:r>
                     </a:p>
                   </a:txBody>
-                  <a:tcPr marT="27432" marB="27432" anchor="ctr">
+                  <a:tcPr marL="91440" marR="91440" marT="27432" marB="27432" anchor="ctr">
                     <a:solidFill>
                       <a:srgbClr val="F3F5F9"/>
                     </a:solidFill>
                   </a:tcPr>
                 </a:tc>
-                <a:extLst>
-                  <a:ext uri="{0D108BD9-81ED-4DB2-BD59-A6C34878D82A}">
-                    <a16:rowId xmlns:a16="http://schemas.microsoft.com/office/drawing/2014/main" val="10004"/>
-                  </a:ext>
-                </a:extLst>
               </a:tr>
               <a:tr h="402336">
                 <a:tc>
@@ -7832,7 +10002,7 @@
                       </a:r>
                     </a:p>
                   </a:txBody>
-                  <a:tcPr marT="27432" marB="27432" anchor="ctr">
+                  <a:tcPr marL="91440" marR="91440" marT="27432" marB="27432" anchor="ctr">
                     <a:solidFill>
                       <a:srgbClr val="FFFFFF"/>
                     </a:solidFill>
@@ -7854,7 +10024,7 @@
                       </a:r>
                     </a:p>
                   </a:txBody>
-                  <a:tcPr marT="27432" marB="27432" anchor="ctr">
+                  <a:tcPr marL="91440" marR="91440" marT="27432" marB="27432" anchor="ctr">
                     <a:solidFill>
                       <a:srgbClr val="FFFFFF"/>
                     </a:solidFill>
@@ -7876,17 +10046,12 @@
                       </a:r>
                     </a:p>
                   </a:txBody>
-                  <a:tcPr marT="27432" marB="27432" anchor="ctr">
+                  <a:tcPr marL="91440" marR="91440" marT="27432" marB="27432" anchor="ctr">
                     <a:solidFill>
                       <a:srgbClr val="FFFFFF"/>
                     </a:solidFill>
                   </a:tcPr>
                 </a:tc>
-                <a:extLst>
-                  <a:ext uri="{0D108BD9-81ED-4DB2-BD59-A6C34878D82A}">
-                    <a16:rowId xmlns:a16="http://schemas.microsoft.com/office/drawing/2014/main" val="10005"/>
-                  </a:ext>
-                </a:extLst>
               </a:tr>
               <a:tr h="402336">
                 <a:tc>
@@ -7905,7 +10070,7 @@
                       </a:r>
                     </a:p>
                   </a:txBody>
-                  <a:tcPr marT="27432" marB="27432" anchor="ctr">
+                  <a:tcPr marL="91440" marR="91440" marT="27432" marB="27432" anchor="ctr">
                     <a:solidFill>
                       <a:srgbClr val="F3F5F9"/>
                     </a:solidFill>
@@ -7927,7 +10092,7 @@
                       </a:r>
                     </a:p>
                   </a:txBody>
-                  <a:tcPr marT="27432" marB="27432" anchor="ctr">
+                  <a:tcPr marL="91440" marR="91440" marT="27432" marB="27432" anchor="ctr">
                     <a:solidFill>
                       <a:srgbClr val="F3F5F9"/>
                     </a:solidFill>
@@ -7949,17 +10114,12 @@
                       </a:r>
                     </a:p>
                   </a:txBody>
-                  <a:tcPr marT="27432" marB="27432" anchor="ctr">
+                  <a:tcPr marL="91440" marR="91440" marT="27432" marB="27432" anchor="ctr">
                     <a:solidFill>
                       <a:srgbClr val="F3F5F9"/>
                     </a:solidFill>
                   </a:tcPr>
                 </a:tc>
-                <a:extLst>
-                  <a:ext uri="{0D108BD9-81ED-4DB2-BD59-A6C34878D82A}">
-                    <a16:rowId xmlns:a16="http://schemas.microsoft.com/office/drawing/2014/main" val="10006"/>
-                  </a:ext>
-                </a:extLst>
               </a:tr>
               <a:tr h="402336">
                 <a:tc>
@@ -7978,7 +10138,7 @@
                       </a:r>
                     </a:p>
                   </a:txBody>
-                  <a:tcPr marT="27432" marB="27432" anchor="ctr">
+                  <a:tcPr marL="91440" marR="91440" marT="27432" marB="27432" anchor="ctr">
                     <a:solidFill>
                       <a:srgbClr val="FFFFFF"/>
                     </a:solidFill>
@@ -8000,7 +10160,7 @@
                       </a:r>
                     </a:p>
                   </a:txBody>
-                  <a:tcPr marT="27432" marB="27432" anchor="ctr">
+                  <a:tcPr marL="91440" marR="91440" marT="27432" marB="27432" anchor="ctr">
                     <a:solidFill>
                       <a:srgbClr val="FFFFFF"/>
                     </a:solidFill>
@@ -8022,17 +10182,12 @@
                       </a:r>
                     </a:p>
                   </a:txBody>
-                  <a:tcPr marT="27432" marB="27432" anchor="ctr">
+                  <a:tcPr marL="91440" marR="91440" marT="27432" marB="27432" anchor="ctr">
                     <a:solidFill>
                       <a:srgbClr val="FFFFFF"/>
                     </a:solidFill>
                   </a:tcPr>
                 </a:tc>
-                <a:extLst>
-                  <a:ext uri="{0D108BD9-81ED-4DB2-BD59-A6C34878D82A}">
-                    <a16:rowId xmlns:a16="http://schemas.microsoft.com/office/drawing/2014/main" val="10007"/>
-                  </a:ext>
-                </a:extLst>
               </a:tr>
             </a:tbl>
           </a:graphicData>
@@ -8081,7 +10236,6 @@
           <a:lstStyle/>
           <a:p>
             <a:pPr algn="ctr"/>
-            <a:endParaRPr/>
           </a:p>
         </p:txBody>
       </p:sp>
@@ -8102,7 +10256,7 @@
           <a:noFill/>
         </p:spPr>
         <p:txBody>
-          <a:bodyPr wrap="square" lIns="0" tIns="0" rIns="0" bIns="0" anchor="t">
+          <a:bodyPr wrap="square" anchor="t" lIns="0" rIns="0" tIns="0" bIns="0">
             <a:spAutoFit/>
           </a:bodyPr>
           <a:lstStyle/>
@@ -8137,7 +10291,7 @@
           <a:noFill/>
         </p:spPr>
         <p:txBody>
-          <a:bodyPr wrap="square" lIns="0" tIns="0" rIns="0" bIns="0" anchor="t">
+          <a:bodyPr wrap="square" anchor="t" lIns="0" rIns="0" tIns="0" bIns="0">
             <a:spAutoFit/>
           </a:bodyPr>
           <a:lstStyle/>
@@ -8198,7 +10352,6 @@
           <a:lstStyle/>
           <a:p>
             <a:pPr algn="ctr"/>
-            <a:endParaRPr/>
           </a:p>
         </p:txBody>
       </p:sp>
@@ -8219,7 +10372,7 @@
           <a:noFill/>
         </p:spPr>
         <p:txBody>
-          <a:bodyPr wrap="square" lIns="0" tIns="0" rIns="0" bIns="0" anchor="t">
+          <a:bodyPr wrap="square" anchor="t" lIns="0" rIns="0" tIns="0" bIns="0">
             <a:spAutoFit/>
           </a:bodyPr>
           <a:lstStyle/>
@@ -8254,7 +10407,7 @@
           <a:noFill/>
         </p:spPr>
         <p:txBody>
-          <a:bodyPr wrap="square" lIns="0" tIns="0" rIns="0" bIns="0" anchor="t">
+          <a:bodyPr wrap="square" anchor="t" lIns="0" rIns="0" tIns="0" bIns="0">
             <a:spAutoFit/>
           </a:bodyPr>
           <a:lstStyle/>
@@ -8315,7 +10468,6 @@
           <a:lstStyle/>
           <a:p>
             <a:pPr algn="ctr"/>
-            <a:endParaRPr/>
           </a:p>
         </p:txBody>
       </p:sp>
@@ -8336,7 +10488,7 @@
           <a:noFill/>
         </p:spPr>
         <p:txBody>
-          <a:bodyPr wrap="square" lIns="0" tIns="0" rIns="0" bIns="0" anchor="t">
+          <a:bodyPr wrap="square" anchor="t" lIns="0" rIns="0" tIns="0" bIns="0">
             <a:spAutoFit/>
           </a:bodyPr>
           <a:lstStyle/>
@@ -8371,7 +10523,7 @@
           <a:noFill/>
         </p:spPr>
         <p:txBody>
-          <a:bodyPr wrap="square" lIns="0" tIns="0" rIns="0" bIns="0" anchor="t">
+          <a:bodyPr wrap="square" anchor="t" lIns="0" rIns="0" tIns="0" bIns="0">
             <a:spAutoFit/>
           </a:bodyPr>
           <a:lstStyle/>
@@ -8435,7 +10587,76 @@
           <a:lstStyle/>
           <a:p>
             <a:pPr algn="ctr"/>
-            <a:endParaRPr/>
+          </a:p>
+        </p:txBody>
+      </p:sp>
+      <p:sp>
+        <p:nvSpPr>
+          <p:cNvPr id="16" name="TextBox 15"/>
+          <p:cNvSpPr txBox="1"/>
+          <p:nvPr/>
+        </p:nvSpPr>
+        <p:spPr>
+          <a:xfrm>
+            <a:off x="6858000" y="2240280"/>
+            <a:ext cx="4873752" cy="365760"/>
+          </a:xfrm>
+          <a:prstGeom prst="rect">
+            <a:avLst/>
+          </a:prstGeom>
+          <a:noFill/>
+        </p:spPr>
+        <p:txBody>
+          <a:bodyPr wrap="square" anchor="t" lIns="0" rIns="0" tIns="0" bIns="0">
+            <a:spAutoFit/>
+          </a:bodyPr>
+          <a:lstStyle/>
+          <a:p>
+            <a:pPr algn="ctr"/>
+            <a:r>
+              <a:rPr sz="1600" b="1">
+                <a:solidFill>
+                  <a:srgbClr val="6B7280"/>
+                </a:solidFill>
+                <a:latin typeface="Calibri"/>
+              </a:rPr>
+              <a:t>Screenshot: review page</a:t>
+            </a:r>
+          </a:p>
+        </p:txBody>
+      </p:sp>
+      <p:sp>
+        <p:nvSpPr>
+          <p:cNvPr id="17" name="TextBox 16"/>
+          <p:cNvSpPr txBox="1"/>
+          <p:nvPr/>
+        </p:nvSpPr>
+        <p:spPr>
+          <a:xfrm>
+            <a:off x="6858000" y="2651760"/>
+            <a:ext cx="4873752" cy="365760"/>
+          </a:xfrm>
+          <a:prstGeom prst="rect">
+            <a:avLst/>
+          </a:prstGeom>
+          <a:noFill/>
+        </p:spPr>
+        <p:txBody>
+          <a:bodyPr wrap="square" anchor="t" lIns="0" rIns="0" tIns="0" bIns="0">
+            <a:spAutoFit/>
+          </a:bodyPr>
+          <a:lstStyle/>
+          <a:p>
+            <a:pPr algn="ctr"/>
+            <a:r>
+              <a:rPr sz="1200" b="0">
+                <a:solidFill>
+                  <a:srgbClr val="6B7280"/>
+                </a:solidFill>
+                <a:latin typeface="Calibri"/>
+              </a:rPr>
+              <a:t>suggestion next to the original, approve / edit / reject</a:t>
+            </a:r>
           </a:p>
         </p:txBody>
       </p:sp>
@@ -8485,7 +10706,76 @@
           <a:lstStyle/>
           <a:p>
             <a:pPr algn="ctr"/>
-            <a:endParaRPr/>
+          </a:p>
+        </p:txBody>
+      </p:sp>
+      <p:sp>
+        <p:nvSpPr>
+          <p:cNvPr id="19" name="TextBox 18"/>
+          <p:cNvSpPr txBox="1"/>
+          <p:nvPr/>
+        </p:nvSpPr>
+        <p:spPr>
+          <a:xfrm>
+            <a:off x="6858000" y="4754879"/>
+            <a:ext cx="4873752" cy="365760"/>
+          </a:xfrm>
+          <a:prstGeom prst="rect">
+            <a:avLst/>
+          </a:prstGeom>
+          <a:noFill/>
+        </p:spPr>
+        <p:txBody>
+          <a:bodyPr wrap="square" anchor="t" lIns="0" rIns="0" tIns="0" bIns="0">
+            <a:spAutoFit/>
+          </a:bodyPr>
+          <a:lstStyle/>
+          <a:p>
+            <a:pPr algn="ctr"/>
+            <a:r>
+              <a:rPr sz="1600" b="1">
+                <a:solidFill>
+                  <a:srgbClr val="6B7280"/>
+                </a:solidFill>
+                <a:latin typeface="Calibri"/>
+              </a:rPr>
+              <a:t>Screenshot: ticket list or upload</a:t>
+            </a:r>
+          </a:p>
+        </p:txBody>
+      </p:sp>
+      <p:sp>
+        <p:nvSpPr>
+          <p:cNvPr id="20" name="TextBox 19"/>
+          <p:cNvSpPr txBox="1"/>
+          <p:nvPr/>
+        </p:nvSpPr>
+        <p:spPr>
+          <a:xfrm>
+            <a:off x="6858000" y="5166359"/>
+            <a:ext cx="4873752" cy="365760"/>
+          </a:xfrm>
+          <a:prstGeom prst="rect">
+            <a:avLst/>
+          </a:prstGeom>
+          <a:noFill/>
+        </p:spPr>
+        <p:txBody>
+          <a:bodyPr wrap="square" anchor="t" lIns="0" rIns="0" tIns="0" bIns="0">
+            <a:spAutoFit/>
+          </a:bodyPr>
+          <a:lstStyle/>
+          <a:p>
+            <a:pPr algn="ctr"/>
+            <a:r>
+              <a:rPr sz="1200" b="0">
+                <a:solidFill>
+                  <a:srgbClr val="6B7280"/>
+                </a:solidFill>
+                <a:latin typeface="Calibri"/>
+              </a:rPr>
+              <a:t>queue, states, result.json download</a:t>
+            </a:r>
           </a:p>
         </p:txBody>
       </p:sp>
@@ -8506,7 +10796,7 @@
           <a:noFill/>
         </p:spPr>
         <p:txBody>
-          <a:bodyPr wrap="square" lIns="0" tIns="0" rIns="0" bIns="0" anchor="t">
+          <a:bodyPr wrap="square" anchor="t" lIns="0" rIns="0" tIns="0" bIns="0">
             <a:spAutoFit/>
           </a:bodyPr>
           <a:lstStyle/>
@@ -8524,66 +10814,6 @@
           </a:p>
         </p:txBody>
       </p:sp>
-      <p:pic>
-        <p:nvPicPr>
-          <p:cNvPr id="23" name="Grafik 22">
-            <a:extLst>
-              <a:ext uri="{FF2B5EF4-FFF2-40B4-BE49-F238E27FC236}">
-                <a16:creationId xmlns:a16="http://schemas.microsoft.com/office/drawing/2014/main" id="{3D02D3A7-18F3-BF6B-71E1-AA4669E1ECCD}"/>
-              </a:ext>
-            </a:extLst>
-          </p:cNvPr>
-          <p:cNvPicPr>
-            <a:picLocks noChangeAspect="1"/>
-          </p:cNvPicPr>
-          <p:nvPr/>
-        </p:nvPicPr>
-        <p:blipFill>
-          <a:blip r:embed="rId3"/>
-          <a:stretch>
-            <a:fillRect/>
-          </a:stretch>
-        </p:blipFill>
-        <p:spPr>
-          <a:xfrm>
-            <a:off x="6937452" y="1793619"/>
-            <a:ext cx="4645670" cy="1635381"/>
-          </a:xfrm>
-          <a:prstGeom prst="rect">
-            <a:avLst/>
-          </a:prstGeom>
-        </p:spPr>
-      </p:pic>
-      <p:pic>
-        <p:nvPicPr>
-          <p:cNvPr id="25" name="Grafik 24">
-            <a:extLst>
-              <a:ext uri="{FF2B5EF4-FFF2-40B4-BE49-F238E27FC236}">
-                <a16:creationId xmlns:a16="http://schemas.microsoft.com/office/drawing/2014/main" id="{E1886568-3626-768E-DDCD-0DA6D11F4C15}"/>
-              </a:ext>
-            </a:extLst>
-          </p:cNvPr>
-          <p:cNvPicPr>
-            <a:picLocks noChangeAspect="1"/>
-          </p:cNvPicPr>
-          <p:nvPr/>
-        </p:nvPicPr>
-        <p:blipFill>
-          <a:blip r:embed="rId4"/>
-          <a:stretch>
-            <a:fillRect/>
-          </a:stretch>
-        </p:blipFill>
-        <p:spPr>
-          <a:xfrm>
-            <a:off x="6937452" y="4275522"/>
-            <a:ext cx="4669332" cy="1767581"/>
-          </a:xfrm>
-          <a:prstGeom prst="rect">
-            <a:avLst/>
-          </a:prstGeom>
-        </p:spPr>
-      </p:pic>
     </p:spTree>
   </p:cSld>
   <p:clrMapOvr>
@@ -8592,8 +10822,8 @@
 </p:sld>
 </file>
 
-<file path=ppt/slides/slide4.xml><?xml version="1.0" encoding="utf-8"?>
-<p:sld xmlns:a="http://schemas.openxmlformats.org/drawingml/2006/main" xmlns:r="http://schemas.openxmlformats.org/officeDocument/2006/relationships" xmlns:p="http://schemas.openxmlformats.org/presentationml/2006/main">
+<file path=ppt/slides/slide5.xml><?xml version="1.0" encoding="utf-8"?>
+<p:sld xmlns:a="http://schemas.openxmlformats.org/drawingml/2006/main" xmlns:p="http://schemas.openxmlformats.org/presentationml/2006/main" xmlns:r="http://schemas.openxmlformats.org/officeDocument/2006/relationships">
   <p:cSld>
     <p:spTree>
       <p:nvGrpSpPr>
@@ -8601,14 +10831,7 @@
         <p:cNvGrpSpPr/>
         <p:nvPr/>
       </p:nvGrpSpPr>
-      <p:grpSpPr>
-        <a:xfrm>
-          <a:off x="0" y="0"/>
-          <a:ext cx="0" cy="0"/>
-          <a:chOff x="0" y="0"/>
-          <a:chExt cx="0" cy="0"/>
-        </a:xfrm>
-      </p:grpSpPr>
+      <p:grpSpPr/>
       <p:sp>
         <p:nvSpPr>
           <p:cNvPr id="2" name="Oval 1"/>
@@ -8646,7 +10869,7 @@
           </a:fontRef>
         </p:style>
         <p:txBody>
-          <a:bodyPr lIns="0" tIns="0" rIns="0" bIns="0" rtlCol="0" anchor="ctr"/>
+          <a:bodyPr rtlCol="0" anchor="ctr" lIns="0" rIns="0" tIns="0" bIns="0"/>
           <a:lstStyle/>
           <a:p>
             <a:pPr algn="ctr"/>
@@ -8657,7 +10880,7 @@
                 </a:solidFill>
                 <a:latin typeface="Cambria"/>
               </a:rPr>
-              <a:t>4</a:t>
+              <a:t>5</a:t>
             </a:r>
           </a:p>
         </p:txBody>
@@ -8679,7 +10902,7 @@
           <a:noFill/>
         </p:spPr>
         <p:txBody>
-          <a:bodyPr wrap="square" lIns="0" tIns="0" rIns="0" bIns="0" anchor="ctr">
+          <a:bodyPr wrap="square" anchor="ctr" lIns="0" rIns="0" tIns="0" bIns="0">
             <a:spAutoFit/>
           </a:bodyPr>
           <a:lstStyle/>
@@ -8714,7 +10937,7 @@
           <a:noFill/>
         </p:spPr>
         <p:txBody>
-          <a:bodyPr wrap="square" lIns="0" tIns="0" rIns="0" bIns="0" anchor="t">
+          <a:bodyPr wrap="square" anchor="t" lIns="0" rIns="0" tIns="0" bIns="0">
             <a:spAutoFit/>
           </a:bodyPr>
           <a:lstStyle/>
@@ -8777,7 +11000,6 @@
           <a:lstStyle/>
           <a:p>
             <a:pPr algn="ctr"/>
-            <a:endParaRPr/>
           </a:p>
         </p:txBody>
       </p:sp>
@@ -8798,7 +11020,7 @@
           <a:noFill/>
         </p:spPr>
         <p:txBody>
-          <a:bodyPr wrap="square" lIns="0" tIns="0" rIns="0" bIns="0" anchor="t">
+          <a:bodyPr wrap="square" anchor="t" lIns="0" rIns="0" tIns="0" bIns="0">
             <a:spAutoFit/>
           </a:bodyPr>
           <a:lstStyle/>
@@ -8833,7 +11055,7 @@
           <a:noFill/>
         </p:spPr>
         <p:txBody>
-          <a:bodyPr wrap="square" lIns="0" tIns="0" rIns="0" bIns="0" anchor="t">
+          <a:bodyPr wrap="square" anchor="t" lIns="0" rIns="0" tIns="0" bIns="0">
             <a:spAutoFit/>
           </a:bodyPr>
           <a:lstStyle/>
@@ -8896,7 +11118,6 @@
           <a:lstStyle/>
           <a:p>
             <a:pPr algn="ctr"/>
-            <a:endParaRPr/>
           </a:p>
         </p:txBody>
       </p:sp>
@@ -8917,7 +11138,7 @@
           <a:noFill/>
         </p:spPr>
         <p:txBody>
-          <a:bodyPr wrap="square" lIns="0" tIns="0" rIns="0" bIns="0" anchor="ctr">
+          <a:bodyPr wrap="square" anchor="ctr" lIns="0" rIns="0" tIns="0" bIns="0">
             <a:spAutoFit/>
           </a:bodyPr>
           <a:lstStyle/>
@@ -8980,7 +11201,6 @@
           <a:lstStyle/>
           <a:p>
             <a:pPr algn="ctr"/>
-            <a:endParaRPr/>
           </a:p>
         </p:txBody>
       </p:sp>
@@ -9001,7 +11221,7 @@
           <a:noFill/>
         </p:spPr>
         <p:txBody>
-          <a:bodyPr wrap="square" lIns="0" tIns="0" rIns="0" bIns="0" anchor="ctr">
+          <a:bodyPr wrap="square" anchor="ctr" lIns="0" rIns="0" tIns="0" bIns="0">
             <a:spAutoFit/>
           </a:bodyPr>
           <a:lstStyle/>
@@ -9064,7 +11284,6 @@
           <a:lstStyle/>
           <a:p>
             <a:pPr algn="ctr"/>
-            <a:endParaRPr/>
           </a:p>
         </p:txBody>
       </p:sp>
@@ -9085,7 +11304,7 @@
           <a:noFill/>
         </p:spPr>
         <p:txBody>
-          <a:bodyPr wrap="square" lIns="0" tIns="0" rIns="0" bIns="0" anchor="ctr">
+          <a:bodyPr wrap="square" anchor="ctr" lIns="0" rIns="0" tIns="0" bIns="0">
             <a:spAutoFit/>
           </a:bodyPr>
           <a:lstStyle/>
@@ -9148,7 +11367,6 @@
           <a:lstStyle/>
           <a:p>
             <a:pPr algn="ctr"/>
-            <a:endParaRPr/>
           </a:p>
         </p:txBody>
       </p:sp>
@@ -9169,7 +11387,7 @@
           <a:noFill/>
         </p:spPr>
         <p:txBody>
-          <a:bodyPr wrap="square" lIns="0" tIns="0" rIns="0" bIns="0" anchor="t">
+          <a:bodyPr wrap="square" anchor="t" lIns="0" rIns="0" tIns="0" bIns="0">
             <a:spAutoFit/>
           </a:bodyPr>
           <a:lstStyle/>
@@ -9204,7 +11422,7 @@
           <a:noFill/>
         </p:spPr>
         <p:txBody>
-          <a:bodyPr wrap="square" lIns="0" tIns="0" rIns="0" bIns="0" anchor="t">
+          <a:bodyPr wrap="square" anchor="t" lIns="0" rIns="0" tIns="0" bIns="0">
             <a:spAutoFit/>
           </a:bodyPr>
           <a:lstStyle/>
@@ -9267,7 +11485,6 @@
           <a:lstStyle/>
           <a:p>
             <a:pPr algn="ctr"/>
-            <a:endParaRPr/>
           </a:p>
         </p:txBody>
       </p:sp>
@@ -9288,7 +11505,7 @@
           <a:noFill/>
         </p:spPr>
         <p:txBody>
-          <a:bodyPr wrap="square" lIns="0" tIns="0" rIns="0" bIns="0" anchor="ctr">
+          <a:bodyPr wrap="square" anchor="ctr" lIns="0" rIns="0" tIns="0" bIns="0">
             <a:spAutoFit/>
           </a:bodyPr>
           <a:lstStyle/>
@@ -9351,7 +11568,6 @@
           <a:lstStyle/>
           <a:p>
             <a:pPr algn="ctr"/>
-            <a:endParaRPr/>
           </a:p>
         </p:txBody>
       </p:sp>
@@ -9372,7 +11588,7 @@
           <a:noFill/>
         </p:spPr>
         <p:txBody>
-          <a:bodyPr wrap="square" lIns="0" tIns="0" rIns="0" bIns="0" anchor="ctr">
+          <a:bodyPr wrap="square" anchor="ctr" lIns="0" rIns="0" tIns="0" bIns="0">
             <a:spAutoFit/>
           </a:bodyPr>
           <a:lstStyle/>
@@ -9435,7 +11651,6 @@
           <a:lstStyle/>
           <a:p>
             <a:pPr algn="ctr"/>
-            <a:endParaRPr/>
           </a:p>
         </p:txBody>
       </p:sp>
@@ -9456,7 +11671,7 @@
           <a:noFill/>
         </p:spPr>
         <p:txBody>
-          <a:bodyPr wrap="square" lIns="0" tIns="0" rIns="0" bIns="0" anchor="ctr">
+          <a:bodyPr wrap="square" anchor="ctr" lIns="0" rIns="0" tIns="0" bIns="0">
             <a:spAutoFit/>
           </a:bodyPr>
           <a:lstStyle/>
@@ -9519,7 +11734,6 @@
           <a:lstStyle/>
           <a:p>
             <a:pPr algn="ctr"/>
-            <a:endParaRPr/>
           </a:p>
         </p:txBody>
       </p:sp>
@@ -9540,7 +11754,7 @@
           <a:noFill/>
         </p:spPr>
         <p:txBody>
-          <a:bodyPr wrap="square" lIns="0" tIns="0" rIns="0" bIns="0" anchor="t">
+          <a:bodyPr wrap="square" anchor="t" lIns="0" rIns="0" tIns="0" bIns="0">
             <a:spAutoFit/>
           </a:bodyPr>
           <a:lstStyle/>
@@ -9575,7 +11789,7 @@
           <a:noFill/>
         </p:spPr>
         <p:txBody>
-          <a:bodyPr wrap="square" lIns="0" tIns="0" rIns="0" bIns="0" anchor="t">
+          <a:bodyPr wrap="square" anchor="t" lIns="0" rIns="0" tIns="0" bIns="0">
             <a:spAutoFit/>
           </a:bodyPr>
           <a:lstStyle/>
@@ -9638,7 +11852,6 @@
           <a:lstStyle/>
           <a:p>
             <a:pPr algn="ctr"/>
-            <a:endParaRPr/>
           </a:p>
         </p:txBody>
       </p:sp>
@@ -9659,7 +11872,7 @@
           <a:noFill/>
         </p:spPr>
         <p:txBody>
-          <a:bodyPr wrap="square" lIns="0" tIns="0" rIns="0" bIns="0" anchor="ctr">
+          <a:bodyPr wrap="square" anchor="ctr" lIns="0" rIns="0" tIns="0" bIns="0">
             <a:spAutoFit/>
           </a:bodyPr>
           <a:lstStyle/>
@@ -9722,7 +11935,6 @@
           <a:lstStyle/>
           <a:p>
             <a:pPr algn="ctr"/>
-            <a:endParaRPr/>
           </a:p>
         </p:txBody>
       </p:sp>
@@ -9743,7 +11955,7 @@
           <a:noFill/>
         </p:spPr>
         <p:txBody>
-          <a:bodyPr wrap="square" lIns="0" tIns="0" rIns="0" bIns="0" anchor="ctr">
+          <a:bodyPr wrap="square" anchor="ctr" lIns="0" rIns="0" tIns="0" bIns="0">
             <a:spAutoFit/>
           </a:bodyPr>
           <a:lstStyle/>
@@ -9806,7 +12018,6 @@
           <a:lstStyle/>
           <a:p>
             <a:pPr algn="ctr"/>
-            <a:endParaRPr/>
           </a:p>
         </p:txBody>
       </p:sp>
@@ -9827,7 +12038,7 @@
           <a:noFill/>
         </p:spPr>
         <p:txBody>
-          <a:bodyPr wrap="square" lIns="0" tIns="0" rIns="0" bIns="0" anchor="ctr">
+          <a:bodyPr wrap="square" anchor="ctr" lIns="0" rIns="0" tIns="0" bIns="0">
             <a:spAutoFit/>
           </a:bodyPr>
           <a:lstStyle/>
@@ -9890,7 +12101,6 @@
           <a:lstStyle/>
           <a:p>
             <a:pPr algn="ctr"/>
-            <a:endParaRPr/>
           </a:p>
         </p:txBody>
       </p:sp>
@@ -9911,7 +12121,7 @@
           <a:noFill/>
         </p:spPr>
         <p:txBody>
-          <a:bodyPr wrap="square" lIns="0" tIns="0" rIns="0" bIns="0" anchor="t">
+          <a:bodyPr wrap="square" anchor="t" lIns="0" rIns="0" tIns="0" bIns="0">
             <a:spAutoFit/>
           </a:bodyPr>
           <a:lstStyle/>
@@ -9946,7 +12156,7 @@
           <a:noFill/>
         </p:spPr>
         <p:txBody>
-          <a:bodyPr wrap="square" lIns="0" tIns="0" rIns="0" bIns="0" anchor="t">
+          <a:bodyPr wrap="square" anchor="t" lIns="0" rIns="0" tIns="0" bIns="0">
             <a:spAutoFit/>
           </a:bodyPr>
           <a:lstStyle/>
@@ -10009,7 +12219,6 @@
           <a:lstStyle/>
           <a:p>
             <a:pPr algn="ctr"/>
-            <a:endParaRPr/>
           </a:p>
         </p:txBody>
       </p:sp>
@@ -10030,7 +12239,7 @@
           <a:noFill/>
         </p:spPr>
         <p:txBody>
-          <a:bodyPr wrap="square" lIns="0" tIns="0" rIns="0" bIns="0" anchor="ctr">
+          <a:bodyPr wrap="square" anchor="ctr" lIns="0" rIns="0" tIns="0" bIns="0">
             <a:spAutoFit/>
           </a:bodyPr>
           <a:lstStyle/>
@@ -10093,7 +12302,6 @@
           <a:lstStyle/>
           <a:p>
             <a:pPr algn="ctr"/>
-            <a:endParaRPr/>
           </a:p>
         </p:txBody>
       </p:sp>
@@ -10114,7 +12322,7 @@
           <a:noFill/>
         </p:spPr>
         <p:txBody>
-          <a:bodyPr wrap="square" lIns="0" tIns="0" rIns="0" bIns="0" anchor="ctr">
+          <a:bodyPr wrap="square" anchor="ctr" lIns="0" rIns="0" tIns="0" bIns="0">
             <a:spAutoFit/>
           </a:bodyPr>
           <a:lstStyle/>
@@ -10177,7 +12385,6 @@
           <a:lstStyle/>
           <a:p>
             <a:pPr algn="ctr"/>
-            <a:endParaRPr/>
           </a:p>
         </p:txBody>
       </p:sp>
@@ -10198,7 +12405,7 @@
           <a:noFill/>
         </p:spPr>
         <p:txBody>
-          <a:bodyPr wrap="square" lIns="0" tIns="0" rIns="0" bIns="0" anchor="ctr">
+          <a:bodyPr wrap="square" anchor="ctr" lIns="0" rIns="0" tIns="0" bIns="0">
             <a:spAutoFit/>
           </a:bodyPr>
           <a:lstStyle/>
@@ -10261,7 +12468,6 @@
           <a:lstStyle/>
           <a:p>
             <a:pPr algn="ctr"/>
-            <a:endParaRPr/>
           </a:p>
         </p:txBody>
       </p:sp>
@@ -10282,7 +12488,7 @@
           <a:noFill/>
         </p:spPr>
         <p:txBody>
-          <a:bodyPr wrap="square" lIns="0" tIns="0" rIns="0" bIns="0" anchor="t">
+          <a:bodyPr wrap="square" anchor="t" lIns="0" rIns="0" tIns="0" bIns="0">
             <a:spAutoFit/>
           </a:bodyPr>
           <a:lstStyle/>
@@ -10317,7 +12523,7 @@
           <a:noFill/>
         </p:spPr>
         <p:txBody>
-          <a:bodyPr wrap="square" lIns="0" tIns="0" rIns="0" bIns="0" anchor="t">
+          <a:bodyPr wrap="square" anchor="t" lIns="0" rIns="0" tIns="0" bIns="0">
             <a:spAutoFit/>
           </a:bodyPr>
           <a:lstStyle/>
@@ -10380,7 +12586,6 @@
           <a:lstStyle/>
           <a:p>
             <a:pPr algn="ctr"/>
-            <a:endParaRPr/>
           </a:p>
         </p:txBody>
       </p:sp>
@@ -10401,7 +12606,7 @@
           <a:noFill/>
         </p:spPr>
         <p:txBody>
-          <a:bodyPr wrap="square" lIns="0" tIns="0" rIns="0" bIns="0" anchor="ctr">
+          <a:bodyPr wrap="square" anchor="ctr" lIns="0" rIns="0" tIns="0" bIns="0">
             <a:spAutoFit/>
           </a:bodyPr>
           <a:lstStyle/>
@@ -10464,7 +12669,6 @@
           <a:lstStyle/>
           <a:p>
             <a:pPr algn="ctr"/>
-            <a:endParaRPr/>
           </a:p>
         </p:txBody>
       </p:sp>
@@ -10485,7 +12689,7 @@
           <a:noFill/>
         </p:spPr>
         <p:txBody>
-          <a:bodyPr wrap="square" lIns="0" tIns="0" rIns="0" bIns="0" anchor="ctr">
+          <a:bodyPr wrap="square" anchor="ctr" lIns="0" rIns="0" tIns="0" bIns="0">
             <a:spAutoFit/>
           </a:bodyPr>
           <a:lstStyle/>
@@ -10548,7 +12752,6 @@
           <a:lstStyle/>
           <a:p>
             <a:pPr algn="ctr"/>
-            <a:endParaRPr/>
           </a:p>
         </p:txBody>
       </p:sp>
@@ -10569,7 +12772,7 @@
           <a:noFill/>
         </p:spPr>
         <p:txBody>
-          <a:bodyPr wrap="square" lIns="0" tIns="0" rIns="0" bIns="0" anchor="ctr">
+          <a:bodyPr wrap="square" anchor="ctr" lIns="0" rIns="0" tIns="0" bIns="0">
             <a:spAutoFit/>
           </a:bodyPr>
           <a:lstStyle/>
@@ -10632,7 +12835,6 @@
           <a:lstStyle/>
           <a:p>
             <a:pPr algn="ctr"/>
-            <a:endParaRPr/>
           </a:p>
         </p:txBody>
       </p:sp>
@@ -10653,7 +12855,7 @@
           <a:noFill/>
         </p:spPr>
         <p:txBody>
-          <a:bodyPr wrap="square" lIns="0" tIns="0" rIns="0" bIns="0" anchor="t">
+          <a:bodyPr wrap="square" anchor="t" lIns="0" rIns="0" tIns="0" bIns="0">
             <a:spAutoFit/>
           </a:bodyPr>
           <a:lstStyle/>
@@ -10688,7 +12890,7 @@
           <a:noFill/>
         </p:spPr>
         <p:txBody>
-          <a:bodyPr wrap="square" lIns="0" tIns="0" rIns="0" bIns="0" anchor="t">
+          <a:bodyPr wrap="square" anchor="t" lIns="0" rIns="0" tIns="0" bIns="0">
             <a:spAutoFit/>
           </a:bodyPr>
           <a:lstStyle/>
@@ -10751,7 +12953,6 @@
           <a:lstStyle/>
           <a:p>
             <a:pPr algn="ctr"/>
-            <a:endParaRPr/>
           </a:p>
         </p:txBody>
       </p:sp>
@@ -10772,7 +12973,7 @@
           <a:noFill/>
         </p:spPr>
         <p:txBody>
-          <a:bodyPr wrap="square" lIns="0" tIns="0" rIns="0" bIns="0" anchor="ctr">
+          <a:bodyPr wrap="square" anchor="ctr" lIns="0" rIns="0" tIns="0" bIns="0">
             <a:spAutoFit/>
           </a:bodyPr>
           <a:lstStyle/>
@@ -10835,7 +13036,6 @@
           <a:lstStyle/>
           <a:p>
             <a:pPr algn="ctr"/>
-            <a:endParaRPr/>
           </a:p>
         </p:txBody>
       </p:sp>
@@ -10856,7 +13056,7 @@
           <a:noFill/>
         </p:spPr>
         <p:txBody>
-          <a:bodyPr wrap="square" lIns="0" tIns="0" rIns="0" bIns="0" anchor="ctr">
+          <a:bodyPr wrap="square" anchor="ctr" lIns="0" rIns="0" tIns="0" bIns="0">
             <a:spAutoFit/>
           </a:bodyPr>
           <a:lstStyle/>
@@ -10919,7 +13119,6 @@
           <a:lstStyle/>
           <a:p>
             <a:pPr algn="ctr"/>
-            <a:endParaRPr/>
           </a:p>
         </p:txBody>
       </p:sp>
@@ -10940,7 +13139,7 @@
           <a:noFill/>
         </p:spPr>
         <p:txBody>
-          <a:bodyPr wrap="square" lIns="0" tIns="0" rIns="0" bIns="0" anchor="ctr">
+          <a:bodyPr wrap="square" anchor="ctr" lIns="0" rIns="0" tIns="0" bIns="0">
             <a:spAutoFit/>
           </a:bodyPr>
           <a:lstStyle/>
@@ -11001,7 +13200,6 @@
           <a:lstStyle/>
           <a:p>
             <a:pPr algn="ctr"/>
-            <a:endParaRPr/>
           </a:p>
         </p:txBody>
       </p:sp>
@@ -11022,7 +13220,7 @@
           <a:noFill/>
         </p:spPr>
         <p:txBody>
-          <a:bodyPr wrap="square" lIns="0" tIns="0" rIns="0" bIns="0" anchor="ctr">
+          <a:bodyPr wrap="square" anchor="ctr" lIns="0" rIns="0" tIns="0" bIns="0">
             <a:spAutoFit/>
           </a:bodyPr>
           <a:lstStyle/>
@@ -11066,7 +13264,7 @@
           <a:noFill/>
         </p:spPr>
         <p:txBody>
-          <a:bodyPr wrap="square" lIns="0" tIns="0" rIns="0" bIns="0" anchor="t">
+          <a:bodyPr wrap="square" anchor="t" lIns="0" rIns="0" tIns="0" bIns="0">
             <a:spAutoFit/>
           </a:bodyPr>
           <a:lstStyle/>
@@ -11413,7 +13611,7 @@
 </file>
 
 <file path=ppt/theme/theme2.xml><?xml version="1.0" encoding="utf-8"?>
-<a:theme xmlns:a="http://schemas.openxmlformats.org/drawingml/2006/main" name="Office">
+<a:theme xmlns:a="http://schemas.openxmlformats.org/drawingml/2006/main" name="Office Theme">
   <a:themeElements>
     <a:clrScheme name="Office">
       <a:dk1>
@@ -11423,44 +13621,44 @@
         <a:sysClr val="window" lastClr="FFFFFF"/>
       </a:lt1>
       <a:dk2>
-        <a:srgbClr val="0E2841"/>
+        <a:srgbClr val="1F497D"/>
       </a:dk2>
       <a:lt2>
-        <a:srgbClr val="E8E8E8"/>
+        <a:srgbClr val="EEECE1"/>
       </a:lt2>
       <a:accent1>
-        <a:srgbClr val="156082"/>
+        <a:srgbClr val="4F81BD"/>
       </a:accent1>
       <a:accent2>
-        <a:srgbClr val="E97132"/>
+        <a:srgbClr val="C0504D"/>
       </a:accent2>
       <a:accent3>
-        <a:srgbClr val="196B24"/>
+        <a:srgbClr val="9BBB59"/>
       </a:accent3>
       <a:accent4>
-        <a:srgbClr val="0F9ED5"/>
+        <a:srgbClr val="8064A2"/>
       </a:accent4>
       <a:accent5>
-        <a:srgbClr val="A02B93"/>
+        <a:srgbClr val="4BACC6"/>
       </a:accent5>
       <a:accent6>
-        <a:srgbClr val="4EA72E"/>
+        <a:srgbClr val="F79646"/>
       </a:accent6>
       <a:hlink>
-        <a:srgbClr val="467886"/>
+        <a:srgbClr val="0000FF"/>
       </a:hlink>
       <a:folHlink>
-        <a:srgbClr val="96607D"/>
+        <a:srgbClr val="800080"/>
       </a:folHlink>
     </a:clrScheme>
     <a:fontScheme name="Office">
       <a:majorFont>
-        <a:latin typeface="Aptos Display" panose="02110004020202020204"/>
+        <a:latin typeface="Calibri"/>
         <a:ea typeface=""/>
         <a:cs typeface=""/>
-        <a:font script="Jpan" typeface="游ゴシック Light"/>
+        <a:font script="Jpan" typeface="ＭＳ Ｐゴシック"/>
         <a:font script="Hang" typeface="맑은 고딕"/>
-        <a:font script="Hans" typeface="等线 Light"/>
+        <a:font script="Hans" typeface="宋体"/>
         <a:font script="Hant" typeface="新細明體"/>
         <a:font script="Arab" typeface="Times New Roman"/>
         <a:font script="Hebr" typeface="Times New Roman"/>
@@ -11488,31 +13686,14 @@
         <a:font script="Viet" typeface="Times New Roman"/>
         <a:font script="Uigh" typeface="Microsoft Uighur"/>
         <a:font script="Geor" typeface="Sylfaen"/>
-        <a:font script="Armn" typeface="Arial"/>
-        <a:font script="Bugi" typeface="Leelawadee UI"/>
-        <a:font script="Bopo" typeface="Microsoft JhengHei"/>
-        <a:font script="Java" typeface="Javanese Text"/>
-        <a:font script="Lisu" typeface="Segoe UI"/>
-        <a:font script="Mymr" typeface="Myanmar Text"/>
-        <a:font script="Nkoo" typeface="Ebrima"/>
-        <a:font script="Olck" typeface="Nirmala UI"/>
-        <a:font script="Osma" typeface="Ebrima"/>
-        <a:font script="Phag" typeface="Phagspa"/>
-        <a:font script="Syrn" typeface="Estrangelo Edessa"/>
-        <a:font script="Syrj" typeface="Estrangelo Edessa"/>
-        <a:font script="Syre" typeface="Estrangelo Edessa"/>
-        <a:font script="Sora" typeface="Nirmala UI"/>
-        <a:font script="Tale" typeface="Microsoft Tai Le"/>
-        <a:font script="Talu" typeface="Microsoft New Tai Lue"/>
-        <a:font script="Tfng" typeface="Ebrima"/>
       </a:majorFont>
       <a:minorFont>
-        <a:latin typeface="Aptos" panose="02110004020202020204"/>
+        <a:latin typeface="Calibri"/>
         <a:ea typeface=""/>
         <a:cs typeface=""/>
-        <a:font script="Jpan" typeface="游ゴシック"/>
+        <a:font script="Jpan" typeface="ＭＳ Ｐゴシック"/>
         <a:font script="Hang" typeface="맑은 고딕"/>
-        <a:font script="Hans" typeface="等线"/>
+        <a:font script="Hans" typeface="宋体"/>
         <a:font script="Hant" typeface="新細明體"/>
         <a:font script="Arab" typeface="Arial"/>
         <a:font script="Hebr" typeface="Arial"/>
@@ -11540,23 +13721,6 @@
         <a:font script="Viet" typeface="Arial"/>
         <a:font script="Uigh" typeface="Microsoft Uighur"/>
         <a:font script="Geor" typeface="Sylfaen"/>
-        <a:font script="Armn" typeface="Arial"/>
-        <a:font script="Bugi" typeface="Leelawadee UI"/>
-        <a:font script="Bopo" typeface="Microsoft JhengHei"/>
-        <a:font script="Java" typeface="Javanese Text"/>
-        <a:font script="Lisu" typeface="Segoe UI"/>
-        <a:font script="Mymr" typeface="Myanmar Text"/>
-        <a:font script="Nkoo" typeface="Ebrima"/>
-        <a:font script="Olck" typeface="Nirmala UI"/>
-        <a:font script="Osma" typeface="Ebrima"/>
-        <a:font script="Phag" typeface="Phagspa"/>
-        <a:font script="Syrn" typeface="Estrangelo Edessa"/>
-        <a:font script="Syrj" typeface="Estrangelo Edessa"/>
-        <a:font script="Syre" typeface="Estrangelo Edessa"/>
-        <a:font script="Sora" typeface="Nirmala UI"/>
-        <a:font script="Tale" typeface="Microsoft Tai Le"/>
-        <a:font script="Talu" typeface="Microsoft New Tai Lue"/>
-        <a:font script="Tfng" typeface="Ebrima"/>
       </a:minorFont>
     </a:fontScheme>
     <a:fmtScheme name="Office">
@@ -11568,136 +13732,180 @@
           <a:gsLst>
             <a:gs pos="0">
               <a:schemeClr val="phClr">
-                <a:lumMod val="110000"/>
-                <a:satMod val="105000"/>
-                <a:tint val="67000"/>
+                <a:tint val="50000"/>
+                <a:satMod val="300000"/>
               </a:schemeClr>
             </a:gs>
-            <a:gs pos="50000">
+            <a:gs pos="35000">
               <a:schemeClr val="phClr">
-                <a:lumMod val="105000"/>
-                <a:satMod val="103000"/>
-                <a:tint val="73000"/>
+                <a:tint val="37000"/>
+                <a:satMod val="300000"/>
               </a:schemeClr>
             </a:gs>
             <a:gs pos="100000">
               <a:schemeClr val="phClr">
-                <a:lumMod val="105000"/>
-                <a:satMod val="109000"/>
-                <a:tint val="81000"/>
+                <a:tint val="15000"/>
+                <a:satMod val="350000"/>
               </a:schemeClr>
             </a:gs>
           </a:gsLst>
-          <a:lin ang="5400000" scaled="0"/>
+          <a:lin ang="16200000" scaled="1"/>
         </a:gradFill>
         <a:gradFill rotWithShape="1">
           <a:gsLst>
             <a:gs pos="0">
               <a:schemeClr val="phClr">
-                <a:satMod val="103000"/>
-                <a:lumMod val="102000"/>
-                <a:tint val="94000"/>
-              </a:schemeClr>
-            </a:gs>
-            <a:gs pos="50000">
-              <a:schemeClr val="phClr">
-                <a:satMod val="110000"/>
-                <a:lumMod val="100000"/>
+                <a:tint val="100000"/>
                 <a:shade val="100000"/>
+                <a:satMod val="130000"/>
               </a:schemeClr>
             </a:gs>
             <a:gs pos="100000">
               <a:schemeClr val="phClr">
-                <a:lumMod val="99000"/>
-                <a:satMod val="120000"/>
-                <a:shade val="78000"/>
+                <a:tint val="50000"/>
+                <a:shade val="100000"/>
+                <a:satMod val="350000"/>
               </a:schemeClr>
             </a:gs>
           </a:gsLst>
-          <a:lin ang="5400000" scaled="0"/>
+          <a:lin ang="16200000" scaled="0"/>
         </a:gradFill>
       </a:fillStyleLst>
       <a:lnStyleLst>
-        <a:ln w="12700" cap="flat" cmpd="sng" algn="ctr">
+        <a:ln w="9525" cap="flat" cmpd="sng" algn="ctr">
           <a:solidFill>
-            <a:schemeClr val="phClr"/>
+            <a:schemeClr val="phClr">
+              <a:shade val="95000"/>
+              <a:satMod val="105000"/>
+            </a:schemeClr>
           </a:solidFill>
           <a:prstDash val="solid"/>
-          <a:miter lim="800000"/>
-        </a:ln>
-        <a:ln w="19050" cap="flat" cmpd="sng" algn="ctr">
-          <a:solidFill>
-            <a:schemeClr val="phClr"/>
-          </a:solidFill>
-          <a:prstDash val="solid"/>
-          <a:miter lim="800000"/>
         </a:ln>
         <a:ln w="25400" cap="flat" cmpd="sng" algn="ctr">
           <a:solidFill>
             <a:schemeClr val="phClr"/>
           </a:solidFill>
           <a:prstDash val="solid"/>
-          <a:miter lim="800000"/>
+        </a:ln>
+        <a:ln w="38100" cap="flat" cmpd="sng" algn="ctr">
+          <a:solidFill>
+            <a:schemeClr val="phClr"/>
+          </a:solidFill>
+          <a:prstDash val="solid"/>
         </a:ln>
       </a:lnStyleLst>
       <a:effectStyleLst>
         <a:effectStyle>
-          <a:effectLst/>
-        </a:effectStyle>
-        <a:effectStyle>
-          <a:effectLst/>
+          <a:effectLst>
+            <a:outerShdw blurRad="40000" dist="20000" dir="5400000" rotWithShape="0">
+              <a:srgbClr val="000000">
+                <a:alpha val="38000"/>
+              </a:srgbClr>
+            </a:outerShdw>
+          </a:effectLst>
         </a:effectStyle>
         <a:effectStyle>
           <a:effectLst>
-            <a:outerShdw blurRad="57150" dist="19050" dir="5400000" algn="ctr" rotWithShape="0">
+            <a:outerShdw blurRad="40000" dist="23000" dir="5400000" rotWithShape="0">
               <a:srgbClr val="000000">
-                <a:alpha val="63000"/>
+                <a:alpha val="35000"/>
               </a:srgbClr>
             </a:outerShdw>
           </a:effectLst>
+        </a:effectStyle>
+        <a:effectStyle>
+          <a:effectLst>
+            <a:outerShdw blurRad="40000" dist="23000" dir="5400000" rotWithShape="0">
+              <a:srgbClr val="000000">
+                <a:alpha val="35000"/>
+              </a:srgbClr>
+            </a:outerShdw>
+          </a:effectLst>
+          <a:scene3d>
+            <a:camera prst="orthographicFront">
+              <a:rot lat="0" lon="0" rev="0"/>
+            </a:camera>
+            <a:lightRig rig="threePt" dir="t">
+              <a:rot lat="0" lon="0" rev="1200000"/>
+            </a:lightRig>
+          </a:scene3d>
+          <a:sp3d>
+            <a:bevelT w="63500" h="25400"/>
+          </a:sp3d>
         </a:effectStyle>
       </a:effectStyleLst>
       <a:bgFillStyleLst>
         <a:solidFill>
           <a:schemeClr val="phClr"/>
         </a:solidFill>
-        <a:solidFill>
-          <a:schemeClr val="phClr">
-            <a:tint val="95000"/>
-            <a:satMod val="170000"/>
-          </a:schemeClr>
-        </a:solidFill>
         <a:gradFill rotWithShape="1">
           <a:gsLst>
             <a:gs pos="0">
               <a:schemeClr val="phClr">
-                <a:tint val="93000"/>
-                <a:satMod val="150000"/>
-                <a:shade val="98000"/>
-                <a:lumMod val="102000"/>
+                <a:tint val="40000"/>
+                <a:satMod val="350000"/>
               </a:schemeClr>
             </a:gs>
-            <a:gs pos="50000">
+            <a:gs pos="40000">
               <a:schemeClr val="phClr">
-                <a:tint val="98000"/>
-                <a:satMod val="130000"/>
-                <a:shade val="90000"/>
-                <a:lumMod val="103000"/>
+                <a:tint val="45000"/>
+                <a:shade val="99000"/>
+                <a:satMod val="350000"/>
               </a:schemeClr>
             </a:gs>
             <a:gs pos="100000">
               <a:schemeClr val="phClr">
-                <a:shade val="63000"/>
-                <a:satMod val="120000"/>
+                <a:shade val="20000"/>
+                <a:satMod val="255000"/>
               </a:schemeClr>
             </a:gs>
           </a:gsLst>
-          <a:lin ang="5400000" scaled="0"/>
+          <a:path path="circle">
+            <a:fillToRect l="50000" t="-80000" r="50000" b="180000"/>
+          </a:path>
+        </a:gradFill>
+        <a:gradFill rotWithShape="1">
+          <a:gsLst>
+            <a:gs pos="0">
+              <a:schemeClr val="phClr">
+                <a:tint val="80000"/>
+                <a:satMod val="300000"/>
+              </a:schemeClr>
+            </a:gs>
+            <a:gs pos="100000">
+              <a:schemeClr val="phClr">
+                <a:shade val="30000"/>
+                <a:satMod val="200000"/>
+              </a:schemeClr>
+            </a:gs>
+          </a:gsLst>
+          <a:path path="circle">
+            <a:fillToRect l="50000" t="50000" r="50000" b="50000"/>
+          </a:path>
         </a:gradFill>
       </a:bgFillStyleLst>
     </a:fmtScheme>
   </a:themeElements>
   <a:objectDefaults>
+    <a:spDef>
+      <a:spPr/>
+      <a:bodyPr/>
+      <a:lstStyle/>
+      <a:style>
+        <a:lnRef idx="1">
+          <a:schemeClr val="accent1"/>
+        </a:lnRef>
+        <a:fillRef idx="3">
+          <a:schemeClr val="accent1"/>
+        </a:fillRef>
+        <a:effectRef idx="2">
+          <a:schemeClr val="accent1"/>
+        </a:effectRef>
+        <a:fontRef idx="minor">
+          <a:schemeClr val="lt1"/>
+        </a:fontRef>
+      </a:style>
+    </a:spDef>
     <a:lnDef>
       <a:spPr/>
       <a:bodyPr/>
@@ -11719,10 +13927,5 @@
     </a:lnDef>
   </a:objectDefaults>
   <a:extraClrSchemeLst/>
-  <a:extLst>
-    <a:ext uri="{05A4C25C-085E-4340-85A3-A5531E510DB2}">
-      <thm15:themeFamily xmlns:thm15="http://schemas.microsoft.com/office/thememl/2012/main" name="Office Theme" id="{2E142A2C-CD16-42D6-873A-C26D2A0506FA}" vid="{1BDDFF52-6CD6-40A5-AB3C-68EB2F1E4D0A}"/>
-    </a:ext>
-  </a:extLst>
 </a:theme>
 </file>
--- a/docs/TicketTriage-presentation.pptx
+++ b/docs/TicketTriage-presentation.pptx
@@ -4,14 +4,17 @@
   <p:sldMasterIdLst>
     <p:sldMasterId id="2147483648" r:id="rId1"/>
   </p:sldMasterIdLst>
+  <p:notesMasterIdLst>
+    <p:notesMasterId r:id="rId7"/>
+  </p:notesMasterIdLst>
   <p:sldIdLst>
-    <p:sldId id="256" r:id="rId7"/>
-    <p:sldId id="257" r:id="rId9"/>
-    <p:sldId id="258" r:id="rId10"/>
-    <p:sldId id="259" r:id="rId11"/>
-    <p:sldId id="260" r:id="rId12"/>
+    <p:sldId id="256" r:id="rId2"/>
+    <p:sldId id="257" r:id="rId3"/>
+    <p:sldId id="258" r:id="rId4"/>
+    <p:sldId id="259" r:id="rId5"/>
+    <p:sldId id="260" r:id="rId6"/>
   </p:sldIdLst>
-  <p:sldSz cx="12191695" cy="6858000" type="screen4x3"/>
+  <p:sldSz cx="12192000" cy="6858000"/>
   <p:notesSz cx="6858000" cy="9144000"/>
   <p:defaultTextStyle>
     <a:defPPr>
@@ -108,11 +111,27 @@
       </a:defRPr>
     </a:lvl9pPr>
   </p:defaultTextStyle>
+  <p:extLst>
+    <p:ext uri="{EFAFB233-063F-42B5-8137-9DF3F51BA10A}">
+      <p15:sldGuideLst xmlns:p15="http://schemas.microsoft.com/office/powerpoint/2012/main">
+        <p15:guide id="1" orient="horz" pos="2160">
+          <p15:clr>
+            <a:srgbClr val="A4A3A4"/>
+          </p15:clr>
+        </p15:guide>
+        <p15:guide id="2" pos="2880">
+          <p15:clr>
+            <a:srgbClr val="A4A3A4"/>
+          </p15:clr>
+        </p15:guide>
+      </p15:sldGuideLst>
+    </p:ext>
+  </p:extLst>
 </p:presentation>
 </file>
 
 <file path=ppt/notesMasters/notesMaster1.xml><?xml version="1.0" encoding="utf-8"?>
-<p:notesMaster xmlns:a="http://schemas.openxmlformats.org/drawingml/2006/main" xmlns:p="http://schemas.openxmlformats.org/presentationml/2006/main" xmlns:r="http://schemas.openxmlformats.org/officeDocument/2006/relationships">
+<p:notesMaster xmlns:a="http://schemas.openxmlformats.org/drawingml/2006/main" xmlns:r="http://schemas.openxmlformats.org/officeDocument/2006/relationships" xmlns:p="http://schemas.openxmlformats.org/presentationml/2006/main">
   <p:cSld>
     <p:bg>
       <p:bgRef idx="1001">
@@ -133,241 +152,16 @@
           <a:chExt cx="0" cy="0"/>
         </a:xfrm>
       </p:grpSpPr>
-      <p:sp>
-        <p:nvSpPr>
-          <p:cNvPr id="2" name="Header Placeholder 1"/>
-          <p:cNvSpPr>
-            <a:spLocks noGrp="1"/>
-          </p:cNvSpPr>
-          <p:nvPr>
-            <p:ph type="hdr" sz="quarter"/>
-          </p:nvPr>
-        </p:nvSpPr>
-        <p:spPr>
-          <a:xfrm>
-            <a:off x="0" y="0"/>
-            <a:ext cx="2971800" cy="457200"/>
-          </a:xfrm>
-          <a:prstGeom prst="rect">
-            <a:avLst/>
-          </a:prstGeom>
-        </p:spPr>
-        <p:txBody>
-          <a:bodyPr vert="horz" lIns="91440" tIns="45720" rIns="91440" bIns="45720" rtlCol="0"/>
-          <a:lstStyle>
-            <a:lvl1pPr algn="l">
-              <a:defRPr sz="1200"/>
-            </a:lvl1pPr>
-          </a:lstStyle>
-          <a:p>
-            <a:endParaRPr lang="en-US"/>
-          </a:p>
-        </p:txBody>
-      </p:sp>
-      <p:sp>
-        <p:nvSpPr>
-          <p:cNvPr id="3" name="Date Placeholder 2"/>
-          <p:cNvSpPr>
-            <a:spLocks noGrp="1"/>
-          </p:cNvSpPr>
-          <p:nvPr>
-            <p:ph type="dt" idx="1"/>
-          </p:nvPr>
-        </p:nvSpPr>
-        <p:spPr>
-          <a:xfrm>
-            <a:off x="3884613" y="0"/>
-            <a:ext cx="2971800" cy="457200"/>
-          </a:xfrm>
-          <a:prstGeom prst="rect">
-            <a:avLst/>
-          </a:prstGeom>
-        </p:spPr>
-        <p:txBody>
-          <a:bodyPr vert="horz" lIns="91440" tIns="45720" rIns="91440" bIns="45720" rtlCol="0"/>
-          <a:lstStyle>
-            <a:lvl1pPr algn="r">
-              <a:defRPr sz="1200"/>
-            </a:lvl1pPr>
-          </a:lstStyle>
-          <a:p>
-            <a:fld id="{0F89C1C7-3DCD-1040-A9CF-14679D8B5DDD}" type="datetimeFigureOut">
-              <a:rPr lang="en-US" smtClean="0"/>
-              <a:t>10/17/16</a:t>
-            </a:fld>
-            <a:endParaRPr lang="en-US"/>
-          </a:p>
-        </p:txBody>
-      </p:sp>
-      <p:sp>
-        <p:nvSpPr>
-          <p:cNvPr id="4" name="Slide Image Placeholder 3"/>
-          <p:cNvSpPr>
-            <a:spLocks noGrp="1" noRot="1" noChangeAspect="1"/>
-          </p:cNvSpPr>
-          <p:nvPr>
-            <p:ph type="sldImg" idx="2"/>
-          </p:nvPr>
-        </p:nvSpPr>
-        <p:spPr>
-          <a:xfrm>
-            <a:off x="1143000" y="685800"/>
-            <a:ext cx="4572000" cy="3429000"/>
-          </a:xfrm>
-          <a:prstGeom prst="rect">
-            <a:avLst/>
-          </a:prstGeom>
-          <a:noFill/>
-          <a:ln w="12700">
-            <a:solidFill>
-              <a:prstClr val="black"/>
-            </a:solidFill>
-          </a:ln>
-        </p:spPr>
-        <p:txBody>
-          <a:bodyPr vert="horz" lIns="91440" tIns="45720" rIns="91440" bIns="45720" rtlCol="0" anchor="ctr"/>
-          <a:lstStyle/>
-          <a:p>
-            <a:endParaRPr lang="en-US"/>
-          </a:p>
-        </p:txBody>
-      </p:sp>
-      <p:sp>
-        <p:nvSpPr>
-          <p:cNvPr id="5" name="Notes Placeholder 4"/>
-          <p:cNvSpPr>
-            <a:spLocks noGrp="1"/>
-          </p:cNvSpPr>
-          <p:nvPr>
-            <p:ph type="body" sz="quarter" idx="3"/>
-          </p:nvPr>
-        </p:nvSpPr>
-        <p:spPr>
-          <a:xfrm>
-            <a:off x="685800" y="4343400"/>
-            <a:ext cx="5486400" cy="4114800"/>
-          </a:xfrm>
-          <a:prstGeom prst="rect">
-            <a:avLst/>
-          </a:prstGeom>
-        </p:spPr>
-        <p:txBody>
-          <a:bodyPr vert="horz" lIns="91440" tIns="45720" rIns="91440" bIns="45720" rtlCol="0"/>
-          <a:lstStyle/>
-          <a:p>
-            <a:pPr lvl="0"/>
-            <a:r>
-              <a:rPr lang="en-US" smtClean="0"/>
-              <a:t>Click to edit Master text styles</a:t>
-            </a:r>
-          </a:p>
-          <a:p>
-            <a:pPr lvl="1"/>
-            <a:r>
-              <a:rPr lang="en-US" smtClean="0"/>
-              <a:t>Second level</a:t>
-            </a:r>
-          </a:p>
-          <a:p>
-            <a:pPr lvl="2"/>
-            <a:r>
-              <a:rPr lang="en-US" smtClean="0"/>
-              <a:t>Third level</a:t>
-            </a:r>
-          </a:p>
-          <a:p>
-            <a:pPr lvl="3"/>
-            <a:r>
-              <a:rPr lang="en-US" smtClean="0"/>
-              <a:t>Fourth level</a:t>
-            </a:r>
-          </a:p>
-          <a:p>
-            <a:pPr lvl="4"/>
-            <a:r>
-              <a:rPr lang="en-US" smtClean="0"/>
-              <a:t>Fifth level</a:t>
-            </a:r>
-            <a:endParaRPr lang="en-US"/>
-          </a:p>
-        </p:txBody>
-      </p:sp>
-      <p:sp>
-        <p:nvSpPr>
-          <p:cNvPr id="6" name="Footer Placeholder 5"/>
-          <p:cNvSpPr>
-            <a:spLocks noGrp="1"/>
-          </p:cNvSpPr>
-          <p:nvPr>
-            <p:ph type="ftr" sz="quarter" idx="4"/>
-          </p:nvPr>
-        </p:nvSpPr>
-        <p:spPr>
-          <a:xfrm>
-            <a:off x="0" y="8685213"/>
-            <a:ext cx="2971800" cy="457200"/>
-          </a:xfrm>
-          <a:prstGeom prst="rect">
-            <a:avLst/>
-          </a:prstGeom>
-        </p:spPr>
-        <p:txBody>
-          <a:bodyPr vert="horz" lIns="91440" tIns="45720" rIns="91440" bIns="45720" rtlCol="0" anchor="b"/>
-          <a:lstStyle>
-            <a:lvl1pPr algn="l">
-              <a:defRPr sz="1200"/>
-            </a:lvl1pPr>
-          </a:lstStyle>
-          <a:p>
-            <a:endParaRPr lang="en-US"/>
-          </a:p>
-        </p:txBody>
-      </p:sp>
-      <p:sp>
-        <p:nvSpPr>
-          <p:cNvPr id="7" name="Slide Number Placeholder 6"/>
-          <p:cNvSpPr>
-            <a:spLocks noGrp="1"/>
-          </p:cNvSpPr>
-          <p:nvPr>
-            <p:ph type="sldNum" sz="quarter" idx="5"/>
-          </p:nvPr>
-        </p:nvSpPr>
-        <p:spPr>
-          <a:xfrm>
-            <a:off x="3884613" y="8685213"/>
-            <a:ext cx="2971800" cy="457200"/>
-          </a:xfrm>
-          <a:prstGeom prst="rect">
-            <a:avLst/>
-          </a:prstGeom>
-        </p:spPr>
-        <p:txBody>
-          <a:bodyPr vert="horz" lIns="91440" tIns="45720" rIns="91440" bIns="45720" rtlCol="0" anchor="b"/>
-          <a:lstStyle>
-            <a:lvl1pPr algn="r">
-              <a:defRPr sz="1200"/>
-            </a:lvl1pPr>
-          </a:lstStyle>
-          <a:p>
-            <a:fld id="{BB5E49A5-4136-284D-997B-48E1D791AD67}" type="slidenum">
-              <a:rPr lang="en-US" smtClean="0"/>
-              <a:t>‹#›</a:t>
-            </a:fld>
-            <a:endParaRPr lang="en-US"/>
-          </a:p>
-        </p:txBody>
-      </p:sp>
     </p:spTree>
     <p:extLst>
       <p:ext uri="{BB962C8B-B14F-4D97-AF65-F5344CB8AC3E}">
-        <p14:creationId xmlns:p14="http://schemas.microsoft.com/office/powerpoint/2010/main" val="2623252185"/>
+        <p14:creationId xmlns:p14="http://schemas.microsoft.com/office/powerpoint/2010/main" val="1390457762"/>
       </p:ext>
     </p:extLst>
   </p:cSld>
   <p:clrMap bg1="lt1" tx1="dk1" bg2="lt2" tx2="dk2" accent1="accent1" accent2="accent2" accent3="accent3" accent4="accent4" accent5="accent5" accent6="accent6" hlink="hlink" folHlink="folHlink"/>
   <p:notesStyle>
-    <a:lvl1pPr marL="0" algn="l" defTabSz="457200" rtl="0" eaLnBrk="1" latinLnBrk="0" hangingPunct="1">
+    <a:lvl1pPr marL="0" algn="l" defTabSz="914400" rtl="0" eaLnBrk="1" latinLnBrk="0" hangingPunct="1">
       <a:defRPr sz="1200" kern="1200">
         <a:solidFill>
           <a:schemeClr val="tx1"/>
@@ -377,7 +171,7 @@
         <a:cs typeface="+mn-cs"/>
       </a:defRPr>
     </a:lvl1pPr>
-    <a:lvl2pPr marL="457200" algn="l" defTabSz="457200" rtl="0" eaLnBrk="1" latinLnBrk="0" hangingPunct="1">
+    <a:lvl2pPr marL="457200" algn="l" defTabSz="914400" rtl="0" eaLnBrk="1" latinLnBrk="0" hangingPunct="1">
       <a:defRPr sz="1200" kern="1200">
         <a:solidFill>
           <a:schemeClr val="tx1"/>
@@ -387,7 +181,7 @@
         <a:cs typeface="+mn-cs"/>
       </a:defRPr>
     </a:lvl2pPr>
-    <a:lvl3pPr marL="914400" algn="l" defTabSz="457200" rtl="0" eaLnBrk="1" latinLnBrk="0" hangingPunct="1">
+    <a:lvl3pPr marL="914400" algn="l" defTabSz="914400" rtl="0" eaLnBrk="1" latinLnBrk="0" hangingPunct="1">
       <a:defRPr sz="1200" kern="1200">
         <a:solidFill>
           <a:schemeClr val="tx1"/>
@@ -397,7 +191,7 @@
         <a:cs typeface="+mn-cs"/>
       </a:defRPr>
     </a:lvl3pPr>
-    <a:lvl4pPr marL="1371600" algn="l" defTabSz="457200" rtl="0" eaLnBrk="1" latinLnBrk="0" hangingPunct="1">
+    <a:lvl4pPr marL="1371600" algn="l" defTabSz="914400" rtl="0" eaLnBrk="1" latinLnBrk="0" hangingPunct="1">
       <a:defRPr sz="1200" kern="1200">
         <a:solidFill>
           <a:schemeClr val="tx1"/>
@@ -407,7 +201,7 @@
         <a:cs typeface="+mn-cs"/>
       </a:defRPr>
     </a:lvl4pPr>
-    <a:lvl5pPr marL="1828800" algn="l" defTabSz="457200" rtl="0" eaLnBrk="1" latinLnBrk="0" hangingPunct="1">
+    <a:lvl5pPr marL="1828800" algn="l" defTabSz="914400" rtl="0" eaLnBrk="1" latinLnBrk="0" hangingPunct="1">
       <a:defRPr sz="1200" kern="1200">
         <a:solidFill>
           <a:schemeClr val="tx1"/>
@@ -417,7 +211,7 @@
         <a:cs typeface="+mn-cs"/>
       </a:defRPr>
     </a:lvl5pPr>
-    <a:lvl6pPr marL="2286000" algn="l" defTabSz="457200" rtl="0" eaLnBrk="1" latinLnBrk="0" hangingPunct="1">
+    <a:lvl6pPr marL="2286000" algn="l" defTabSz="914400" rtl="0" eaLnBrk="1" latinLnBrk="0" hangingPunct="1">
       <a:defRPr sz="1200" kern="1200">
         <a:solidFill>
           <a:schemeClr val="tx1"/>
@@ -427,7 +221,7 @@
         <a:cs typeface="+mn-cs"/>
       </a:defRPr>
     </a:lvl6pPr>
-    <a:lvl7pPr marL="2743200" algn="l" defTabSz="457200" rtl="0" eaLnBrk="1" latinLnBrk="0" hangingPunct="1">
+    <a:lvl7pPr marL="2743200" algn="l" defTabSz="914400" rtl="0" eaLnBrk="1" latinLnBrk="0" hangingPunct="1">
       <a:defRPr sz="1200" kern="1200">
         <a:solidFill>
           <a:schemeClr val="tx1"/>
@@ -437,7 +231,7 @@
         <a:cs typeface="+mn-cs"/>
       </a:defRPr>
     </a:lvl7pPr>
-    <a:lvl8pPr marL="3200400" algn="l" defTabSz="457200" rtl="0" eaLnBrk="1" latinLnBrk="0" hangingPunct="1">
+    <a:lvl8pPr marL="3200400" algn="l" defTabSz="914400" rtl="0" eaLnBrk="1" latinLnBrk="0" hangingPunct="1">
       <a:defRPr sz="1200" kern="1200">
         <a:solidFill>
           <a:schemeClr val="tx1"/>
@@ -447,7 +241,7 @@
         <a:cs typeface="+mn-cs"/>
       </a:defRPr>
     </a:lvl8pPr>
-    <a:lvl9pPr marL="3657600" algn="l" defTabSz="457200" rtl="0" eaLnBrk="1" latinLnBrk="0" hangingPunct="1">
+    <a:lvl9pPr marL="3657600" algn="l" defTabSz="914400" rtl="0" eaLnBrk="1" latinLnBrk="0" hangingPunct="1">
       <a:defRPr sz="1200" kern="1200">
         <a:solidFill>
           <a:schemeClr val="tx1"/>
@@ -462,7 +256,7 @@
 </file>
 
 <file path=ppt/notesSlides/notesSlide1.xml><?xml version="1.0" encoding="utf-8"?>
-<p:notes xmlns:a="http://schemas.openxmlformats.org/drawingml/2006/main" xmlns:p="http://schemas.openxmlformats.org/presentationml/2006/main" xmlns:r="http://schemas.openxmlformats.org/officeDocument/2006/relationships">
+<p:notes xmlns:a="http://schemas.openxmlformats.org/drawingml/2006/main" xmlns:r="http://schemas.openxmlformats.org/officeDocument/2006/relationships" xmlns:p="http://schemas.openxmlformats.org/presentationml/2006/main">
   <p:cSld>
     <p:spTree>
       <p:nvGrpSpPr>
@@ -482,7 +276,7 @@
         <p:nvSpPr>
           <p:cNvPr id="2" name="Slide Image Placeholder 1"/>
           <p:cNvSpPr>
-            <a:spLocks noGrp="1"/>
+            <a:spLocks noGrp="1" noRot="1" noChangeAspect="1"/>
           </p:cNvSpPr>
           <p:nvPr>
             <p:ph type="sldImg" idx="2"/>
@@ -497,7 +291,7 @@
             <a:spLocks noGrp="1"/>
           </p:cNvSpPr>
           <p:nvPr>
-            <p:ph type="body" idx="3" sz="quarter"/>
+            <p:ph type="body" sz="quarter" idx="3"/>
           </p:nvPr>
         </p:nvSpPr>
         <p:spPr/>
@@ -518,7 +312,7 @@
             <a:spLocks noGrp="1"/>
           </p:cNvSpPr>
           <p:nvPr>
-            <p:ph type="sldNum" idx="5" sz="quarter"/>
+            <p:ph type="sldNum" sz="quarter" idx="5"/>
           </p:nvPr>
         </p:nvSpPr>
         <p:spPr/>
@@ -532,7 +326,7 @@
 </file>
 
 <file path=ppt/notesSlides/notesSlide2.xml><?xml version="1.0" encoding="utf-8"?>
-<p:notes xmlns:a="http://schemas.openxmlformats.org/drawingml/2006/main" xmlns:p="http://schemas.openxmlformats.org/presentationml/2006/main" xmlns:r="http://schemas.openxmlformats.org/officeDocument/2006/relationships">
+<p:notes xmlns:a="http://schemas.openxmlformats.org/drawingml/2006/main" xmlns:r="http://schemas.openxmlformats.org/officeDocument/2006/relationships" xmlns:p="http://schemas.openxmlformats.org/presentationml/2006/main">
   <p:cSld>
     <p:spTree>
       <p:nvGrpSpPr>
@@ -552,7 +346,7 @@
         <p:nvSpPr>
           <p:cNvPr id="2" name="Slide Image Placeholder 1"/>
           <p:cNvSpPr>
-            <a:spLocks noGrp="1"/>
+            <a:spLocks noGrp="1" noRot="1" noChangeAspect="1"/>
           </p:cNvSpPr>
           <p:nvPr>
             <p:ph type="sldImg" idx="2"/>
@@ -567,7 +361,7 @@
             <a:spLocks noGrp="1"/>
           </p:cNvSpPr>
           <p:nvPr>
-            <p:ph type="body" idx="3" sz="quarter"/>
+            <p:ph type="body" sz="quarter" idx="3"/>
           </p:nvPr>
         </p:nvSpPr>
         <p:spPr/>
@@ -588,7 +382,7 @@
             <a:spLocks noGrp="1"/>
           </p:cNvSpPr>
           <p:nvPr>
-            <p:ph type="sldNum" idx="5" sz="quarter"/>
+            <p:ph type="sldNum" sz="quarter" idx="5"/>
           </p:nvPr>
         </p:nvSpPr>
         <p:spPr/>
@@ -602,7 +396,7 @@
 </file>
 
 <file path=ppt/notesSlides/notesSlide3.xml><?xml version="1.0" encoding="utf-8"?>
-<p:notes xmlns:a="http://schemas.openxmlformats.org/drawingml/2006/main" xmlns:p="http://schemas.openxmlformats.org/presentationml/2006/main" xmlns:r="http://schemas.openxmlformats.org/officeDocument/2006/relationships">
+<p:notes xmlns:a="http://schemas.openxmlformats.org/drawingml/2006/main" xmlns:r="http://schemas.openxmlformats.org/officeDocument/2006/relationships" xmlns:p="http://schemas.openxmlformats.org/presentationml/2006/main">
   <p:cSld>
     <p:spTree>
       <p:nvGrpSpPr>
@@ -622,7 +416,7 @@
         <p:nvSpPr>
           <p:cNvPr id="2" name="Slide Image Placeholder 1"/>
           <p:cNvSpPr>
-            <a:spLocks noGrp="1"/>
+            <a:spLocks noGrp="1" noRot="1" noChangeAspect="1"/>
           </p:cNvSpPr>
           <p:nvPr>
             <p:ph type="sldImg" idx="2"/>
@@ -637,7 +431,7 @@
             <a:spLocks noGrp="1"/>
           </p:cNvSpPr>
           <p:nvPr>
-            <p:ph type="body" idx="3" sz="quarter"/>
+            <p:ph type="body" sz="quarter" idx="3"/>
           </p:nvPr>
         </p:nvSpPr>
         <p:spPr/>
@@ -658,7 +452,7 @@
             <a:spLocks noGrp="1"/>
           </p:cNvSpPr>
           <p:nvPr>
-            <p:ph type="sldNum" idx="5" sz="quarter"/>
+            <p:ph type="sldNum" sz="quarter" idx="5"/>
           </p:nvPr>
         </p:nvSpPr>
         <p:spPr/>
@@ -672,7 +466,7 @@
 </file>
 
 <file path=ppt/notesSlides/notesSlide4.xml><?xml version="1.0" encoding="utf-8"?>
-<p:notes xmlns:a="http://schemas.openxmlformats.org/drawingml/2006/main" xmlns:p="http://schemas.openxmlformats.org/presentationml/2006/main" xmlns:r="http://schemas.openxmlformats.org/officeDocument/2006/relationships">
+<p:notes xmlns:a="http://schemas.openxmlformats.org/drawingml/2006/main" xmlns:r="http://schemas.openxmlformats.org/officeDocument/2006/relationships" xmlns:p="http://schemas.openxmlformats.org/presentationml/2006/main">
   <p:cSld>
     <p:spTree>
       <p:nvGrpSpPr>
@@ -692,7 +486,7 @@
         <p:nvSpPr>
           <p:cNvPr id="2" name="Slide Image Placeholder 1"/>
           <p:cNvSpPr>
-            <a:spLocks noGrp="1"/>
+            <a:spLocks noGrp="1" noRot="1" noChangeAspect="1"/>
           </p:cNvSpPr>
           <p:nvPr>
             <p:ph type="sldImg" idx="2"/>
@@ -707,7 +501,7 @@
             <a:spLocks noGrp="1"/>
           </p:cNvSpPr>
           <p:nvPr>
-            <p:ph type="body" idx="3" sz="quarter"/>
+            <p:ph type="body" sz="quarter" idx="3"/>
           </p:nvPr>
         </p:nvSpPr>
         <p:spPr/>
@@ -728,7 +522,7 @@
             <a:spLocks noGrp="1"/>
           </p:cNvSpPr>
           <p:nvPr>
-            <p:ph type="sldNum" idx="5" sz="quarter"/>
+            <p:ph type="sldNum" sz="quarter" idx="5"/>
           </p:nvPr>
         </p:nvSpPr>
         <p:spPr/>
@@ -742,7 +536,7 @@
 </file>
 
 <file path=ppt/notesSlides/notesSlide5.xml><?xml version="1.0" encoding="utf-8"?>
-<p:notes xmlns:a="http://schemas.openxmlformats.org/drawingml/2006/main" xmlns:p="http://schemas.openxmlformats.org/presentationml/2006/main" xmlns:r="http://schemas.openxmlformats.org/officeDocument/2006/relationships">
+<p:notes xmlns:a="http://schemas.openxmlformats.org/drawingml/2006/main" xmlns:r="http://schemas.openxmlformats.org/officeDocument/2006/relationships" xmlns:p="http://schemas.openxmlformats.org/presentationml/2006/main">
   <p:cSld>
     <p:spTree>
       <p:nvGrpSpPr>
@@ -762,7 +556,7 @@
         <p:nvSpPr>
           <p:cNvPr id="2" name="Slide Image Placeholder 1"/>
           <p:cNvSpPr>
-            <a:spLocks noGrp="1"/>
+            <a:spLocks noGrp="1" noRot="1" noChangeAspect="1"/>
           </p:cNvSpPr>
           <p:nvPr>
             <p:ph type="sldImg" idx="2"/>
@@ -777,7 +571,7 @@
             <a:spLocks noGrp="1"/>
           </p:cNvSpPr>
           <p:nvPr>
-            <p:ph type="body" idx="3" sz="quarter"/>
+            <p:ph type="body" sz="quarter" idx="3"/>
           </p:nvPr>
         </p:nvSpPr>
         <p:spPr/>
@@ -798,7 +592,7 @@
             <a:spLocks noGrp="1"/>
           </p:cNvSpPr>
           <p:nvPr>
-            <p:ph type="sldNum" idx="5" sz="quarter"/>
+            <p:ph type="sldNum" sz="quarter" idx="5"/>
           </p:nvPr>
         </p:nvSpPr>
         <p:spPr/>
@@ -849,10 +643,9 @@
           <a:lstStyle/>
           <a:p>
             <a:r>
-              <a:rPr lang="en-US" smtClean="0"/>
+              <a:rPr lang="en-US"/>
               <a:t>Click to edit Master title style</a:t>
             </a:r>
-            <a:endParaRPr lang="en-US"/>
           </a:p>
         </p:txBody>
       </p:sp>
@@ -968,10 +761,9 @@
           </a:lstStyle>
           <a:p>
             <a:r>
-              <a:rPr lang="en-US" smtClean="0"/>
+              <a:rPr lang="en-US"/>
               <a:t>Click to edit Master subtitle style</a:t>
             </a:r>
-            <a:endParaRPr lang="en-US"/>
           </a:p>
         </p:txBody>
       </p:sp>
@@ -992,7 +784,7 @@
           <a:p>
             <a:fld id="{5BCAD085-E8A6-8845-BD4E-CB4CCA059FC4}" type="datetimeFigureOut">
               <a:rPr lang="en-US" smtClean="0"/>
-              <a:t>1/27/13</a:t>
+              <a:t>9/25/2026</a:t>
             </a:fld>
             <a:endParaRPr lang="en-US"/>
           </a:p>
@@ -1034,7 +826,7 @@
           <a:p>
             <a:fld id="{C1FF6DA9-008F-8B48-92A6-B652298478BF}" type="slidenum">
               <a:rPr lang="en-US" smtClean="0"/>
-              <a:t>‹#›</a:t>
+              <a:t>‹Nr.›</a:t>
             </a:fld>
             <a:endParaRPr lang="en-US"/>
           </a:p>
@@ -1086,10 +878,9 @@
           <a:lstStyle/>
           <a:p>
             <a:r>
-              <a:rPr lang="en-US" smtClean="0"/>
+              <a:rPr lang="en-US"/>
               <a:t>Click to edit Master title style</a:t>
             </a:r>
-            <a:endParaRPr lang="en-US"/>
           </a:p>
         </p:txBody>
       </p:sp>
@@ -1110,38 +901,37 @@
           <a:p>
             <a:pPr lvl="0"/>
             <a:r>
-              <a:rPr lang="en-US" smtClean="0"/>
+              <a:rPr lang="en-US"/>
               <a:t>Click to edit Master text styles</a:t>
             </a:r>
           </a:p>
           <a:p>
             <a:pPr lvl="1"/>
             <a:r>
-              <a:rPr lang="en-US" smtClean="0"/>
+              <a:rPr lang="en-US"/>
               <a:t>Second level</a:t>
             </a:r>
           </a:p>
           <a:p>
             <a:pPr lvl="2"/>
             <a:r>
-              <a:rPr lang="en-US" smtClean="0"/>
+              <a:rPr lang="en-US"/>
               <a:t>Third level</a:t>
             </a:r>
           </a:p>
           <a:p>
             <a:pPr lvl="3"/>
             <a:r>
-              <a:rPr lang="en-US" smtClean="0"/>
+              <a:rPr lang="en-US"/>
               <a:t>Fourth level</a:t>
             </a:r>
           </a:p>
           <a:p>
             <a:pPr lvl="4"/>
             <a:r>
-              <a:rPr lang="en-US" smtClean="0"/>
+              <a:rPr lang="en-US"/>
               <a:t>Fifth level</a:t>
             </a:r>
-            <a:endParaRPr lang="en-US"/>
           </a:p>
         </p:txBody>
       </p:sp>
@@ -1162,7 +952,7 @@
           <a:p>
             <a:fld id="{5BCAD085-E8A6-8845-BD4E-CB4CCA059FC4}" type="datetimeFigureOut">
               <a:rPr lang="en-US" smtClean="0"/>
-              <a:t>1/27/13</a:t>
+              <a:t>9/25/2026</a:t>
             </a:fld>
             <a:endParaRPr lang="en-US"/>
           </a:p>
@@ -1204,7 +994,7 @@
           <a:p>
             <a:fld id="{C1FF6DA9-008F-8B48-92A6-B652298478BF}" type="slidenum">
               <a:rPr lang="en-US" smtClean="0"/>
-              <a:t>‹#›</a:t>
+              <a:t>‹Nr.›</a:t>
             </a:fld>
             <a:endParaRPr lang="en-US"/>
           </a:p>
@@ -1261,10 +1051,9 @@
           <a:lstStyle/>
           <a:p>
             <a:r>
-              <a:rPr lang="en-US" smtClean="0"/>
+              <a:rPr lang="en-US"/>
               <a:t>Click to edit Master title style</a:t>
             </a:r>
-            <a:endParaRPr lang="en-US"/>
           </a:p>
         </p:txBody>
       </p:sp>
@@ -1290,38 +1079,37 @@
           <a:p>
             <a:pPr lvl="0"/>
             <a:r>
-              <a:rPr lang="en-US" smtClean="0"/>
+              <a:rPr lang="en-US"/>
               <a:t>Click to edit Master text styles</a:t>
             </a:r>
           </a:p>
           <a:p>
             <a:pPr lvl="1"/>
             <a:r>
-              <a:rPr lang="en-US" smtClean="0"/>
+              <a:rPr lang="en-US"/>
               <a:t>Second level</a:t>
             </a:r>
           </a:p>
           <a:p>
             <a:pPr lvl="2"/>
             <a:r>
-              <a:rPr lang="en-US" smtClean="0"/>
+              <a:rPr lang="en-US"/>
               <a:t>Third level</a:t>
             </a:r>
           </a:p>
           <a:p>
             <a:pPr lvl="3"/>
             <a:r>
-              <a:rPr lang="en-US" smtClean="0"/>
+              <a:rPr lang="en-US"/>
               <a:t>Fourth level</a:t>
             </a:r>
           </a:p>
           <a:p>
             <a:pPr lvl="4"/>
             <a:r>
-              <a:rPr lang="en-US" smtClean="0"/>
+              <a:rPr lang="en-US"/>
               <a:t>Fifth level</a:t>
             </a:r>
-            <a:endParaRPr lang="en-US"/>
           </a:p>
         </p:txBody>
       </p:sp>
@@ -1342,7 +1130,7 @@
           <a:p>
             <a:fld id="{5BCAD085-E8A6-8845-BD4E-CB4CCA059FC4}" type="datetimeFigureOut">
               <a:rPr lang="en-US" smtClean="0"/>
-              <a:t>1/27/13</a:t>
+              <a:t>9/25/2026</a:t>
             </a:fld>
             <a:endParaRPr lang="en-US"/>
           </a:p>
@@ -1384,7 +1172,7 @@
           <a:p>
             <a:fld id="{C1FF6DA9-008F-8B48-92A6-B652298478BF}" type="slidenum">
               <a:rPr lang="en-US" smtClean="0"/>
-              <a:t>‹#›</a:t>
+              <a:t>‹Nr.›</a:t>
             </a:fld>
             <a:endParaRPr lang="en-US"/>
           </a:p>
@@ -1436,10 +1224,9 @@
           <a:lstStyle/>
           <a:p>
             <a:r>
-              <a:rPr lang="en-US" smtClean="0"/>
+              <a:rPr lang="en-US"/>
               <a:t>Click to edit Master title style</a:t>
             </a:r>
-            <a:endParaRPr lang="en-US"/>
           </a:p>
         </p:txBody>
       </p:sp>
@@ -1460,38 +1247,37 @@
           <a:p>
             <a:pPr lvl="0"/>
             <a:r>
-              <a:rPr lang="en-US" smtClean="0"/>
+              <a:rPr lang="en-US"/>
               <a:t>Click to edit Master text styles</a:t>
             </a:r>
           </a:p>
           <a:p>
             <a:pPr lvl="1"/>
             <a:r>
-              <a:rPr lang="en-US" smtClean="0"/>
+              <a:rPr lang="en-US"/>
               <a:t>Second level</a:t>
             </a:r>
           </a:p>
           <a:p>
             <a:pPr lvl="2"/>
             <a:r>
-              <a:rPr lang="en-US" smtClean="0"/>
+              <a:rPr lang="en-US"/>
               <a:t>Third level</a:t>
             </a:r>
           </a:p>
           <a:p>
             <a:pPr lvl="3"/>
             <a:r>
-              <a:rPr lang="en-US" smtClean="0"/>
+              <a:rPr lang="en-US"/>
               <a:t>Fourth level</a:t>
             </a:r>
           </a:p>
           <a:p>
             <a:pPr lvl="4"/>
             <a:r>
-              <a:rPr lang="en-US" smtClean="0"/>
+              <a:rPr lang="en-US"/>
               <a:t>Fifth level</a:t>
             </a:r>
-            <a:endParaRPr lang="en-US"/>
           </a:p>
         </p:txBody>
       </p:sp>
@@ -1512,7 +1298,7 @@
           <a:p>
             <a:fld id="{5BCAD085-E8A6-8845-BD4E-CB4CCA059FC4}" type="datetimeFigureOut">
               <a:rPr lang="en-US" smtClean="0"/>
-              <a:t>1/27/13</a:t>
+              <a:t>9/25/2026</a:t>
             </a:fld>
             <a:endParaRPr lang="en-US"/>
           </a:p>
@@ -1554,7 +1340,7 @@
           <a:p>
             <a:fld id="{C1FF6DA9-008F-8B48-92A6-B652298478BF}" type="slidenum">
               <a:rPr lang="en-US" smtClean="0"/>
-              <a:t>‹#›</a:t>
+              <a:t>‹Nr.›</a:t>
             </a:fld>
             <a:endParaRPr lang="en-US"/>
           </a:p>
@@ -1615,10 +1401,9 @@
           </a:lstStyle>
           <a:p>
             <a:r>
-              <a:rPr lang="en-US" smtClean="0"/>
+              <a:rPr lang="en-US"/>
               <a:t>Click to edit Master title style</a:t>
             </a:r>
-            <a:endParaRPr lang="en-US"/>
           </a:p>
         </p:txBody>
       </p:sp>
@@ -1735,7 +1520,7 @@
           <a:p>
             <a:pPr lvl="0"/>
             <a:r>
-              <a:rPr lang="en-US" smtClean="0"/>
+              <a:rPr lang="en-US"/>
               <a:t>Click to edit Master text styles</a:t>
             </a:r>
           </a:p>
@@ -1758,7 +1543,7 @@
           <a:p>
             <a:fld id="{5BCAD085-E8A6-8845-BD4E-CB4CCA059FC4}" type="datetimeFigureOut">
               <a:rPr lang="en-US" smtClean="0"/>
-              <a:t>1/27/13</a:t>
+              <a:t>9/25/2026</a:t>
             </a:fld>
             <a:endParaRPr lang="en-US"/>
           </a:p>
@@ -1800,7 +1585,7 @@
           <a:p>
             <a:fld id="{C1FF6DA9-008F-8B48-92A6-B652298478BF}" type="slidenum">
               <a:rPr lang="en-US" smtClean="0"/>
-              <a:t>‹#›</a:t>
+              <a:t>‹Nr.›</a:t>
             </a:fld>
             <a:endParaRPr lang="en-US"/>
           </a:p>
@@ -1852,10 +1637,9 @@
           <a:lstStyle/>
           <a:p>
             <a:r>
-              <a:rPr lang="en-US" smtClean="0"/>
+              <a:rPr lang="en-US"/>
               <a:t>Click to edit Master title style</a:t>
             </a:r>
-            <a:endParaRPr lang="en-US"/>
           </a:p>
         </p:txBody>
       </p:sp>
@@ -1909,38 +1693,37 @@
           <a:p>
             <a:pPr lvl="0"/>
             <a:r>
-              <a:rPr lang="en-US" smtClean="0"/>
+              <a:rPr lang="en-US"/>
               <a:t>Click to edit Master text styles</a:t>
             </a:r>
           </a:p>
           <a:p>
             <a:pPr lvl="1"/>
             <a:r>
-              <a:rPr lang="en-US" smtClean="0"/>
+              <a:rPr lang="en-US"/>
               <a:t>Second level</a:t>
             </a:r>
           </a:p>
           <a:p>
             <a:pPr lvl="2"/>
             <a:r>
-              <a:rPr lang="en-US" smtClean="0"/>
+              <a:rPr lang="en-US"/>
               <a:t>Third level</a:t>
             </a:r>
           </a:p>
           <a:p>
             <a:pPr lvl="3"/>
             <a:r>
-              <a:rPr lang="en-US" smtClean="0"/>
+              <a:rPr lang="en-US"/>
               <a:t>Fourth level</a:t>
             </a:r>
           </a:p>
           <a:p>
             <a:pPr lvl="4"/>
             <a:r>
-              <a:rPr lang="en-US" smtClean="0"/>
+              <a:rPr lang="en-US"/>
               <a:t>Fifth level</a:t>
             </a:r>
-            <a:endParaRPr lang="en-US"/>
           </a:p>
         </p:txBody>
       </p:sp>
@@ -1994,38 +1777,37 @@
           <a:p>
             <a:pPr lvl="0"/>
             <a:r>
-              <a:rPr lang="en-US" smtClean="0"/>
+              <a:rPr lang="en-US"/>
               <a:t>Click to edit Master text styles</a:t>
             </a:r>
           </a:p>
           <a:p>
             <a:pPr lvl="1"/>
             <a:r>
-              <a:rPr lang="en-US" smtClean="0"/>
+              <a:rPr lang="en-US"/>
               <a:t>Second level</a:t>
             </a:r>
           </a:p>
           <a:p>
             <a:pPr lvl="2"/>
             <a:r>
-              <a:rPr lang="en-US" smtClean="0"/>
+              <a:rPr lang="en-US"/>
               <a:t>Third level</a:t>
             </a:r>
           </a:p>
           <a:p>
             <a:pPr lvl="3"/>
             <a:r>
-              <a:rPr lang="en-US" smtClean="0"/>
+              <a:rPr lang="en-US"/>
               <a:t>Fourth level</a:t>
             </a:r>
           </a:p>
           <a:p>
             <a:pPr lvl="4"/>
             <a:r>
-              <a:rPr lang="en-US" smtClean="0"/>
+              <a:rPr lang="en-US"/>
               <a:t>Fifth level</a:t>
             </a:r>
-            <a:endParaRPr lang="en-US"/>
           </a:p>
         </p:txBody>
       </p:sp>
@@ -2046,7 +1828,7 @@
           <a:p>
             <a:fld id="{5BCAD085-E8A6-8845-BD4E-CB4CCA059FC4}" type="datetimeFigureOut">
               <a:rPr lang="en-US" smtClean="0"/>
-              <a:t>1/27/13</a:t>
+              <a:t>9/25/2026</a:t>
             </a:fld>
             <a:endParaRPr lang="en-US"/>
           </a:p>
@@ -2088,7 +1870,7 @@
           <a:p>
             <a:fld id="{C1FF6DA9-008F-8B48-92A6-B652298478BF}" type="slidenum">
               <a:rPr lang="en-US" smtClean="0"/>
-              <a:t>‹#›</a:t>
+              <a:t>‹Nr.›</a:t>
             </a:fld>
             <a:endParaRPr lang="en-US"/>
           </a:p>
@@ -2144,10 +1926,9 @@
           </a:lstStyle>
           <a:p>
             <a:r>
-              <a:rPr lang="en-US" smtClean="0"/>
+              <a:rPr lang="en-US"/>
               <a:t>Click to edit Master title style</a:t>
             </a:r>
-            <a:endParaRPr lang="en-US"/>
           </a:p>
         </p:txBody>
       </p:sp>
@@ -2210,7 +1991,7 @@
           <a:p>
             <a:pPr lvl="0"/>
             <a:r>
-              <a:rPr lang="en-US" smtClean="0"/>
+              <a:rPr lang="en-US"/>
               <a:t>Click to edit Master text styles</a:t>
             </a:r>
           </a:p>
@@ -2266,38 +2047,37 @@
           <a:p>
             <a:pPr lvl="0"/>
             <a:r>
-              <a:rPr lang="en-US" smtClean="0"/>
+              <a:rPr lang="en-US"/>
               <a:t>Click to edit Master text styles</a:t>
             </a:r>
           </a:p>
           <a:p>
             <a:pPr lvl="1"/>
             <a:r>
-              <a:rPr lang="en-US" smtClean="0"/>
+              <a:rPr lang="en-US"/>
               <a:t>Second level</a:t>
             </a:r>
           </a:p>
           <a:p>
             <a:pPr lvl="2"/>
             <a:r>
-              <a:rPr lang="en-US" smtClean="0"/>
+              <a:rPr lang="en-US"/>
               <a:t>Third level</a:t>
             </a:r>
           </a:p>
           <a:p>
             <a:pPr lvl="3"/>
             <a:r>
-              <a:rPr lang="en-US" smtClean="0"/>
+              <a:rPr lang="en-US"/>
               <a:t>Fourth level</a:t>
             </a:r>
           </a:p>
           <a:p>
             <a:pPr lvl="4"/>
             <a:r>
-              <a:rPr lang="en-US" smtClean="0"/>
+              <a:rPr lang="en-US"/>
               <a:t>Fifth level</a:t>
             </a:r>
-            <a:endParaRPr lang="en-US"/>
           </a:p>
         </p:txBody>
       </p:sp>
@@ -2360,7 +2140,7 @@
           <a:p>
             <a:pPr lvl="0"/>
             <a:r>
-              <a:rPr lang="en-US" smtClean="0"/>
+              <a:rPr lang="en-US"/>
               <a:t>Click to edit Master text styles</a:t>
             </a:r>
           </a:p>
@@ -2416,38 +2196,37 @@
           <a:p>
             <a:pPr lvl="0"/>
             <a:r>
-              <a:rPr lang="en-US" smtClean="0"/>
+              <a:rPr lang="en-US"/>
               <a:t>Click to edit Master text styles</a:t>
             </a:r>
           </a:p>
           <a:p>
             <a:pPr lvl="1"/>
             <a:r>
-              <a:rPr lang="en-US" smtClean="0"/>
+              <a:rPr lang="en-US"/>
               <a:t>Second level</a:t>
             </a:r>
           </a:p>
           <a:p>
             <a:pPr lvl="2"/>
             <a:r>
-              <a:rPr lang="en-US" smtClean="0"/>
+              <a:rPr lang="en-US"/>
               <a:t>Third level</a:t>
             </a:r>
           </a:p>
           <a:p>
             <a:pPr lvl="3"/>
             <a:r>
-              <a:rPr lang="en-US" smtClean="0"/>
+              <a:rPr lang="en-US"/>
               <a:t>Fourth level</a:t>
             </a:r>
           </a:p>
           <a:p>
             <a:pPr lvl="4"/>
             <a:r>
-              <a:rPr lang="en-US" smtClean="0"/>
+              <a:rPr lang="en-US"/>
               <a:t>Fifth level</a:t>
             </a:r>
-            <a:endParaRPr lang="en-US"/>
           </a:p>
         </p:txBody>
       </p:sp>
@@ -2468,7 +2247,7 @@
           <a:p>
             <a:fld id="{5BCAD085-E8A6-8845-BD4E-CB4CCA059FC4}" type="datetimeFigureOut">
               <a:rPr lang="en-US" smtClean="0"/>
-              <a:t>1/27/13</a:t>
+              <a:t>9/25/2026</a:t>
             </a:fld>
             <a:endParaRPr lang="en-US"/>
           </a:p>
@@ -2510,7 +2289,7 @@
           <a:p>
             <a:fld id="{C1FF6DA9-008F-8B48-92A6-B652298478BF}" type="slidenum">
               <a:rPr lang="en-US" smtClean="0"/>
-              <a:t>‹#›</a:t>
+              <a:t>‹Nr.›</a:t>
             </a:fld>
             <a:endParaRPr lang="en-US"/>
           </a:p>
@@ -2562,10 +2341,9 @@
           <a:lstStyle/>
           <a:p>
             <a:r>
-              <a:rPr lang="en-US" smtClean="0"/>
+              <a:rPr lang="en-US"/>
               <a:t>Click to edit Master title style</a:t>
             </a:r>
-            <a:endParaRPr lang="en-US"/>
           </a:p>
         </p:txBody>
       </p:sp>
@@ -2586,7 +2364,7 @@
           <a:p>
             <a:fld id="{5BCAD085-E8A6-8845-BD4E-CB4CCA059FC4}" type="datetimeFigureOut">
               <a:rPr lang="en-US" smtClean="0"/>
-              <a:t>1/27/13</a:t>
+              <a:t>9/25/2026</a:t>
             </a:fld>
             <a:endParaRPr lang="en-US"/>
           </a:p>
@@ -2628,7 +2406,7 @@
           <a:p>
             <a:fld id="{C1FF6DA9-008F-8B48-92A6-B652298478BF}" type="slidenum">
               <a:rPr lang="en-US" smtClean="0"/>
-              <a:t>‹#›</a:t>
+              <a:t>‹Nr.›</a:t>
             </a:fld>
             <a:endParaRPr lang="en-US"/>
           </a:p>
@@ -2681,7 +2459,7 @@
           <a:p>
             <a:fld id="{5BCAD085-E8A6-8845-BD4E-CB4CCA059FC4}" type="datetimeFigureOut">
               <a:rPr lang="en-US" smtClean="0"/>
-              <a:t>1/27/13</a:t>
+              <a:t>9/25/2026</a:t>
             </a:fld>
             <a:endParaRPr lang="en-US"/>
           </a:p>
@@ -2723,7 +2501,7 @@
           <a:p>
             <a:fld id="{C1FF6DA9-008F-8B48-92A6-B652298478BF}" type="slidenum">
               <a:rPr lang="en-US" smtClean="0"/>
-              <a:t>‹#›</a:t>
+              <a:t>‹Nr.›</a:t>
             </a:fld>
             <a:endParaRPr lang="en-US"/>
           </a:p>
@@ -2784,10 +2562,9 @@
           </a:lstStyle>
           <a:p>
             <a:r>
-              <a:rPr lang="en-US" smtClean="0"/>
+              <a:rPr lang="en-US"/>
               <a:t>Click to edit Master title style</a:t>
             </a:r>
-            <a:endParaRPr lang="en-US"/>
           </a:p>
         </p:txBody>
       </p:sp>
@@ -2841,38 +2618,37 @@
           <a:p>
             <a:pPr lvl="0"/>
             <a:r>
-              <a:rPr lang="en-US" smtClean="0"/>
+              <a:rPr lang="en-US"/>
               <a:t>Click to edit Master text styles</a:t>
             </a:r>
           </a:p>
           <a:p>
             <a:pPr lvl="1"/>
             <a:r>
-              <a:rPr lang="en-US" smtClean="0"/>
+              <a:rPr lang="en-US"/>
               <a:t>Second level</a:t>
             </a:r>
           </a:p>
           <a:p>
             <a:pPr lvl="2"/>
             <a:r>
-              <a:rPr lang="en-US" smtClean="0"/>
+              <a:rPr lang="en-US"/>
               <a:t>Third level</a:t>
             </a:r>
           </a:p>
           <a:p>
             <a:pPr lvl="3"/>
             <a:r>
-              <a:rPr lang="en-US" smtClean="0"/>
+              <a:rPr lang="en-US"/>
               <a:t>Fourth level</a:t>
             </a:r>
           </a:p>
           <a:p>
             <a:pPr lvl="4"/>
             <a:r>
-              <a:rPr lang="en-US" smtClean="0"/>
+              <a:rPr lang="en-US"/>
               <a:t>Fifth level</a:t>
             </a:r>
-            <a:endParaRPr lang="en-US"/>
           </a:p>
         </p:txBody>
       </p:sp>
@@ -2935,7 +2711,7 @@
           <a:p>
             <a:pPr lvl="0"/>
             <a:r>
-              <a:rPr lang="en-US" smtClean="0"/>
+              <a:rPr lang="en-US"/>
               <a:t>Click to edit Master text styles</a:t>
             </a:r>
           </a:p>
@@ -2958,7 +2734,7 @@
           <a:p>
             <a:fld id="{5BCAD085-E8A6-8845-BD4E-CB4CCA059FC4}" type="datetimeFigureOut">
               <a:rPr lang="en-US" smtClean="0"/>
-              <a:t>1/27/13</a:t>
+              <a:t>9/25/2026</a:t>
             </a:fld>
             <a:endParaRPr lang="en-US"/>
           </a:p>
@@ -3000,7 +2776,7 @@
           <a:p>
             <a:fld id="{C1FF6DA9-008F-8B48-92A6-B652298478BF}" type="slidenum">
               <a:rPr lang="en-US" smtClean="0"/>
-              <a:t>‹#›</a:t>
+              <a:t>‹Nr.›</a:t>
             </a:fld>
             <a:endParaRPr lang="en-US"/>
           </a:p>
@@ -3061,10 +2837,9 @@
           </a:lstStyle>
           <a:p>
             <a:r>
-              <a:rPr lang="en-US" smtClean="0"/>
+              <a:rPr lang="en-US"/>
               <a:t>Click to edit Master title style</a:t>
             </a:r>
-            <a:endParaRPr lang="en-US"/>
           </a:p>
         </p:txBody>
       </p:sp>
@@ -3188,7 +2963,7 @@
           <a:p>
             <a:pPr lvl="0"/>
             <a:r>
-              <a:rPr lang="en-US" smtClean="0"/>
+              <a:rPr lang="en-US"/>
               <a:t>Click to edit Master text styles</a:t>
             </a:r>
           </a:p>
@@ -3211,7 +2986,7 @@
           <a:p>
             <a:fld id="{5BCAD085-E8A6-8845-BD4E-CB4CCA059FC4}" type="datetimeFigureOut">
               <a:rPr lang="en-US" smtClean="0"/>
-              <a:t>1/27/13</a:t>
+              <a:t>9/25/2026</a:t>
             </a:fld>
             <a:endParaRPr lang="en-US"/>
           </a:p>
@@ -3253,7 +3028,7 @@
           <a:p>
             <a:fld id="{C1FF6DA9-008F-8B48-92A6-B652298478BF}" type="slidenum">
               <a:rPr lang="en-US" smtClean="0"/>
-              <a:t>‹#›</a:t>
+              <a:t>‹Nr.›</a:t>
             </a:fld>
             <a:endParaRPr lang="en-US"/>
           </a:p>
@@ -3320,10 +3095,9 @@
           <a:lstStyle/>
           <a:p>
             <a:r>
-              <a:rPr lang="en-US" smtClean="0"/>
+              <a:rPr lang="en-US"/>
               <a:t>Click to edit Master title style</a:t>
             </a:r>
-            <a:endParaRPr lang="en-US"/>
           </a:p>
         </p:txBody>
       </p:sp>
@@ -3354,38 +3128,37 @@
           <a:p>
             <a:pPr lvl="0"/>
             <a:r>
-              <a:rPr lang="en-US" smtClean="0"/>
+              <a:rPr lang="en-US"/>
               <a:t>Click to edit Master text styles</a:t>
             </a:r>
           </a:p>
           <a:p>
             <a:pPr lvl="1"/>
             <a:r>
-              <a:rPr lang="en-US" smtClean="0"/>
+              <a:rPr lang="en-US"/>
               <a:t>Second level</a:t>
             </a:r>
           </a:p>
           <a:p>
             <a:pPr lvl="2"/>
             <a:r>
-              <a:rPr lang="en-US" smtClean="0"/>
+              <a:rPr lang="en-US"/>
               <a:t>Third level</a:t>
             </a:r>
           </a:p>
           <a:p>
             <a:pPr lvl="3"/>
             <a:r>
-              <a:rPr lang="en-US" smtClean="0"/>
+              <a:rPr lang="en-US"/>
               <a:t>Fourth level</a:t>
             </a:r>
           </a:p>
           <a:p>
             <a:pPr lvl="4"/>
             <a:r>
-              <a:rPr lang="en-US" smtClean="0"/>
+              <a:rPr lang="en-US"/>
               <a:t>Fifth level</a:t>
             </a:r>
-            <a:endParaRPr lang="en-US"/>
           </a:p>
         </p:txBody>
       </p:sp>
@@ -3424,7 +3197,7 @@
           <a:p>
             <a:fld id="{5BCAD085-E8A6-8845-BD4E-CB4CCA059FC4}" type="datetimeFigureOut">
               <a:rPr lang="en-US" smtClean="0"/>
-              <a:t>1/27/13</a:t>
+              <a:t>9/25/2026</a:t>
             </a:fld>
             <a:endParaRPr lang="en-US"/>
           </a:p>
@@ -3502,7 +3275,7 @@
           <a:p>
             <a:fld id="{C1FF6DA9-008F-8B48-92A6-B652298478BF}" type="slidenum">
               <a:rPr lang="en-US" smtClean="0"/>
-              <a:t>‹#›</a:t>
+              <a:t>‹Nr.›</a:t>
             </a:fld>
             <a:endParaRPr lang="en-US"/>
           </a:p>
@@ -3783,7 +3556,7 @@
 </file>
 
 <file path=ppt/slides/slide1.xml><?xml version="1.0" encoding="utf-8"?>
-<p:sld xmlns:a="http://schemas.openxmlformats.org/drawingml/2006/main" xmlns:p="http://schemas.openxmlformats.org/presentationml/2006/main" xmlns:r="http://schemas.openxmlformats.org/officeDocument/2006/relationships">
+<p:sld xmlns:a="http://schemas.openxmlformats.org/drawingml/2006/main" xmlns:r="http://schemas.openxmlformats.org/officeDocument/2006/relationships" xmlns:p="http://schemas.openxmlformats.org/presentationml/2006/main">
   <p:cSld>
     <p:spTree>
       <p:nvGrpSpPr>
@@ -3791,7 +3564,14 @@
         <p:cNvGrpSpPr/>
         <p:nvPr/>
       </p:nvGrpSpPr>
-      <p:grpSpPr/>
+      <p:grpSpPr>
+        <a:xfrm>
+          <a:off x="0" y="0"/>
+          <a:ext cx="0" cy="0"/>
+          <a:chOff x="0" y="0"/>
+          <a:chExt cx="0" cy="0"/>
+        </a:xfrm>
+      </p:grpSpPr>
       <p:sp>
         <p:nvSpPr>
           <p:cNvPr id="2" name="Oval 1"/>
@@ -3829,7 +3609,7 @@
           </a:fontRef>
         </p:style>
         <p:txBody>
-          <a:bodyPr rtlCol="0" anchor="ctr" lIns="0" rIns="0" tIns="0" bIns="0"/>
+          <a:bodyPr lIns="0" tIns="0" rIns="0" bIns="0" rtlCol="0" anchor="ctr"/>
           <a:lstStyle/>
           <a:p>
             <a:pPr algn="ctr"/>
@@ -3862,7 +3642,7 @@
           <a:noFill/>
         </p:spPr>
         <p:txBody>
-          <a:bodyPr wrap="square" anchor="ctr" lIns="0" rIns="0" tIns="0" bIns="0">
+          <a:bodyPr wrap="square" lIns="0" tIns="0" rIns="0" bIns="0" anchor="ctr">
             <a:spAutoFit/>
           </a:bodyPr>
           <a:lstStyle/>
@@ -3897,7 +3677,7 @@
           <a:noFill/>
         </p:spPr>
         <p:txBody>
-          <a:bodyPr wrap="square" anchor="t" lIns="0" rIns="0" tIns="0" bIns="0">
+          <a:bodyPr wrap="square" lIns="0" tIns="0" rIns="0" bIns="0" anchor="t">
             <a:spAutoFit/>
           </a:bodyPr>
           <a:lstStyle/>
@@ -3958,6 +3738,7 @@
           <a:lstStyle/>
           <a:p>
             <a:pPr algn="ctr"/>
+            <a:endParaRPr/>
           </a:p>
         </p:txBody>
       </p:sp>
@@ -3978,7 +3759,7 @@
           <a:noFill/>
         </p:spPr>
         <p:txBody>
-          <a:bodyPr wrap="square" anchor="t" lIns="0" rIns="0" tIns="0" bIns="0">
+          <a:bodyPr wrap="square" lIns="0" tIns="0" rIns="0" bIns="0" anchor="t">
             <a:spAutoFit/>
           </a:bodyPr>
           <a:lstStyle/>
@@ -4013,7 +3794,7 @@
           <a:noFill/>
         </p:spPr>
         <p:txBody>
-          <a:bodyPr wrap="square" anchor="t" lIns="0" rIns="0" tIns="0" bIns="0">
+          <a:bodyPr wrap="square" lIns="0" tIns="0" rIns="0" bIns="0" anchor="t">
             <a:spAutoFit/>
           </a:bodyPr>
           <a:lstStyle/>
@@ -4110,6 +3891,7 @@
           <a:lstStyle/>
           <a:p>
             <a:pPr algn="ctr"/>
+            <a:endParaRPr/>
           </a:p>
         </p:txBody>
       </p:sp>
@@ -4130,7 +3912,7 @@
           <a:noFill/>
         </p:spPr>
         <p:txBody>
-          <a:bodyPr wrap="square" anchor="t" lIns="0" rIns="0" tIns="0" bIns="0">
+          <a:bodyPr wrap="square" lIns="0" tIns="0" rIns="0" bIns="0" anchor="t">
             <a:spAutoFit/>
           </a:bodyPr>
           <a:lstStyle/>
@@ -4165,7 +3947,7 @@
           <a:noFill/>
         </p:spPr>
         <p:txBody>
-          <a:bodyPr wrap="square" anchor="t" lIns="0" rIns="0" tIns="0" bIns="0">
+          <a:bodyPr wrap="square" lIns="0" tIns="0" rIns="0" bIns="0" anchor="t">
             <a:spAutoFit/>
           </a:bodyPr>
           <a:lstStyle/>
@@ -4200,7 +3982,7 @@
           <a:noFill/>
         </p:spPr>
         <p:txBody>
-          <a:bodyPr wrap="square" anchor="t" lIns="0" rIns="0" tIns="0" bIns="0">
+          <a:bodyPr wrap="square" lIns="0" tIns="0" rIns="0" bIns="0" anchor="t">
             <a:spAutoFit/>
           </a:bodyPr>
           <a:lstStyle/>
@@ -4235,7 +4017,7 @@
           <a:noFill/>
         </p:spPr>
         <p:txBody>
-          <a:bodyPr wrap="square" anchor="t" lIns="0" rIns="0" tIns="0" bIns="0">
+          <a:bodyPr wrap="square" lIns="0" tIns="0" rIns="0" bIns="0" anchor="t">
             <a:spAutoFit/>
           </a:bodyPr>
           <a:lstStyle/>
@@ -4270,7 +4052,7 @@
           <a:noFill/>
         </p:spPr>
         <p:txBody>
-          <a:bodyPr wrap="square" anchor="t" lIns="0" rIns="0" tIns="0" bIns="0">
+          <a:bodyPr wrap="square" lIns="0" tIns="0" rIns="0" bIns="0" anchor="t">
             <a:spAutoFit/>
           </a:bodyPr>
           <a:lstStyle/>
@@ -4305,7 +4087,7 @@
           <a:noFill/>
         </p:spPr>
         <p:txBody>
-          <a:bodyPr wrap="square" anchor="t" lIns="0" rIns="0" tIns="0" bIns="0">
+          <a:bodyPr wrap="square" lIns="0" tIns="0" rIns="0" bIns="0" anchor="t">
             <a:spAutoFit/>
           </a:bodyPr>
           <a:lstStyle/>
@@ -4368,6 +4150,7 @@
           <a:lstStyle/>
           <a:p>
             <a:pPr algn="ctr"/>
+            <a:endParaRPr/>
           </a:p>
         </p:txBody>
       </p:sp>
@@ -4408,7 +4191,7 @@
           </a:fontRef>
         </p:style>
         <p:txBody>
-          <a:bodyPr rtlCol="0" anchor="ctr" lIns="0" rIns="0" tIns="0" bIns="0"/>
+          <a:bodyPr lIns="0" tIns="0" rIns="0" bIns="0" rtlCol="0" anchor="ctr"/>
           <a:lstStyle/>
           <a:p>
             <a:pPr algn="ctr"/>
@@ -4441,7 +4224,7 @@
           <a:noFill/>
         </p:spPr>
         <p:txBody>
-          <a:bodyPr wrap="square" anchor="t" lIns="0" rIns="0" tIns="0" bIns="0">
+          <a:bodyPr wrap="square" lIns="0" tIns="0" rIns="0" bIns="0" anchor="t">
             <a:spAutoFit/>
           </a:bodyPr>
           <a:lstStyle/>
@@ -4476,7 +4259,7 @@
           <a:noFill/>
         </p:spPr>
         <p:txBody>
-          <a:bodyPr wrap="square" anchor="t" lIns="0" rIns="0" tIns="0" bIns="0">
+          <a:bodyPr wrap="square" lIns="0" tIns="0" rIns="0" bIns="0" anchor="t">
             <a:spAutoFit/>
           </a:bodyPr>
           <a:lstStyle/>
@@ -4539,6 +4322,7 @@
           <a:lstStyle/>
           <a:p>
             <a:pPr algn="ctr"/>
+            <a:endParaRPr/>
           </a:p>
         </p:txBody>
       </p:sp>
@@ -4579,7 +4363,7 @@
           </a:fontRef>
         </p:style>
         <p:txBody>
-          <a:bodyPr rtlCol="0" anchor="ctr" lIns="0" rIns="0" tIns="0" bIns="0"/>
+          <a:bodyPr lIns="0" tIns="0" rIns="0" bIns="0" rtlCol="0" anchor="ctr"/>
           <a:lstStyle/>
           <a:p>
             <a:pPr algn="ctr"/>
@@ -4612,7 +4396,7 @@
           <a:noFill/>
         </p:spPr>
         <p:txBody>
-          <a:bodyPr wrap="square" anchor="t" lIns="0" rIns="0" tIns="0" bIns="0">
+          <a:bodyPr wrap="square" lIns="0" tIns="0" rIns="0" bIns="0" anchor="t">
             <a:spAutoFit/>
           </a:bodyPr>
           <a:lstStyle/>
@@ -4647,7 +4431,7 @@
           <a:noFill/>
         </p:spPr>
         <p:txBody>
-          <a:bodyPr wrap="square" anchor="t" lIns="0" rIns="0" tIns="0" bIns="0">
+          <a:bodyPr wrap="square" lIns="0" tIns="0" rIns="0" bIns="0" anchor="t">
             <a:spAutoFit/>
           </a:bodyPr>
           <a:lstStyle/>
@@ -4710,6 +4494,7 @@
           <a:lstStyle/>
           <a:p>
             <a:pPr algn="ctr"/>
+            <a:endParaRPr/>
           </a:p>
         </p:txBody>
       </p:sp>
@@ -4750,7 +4535,7 @@
           </a:fontRef>
         </p:style>
         <p:txBody>
-          <a:bodyPr rtlCol="0" anchor="ctr" lIns="0" rIns="0" tIns="0" bIns="0"/>
+          <a:bodyPr lIns="0" tIns="0" rIns="0" bIns="0" rtlCol="0" anchor="ctr"/>
           <a:lstStyle/>
           <a:p>
             <a:pPr algn="ctr"/>
@@ -4783,7 +4568,7 @@
           <a:noFill/>
         </p:spPr>
         <p:txBody>
-          <a:bodyPr wrap="square" anchor="t" lIns="0" rIns="0" tIns="0" bIns="0">
+          <a:bodyPr wrap="square" lIns="0" tIns="0" rIns="0" bIns="0" anchor="t">
             <a:spAutoFit/>
           </a:bodyPr>
           <a:lstStyle/>
@@ -4818,7 +4603,7 @@
           <a:noFill/>
         </p:spPr>
         <p:txBody>
-          <a:bodyPr wrap="square" anchor="t" lIns="0" rIns="0" tIns="0" bIns="0">
+          <a:bodyPr wrap="square" lIns="0" tIns="0" rIns="0" bIns="0" anchor="t">
             <a:spAutoFit/>
           </a:bodyPr>
           <a:lstStyle/>
@@ -4881,6 +4666,7 @@
           <a:lstStyle/>
           <a:p>
             <a:pPr algn="ctr"/>
+            <a:endParaRPr/>
           </a:p>
         </p:txBody>
       </p:sp>
@@ -4921,7 +4707,7 @@
           </a:fontRef>
         </p:style>
         <p:txBody>
-          <a:bodyPr rtlCol="0" anchor="ctr" lIns="0" rIns="0" tIns="0" bIns="0"/>
+          <a:bodyPr lIns="0" tIns="0" rIns="0" bIns="0" rtlCol="0" anchor="ctr"/>
           <a:lstStyle/>
           <a:p>
             <a:pPr algn="ctr"/>
@@ -4954,7 +4740,7 @@
           <a:noFill/>
         </p:spPr>
         <p:txBody>
-          <a:bodyPr wrap="square" anchor="t" lIns="0" rIns="0" tIns="0" bIns="0">
+          <a:bodyPr wrap="square" lIns="0" tIns="0" rIns="0" bIns="0" anchor="t">
             <a:spAutoFit/>
           </a:bodyPr>
           <a:lstStyle/>
@@ -4989,7 +4775,7 @@
           <a:noFill/>
         </p:spPr>
         <p:txBody>
-          <a:bodyPr wrap="square" anchor="t" lIns="0" rIns="0" tIns="0" bIns="0">
+          <a:bodyPr wrap="square" lIns="0" tIns="0" rIns="0" bIns="0" anchor="t">
             <a:spAutoFit/>
           </a:bodyPr>
           <a:lstStyle/>
@@ -5052,6 +4838,7 @@
           <a:lstStyle/>
           <a:p>
             <a:pPr algn="ctr"/>
+            <a:endParaRPr/>
           </a:p>
         </p:txBody>
       </p:sp>
@@ -5092,7 +4879,7 @@
           </a:fontRef>
         </p:style>
         <p:txBody>
-          <a:bodyPr rtlCol="0" anchor="ctr" lIns="0" rIns="0" tIns="0" bIns="0"/>
+          <a:bodyPr lIns="0" tIns="0" rIns="0" bIns="0" rtlCol="0" anchor="ctr"/>
           <a:lstStyle/>
           <a:p>
             <a:pPr algn="ctr"/>
@@ -5125,7 +4912,7 @@
           <a:noFill/>
         </p:spPr>
         <p:txBody>
-          <a:bodyPr wrap="square" anchor="t" lIns="0" rIns="0" tIns="0" bIns="0">
+          <a:bodyPr wrap="square" lIns="0" tIns="0" rIns="0" bIns="0" anchor="t">
             <a:spAutoFit/>
           </a:bodyPr>
           <a:lstStyle/>
@@ -5160,7 +4947,7 @@
           <a:noFill/>
         </p:spPr>
         <p:txBody>
-          <a:bodyPr wrap="square" anchor="t" lIns="0" rIns="0" tIns="0" bIns="0">
+          <a:bodyPr wrap="square" lIns="0" tIns="0" rIns="0" bIns="0" anchor="t">
             <a:spAutoFit/>
           </a:bodyPr>
           <a:lstStyle/>
@@ -5223,6 +5010,7 @@
           <a:lstStyle/>
           <a:p>
             <a:pPr algn="ctr"/>
+            <a:endParaRPr/>
           </a:p>
         </p:txBody>
       </p:sp>
@@ -5263,7 +5051,7 @@
           </a:fontRef>
         </p:style>
         <p:txBody>
-          <a:bodyPr rtlCol="0" anchor="ctr" lIns="0" rIns="0" tIns="0" bIns="0"/>
+          <a:bodyPr lIns="0" tIns="0" rIns="0" bIns="0" rtlCol="0" anchor="ctr"/>
           <a:lstStyle/>
           <a:p>
             <a:pPr algn="ctr"/>
@@ -5296,7 +5084,7 @@
           <a:noFill/>
         </p:spPr>
         <p:txBody>
-          <a:bodyPr wrap="square" anchor="t" lIns="0" rIns="0" tIns="0" bIns="0">
+          <a:bodyPr wrap="square" lIns="0" tIns="0" rIns="0" bIns="0" anchor="t">
             <a:spAutoFit/>
           </a:bodyPr>
           <a:lstStyle/>
@@ -5331,7 +5119,7 @@
           <a:noFill/>
         </p:spPr>
         <p:txBody>
-          <a:bodyPr wrap="square" anchor="t" lIns="0" rIns="0" tIns="0" bIns="0">
+          <a:bodyPr wrap="square" lIns="0" tIns="0" rIns="0" bIns="0" anchor="t">
             <a:spAutoFit/>
           </a:bodyPr>
           <a:lstStyle/>
@@ -5394,6 +5182,7 @@
           <a:lstStyle/>
           <a:p>
             <a:pPr algn="ctr"/>
+            <a:endParaRPr/>
           </a:p>
         </p:txBody>
       </p:sp>
@@ -5434,7 +5223,7 @@
           </a:fontRef>
         </p:style>
         <p:txBody>
-          <a:bodyPr rtlCol="0" anchor="ctr" lIns="0" rIns="0" tIns="0" bIns="0"/>
+          <a:bodyPr lIns="0" tIns="0" rIns="0" bIns="0" rtlCol="0" anchor="ctr"/>
           <a:lstStyle/>
           <a:p>
             <a:pPr algn="ctr"/>
@@ -5467,7 +5256,7 @@
           <a:noFill/>
         </p:spPr>
         <p:txBody>
-          <a:bodyPr wrap="square" anchor="t" lIns="0" rIns="0" tIns="0" bIns="0">
+          <a:bodyPr wrap="square" lIns="0" tIns="0" rIns="0" bIns="0" anchor="t">
             <a:spAutoFit/>
           </a:bodyPr>
           <a:lstStyle/>
@@ -5502,7 +5291,7 @@
           <a:noFill/>
         </p:spPr>
         <p:txBody>
-          <a:bodyPr wrap="square" anchor="t" lIns="0" rIns="0" tIns="0" bIns="0">
+          <a:bodyPr wrap="square" lIns="0" tIns="0" rIns="0" bIns="0" anchor="t">
             <a:spAutoFit/>
           </a:bodyPr>
           <a:lstStyle/>
@@ -5563,6 +5352,7 @@
           <a:lstStyle/>
           <a:p>
             <a:pPr algn="ctr"/>
+            <a:endParaRPr/>
           </a:p>
         </p:txBody>
       </p:sp>
@@ -5583,7 +5373,7 @@
           <a:noFill/>
         </p:spPr>
         <p:txBody>
-          <a:bodyPr wrap="square" anchor="ctr" lIns="0" rIns="0" tIns="0" bIns="0">
+          <a:bodyPr wrap="square" lIns="0" tIns="0" rIns="0" bIns="0" anchor="ctr">
             <a:spAutoFit/>
           </a:bodyPr>
           <a:lstStyle/>
@@ -5664,6 +5454,7 @@
           <a:lstStyle/>
           <a:p>
             <a:pPr algn="ctr"/>
+            <a:endParaRPr/>
           </a:p>
         </p:txBody>
       </p:sp>
@@ -5684,7 +5475,7 @@
           <a:noFill/>
         </p:spPr>
         <p:txBody>
-          <a:bodyPr wrap="square" anchor="ctr" lIns="0" rIns="0" tIns="0" bIns="0">
+          <a:bodyPr wrap="square" lIns="0" tIns="0" rIns="0" bIns="0" anchor="ctr">
             <a:spAutoFit/>
           </a:bodyPr>
           <a:lstStyle/>
@@ -5728,7 +5519,7 @@
           <a:noFill/>
         </p:spPr>
         <p:txBody>
-          <a:bodyPr wrap="square" anchor="t" lIns="0" rIns="0" tIns="0" bIns="0">
+          <a:bodyPr wrap="square" lIns="0" tIns="0" rIns="0" bIns="0" anchor="t">
             <a:spAutoFit/>
           </a:bodyPr>
           <a:lstStyle/>
@@ -5755,7 +5546,7 @@
 </file>
 
 <file path=ppt/slides/slide2.xml><?xml version="1.0" encoding="utf-8"?>
-<p:sld xmlns:a="http://schemas.openxmlformats.org/drawingml/2006/main" xmlns:p="http://schemas.openxmlformats.org/presentationml/2006/main" xmlns:r="http://schemas.openxmlformats.org/officeDocument/2006/relationships">
+<p:sld xmlns:a="http://schemas.openxmlformats.org/drawingml/2006/main" xmlns:r="http://schemas.openxmlformats.org/officeDocument/2006/relationships" xmlns:p="http://schemas.openxmlformats.org/presentationml/2006/main">
   <p:cSld>
     <p:spTree>
       <p:nvGrpSpPr>
@@ -5763,7 +5554,14 @@
         <p:cNvGrpSpPr/>
         <p:nvPr/>
       </p:nvGrpSpPr>
-      <p:grpSpPr/>
+      <p:grpSpPr>
+        <a:xfrm>
+          <a:off x="0" y="0"/>
+          <a:ext cx="0" cy="0"/>
+          <a:chOff x="0" y="0"/>
+          <a:chExt cx="0" cy="0"/>
+        </a:xfrm>
+      </p:grpSpPr>
       <p:sp>
         <p:nvSpPr>
           <p:cNvPr id="2" name="Oval 1"/>
@@ -5801,7 +5599,7 @@
           </a:fontRef>
         </p:style>
         <p:txBody>
-          <a:bodyPr rtlCol="0" anchor="ctr" lIns="0" rIns="0" tIns="0" bIns="0"/>
+          <a:bodyPr lIns="0" tIns="0" rIns="0" bIns="0" rtlCol="0" anchor="ctr"/>
           <a:lstStyle/>
           <a:p>
             <a:pPr algn="ctr"/>
@@ -5834,7 +5632,7 @@
           <a:noFill/>
         </p:spPr>
         <p:txBody>
-          <a:bodyPr wrap="square" anchor="ctr" lIns="0" rIns="0" tIns="0" bIns="0">
+          <a:bodyPr wrap="square" lIns="0" tIns="0" rIns="0" bIns="0" anchor="ctr">
             <a:spAutoFit/>
           </a:bodyPr>
           <a:lstStyle/>
@@ -5869,7 +5667,7 @@
           <a:noFill/>
         </p:spPr>
         <p:txBody>
-          <a:bodyPr wrap="square" anchor="t" lIns="0" rIns="0" tIns="0" bIns="0">
+          <a:bodyPr wrap="square" lIns="0" tIns="0" rIns="0" bIns="0" anchor="t">
             <a:spAutoFit/>
           </a:bodyPr>
           <a:lstStyle/>
@@ -5930,6 +5728,7 @@
           <a:lstStyle/>
           <a:p>
             <a:pPr algn="ctr"/>
+            <a:endParaRPr/>
           </a:p>
         </p:txBody>
       </p:sp>
@@ -5950,7 +5749,7 @@
           <a:noFill/>
         </p:spPr>
         <p:txBody>
-          <a:bodyPr wrap="square" anchor="t" lIns="0" rIns="0" tIns="0" bIns="0">
+          <a:bodyPr wrap="square" lIns="0" tIns="0" rIns="0" bIns="0" anchor="t">
             <a:spAutoFit/>
           </a:bodyPr>
           <a:lstStyle/>
@@ -5985,7 +5784,7 @@
           <a:noFill/>
         </p:spPr>
         <p:txBody>
-          <a:bodyPr wrap="square" anchor="t" lIns="0" rIns="0" tIns="0" bIns="0">
+          <a:bodyPr wrap="square" lIns="0" tIns="0" rIns="0" bIns="0" anchor="t">
             <a:spAutoFit/>
           </a:bodyPr>
           <a:lstStyle/>
@@ -6046,6 +5845,7 @@
           <a:lstStyle/>
           <a:p>
             <a:pPr algn="ctr"/>
+            <a:endParaRPr/>
           </a:p>
         </p:txBody>
       </p:sp>
@@ -6066,7 +5866,7 @@
           <a:noFill/>
         </p:spPr>
         <p:txBody>
-          <a:bodyPr wrap="square" anchor="t" lIns="0" rIns="0" tIns="0" bIns="0">
+          <a:bodyPr wrap="square" lIns="0" tIns="0" rIns="0" bIns="0" anchor="t">
             <a:spAutoFit/>
           </a:bodyPr>
           <a:lstStyle/>
@@ -6101,7 +5901,7 @@
           <a:noFill/>
         </p:spPr>
         <p:txBody>
-          <a:bodyPr wrap="square" anchor="t" lIns="0" rIns="0" tIns="0" bIns="0">
+          <a:bodyPr wrap="square" lIns="0" tIns="0" rIns="0" bIns="0" anchor="t">
             <a:spAutoFit/>
           </a:bodyPr>
           <a:lstStyle/>
@@ -6162,6 +5962,7 @@
           <a:lstStyle/>
           <a:p>
             <a:pPr algn="ctr"/>
+            <a:endParaRPr/>
           </a:p>
         </p:txBody>
       </p:sp>
@@ -6182,7 +5983,7 @@
           <a:noFill/>
         </p:spPr>
         <p:txBody>
-          <a:bodyPr wrap="square" anchor="t" lIns="0" rIns="0" tIns="0" bIns="0">
+          <a:bodyPr wrap="square" lIns="0" tIns="0" rIns="0" bIns="0" anchor="t">
             <a:spAutoFit/>
           </a:bodyPr>
           <a:lstStyle/>
@@ -6217,7 +6018,7 @@
           <a:noFill/>
         </p:spPr>
         <p:txBody>
-          <a:bodyPr wrap="square" anchor="t" lIns="0" rIns="0" tIns="0" bIns="0">
+          <a:bodyPr wrap="square" lIns="0" tIns="0" rIns="0" bIns="0" anchor="t">
             <a:spAutoFit/>
           </a:bodyPr>
           <a:lstStyle/>
@@ -6278,6 +6079,7 @@
           <a:lstStyle/>
           <a:p>
             <a:pPr algn="ctr"/>
+            <a:endParaRPr/>
           </a:p>
         </p:txBody>
       </p:sp>
@@ -6298,7 +6100,7 @@
           <a:noFill/>
         </p:spPr>
         <p:txBody>
-          <a:bodyPr wrap="square" anchor="ctr" lIns="0" rIns="0" tIns="0" bIns="0">
+          <a:bodyPr wrap="square" lIns="0" tIns="0" rIns="0" bIns="0" anchor="ctr">
             <a:spAutoFit/>
           </a:bodyPr>
           <a:lstStyle/>
@@ -6325,7 +6127,7 @@
           <p:nvPr/>
         </p:nvPicPr>
         <p:blipFill>
-          <a:blip r:embed="rId2"/>
+          <a:blip r:embed="rId3"/>
           <a:stretch>
             <a:fillRect/>
           </a:stretch>
@@ -6354,7 +6156,7 @@
           <p:nvPr/>
         </p:nvPicPr>
         <p:blipFill>
-          <a:blip r:embed="rId3"/>
+          <a:blip r:embed="rId4"/>
           <a:stretch>
             <a:fillRect/>
           </a:stretch>
@@ -6383,7 +6185,7 @@
           <p:nvPr/>
         </p:nvPicPr>
         <p:blipFill>
-          <a:blip r:embed="rId4"/>
+          <a:blip r:embed="rId5"/>
           <a:stretch>
             <a:fillRect/>
           </a:stretch>
@@ -6420,7 +6222,7 @@
           <a:noFill/>
         </p:spPr>
         <p:txBody>
-          <a:bodyPr wrap="square" anchor="ctr" lIns="0" rIns="0" tIns="0" bIns="0">
+          <a:bodyPr wrap="square" lIns="0" tIns="0" rIns="0" bIns="0" anchor="ctr">
             <a:spAutoFit/>
           </a:bodyPr>
           <a:lstStyle/>
@@ -6475,7 +6277,7 @@
           <a:noFill/>
         </p:spPr>
         <p:txBody>
-          <a:bodyPr wrap="square" anchor="t" lIns="0" rIns="0" tIns="0" bIns="0">
+          <a:bodyPr wrap="square" lIns="0" tIns="0" rIns="0" bIns="0" anchor="t">
             <a:spAutoFit/>
           </a:bodyPr>
           <a:lstStyle/>
@@ -6502,7 +6304,7 @@
 </file>
 
 <file path=ppt/slides/slide3.xml><?xml version="1.0" encoding="utf-8"?>
-<p:sld xmlns:a="http://schemas.openxmlformats.org/drawingml/2006/main" xmlns:p="http://schemas.openxmlformats.org/presentationml/2006/main" xmlns:r="http://schemas.openxmlformats.org/officeDocument/2006/relationships">
+<p:sld xmlns:a="http://schemas.openxmlformats.org/drawingml/2006/main" xmlns:r="http://schemas.openxmlformats.org/officeDocument/2006/relationships" xmlns:p="http://schemas.openxmlformats.org/presentationml/2006/main">
   <p:cSld>
     <p:spTree>
       <p:nvGrpSpPr>
@@ -6510,7 +6312,14 @@
         <p:cNvGrpSpPr/>
         <p:nvPr/>
       </p:nvGrpSpPr>
-      <p:grpSpPr/>
+      <p:grpSpPr>
+        <a:xfrm>
+          <a:off x="0" y="0"/>
+          <a:ext cx="0" cy="0"/>
+          <a:chOff x="0" y="0"/>
+          <a:chExt cx="0" cy="0"/>
+        </a:xfrm>
+      </p:grpSpPr>
       <p:sp>
         <p:nvSpPr>
           <p:cNvPr id="2" name="Oval 1"/>
@@ -6548,7 +6357,7 @@
           </a:fontRef>
         </p:style>
         <p:txBody>
-          <a:bodyPr rtlCol="0" anchor="ctr" lIns="0" rIns="0" tIns="0" bIns="0"/>
+          <a:bodyPr lIns="0" tIns="0" rIns="0" bIns="0" rtlCol="0" anchor="ctr"/>
           <a:lstStyle/>
           <a:p>
             <a:pPr algn="ctr"/>
@@ -6581,7 +6390,7 @@
           <a:noFill/>
         </p:spPr>
         <p:txBody>
-          <a:bodyPr wrap="square" anchor="ctr" lIns="0" rIns="0" tIns="0" bIns="0">
+          <a:bodyPr wrap="square" lIns="0" tIns="0" rIns="0" bIns="0" anchor="ctr">
             <a:spAutoFit/>
           </a:bodyPr>
           <a:lstStyle/>
@@ -6616,7 +6425,7 @@
           <a:noFill/>
         </p:spPr>
         <p:txBody>
-          <a:bodyPr wrap="square" anchor="t" lIns="0" rIns="0" tIns="0" bIns="0">
+          <a:bodyPr wrap="square" lIns="0" tIns="0" rIns="0" bIns="0" anchor="t">
             <a:spAutoFit/>
           </a:bodyPr>
           <a:lstStyle/>
@@ -6651,7 +6460,7 @@
           <a:noFill/>
         </p:spPr>
         <p:txBody>
-          <a:bodyPr wrap="square" anchor="t" lIns="0" rIns="0" tIns="0" bIns="0">
+          <a:bodyPr wrap="square" lIns="0" tIns="0" rIns="0" bIns="0" anchor="t">
             <a:spAutoFit/>
           </a:bodyPr>
           <a:lstStyle/>
@@ -6714,6 +6523,7 @@
           <a:lstStyle/>
           <a:p>
             <a:pPr algn="ctr"/>
+            <a:endParaRPr/>
           </a:p>
         </p:txBody>
       </p:sp>
@@ -6734,7 +6544,7 @@
           <a:noFill/>
         </p:spPr>
         <p:txBody>
-          <a:bodyPr wrap="square" anchor="t" lIns="0" rIns="0" tIns="0" bIns="0">
+          <a:bodyPr wrap="square" lIns="0" tIns="0" rIns="0" bIns="0" anchor="t">
             <a:spAutoFit/>
           </a:bodyPr>
           <a:lstStyle/>
@@ -6769,7 +6579,7 @@
           <a:noFill/>
         </p:spPr>
         <p:txBody>
-          <a:bodyPr wrap="square" anchor="t" lIns="0" rIns="0" tIns="0" bIns="0">
+          <a:bodyPr wrap="square" lIns="0" tIns="0" rIns="0" bIns="0" anchor="t">
             <a:spAutoFit/>
           </a:bodyPr>
           <a:lstStyle/>
@@ -6828,6 +6638,7 @@
           <a:lstStyle/>
           <a:p>
             <a:pPr algn="ctr"/>
+            <a:endParaRPr/>
           </a:p>
         </p:txBody>
       </p:sp>
@@ -6876,6 +6687,7 @@
           <a:lstStyle/>
           <a:p>
             <a:pPr algn="ctr"/>
+            <a:endParaRPr/>
           </a:p>
         </p:txBody>
       </p:sp>
@@ -6896,7 +6708,7 @@
           <a:noFill/>
         </p:spPr>
         <p:txBody>
-          <a:bodyPr wrap="square" anchor="t" lIns="0" rIns="0" tIns="0" bIns="0">
+          <a:bodyPr wrap="square" lIns="0" tIns="0" rIns="0" bIns="0" anchor="t">
             <a:spAutoFit/>
           </a:bodyPr>
           <a:lstStyle/>
@@ -6931,7 +6743,7 @@
           <a:noFill/>
         </p:spPr>
         <p:txBody>
-          <a:bodyPr wrap="square" anchor="t" lIns="0" rIns="0" tIns="0" bIns="0">
+          <a:bodyPr wrap="square" lIns="0" tIns="0" rIns="0" bIns="0" anchor="t">
             <a:spAutoFit/>
           </a:bodyPr>
           <a:lstStyle/>
@@ -6990,6 +6802,7 @@
           <a:lstStyle/>
           <a:p>
             <a:pPr algn="ctr"/>
+            <a:endParaRPr/>
           </a:p>
         </p:txBody>
       </p:sp>
@@ -7038,6 +6851,7 @@
           <a:lstStyle/>
           <a:p>
             <a:pPr algn="ctr"/>
+            <a:endParaRPr/>
           </a:p>
         </p:txBody>
       </p:sp>
@@ -7058,7 +6872,7 @@
           <a:noFill/>
         </p:spPr>
         <p:txBody>
-          <a:bodyPr wrap="square" anchor="t" lIns="0" rIns="0" tIns="0" bIns="0">
+          <a:bodyPr wrap="square" lIns="0" tIns="0" rIns="0" bIns="0" anchor="t">
             <a:spAutoFit/>
           </a:bodyPr>
           <a:lstStyle/>
@@ -7093,7 +6907,7 @@
           <a:noFill/>
         </p:spPr>
         <p:txBody>
-          <a:bodyPr wrap="square" anchor="t" lIns="0" rIns="0" tIns="0" bIns="0">
+          <a:bodyPr wrap="square" lIns="0" tIns="0" rIns="0" bIns="0" anchor="t">
             <a:spAutoFit/>
           </a:bodyPr>
           <a:lstStyle/>
@@ -7152,6 +6966,7 @@
           <a:lstStyle/>
           <a:p>
             <a:pPr algn="ctr"/>
+            <a:endParaRPr/>
           </a:p>
         </p:txBody>
       </p:sp>
@@ -7200,6 +7015,7 @@
           <a:lstStyle/>
           <a:p>
             <a:pPr algn="ctr"/>
+            <a:endParaRPr/>
           </a:p>
         </p:txBody>
       </p:sp>
@@ -7220,7 +7036,7 @@
           <a:noFill/>
         </p:spPr>
         <p:txBody>
-          <a:bodyPr wrap="square" anchor="t" lIns="0" rIns="0" tIns="0" bIns="0">
+          <a:bodyPr wrap="square" lIns="0" tIns="0" rIns="0" bIns="0" anchor="t">
             <a:spAutoFit/>
           </a:bodyPr>
           <a:lstStyle/>
@@ -7255,7 +7071,7 @@
           <a:noFill/>
         </p:spPr>
         <p:txBody>
-          <a:bodyPr wrap="square" anchor="t" lIns="0" rIns="0" tIns="0" bIns="0">
+          <a:bodyPr wrap="square" lIns="0" tIns="0" rIns="0" bIns="0" anchor="t">
             <a:spAutoFit/>
           </a:bodyPr>
           <a:lstStyle/>
@@ -7314,6 +7130,7 @@
           <a:lstStyle/>
           <a:p>
             <a:pPr algn="ctr"/>
+            <a:endParaRPr/>
           </a:p>
         </p:txBody>
       </p:sp>
@@ -7362,6 +7179,7 @@
           <a:lstStyle/>
           <a:p>
             <a:pPr algn="ctr"/>
+            <a:endParaRPr/>
           </a:p>
         </p:txBody>
       </p:sp>
@@ -7382,7 +7200,7 @@
           <a:noFill/>
         </p:spPr>
         <p:txBody>
-          <a:bodyPr wrap="square" anchor="t" lIns="0" rIns="0" tIns="0" bIns="0">
+          <a:bodyPr wrap="square" lIns="0" tIns="0" rIns="0" bIns="0" anchor="t">
             <a:spAutoFit/>
           </a:bodyPr>
           <a:lstStyle/>
@@ -7417,7 +7235,7 @@
           <a:noFill/>
         </p:spPr>
         <p:txBody>
-          <a:bodyPr wrap="square" anchor="t" lIns="0" rIns="0" tIns="0" bIns="0">
+          <a:bodyPr wrap="square" lIns="0" tIns="0" rIns="0" bIns="0" anchor="t">
             <a:spAutoFit/>
           </a:bodyPr>
           <a:lstStyle/>
@@ -7476,6 +7294,7 @@
           <a:lstStyle/>
           <a:p>
             <a:pPr algn="ctr"/>
+            <a:endParaRPr/>
           </a:p>
         </p:txBody>
       </p:sp>
@@ -7524,6 +7343,7 @@
           <a:lstStyle/>
           <a:p>
             <a:pPr algn="ctr"/>
+            <a:endParaRPr/>
           </a:p>
         </p:txBody>
       </p:sp>
@@ -7544,7 +7364,7 @@
           <a:noFill/>
         </p:spPr>
         <p:txBody>
-          <a:bodyPr wrap="square" anchor="t" lIns="0" rIns="0" tIns="0" bIns="0">
+          <a:bodyPr wrap="square" lIns="0" tIns="0" rIns="0" bIns="0" anchor="t">
             <a:spAutoFit/>
           </a:bodyPr>
           <a:lstStyle/>
@@ -7579,7 +7399,7 @@
           <a:noFill/>
         </p:spPr>
         <p:txBody>
-          <a:bodyPr wrap="square" anchor="t" lIns="0" rIns="0" tIns="0" bIns="0">
+          <a:bodyPr wrap="square" lIns="0" tIns="0" rIns="0" bIns="0" anchor="t">
             <a:spAutoFit/>
           </a:bodyPr>
           <a:lstStyle/>
@@ -7640,6 +7460,7 @@
           <a:lstStyle/>
           <a:p>
             <a:pPr algn="ctr"/>
+            <a:endParaRPr/>
           </a:p>
         </p:txBody>
       </p:sp>
@@ -7660,7 +7481,7 @@
           <a:noFill/>
         </p:spPr>
         <p:txBody>
-          <a:bodyPr wrap="square" anchor="ctr" lIns="0" rIns="0" tIns="0" bIns="0">
+          <a:bodyPr wrap="square" lIns="0" tIns="0" rIns="0" bIns="0" anchor="ctr">
             <a:spAutoFit/>
           </a:bodyPr>
           <a:lstStyle/>
@@ -7695,7 +7516,7 @@
           <a:noFill/>
         </p:spPr>
         <p:txBody>
-          <a:bodyPr wrap="square" anchor="t" lIns="0" rIns="0" tIns="0" bIns="0">
+          <a:bodyPr wrap="square" lIns="0" tIns="0" rIns="0" bIns="0" anchor="t">
             <a:spAutoFit/>
           </a:bodyPr>
           <a:lstStyle/>
@@ -7758,6 +7579,7 @@
           <a:lstStyle/>
           <a:p>
             <a:pPr algn="ctr"/>
+            <a:endParaRPr/>
           </a:p>
         </p:txBody>
       </p:sp>
@@ -7778,7 +7600,7 @@
           <a:noFill/>
         </p:spPr>
         <p:txBody>
-          <a:bodyPr wrap="square" anchor="ctr" lIns="0" rIns="0" tIns="0" bIns="0">
+          <a:bodyPr wrap="square" lIns="0" tIns="0" rIns="0" bIns="0" anchor="ctr">
             <a:spAutoFit/>
           </a:bodyPr>
           <a:lstStyle/>
@@ -7841,6 +7663,7 @@
           <a:lstStyle/>
           <a:p>
             <a:pPr algn="ctr"/>
+            <a:endParaRPr/>
           </a:p>
         </p:txBody>
       </p:sp>
@@ -7861,7 +7684,7 @@
           <a:noFill/>
         </p:spPr>
         <p:txBody>
-          <a:bodyPr wrap="square" anchor="ctr" lIns="0" rIns="0" tIns="0" bIns="0">
+          <a:bodyPr wrap="square" lIns="0" tIns="0" rIns="0" bIns="0" anchor="ctr">
             <a:spAutoFit/>
           </a:bodyPr>
           <a:lstStyle/>
@@ -7924,6 +7747,7 @@
           <a:lstStyle/>
           <a:p>
             <a:pPr algn="ctr"/>
+            <a:endParaRPr/>
           </a:p>
         </p:txBody>
       </p:sp>
@@ -7944,7 +7768,7 @@
           <a:noFill/>
         </p:spPr>
         <p:txBody>
-          <a:bodyPr wrap="square" anchor="t" lIns="0" rIns="0" tIns="0" bIns="0">
+          <a:bodyPr wrap="square" lIns="0" tIns="0" rIns="0" bIns="0" anchor="t">
             <a:spAutoFit/>
           </a:bodyPr>
           <a:lstStyle/>
@@ -7979,7 +7803,7 @@
           <a:noFill/>
         </p:spPr>
         <p:txBody>
-          <a:bodyPr wrap="square" anchor="t" lIns="0" rIns="0" tIns="0" bIns="0">
+          <a:bodyPr wrap="square" lIns="0" tIns="0" rIns="0" bIns="0" anchor="t">
             <a:spAutoFit/>
           </a:bodyPr>
           <a:lstStyle/>
@@ -8038,6 +7862,7 @@
           <a:lstStyle/>
           <a:p>
             <a:pPr algn="ctr"/>
+            <a:endParaRPr/>
           </a:p>
         </p:txBody>
       </p:sp>
@@ -8086,6 +7911,7 @@
           <a:lstStyle/>
           <a:p>
             <a:pPr algn="ctr"/>
+            <a:endParaRPr/>
           </a:p>
         </p:txBody>
       </p:sp>
@@ -8106,7 +7932,7 @@
           <a:noFill/>
         </p:spPr>
         <p:txBody>
-          <a:bodyPr wrap="square" anchor="t" lIns="0" rIns="0" tIns="0" bIns="0">
+          <a:bodyPr wrap="square" lIns="0" tIns="0" rIns="0" bIns="0" anchor="t">
             <a:spAutoFit/>
           </a:bodyPr>
           <a:lstStyle/>
@@ -8141,7 +7967,7 @@
           <a:noFill/>
         </p:spPr>
         <p:txBody>
-          <a:bodyPr wrap="square" anchor="t" lIns="0" rIns="0" tIns="0" bIns="0">
+          <a:bodyPr wrap="square" lIns="0" tIns="0" rIns="0" bIns="0" anchor="t">
             <a:spAutoFit/>
           </a:bodyPr>
           <a:lstStyle/>
@@ -8200,6 +8026,7 @@
           <a:lstStyle/>
           <a:p>
             <a:pPr algn="ctr"/>
+            <a:endParaRPr/>
           </a:p>
         </p:txBody>
       </p:sp>
@@ -8248,6 +8075,7 @@
           <a:lstStyle/>
           <a:p>
             <a:pPr algn="ctr"/>
+            <a:endParaRPr/>
           </a:p>
         </p:txBody>
       </p:sp>
@@ -8268,7 +8096,7 @@
           <a:noFill/>
         </p:spPr>
         <p:txBody>
-          <a:bodyPr wrap="square" anchor="t" lIns="0" rIns="0" tIns="0" bIns="0">
+          <a:bodyPr wrap="square" lIns="0" tIns="0" rIns="0" bIns="0" anchor="t">
             <a:spAutoFit/>
           </a:bodyPr>
           <a:lstStyle/>
@@ -8303,7 +8131,7 @@
           <a:noFill/>
         </p:spPr>
         <p:txBody>
-          <a:bodyPr wrap="square" anchor="t" lIns="0" rIns="0" tIns="0" bIns="0">
+          <a:bodyPr wrap="square" lIns="0" tIns="0" rIns="0" bIns="0" anchor="t">
             <a:spAutoFit/>
           </a:bodyPr>
           <a:lstStyle/>
@@ -8362,6 +8190,7 @@
           <a:lstStyle/>
           <a:p>
             <a:pPr algn="ctr"/>
+            <a:endParaRPr/>
           </a:p>
         </p:txBody>
       </p:sp>
@@ -8410,6 +8239,7 @@
           <a:lstStyle/>
           <a:p>
             <a:pPr algn="ctr"/>
+            <a:endParaRPr/>
           </a:p>
         </p:txBody>
       </p:sp>
@@ -8430,7 +8260,7 @@
           <a:noFill/>
         </p:spPr>
         <p:txBody>
-          <a:bodyPr wrap="square" anchor="t" lIns="0" rIns="0" tIns="0" bIns="0">
+          <a:bodyPr wrap="square" lIns="0" tIns="0" rIns="0" bIns="0" anchor="t">
             <a:spAutoFit/>
           </a:bodyPr>
           <a:lstStyle/>
@@ -8465,7 +8295,7 @@
           <a:noFill/>
         </p:spPr>
         <p:txBody>
-          <a:bodyPr wrap="square" anchor="t" lIns="0" rIns="0" tIns="0" bIns="0">
+          <a:bodyPr wrap="square" lIns="0" tIns="0" rIns="0" bIns="0" anchor="t">
             <a:spAutoFit/>
           </a:bodyPr>
           <a:lstStyle/>
@@ -8524,6 +8354,7 @@
           <a:lstStyle/>
           <a:p>
             <a:pPr algn="ctr"/>
+            <a:endParaRPr/>
           </a:p>
         </p:txBody>
       </p:sp>
@@ -8572,6 +8403,7 @@
           <a:lstStyle/>
           <a:p>
             <a:pPr algn="ctr"/>
+            <a:endParaRPr/>
           </a:p>
         </p:txBody>
       </p:sp>
@@ -8592,7 +8424,7 @@
           <a:noFill/>
         </p:spPr>
         <p:txBody>
-          <a:bodyPr wrap="square" anchor="t" lIns="0" rIns="0" tIns="0" bIns="0">
+          <a:bodyPr wrap="square" lIns="0" tIns="0" rIns="0" bIns="0" anchor="t">
             <a:spAutoFit/>
           </a:bodyPr>
           <a:lstStyle/>
@@ -8627,7 +8459,7 @@
           <a:noFill/>
         </p:spPr>
         <p:txBody>
-          <a:bodyPr wrap="square" anchor="t" lIns="0" rIns="0" tIns="0" bIns="0">
+          <a:bodyPr wrap="square" lIns="0" tIns="0" rIns="0" bIns="0" anchor="t">
             <a:spAutoFit/>
           </a:bodyPr>
           <a:lstStyle/>
@@ -8686,6 +8518,7 @@
           <a:lstStyle/>
           <a:p>
             <a:pPr algn="ctr"/>
+            <a:endParaRPr/>
           </a:p>
         </p:txBody>
       </p:sp>
@@ -8734,6 +8567,7 @@
           <a:lstStyle/>
           <a:p>
             <a:pPr algn="ctr"/>
+            <a:endParaRPr/>
           </a:p>
         </p:txBody>
       </p:sp>
@@ -8754,7 +8588,7 @@
           <a:noFill/>
         </p:spPr>
         <p:txBody>
-          <a:bodyPr wrap="square" anchor="t" lIns="0" rIns="0" tIns="0" bIns="0">
+          <a:bodyPr wrap="square" lIns="0" tIns="0" rIns="0" bIns="0" anchor="t">
             <a:spAutoFit/>
           </a:bodyPr>
           <a:lstStyle/>
@@ -8789,7 +8623,7 @@
           <a:noFill/>
         </p:spPr>
         <p:txBody>
-          <a:bodyPr wrap="square" anchor="t" lIns="0" rIns="0" tIns="0" bIns="0">
+          <a:bodyPr wrap="square" lIns="0" tIns="0" rIns="0" bIns="0" anchor="t">
             <a:spAutoFit/>
           </a:bodyPr>
           <a:lstStyle/>
@@ -8824,7 +8658,7 @@
           <a:noFill/>
         </p:spPr>
         <p:txBody>
-          <a:bodyPr wrap="square" anchor="t" lIns="0" rIns="0" tIns="0" bIns="0">
+          <a:bodyPr wrap="square" lIns="0" tIns="0" rIns="0" bIns="0" anchor="t">
             <a:spAutoFit/>
           </a:bodyPr>
           <a:lstStyle/>
@@ -8887,6 +8721,7 @@
           <a:lstStyle/>
           <a:p>
             <a:pPr algn="ctr"/>
+            <a:endParaRPr/>
           </a:p>
         </p:txBody>
       </p:sp>
@@ -8907,7 +8742,7 @@
           <a:noFill/>
         </p:spPr>
         <p:txBody>
-          <a:bodyPr wrap="square" anchor="t" lIns="0" rIns="0" tIns="0" bIns="0">
+          <a:bodyPr wrap="square" lIns="0" tIns="0" rIns="0" bIns="0" anchor="t">
             <a:spAutoFit/>
           </a:bodyPr>
           <a:lstStyle/>
@@ -8942,7 +8777,7 @@
           <a:noFill/>
         </p:spPr>
         <p:txBody>
-          <a:bodyPr wrap="square" anchor="t" lIns="0" rIns="0" tIns="0" bIns="0">
+          <a:bodyPr wrap="square" lIns="0" tIns="0" rIns="0" bIns="0" anchor="t">
             <a:spAutoFit/>
           </a:bodyPr>
           <a:lstStyle/>
@@ -9001,6 +8836,7 @@
           <a:lstStyle/>
           <a:p>
             <a:pPr algn="ctr"/>
+            <a:endParaRPr/>
           </a:p>
         </p:txBody>
       </p:sp>
@@ -9049,6 +8885,7 @@
           <a:lstStyle/>
           <a:p>
             <a:pPr algn="ctr"/>
+            <a:endParaRPr/>
           </a:p>
         </p:txBody>
       </p:sp>
@@ -9069,7 +8906,7 @@
           <a:noFill/>
         </p:spPr>
         <p:txBody>
-          <a:bodyPr wrap="square" anchor="t" lIns="0" rIns="0" tIns="0" bIns="0">
+          <a:bodyPr wrap="square" lIns="0" tIns="0" rIns="0" bIns="0" anchor="t">
             <a:spAutoFit/>
           </a:bodyPr>
           <a:lstStyle/>
@@ -9104,7 +8941,7 @@
           <a:noFill/>
         </p:spPr>
         <p:txBody>
-          <a:bodyPr wrap="square" anchor="t" lIns="0" rIns="0" tIns="0" bIns="0">
+          <a:bodyPr wrap="square" lIns="0" tIns="0" rIns="0" bIns="0" anchor="t">
             <a:spAutoFit/>
           </a:bodyPr>
           <a:lstStyle/>
@@ -9163,6 +9000,7 @@
           <a:lstStyle/>
           <a:p>
             <a:pPr algn="ctr"/>
+            <a:endParaRPr/>
           </a:p>
         </p:txBody>
       </p:sp>
@@ -9211,6 +9049,7 @@
           <a:lstStyle/>
           <a:p>
             <a:pPr algn="ctr"/>
+            <a:endParaRPr/>
           </a:p>
         </p:txBody>
       </p:sp>
@@ -9231,7 +9070,7 @@
           <a:noFill/>
         </p:spPr>
         <p:txBody>
-          <a:bodyPr wrap="square" anchor="t" lIns="0" rIns="0" tIns="0" bIns="0">
+          <a:bodyPr wrap="square" lIns="0" tIns="0" rIns="0" bIns="0" anchor="t">
             <a:spAutoFit/>
           </a:bodyPr>
           <a:lstStyle/>
@@ -9266,7 +9105,7 @@
           <a:noFill/>
         </p:spPr>
         <p:txBody>
-          <a:bodyPr wrap="square" anchor="t" lIns="0" rIns="0" tIns="0" bIns="0">
+          <a:bodyPr wrap="square" lIns="0" tIns="0" rIns="0" bIns="0" anchor="t">
             <a:spAutoFit/>
           </a:bodyPr>
           <a:lstStyle/>
@@ -9325,6 +9164,7 @@
           <a:lstStyle/>
           <a:p>
             <a:pPr algn="ctr"/>
+            <a:endParaRPr/>
           </a:p>
         </p:txBody>
       </p:sp>
@@ -9373,6 +9213,7 @@
           <a:lstStyle/>
           <a:p>
             <a:pPr algn="ctr"/>
+            <a:endParaRPr/>
           </a:p>
         </p:txBody>
       </p:sp>
@@ -9393,7 +9234,7 @@
           <a:noFill/>
         </p:spPr>
         <p:txBody>
-          <a:bodyPr wrap="square" anchor="t" lIns="0" rIns="0" tIns="0" bIns="0">
+          <a:bodyPr wrap="square" lIns="0" tIns="0" rIns="0" bIns="0" anchor="t">
             <a:spAutoFit/>
           </a:bodyPr>
           <a:lstStyle/>
@@ -9428,7 +9269,7 @@
           <a:noFill/>
         </p:spPr>
         <p:txBody>
-          <a:bodyPr wrap="square" anchor="t" lIns="0" rIns="0" tIns="0" bIns="0">
+          <a:bodyPr wrap="square" lIns="0" tIns="0" rIns="0" bIns="0" anchor="t">
             <a:spAutoFit/>
           </a:bodyPr>
           <a:lstStyle/>
@@ -9463,7 +9304,7 @@
           <a:noFill/>
         </p:spPr>
         <p:txBody>
-          <a:bodyPr wrap="square" anchor="t" lIns="0" rIns="0" tIns="0" bIns="0">
+          <a:bodyPr wrap="square" lIns="0" tIns="0" rIns="0" bIns="0" anchor="t">
             <a:spAutoFit/>
           </a:bodyPr>
           <a:lstStyle/>
@@ -9490,7 +9331,7 @@
 </file>
 
 <file path=ppt/slides/slide4.xml><?xml version="1.0" encoding="utf-8"?>
-<p:sld xmlns:a="http://schemas.openxmlformats.org/drawingml/2006/main" xmlns:p="http://schemas.openxmlformats.org/presentationml/2006/main" xmlns:r="http://schemas.openxmlformats.org/officeDocument/2006/relationships">
+<p:sld xmlns:a="http://schemas.openxmlformats.org/drawingml/2006/main" xmlns:r="http://schemas.openxmlformats.org/officeDocument/2006/relationships" xmlns:p="http://schemas.openxmlformats.org/presentationml/2006/main">
   <p:cSld>
     <p:spTree>
       <p:nvGrpSpPr>
@@ -9498,7 +9339,14 @@
         <p:cNvGrpSpPr/>
         <p:nvPr/>
       </p:nvGrpSpPr>
-      <p:grpSpPr/>
+      <p:grpSpPr>
+        <a:xfrm>
+          <a:off x="0" y="0"/>
+          <a:ext cx="0" cy="0"/>
+          <a:chOff x="0" y="0"/>
+          <a:chExt cx="0" cy="0"/>
+        </a:xfrm>
+      </p:grpSpPr>
       <p:sp>
         <p:nvSpPr>
           <p:cNvPr id="2" name="Oval 1"/>
@@ -9536,7 +9384,7 @@
           </a:fontRef>
         </p:style>
         <p:txBody>
-          <a:bodyPr rtlCol="0" anchor="ctr" lIns="0" rIns="0" tIns="0" bIns="0"/>
+          <a:bodyPr lIns="0" tIns="0" rIns="0" bIns="0" rtlCol="0" anchor="ctr"/>
           <a:lstStyle/>
           <a:p>
             <a:pPr algn="ctr"/>
@@ -9569,7 +9417,7 @@
           <a:noFill/>
         </p:spPr>
         <p:txBody>
-          <a:bodyPr wrap="square" anchor="ctr" lIns="0" rIns="0" tIns="0" bIns="0">
+          <a:bodyPr wrap="square" lIns="0" tIns="0" rIns="0" bIns="0" anchor="ctr">
             <a:spAutoFit/>
           </a:bodyPr>
           <a:lstStyle/>
@@ -9604,7 +9452,7 @@
           <a:noFill/>
         </p:spPr>
         <p:txBody>
-          <a:bodyPr wrap="square" anchor="t" lIns="0" rIns="0" tIns="0" bIns="0">
+          <a:bodyPr wrap="square" lIns="0" tIns="0" rIns="0" bIns="0" anchor="t">
             <a:spAutoFit/>
           </a:bodyPr>
           <a:lstStyle/>
@@ -9641,9 +9489,27 @@
                 <a:tableStyleId>{5C22544A-7EE6-4342-B048-85BDC9FD1C3A}</a:tableStyleId>
               </a:tblPr>
               <a:tblGrid>
-                <a:gridCol w="1874519"/>
-                <a:gridCol w="960120"/>
-                <a:gridCol w="3291840"/>
+                <a:gridCol w="1874519">
+                  <a:extLst>
+                    <a:ext uri="{9D8B030D-6E8A-4147-A177-3AD203B41FA5}">
+                      <a16:colId xmlns:a16="http://schemas.microsoft.com/office/drawing/2014/main" val="20000"/>
+                    </a:ext>
+                  </a:extLst>
+                </a:gridCol>
+                <a:gridCol w="960120">
+                  <a:extLst>
+                    <a:ext uri="{9D8B030D-6E8A-4147-A177-3AD203B41FA5}">
+                      <a16:colId xmlns:a16="http://schemas.microsoft.com/office/drawing/2014/main" val="20001"/>
+                    </a:ext>
+                  </a:extLst>
+                </a:gridCol>
+                <a:gridCol w="3291840">
+                  <a:extLst>
+                    <a:ext uri="{9D8B030D-6E8A-4147-A177-3AD203B41FA5}">
+                      <a16:colId xmlns:a16="http://schemas.microsoft.com/office/drawing/2014/main" val="20002"/>
+                    </a:ext>
+                  </a:extLst>
+                </a:gridCol>
               </a:tblGrid>
               <a:tr h="402336">
                 <a:tc>
@@ -9662,7 +9528,7 @@
                       </a:r>
                     </a:p>
                   </a:txBody>
-                  <a:tcPr marL="91440" marR="91440" marT="27432" marB="27432" anchor="ctr">
+                  <a:tcPr marT="27432" marB="27432" anchor="ctr">
                     <a:solidFill>
                       <a:srgbClr val="1B2A49"/>
                     </a:solidFill>
@@ -9684,7 +9550,7 @@
                       </a:r>
                     </a:p>
                   </a:txBody>
-                  <a:tcPr marL="91440" marR="91440" marT="27432" marB="27432" anchor="ctr">
+                  <a:tcPr marT="27432" marB="27432" anchor="ctr">
                     <a:solidFill>
                       <a:srgbClr val="1B2A49"/>
                     </a:solidFill>
@@ -9706,12 +9572,17 @@
                       </a:r>
                     </a:p>
                   </a:txBody>
-                  <a:tcPr marL="91440" marR="91440" marT="27432" marB="27432" anchor="ctr">
+                  <a:tcPr marT="27432" marB="27432" anchor="ctr">
                     <a:solidFill>
                       <a:srgbClr val="1B2A49"/>
                     </a:solidFill>
                   </a:tcPr>
                 </a:tc>
+                <a:extLst>
+                  <a:ext uri="{0D108BD9-81ED-4DB2-BD59-A6C34878D82A}">
+                    <a16:rowId xmlns:a16="http://schemas.microsoft.com/office/drawing/2014/main" val="10000"/>
+                  </a:ext>
+                </a:extLst>
               </a:tr>
               <a:tr h="402336">
                 <a:tc>
@@ -9730,7 +9601,7 @@
                       </a:r>
                     </a:p>
                   </a:txBody>
-                  <a:tcPr marL="91440" marR="91440" marT="27432" marB="27432" anchor="ctr">
+                  <a:tcPr marT="27432" marB="27432" anchor="ctr">
                     <a:solidFill>
                       <a:srgbClr val="FFFFFF"/>
                     </a:solidFill>
@@ -9752,7 +9623,7 @@
                       </a:r>
                     </a:p>
                   </a:txBody>
-                  <a:tcPr marL="91440" marR="91440" marT="27432" marB="27432" anchor="ctr">
+                  <a:tcPr marT="27432" marB="27432" anchor="ctr">
                     <a:solidFill>
                       <a:srgbClr val="FFFFFF"/>
                     </a:solidFill>
@@ -9774,12 +9645,17 @@
                       </a:r>
                     </a:p>
                   </a:txBody>
-                  <a:tcPr marL="91440" marR="91440" marT="27432" marB="27432" anchor="ctr">
+                  <a:tcPr marT="27432" marB="27432" anchor="ctr">
                     <a:solidFill>
                       <a:srgbClr val="FFFFFF"/>
                     </a:solidFill>
                   </a:tcPr>
                 </a:tc>
+                <a:extLst>
+                  <a:ext uri="{0D108BD9-81ED-4DB2-BD59-A6C34878D82A}">
+                    <a16:rowId xmlns:a16="http://schemas.microsoft.com/office/drawing/2014/main" val="10001"/>
+                  </a:ext>
+                </a:extLst>
               </a:tr>
               <a:tr h="402336">
                 <a:tc>
@@ -9798,7 +9674,7 @@
                       </a:r>
                     </a:p>
                   </a:txBody>
-                  <a:tcPr marL="91440" marR="91440" marT="27432" marB="27432" anchor="ctr">
+                  <a:tcPr marT="27432" marB="27432" anchor="ctr">
                     <a:solidFill>
                       <a:srgbClr val="F3F5F9"/>
                     </a:solidFill>
@@ -9820,7 +9696,7 @@
                       </a:r>
                     </a:p>
                   </a:txBody>
-                  <a:tcPr marL="91440" marR="91440" marT="27432" marB="27432" anchor="ctr">
+                  <a:tcPr marT="27432" marB="27432" anchor="ctr">
                     <a:solidFill>
                       <a:srgbClr val="F3F5F9"/>
                     </a:solidFill>
@@ -9842,12 +9718,17 @@
                       </a:r>
                     </a:p>
                   </a:txBody>
-                  <a:tcPr marL="91440" marR="91440" marT="27432" marB="27432" anchor="ctr">
+                  <a:tcPr marT="27432" marB="27432" anchor="ctr">
                     <a:solidFill>
                       <a:srgbClr val="F3F5F9"/>
                     </a:solidFill>
                   </a:tcPr>
                 </a:tc>
+                <a:extLst>
+                  <a:ext uri="{0D108BD9-81ED-4DB2-BD59-A6C34878D82A}">
+                    <a16:rowId xmlns:a16="http://schemas.microsoft.com/office/drawing/2014/main" val="10002"/>
+                  </a:ext>
+                </a:extLst>
               </a:tr>
               <a:tr h="402336">
                 <a:tc>
@@ -9866,7 +9747,7 @@
                       </a:r>
                     </a:p>
                   </a:txBody>
-                  <a:tcPr marL="91440" marR="91440" marT="27432" marB="27432" anchor="ctr">
+                  <a:tcPr marT="27432" marB="27432" anchor="ctr">
                     <a:solidFill>
                       <a:srgbClr val="FFFFFF"/>
                     </a:solidFill>
@@ -9888,7 +9769,7 @@
                       </a:r>
                     </a:p>
                   </a:txBody>
-                  <a:tcPr marL="91440" marR="91440" marT="27432" marB="27432" anchor="ctr">
+                  <a:tcPr marT="27432" marB="27432" anchor="ctr">
                     <a:solidFill>
                       <a:srgbClr val="FFFFFF"/>
                     </a:solidFill>
@@ -9910,12 +9791,17 @@
                       </a:r>
                     </a:p>
                   </a:txBody>
-                  <a:tcPr marL="91440" marR="91440" marT="27432" marB="27432" anchor="ctr">
+                  <a:tcPr marT="27432" marB="27432" anchor="ctr">
                     <a:solidFill>
                       <a:srgbClr val="FFFFFF"/>
                     </a:solidFill>
                   </a:tcPr>
                 </a:tc>
+                <a:extLst>
+                  <a:ext uri="{0D108BD9-81ED-4DB2-BD59-A6C34878D82A}">
+                    <a16:rowId xmlns:a16="http://schemas.microsoft.com/office/drawing/2014/main" val="10003"/>
+                  </a:ext>
+                </a:extLst>
               </a:tr>
               <a:tr h="402336">
                 <a:tc>
@@ -9934,7 +9820,7 @@
                       </a:r>
                     </a:p>
                   </a:txBody>
-                  <a:tcPr marL="91440" marR="91440" marT="27432" marB="27432" anchor="ctr">
+                  <a:tcPr marT="27432" marB="27432" anchor="ctr">
                     <a:solidFill>
                       <a:srgbClr val="F3F5F9"/>
                     </a:solidFill>
@@ -9956,7 +9842,7 @@
                       </a:r>
                     </a:p>
                   </a:txBody>
-                  <a:tcPr marL="91440" marR="91440" marT="27432" marB="27432" anchor="ctr">
+                  <a:tcPr marT="27432" marB="27432" anchor="ctr">
                     <a:solidFill>
                       <a:srgbClr val="F3F5F9"/>
                     </a:solidFill>
@@ -9978,12 +9864,17 @@
                       </a:r>
                     </a:p>
                   </a:txBody>
-                  <a:tcPr marL="91440" marR="91440" marT="27432" marB="27432" anchor="ctr">
+                  <a:tcPr marT="27432" marB="27432" anchor="ctr">
                     <a:solidFill>
                       <a:srgbClr val="F3F5F9"/>
                     </a:solidFill>
                   </a:tcPr>
                 </a:tc>
+                <a:extLst>
+                  <a:ext uri="{0D108BD9-81ED-4DB2-BD59-A6C34878D82A}">
+                    <a16:rowId xmlns:a16="http://schemas.microsoft.com/office/drawing/2014/main" val="10004"/>
+                  </a:ext>
+                </a:extLst>
               </a:tr>
               <a:tr h="402336">
                 <a:tc>
@@ -10002,7 +9893,7 @@
                       </a:r>
                     </a:p>
                   </a:txBody>
-                  <a:tcPr marL="91440" marR="91440" marT="27432" marB="27432" anchor="ctr">
+                  <a:tcPr marT="27432" marB="27432" anchor="ctr">
                     <a:solidFill>
                       <a:srgbClr val="FFFFFF"/>
                     </a:solidFill>
@@ -10024,7 +9915,7 @@
                       </a:r>
                     </a:p>
                   </a:txBody>
-                  <a:tcPr marL="91440" marR="91440" marT="27432" marB="27432" anchor="ctr">
+                  <a:tcPr marT="27432" marB="27432" anchor="ctr">
                     <a:solidFill>
                       <a:srgbClr val="FFFFFF"/>
                     </a:solidFill>
@@ -10046,12 +9937,17 @@
                       </a:r>
                     </a:p>
                   </a:txBody>
-                  <a:tcPr marL="91440" marR="91440" marT="27432" marB="27432" anchor="ctr">
+                  <a:tcPr marT="27432" marB="27432" anchor="ctr">
                     <a:solidFill>
                       <a:srgbClr val="FFFFFF"/>
                     </a:solidFill>
                   </a:tcPr>
                 </a:tc>
+                <a:extLst>
+                  <a:ext uri="{0D108BD9-81ED-4DB2-BD59-A6C34878D82A}">
+                    <a16:rowId xmlns:a16="http://schemas.microsoft.com/office/drawing/2014/main" val="10005"/>
+                  </a:ext>
+                </a:extLst>
               </a:tr>
               <a:tr h="402336">
                 <a:tc>
@@ -10070,7 +9966,7 @@
                       </a:r>
                     </a:p>
                   </a:txBody>
-                  <a:tcPr marL="91440" marR="91440" marT="27432" marB="27432" anchor="ctr">
+                  <a:tcPr marT="27432" marB="27432" anchor="ctr">
                     <a:solidFill>
                       <a:srgbClr val="F3F5F9"/>
                     </a:solidFill>
@@ -10092,7 +9988,7 @@
                       </a:r>
                     </a:p>
                   </a:txBody>
-                  <a:tcPr marL="91440" marR="91440" marT="27432" marB="27432" anchor="ctr">
+                  <a:tcPr marT="27432" marB="27432" anchor="ctr">
                     <a:solidFill>
                       <a:srgbClr val="F3F5F9"/>
                     </a:solidFill>
@@ -10114,12 +10010,17 @@
                       </a:r>
                     </a:p>
                   </a:txBody>
-                  <a:tcPr marL="91440" marR="91440" marT="27432" marB="27432" anchor="ctr">
+                  <a:tcPr marT="27432" marB="27432" anchor="ctr">
                     <a:solidFill>
                       <a:srgbClr val="F3F5F9"/>
                     </a:solidFill>
                   </a:tcPr>
                 </a:tc>
+                <a:extLst>
+                  <a:ext uri="{0D108BD9-81ED-4DB2-BD59-A6C34878D82A}">
+                    <a16:rowId xmlns:a16="http://schemas.microsoft.com/office/drawing/2014/main" val="10006"/>
+                  </a:ext>
+                </a:extLst>
               </a:tr>
               <a:tr h="402336">
                 <a:tc>
@@ -10138,7 +10039,7 @@
                       </a:r>
                     </a:p>
                   </a:txBody>
-                  <a:tcPr marL="91440" marR="91440" marT="27432" marB="27432" anchor="ctr">
+                  <a:tcPr marT="27432" marB="27432" anchor="ctr">
                     <a:solidFill>
                       <a:srgbClr val="FFFFFF"/>
                     </a:solidFill>
@@ -10160,7 +10061,7 @@
                       </a:r>
                     </a:p>
                   </a:txBody>
-                  <a:tcPr marL="91440" marR="91440" marT="27432" marB="27432" anchor="ctr">
+                  <a:tcPr marT="27432" marB="27432" anchor="ctr">
                     <a:solidFill>
                       <a:srgbClr val="FFFFFF"/>
                     </a:solidFill>
@@ -10182,12 +10083,17 @@
                       </a:r>
                     </a:p>
                   </a:txBody>
-                  <a:tcPr marL="91440" marR="91440" marT="27432" marB="27432" anchor="ctr">
+                  <a:tcPr marT="27432" marB="27432" anchor="ctr">
                     <a:solidFill>
                       <a:srgbClr val="FFFFFF"/>
                     </a:solidFill>
                   </a:tcPr>
                 </a:tc>
+                <a:extLst>
+                  <a:ext uri="{0D108BD9-81ED-4DB2-BD59-A6C34878D82A}">
+                    <a16:rowId xmlns:a16="http://schemas.microsoft.com/office/drawing/2014/main" val="10007"/>
+                  </a:ext>
+                </a:extLst>
               </a:tr>
             </a:tbl>
           </a:graphicData>
@@ -10236,6 +10142,7 @@
           <a:lstStyle/>
           <a:p>
             <a:pPr algn="ctr"/>
+            <a:endParaRPr/>
           </a:p>
         </p:txBody>
       </p:sp>
@@ -10256,7 +10163,7 @@
           <a:noFill/>
         </p:spPr>
         <p:txBody>
-          <a:bodyPr wrap="square" anchor="t" lIns="0" rIns="0" tIns="0" bIns="0">
+          <a:bodyPr wrap="square" lIns="0" tIns="0" rIns="0" bIns="0" anchor="t">
             <a:spAutoFit/>
           </a:bodyPr>
           <a:lstStyle/>
@@ -10291,7 +10198,7 @@
           <a:noFill/>
         </p:spPr>
         <p:txBody>
-          <a:bodyPr wrap="square" anchor="t" lIns="0" rIns="0" tIns="0" bIns="0">
+          <a:bodyPr wrap="square" lIns="0" tIns="0" rIns="0" bIns="0" anchor="t">
             <a:spAutoFit/>
           </a:bodyPr>
           <a:lstStyle/>
@@ -10352,6 +10259,7 @@
           <a:lstStyle/>
           <a:p>
             <a:pPr algn="ctr"/>
+            <a:endParaRPr/>
           </a:p>
         </p:txBody>
       </p:sp>
@@ -10372,7 +10280,7 @@
           <a:noFill/>
         </p:spPr>
         <p:txBody>
-          <a:bodyPr wrap="square" anchor="t" lIns="0" rIns="0" tIns="0" bIns="0">
+          <a:bodyPr wrap="square" lIns="0" tIns="0" rIns="0" bIns="0" anchor="t">
             <a:spAutoFit/>
           </a:bodyPr>
           <a:lstStyle/>
@@ -10407,7 +10315,7 @@
           <a:noFill/>
         </p:spPr>
         <p:txBody>
-          <a:bodyPr wrap="square" anchor="t" lIns="0" rIns="0" tIns="0" bIns="0">
+          <a:bodyPr wrap="square" lIns="0" tIns="0" rIns="0" bIns="0" anchor="t">
             <a:spAutoFit/>
           </a:bodyPr>
           <a:lstStyle/>
@@ -10468,6 +10376,7 @@
           <a:lstStyle/>
           <a:p>
             <a:pPr algn="ctr"/>
+            <a:endParaRPr/>
           </a:p>
         </p:txBody>
       </p:sp>
@@ -10488,7 +10397,7 @@
           <a:noFill/>
         </p:spPr>
         <p:txBody>
-          <a:bodyPr wrap="square" anchor="t" lIns="0" rIns="0" tIns="0" bIns="0">
+          <a:bodyPr wrap="square" lIns="0" tIns="0" rIns="0" bIns="0" anchor="t">
             <a:spAutoFit/>
           </a:bodyPr>
           <a:lstStyle/>
@@ -10523,7 +10432,7 @@
           <a:noFill/>
         </p:spPr>
         <p:txBody>
-          <a:bodyPr wrap="square" anchor="t" lIns="0" rIns="0" tIns="0" bIns="0">
+          <a:bodyPr wrap="square" lIns="0" tIns="0" rIns="0" bIns="0" anchor="t">
             <a:spAutoFit/>
           </a:bodyPr>
           <a:lstStyle/>
@@ -10587,76 +10496,7 @@
           <a:lstStyle/>
           <a:p>
             <a:pPr algn="ctr"/>
-          </a:p>
-        </p:txBody>
-      </p:sp>
-      <p:sp>
-        <p:nvSpPr>
-          <p:cNvPr id="16" name="TextBox 15"/>
-          <p:cNvSpPr txBox="1"/>
-          <p:nvPr/>
-        </p:nvSpPr>
-        <p:spPr>
-          <a:xfrm>
-            <a:off x="6858000" y="2240280"/>
-            <a:ext cx="4873752" cy="365760"/>
-          </a:xfrm>
-          <a:prstGeom prst="rect">
-            <a:avLst/>
-          </a:prstGeom>
-          <a:noFill/>
-        </p:spPr>
-        <p:txBody>
-          <a:bodyPr wrap="square" anchor="t" lIns="0" rIns="0" tIns="0" bIns="0">
-            <a:spAutoFit/>
-          </a:bodyPr>
-          <a:lstStyle/>
-          <a:p>
-            <a:pPr algn="ctr"/>
-            <a:r>
-              <a:rPr sz="1600" b="1">
-                <a:solidFill>
-                  <a:srgbClr val="6B7280"/>
-                </a:solidFill>
-                <a:latin typeface="Calibri"/>
-              </a:rPr>
-              <a:t>Screenshot: review page</a:t>
-            </a:r>
-          </a:p>
-        </p:txBody>
-      </p:sp>
-      <p:sp>
-        <p:nvSpPr>
-          <p:cNvPr id="17" name="TextBox 16"/>
-          <p:cNvSpPr txBox="1"/>
-          <p:nvPr/>
-        </p:nvSpPr>
-        <p:spPr>
-          <a:xfrm>
-            <a:off x="6858000" y="2651760"/>
-            <a:ext cx="4873752" cy="365760"/>
-          </a:xfrm>
-          <a:prstGeom prst="rect">
-            <a:avLst/>
-          </a:prstGeom>
-          <a:noFill/>
-        </p:spPr>
-        <p:txBody>
-          <a:bodyPr wrap="square" anchor="t" lIns="0" rIns="0" tIns="0" bIns="0">
-            <a:spAutoFit/>
-          </a:bodyPr>
-          <a:lstStyle/>
-          <a:p>
-            <a:pPr algn="ctr"/>
-            <a:r>
-              <a:rPr sz="1200" b="0">
-                <a:solidFill>
-                  <a:srgbClr val="6B7280"/>
-                </a:solidFill>
-                <a:latin typeface="Calibri"/>
-              </a:rPr>
-              <a:t>suggestion next to the original, approve / edit / reject</a:t>
-            </a:r>
+            <a:endParaRPr/>
           </a:p>
         </p:txBody>
       </p:sp>
@@ -10706,19 +10546,20 @@
           <a:lstStyle/>
           <a:p>
             <a:pPr algn="ctr"/>
-          </a:p>
-        </p:txBody>
-      </p:sp>
-      <p:sp>
-        <p:nvSpPr>
-          <p:cNvPr id="19" name="TextBox 18"/>
+            <a:endParaRPr/>
+          </a:p>
+        </p:txBody>
+      </p:sp>
+      <p:sp>
+        <p:nvSpPr>
+          <p:cNvPr id="21" name="TextBox 20"/>
           <p:cNvSpPr txBox="1"/>
           <p:nvPr/>
         </p:nvSpPr>
         <p:spPr>
           <a:xfrm>
-            <a:off x="6858000" y="4754879"/>
-            <a:ext cx="4873752" cy="365760"/>
+            <a:off x="457200" y="6510528"/>
+            <a:ext cx="8229600" cy="228600"/>
           </a:xfrm>
           <a:prstGeom prst="rect">
             <a:avLst/>
@@ -10726,94 +10567,84 @@
           <a:noFill/>
         </p:spPr>
         <p:txBody>
-          <a:bodyPr wrap="square" anchor="t" lIns="0" rIns="0" tIns="0" bIns="0">
+          <a:bodyPr wrap="square" lIns="0" tIns="0" rIns="0" bIns="0" anchor="t">
             <a:spAutoFit/>
           </a:bodyPr>
           <a:lstStyle/>
           <a:p>
-            <a:pPr algn="ctr"/>
-            <a:r>
-              <a:rPr sz="1600" b="1">
+            <a:pPr algn="l"/>
+            <a:r>
+              <a:rPr sz="1000" b="0">
                 <a:solidFill>
                   <a:srgbClr val="6B7280"/>
                 </a:solidFill>
                 <a:latin typeface="Calibri"/>
               </a:rPr>
-              <a:t>Screenshot: ticket list or upload</a:t>
-            </a:r>
-          </a:p>
-        </p:txBody>
-      </p:sp>
-      <p:sp>
-        <p:nvSpPr>
-          <p:cNvPr id="20" name="TextBox 19"/>
-          <p:cNvSpPr txBox="1"/>
-          <p:nvPr/>
-        </p:nvSpPr>
-        <p:spPr>
-          <a:xfrm>
-            <a:off x="6858000" y="5166359"/>
-            <a:ext cx="4873752" cy="365760"/>
+              <a:t>TicketTriage  ·  Swiss {ai} Weeks  ·  Pipeline (docs/features/triage-pipeline, web-triage-ui)</a:t>
+            </a:r>
+          </a:p>
+        </p:txBody>
+      </p:sp>
+      <p:pic>
+        <p:nvPicPr>
+          <p:cNvPr id="23" name="Grafik 22">
+            <a:extLst>
+              <a:ext uri="{FF2B5EF4-FFF2-40B4-BE49-F238E27FC236}">
+                <a16:creationId xmlns:a16="http://schemas.microsoft.com/office/drawing/2014/main" id="{E3381A78-06EF-6610-E48F-EE461CFECE4A}"/>
+              </a:ext>
+            </a:extLst>
+          </p:cNvPr>
+          <p:cNvPicPr>
+            <a:picLocks noChangeAspect="1"/>
+          </p:cNvPicPr>
+          <p:nvPr/>
+        </p:nvPicPr>
+        <p:blipFill>
+          <a:blip r:embed="rId3"/>
+          <a:stretch>
+            <a:fillRect/>
+          </a:stretch>
+        </p:blipFill>
+        <p:spPr>
+          <a:xfrm>
+            <a:off x="6992855" y="4275481"/>
+            <a:ext cx="4599831" cy="1741271"/>
           </a:xfrm>
           <a:prstGeom prst="rect">
             <a:avLst/>
           </a:prstGeom>
-          <a:noFill/>
-        </p:spPr>
-        <p:txBody>
-          <a:bodyPr wrap="square" anchor="t" lIns="0" rIns="0" tIns="0" bIns="0">
-            <a:spAutoFit/>
-          </a:bodyPr>
-          <a:lstStyle/>
-          <a:p>
-            <a:pPr algn="ctr"/>
-            <a:r>
-              <a:rPr sz="1200" b="0">
-                <a:solidFill>
-                  <a:srgbClr val="6B7280"/>
-                </a:solidFill>
-                <a:latin typeface="Calibri"/>
-              </a:rPr>
-              <a:t>queue, states, result.json download</a:t>
-            </a:r>
-          </a:p>
-        </p:txBody>
-      </p:sp>
-      <p:sp>
-        <p:nvSpPr>
-          <p:cNvPr id="21" name="TextBox 20"/>
-          <p:cNvSpPr txBox="1"/>
-          <p:nvPr/>
-        </p:nvSpPr>
-        <p:spPr>
-          <a:xfrm>
-            <a:off x="457200" y="6510528"/>
-            <a:ext cx="8229600" cy="228600"/>
+        </p:spPr>
+      </p:pic>
+      <p:pic>
+        <p:nvPicPr>
+          <p:cNvPr id="25" name="Grafik 24">
+            <a:extLst>
+              <a:ext uri="{FF2B5EF4-FFF2-40B4-BE49-F238E27FC236}">
+                <a16:creationId xmlns:a16="http://schemas.microsoft.com/office/drawing/2014/main" id="{2B535C65-D08E-379D-E198-F1828D3F6CE7}"/>
+              </a:ext>
+            </a:extLst>
+          </p:cNvPr>
+          <p:cNvPicPr>
+            <a:picLocks noChangeAspect="1"/>
+          </p:cNvPicPr>
+          <p:nvPr/>
+        </p:nvPicPr>
+        <p:blipFill>
+          <a:blip r:embed="rId4"/>
+          <a:stretch>
+            <a:fillRect/>
+          </a:stretch>
+        </p:blipFill>
+        <p:spPr>
+          <a:xfrm>
+            <a:off x="6992855" y="1704929"/>
+            <a:ext cx="4599831" cy="1893662"/>
           </a:xfrm>
           <a:prstGeom prst="rect">
             <a:avLst/>
           </a:prstGeom>
-          <a:noFill/>
-        </p:spPr>
-        <p:txBody>
-          <a:bodyPr wrap="square" anchor="t" lIns="0" rIns="0" tIns="0" bIns="0">
-            <a:spAutoFit/>
-          </a:bodyPr>
-          <a:lstStyle/>
-          <a:p>
-            <a:pPr algn="l"/>
-            <a:r>
-              <a:rPr sz="1000" b="0">
-                <a:solidFill>
-                  <a:srgbClr val="6B7280"/>
-                </a:solidFill>
-                <a:latin typeface="Calibri"/>
-              </a:rPr>
-              <a:t>TicketTriage  ·  Swiss {ai} Weeks  ·  Pipeline (docs/features/triage-pipeline, web-triage-ui)</a:t>
-            </a:r>
-          </a:p>
-        </p:txBody>
-      </p:sp>
+        </p:spPr>
+      </p:pic>
     </p:spTree>
   </p:cSld>
   <p:clrMapOvr>
@@ -10823,7 +10654,7 @@
 </file>
 
 <file path=ppt/slides/slide5.xml><?xml version="1.0" encoding="utf-8"?>
-<p:sld xmlns:a="http://schemas.openxmlformats.org/drawingml/2006/main" xmlns:p="http://schemas.openxmlformats.org/presentationml/2006/main" xmlns:r="http://schemas.openxmlformats.org/officeDocument/2006/relationships">
+<p:sld xmlns:a="http://schemas.openxmlformats.org/drawingml/2006/main" xmlns:r="http://schemas.openxmlformats.org/officeDocument/2006/relationships" xmlns:p="http://schemas.openxmlformats.org/presentationml/2006/main">
   <p:cSld>
     <p:spTree>
       <p:nvGrpSpPr>
@@ -10831,7 +10662,14 @@
         <p:cNvGrpSpPr/>
         <p:nvPr/>
       </p:nvGrpSpPr>
-      <p:grpSpPr/>
+      <p:grpSpPr>
+        <a:xfrm>
+          <a:off x="0" y="0"/>
+          <a:ext cx="0" cy="0"/>
+          <a:chOff x="0" y="0"/>
+          <a:chExt cx="0" cy="0"/>
+        </a:xfrm>
+      </p:grpSpPr>
       <p:sp>
         <p:nvSpPr>
           <p:cNvPr id="2" name="Oval 1"/>
@@ -10869,7 +10707,7 @@
           </a:fontRef>
         </p:style>
         <p:txBody>
-          <a:bodyPr rtlCol="0" anchor="ctr" lIns="0" rIns="0" tIns="0" bIns="0"/>
+          <a:bodyPr lIns="0" tIns="0" rIns="0" bIns="0" rtlCol="0" anchor="ctr"/>
           <a:lstStyle/>
           <a:p>
             <a:pPr algn="ctr"/>
@@ -10902,7 +10740,7 @@
           <a:noFill/>
         </p:spPr>
         <p:txBody>
-          <a:bodyPr wrap="square" anchor="ctr" lIns="0" rIns="0" tIns="0" bIns="0">
+          <a:bodyPr wrap="square" lIns="0" tIns="0" rIns="0" bIns="0" anchor="ctr">
             <a:spAutoFit/>
           </a:bodyPr>
           <a:lstStyle/>
@@ -10937,7 +10775,7 @@
           <a:noFill/>
         </p:spPr>
         <p:txBody>
-          <a:bodyPr wrap="square" anchor="t" lIns="0" rIns="0" tIns="0" bIns="0">
+          <a:bodyPr wrap="square" lIns="0" tIns="0" rIns="0" bIns="0" anchor="t">
             <a:spAutoFit/>
           </a:bodyPr>
           <a:lstStyle/>
@@ -11000,6 +10838,7 @@
           <a:lstStyle/>
           <a:p>
             <a:pPr algn="ctr"/>
+            <a:endParaRPr/>
           </a:p>
         </p:txBody>
       </p:sp>
@@ -11020,7 +10859,7 @@
           <a:noFill/>
         </p:spPr>
         <p:txBody>
-          <a:bodyPr wrap="square" anchor="t" lIns="0" rIns="0" tIns="0" bIns="0">
+          <a:bodyPr wrap="square" lIns="0" tIns="0" rIns="0" bIns="0" anchor="t">
             <a:spAutoFit/>
           </a:bodyPr>
           <a:lstStyle/>
@@ -11055,7 +10894,7 @@
           <a:noFill/>
         </p:spPr>
         <p:txBody>
-          <a:bodyPr wrap="square" anchor="t" lIns="0" rIns="0" tIns="0" bIns="0">
+          <a:bodyPr wrap="square" lIns="0" tIns="0" rIns="0" bIns="0" anchor="t">
             <a:spAutoFit/>
           </a:bodyPr>
           <a:lstStyle/>
@@ -11118,6 +10957,7 @@
           <a:lstStyle/>
           <a:p>
             <a:pPr algn="ctr"/>
+            <a:endParaRPr/>
           </a:p>
         </p:txBody>
       </p:sp>
@@ -11138,7 +10978,7 @@
           <a:noFill/>
         </p:spPr>
         <p:txBody>
-          <a:bodyPr wrap="square" anchor="ctr" lIns="0" rIns="0" tIns="0" bIns="0">
+          <a:bodyPr wrap="square" lIns="0" tIns="0" rIns="0" bIns="0" anchor="ctr">
             <a:spAutoFit/>
           </a:bodyPr>
           <a:lstStyle/>
@@ -11201,6 +11041,7 @@
           <a:lstStyle/>
           <a:p>
             <a:pPr algn="ctr"/>
+            <a:endParaRPr/>
           </a:p>
         </p:txBody>
       </p:sp>
@@ -11221,7 +11062,7 @@
           <a:noFill/>
         </p:spPr>
         <p:txBody>
-          <a:bodyPr wrap="square" anchor="ctr" lIns="0" rIns="0" tIns="0" bIns="0">
+          <a:bodyPr wrap="square" lIns="0" tIns="0" rIns="0" bIns="0" anchor="ctr">
             <a:spAutoFit/>
           </a:bodyPr>
           <a:lstStyle/>
@@ -11284,6 +11125,7 @@
           <a:lstStyle/>
           <a:p>
             <a:pPr algn="ctr"/>
+            <a:endParaRPr/>
           </a:p>
         </p:txBody>
       </p:sp>
@@ -11304,7 +11146,7 @@
           <a:noFill/>
         </p:spPr>
         <p:txBody>
-          <a:bodyPr wrap="square" anchor="ctr" lIns="0" rIns="0" tIns="0" bIns="0">
+          <a:bodyPr wrap="square" lIns="0" tIns="0" rIns="0" bIns="0" anchor="ctr">
             <a:spAutoFit/>
           </a:bodyPr>
           <a:lstStyle/>
@@ -11367,6 +11209,7 @@
           <a:lstStyle/>
           <a:p>
             <a:pPr algn="ctr"/>
+            <a:endParaRPr/>
           </a:p>
         </p:txBody>
       </p:sp>
@@ -11387,7 +11230,7 @@
           <a:noFill/>
         </p:spPr>
         <p:txBody>
-          <a:bodyPr wrap="square" anchor="t" lIns="0" rIns="0" tIns="0" bIns="0">
+          <a:bodyPr wrap="square" lIns="0" tIns="0" rIns="0" bIns="0" anchor="t">
             <a:spAutoFit/>
           </a:bodyPr>
           <a:lstStyle/>
@@ -11422,7 +11265,7 @@
           <a:noFill/>
         </p:spPr>
         <p:txBody>
-          <a:bodyPr wrap="square" anchor="t" lIns="0" rIns="0" tIns="0" bIns="0">
+          <a:bodyPr wrap="square" lIns="0" tIns="0" rIns="0" bIns="0" anchor="t">
             <a:spAutoFit/>
           </a:bodyPr>
           <a:lstStyle/>
@@ -11485,6 +11328,7 @@
           <a:lstStyle/>
           <a:p>
             <a:pPr algn="ctr"/>
+            <a:endParaRPr/>
           </a:p>
         </p:txBody>
       </p:sp>
@@ -11505,7 +11349,7 @@
           <a:noFill/>
         </p:spPr>
         <p:txBody>
-          <a:bodyPr wrap="square" anchor="ctr" lIns="0" rIns="0" tIns="0" bIns="0">
+          <a:bodyPr wrap="square" lIns="0" tIns="0" rIns="0" bIns="0" anchor="ctr">
             <a:spAutoFit/>
           </a:bodyPr>
           <a:lstStyle/>
@@ -11568,6 +11412,7 @@
           <a:lstStyle/>
           <a:p>
             <a:pPr algn="ctr"/>
+            <a:endParaRPr/>
           </a:p>
         </p:txBody>
       </p:sp>
@@ -11588,7 +11433,7 @@
           <a:noFill/>
         </p:spPr>
         <p:txBody>
-          <a:bodyPr wrap="square" anchor="ctr" lIns="0" rIns="0" tIns="0" bIns="0">
+          <a:bodyPr wrap="square" lIns="0" tIns="0" rIns="0" bIns="0" anchor="ctr">
             <a:spAutoFit/>
           </a:bodyPr>
           <a:lstStyle/>
@@ -11651,6 +11496,7 @@
           <a:lstStyle/>
           <a:p>
             <a:pPr algn="ctr"/>
+            <a:endParaRPr/>
           </a:p>
         </p:txBody>
       </p:sp>
@@ -11671,7 +11517,7 @@
           <a:noFill/>
         </p:spPr>
         <p:txBody>
-          <a:bodyPr wrap="square" anchor="ctr" lIns="0" rIns="0" tIns="0" bIns="0">
+          <a:bodyPr wrap="square" lIns="0" tIns="0" rIns="0" bIns="0" anchor="ctr">
             <a:spAutoFit/>
           </a:bodyPr>
           <a:lstStyle/>
@@ -11734,6 +11580,7 @@
           <a:lstStyle/>
           <a:p>
             <a:pPr algn="ctr"/>
+            <a:endParaRPr/>
           </a:p>
         </p:txBody>
       </p:sp>
@@ -11754,7 +11601,7 @@
           <a:noFill/>
         </p:spPr>
         <p:txBody>
-          <a:bodyPr wrap="square" anchor="t" lIns="0" rIns="0" tIns="0" bIns="0">
+          <a:bodyPr wrap="square" lIns="0" tIns="0" rIns="0" bIns="0" anchor="t">
             <a:spAutoFit/>
           </a:bodyPr>
           <a:lstStyle/>
@@ -11789,7 +11636,7 @@
           <a:noFill/>
         </p:spPr>
         <p:txBody>
-          <a:bodyPr wrap="square" anchor="t" lIns="0" rIns="0" tIns="0" bIns="0">
+          <a:bodyPr wrap="square" lIns="0" tIns="0" rIns="0" bIns="0" anchor="t">
             <a:spAutoFit/>
           </a:bodyPr>
           <a:lstStyle/>
@@ -11852,6 +11699,7 @@
           <a:lstStyle/>
           <a:p>
             <a:pPr algn="ctr"/>
+            <a:endParaRPr/>
           </a:p>
         </p:txBody>
       </p:sp>
@@ -11872,7 +11720,7 @@
           <a:noFill/>
         </p:spPr>
         <p:txBody>
-          <a:bodyPr wrap="square" anchor="ctr" lIns="0" rIns="0" tIns="0" bIns="0">
+          <a:bodyPr wrap="square" lIns="0" tIns="0" rIns="0" bIns="0" anchor="ctr">
             <a:spAutoFit/>
           </a:bodyPr>
           <a:lstStyle/>
@@ -11935,6 +11783,7 @@
           <a:lstStyle/>
           <a:p>
             <a:pPr algn="ctr"/>
+            <a:endParaRPr/>
           </a:p>
         </p:txBody>
       </p:sp>
@@ -11955,7 +11804,7 @@
           <a:noFill/>
         </p:spPr>
         <p:txBody>
-          <a:bodyPr wrap="square" anchor="ctr" lIns="0" rIns="0" tIns="0" bIns="0">
+          <a:bodyPr wrap="square" lIns="0" tIns="0" rIns="0" bIns="0" anchor="ctr">
             <a:spAutoFit/>
           </a:bodyPr>
           <a:lstStyle/>
@@ -12018,6 +11867,7 @@
           <a:lstStyle/>
           <a:p>
             <a:pPr algn="ctr"/>
+            <a:endParaRPr/>
           </a:p>
         </p:txBody>
       </p:sp>
@@ -12038,7 +11888,7 @@
           <a:noFill/>
         </p:spPr>
         <p:txBody>
-          <a:bodyPr wrap="square" anchor="ctr" lIns="0" rIns="0" tIns="0" bIns="0">
+          <a:bodyPr wrap="square" lIns="0" tIns="0" rIns="0" bIns="0" anchor="ctr">
             <a:spAutoFit/>
           </a:bodyPr>
           <a:lstStyle/>
@@ -12101,6 +11951,7 @@
           <a:lstStyle/>
           <a:p>
             <a:pPr algn="ctr"/>
+            <a:endParaRPr/>
           </a:p>
         </p:txBody>
       </p:sp>
@@ -12121,7 +11972,7 @@
           <a:noFill/>
         </p:spPr>
         <p:txBody>
-          <a:bodyPr wrap="square" anchor="t" lIns="0" rIns="0" tIns="0" bIns="0">
+          <a:bodyPr wrap="square" lIns="0" tIns="0" rIns="0" bIns="0" anchor="t">
             <a:spAutoFit/>
           </a:bodyPr>
           <a:lstStyle/>
@@ -12156,7 +12007,7 @@
           <a:noFill/>
         </p:spPr>
         <p:txBody>
-          <a:bodyPr wrap="square" anchor="t" lIns="0" rIns="0" tIns="0" bIns="0">
+          <a:bodyPr wrap="square" lIns="0" tIns="0" rIns="0" bIns="0" anchor="t">
             <a:spAutoFit/>
           </a:bodyPr>
           <a:lstStyle/>
@@ -12219,6 +12070,7 @@
           <a:lstStyle/>
           <a:p>
             <a:pPr algn="ctr"/>
+            <a:endParaRPr/>
           </a:p>
         </p:txBody>
       </p:sp>
@@ -12239,7 +12091,7 @@
           <a:noFill/>
         </p:spPr>
         <p:txBody>
-          <a:bodyPr wrap="square" anchor="ctr" lIns="0" rIns="0" tIns="0" bIns="0">
+          <a:bodyPr wrap="square" lIns="0" tIns="0" rIns="0" bIns="0" anchor="ctr">
             <a:spAutoFit/>
           </a:bodyPr>
           <a:lstStyle/>
@@ -12302,6 +12154,7 @@
           <a:lstStyle/>
           <a:p>
             <a:pPr algn="ctr"/>
+            <a:endParaRPr/>
           </a:p>
         </p:txBody>
       </p:sp>
@@ -12322,7 +12175,7 @@
           <a:noFill/>
         </p:spPr>
         <p:txBody>
-          <a:bodyPr wrap="square" anchor="ctr" lIns="0" rIns="0" tIns="0" bIns="0">
+          <a:bodyPr wrap="square" lIns="0" tIns="0" rIns="0" bIns="0" anchor="ctr">
             <a:spAutoFit/>
           </a:bodyPr>
           <a:lstStyle/>
@@ -12385,6 +12238,7 @@
           <a:lstStyle/>
           <a:p>
             <a:pPr algn="ctr"/>
+            <a:endParaRPr/>
           </a:p>
         </p:txBody>
       </p:sp>
@@ -12405,7 +12259,7 @@
           <a:noFill/>
         </p:spPr>
         <p:txBody>
-          <a:bodyPr wrap="square" anchor="ctr" lIns="0" rIns="0" tIns="0" bIns="0">
+          <a:bodyPr wrap="square" lIns="0" tIns="0" rIns="0" bIns="0" anchor="ctr">
             <a:spAutoFit/>
           </a:bodyPr>
           <a:lstStyle/>
@@ -12468,6 +12322,7 @@
           <a:lstStyle/>
           <a:p>
             <a:pPr algn="ctr"/>
+            <a:endParaRPr/>
           </a:p>
         </p:txBody>
       </p:sp>
@@ -12488,7 +12343,7 @@
           <a:noFill/>
         </p:spPr>
         <p:txBody>
-          <a:bodyPr wrap="square" anchor="t" lIns="0" rIns="0" tIns="0" bIns="0">
+          <a:bodyPr wrap="square" lIns="0" tIns="0" rIns="0" bIns="0" anchor="t">
             <a:spAutoFit/>
           </a:bodyPr>
           <a:lstStyle/>
@@ -12523,7 +12378,7 @@
           <a:noFill/>
         </p:spPr>
         <p:txBody>
-          <a:bodyPr wrap="square" anchor="t" lIns="0" rIns="0" tIns="0" bIns="0">
+          <a:bodyPr wrap="square" lIns="0" tIns="0" rIns="0" bIns="0" anchor="t">
             <a:spAutoFit/>
           </a:bodyPr>
           <a:lstStyle/>
@@ -12586,6 +12441,7 @@
           <a:lstStyle/>
           <a:p>
             <a:pPr algn="ctr"/>
+            <a:endParaRPr/>
           </a:p>
         </p:txBody>
       </p:sp>
@@ -12606,7 +12462,7 @@
           <a:noFill/>
         </p:spPr>
         <p:txBody>
-          <a:bodyPr wrap="square" anchor="ctr" lIns="0" rIns="0" tIns="0" bIns="0">
+          <a:bodyPr wrap="square" lIns="0" tIns="0" rIns="0" bIns="0" anchor="ctr">
             <a:spAutoFit/>
           </a:bodyPr>
           <a:lstStyle/>
@@ -12669,6 +12525,7 @@
           <a:lstStyle/>
           <a:p>
             <a:pPr algn="ctr"/>
+            <a:endParaRPr/>
           </a:p>
         </p:txBody>
       </p:sp>
@@ -12689,7 +12546,7 @@
           <a:noFill/>
         </p:spPr>
         <p:txBody>
-          <a:bodyPr wrap="square" anchor="ctr" lIns="0" rIns="0" tIns="0" bIns="0">
+          <a:bodyPr wrap="square" lIns="0" tIns="0" rIns="0" bIns="0" anchor="ctr">
             <a:spAutoFit/>
           </a:bodyPr>
           <a:lstStyle/>
@@ -12752,6 +12609,7 @@
           <a:lstStyle/>
           <a:p>
             <a:pPr algn="ctr"/>
+            <a:endParaRPr/>
           </a:p>
         </p:txBody>
       </p:sp>
@@ -12772,7 +12630,7 @@
           <a:noFill/>
         </p:spPr>
         <p:txBody>
-          <a:bodyPr wrap="square" anchor="ctr" lIns="0" rIns="0" tIns="0" bIns="0">
+          <a:bodyPr wrap="square" lIns="0" tIns="0" rIns="0" bIns="0" anchor="ctr">
             <a:spAutoFit/>
           </a:bodyPr>
           <a:lstStyle/>
@@ -12835,6 +12693,7 @@
           <a:lstStyle/>
           <a:p>
             <a:pPr algn="ctr"/>
+            <a:endParaRPr/>
           </a:p>
         </p:txBody>
       </p:sp>
@@ -12855,7 +12714,7 @@
           <a:noFill/>
         </p:spPr>
         <p:txBody>
-          <a:bodyPr wrap="square" anchor="t" lIns="0" rIns="0" tIns="0" bIns="0">
+          <a:bodyPr wrap="square" lIns="0" tIns="0" rIns="0" bIns="0" anchor="t">
             <a:spAutoFit/>
           </a:bodyPr>
           <a:lstStyle/>
@@ -12890,7 +12749,7 @@
           <a:noFill/>
         </p:spPr>
         <p:txBody>
-          <a:bodyPr wrap="square" anchor="t" lIns="0" rIns="0" tIns="0" bIns="0">
+          <a:bodyPr wrap="square" lIns="0" tIns="0" rIns="0" bIns="0" anchor="t">
             <a:spAutoFit/>
           </a:bodyPr>
           <a:lstStyle/>
@@ -12953,6 +12812,7 @@
           <a:lstStyle/>
           <a:p>
             <a:pPr algn="ctr"/>
+            <a:endParaRPr/>
           </a:p>
         </p:txBody>
       </p:sp>
@@ -12973,7 +12833,7 @@
           <a:noFill/>
         </p:spPr>
         <p:txBody>
-          <a:bodyPr wrap="square" anchor="ctr" lIns="0" rIns="0" tIns="0" bIns="0">
+          <a:bodyPr wrap="square" lIns="0" tIns="0" rIns="0" bIns="0" anchor="ctr">
             <a:spAutoFit/>
           </a:bodyPr>
           <a:lstStyle/>
@@ -13036,6 +12896,7 @@
           <a:lstStyle/>
           <a:p>
             <a:pPr algn="ctr"/>
+            <a:endParaRPr/>
           </a:p>
         </p:txBody>
       </p:sp>
@@ -13056,7 +12917,7 @@
           <a:noFill/>
         </p:spPr>
         <p:txBody>
-          <a:bodyPr wrap="square" anchor="ctr" lIns="0" rIns="0" tIns="0" bIns="0">
+          <a:bodyPr wrap="square" lIns="0" tIns="0" rIns="0" bIns="0" anchor="ctr">
             <a:spAutoFit/>
           </a:bodyPr>
           <a:lstStyle/>
@@ -13119,6 +12980,7 @@
           <a:lstStyle/>
           <a:p>
             <a:pPr algn="ctr"/>
+            <a:endParaRPr/>
           </a:p>
         </p:txBody>
       </p:sp>
@@ -13139,7 +13001,7 @@
           <a:noFill/>
         </p:spPr>
         <p:txBody>
-          <a:bodyPr wrap="square" anchor="ctr" lIns="0" rIns="0" tIns="0" bIns="0">
+          <a:bodyPr wrap="square" lIns="0" tIns="0" rIns="0" bIns="0" anchor="ctr">
             <a:spAutoFit/>
           </a:bodyPr>
           <a:lstStyle/>
@@ -13200,6 +13062,7 @@
           <a:lstStyle/>
           <a:p>
             <a:pPr algn="ctr"/>
+            <a:endParaRPr/>
           </a:p>
         </p:txBody>
       </p:sp>
@@ -13220,7 +13083,7 @@
           <a:noFill/>
         </p:spPr>
         <p:txBody>
-          <a:bodyPr wrap="square" anchor="ctr" lIns="0" rIns="0" tIns="0" bIns="0">
+          <a:bodyPr wrap="square" lIns="0" tIns="0" rIns="0" bIns="0" anchor="ctr">
             <a:spAutoFit/>
           </a:bodyPr>
           <a:lstStyle/>
@@ -13264,7 +13127,7 @@
           <a:noFill/>
         </p:spPr>
         <p:txBody>
-          <a:bodyPr wrap="square" anchor="t" lIns="0" rIns="0" tIns="0" bIns="0">
+          <a:bodyPr wrap="square" lIns="0" tIns="0" rIns="0" bIns="0" anchor="t">
             <a:spAutoFit/>
           </a:bodyPr>
           <a:lstStyle/>
@@ -13611,7 +13474,7 @@
 </file>
 
 <file path=ppt/theme/theme2.xml><?xml version="1.0" encoding="utf-8"?>
-<a:theme xmlns:a="http://schemas.openxmlformats.org/drawingml/2006/main" name="Office Theme">
+<a:theme xmlns:a="http://schemas.openxmlformats.org/drawingml/2006/main" name="Office">
   <a:themeElements>
     <a:clrScheme name="Office">
       <a:dk1>
@@ -13621,44 +13484,44 @@
         <a:sysClr val="window" lastClr="FFFFFF"/>
       </a:lt1>
       <a:dk2>
-        <a:srgbClr val="1F497D"/>
+        <a:srgbClr val="0E2841"/>
       </a:dk2>
       <a:lt2>
-        <a:srgbClr val="EEECE1"/>
+        <a:srgbClr val="E8E8E8"/>
       </a:lt2>
       <a:accent1>
-        <a:srgbClr val="4F81BD"/>
+        <a:srgbClr val="156082"/>
       </a:accent1>
       <a:accent2>
-        <a:srgbClr val="C0504D"/>
+        <a:srgbClr val="E97132"/>
       </a:accent2>
       <a:accent3>
-        <a:srgbClr val="9BBB59"/>
+        <a:srgbClr val="196B24"/>
       </a:accent3>
       <a:accent4>
-        <a:srgbClr val="8064A2"/>
+        <a:srgbClr val="0F9ED5"/>
       </a:accent4>
       <a:accent5>
-        <a:srgbClr val="4BACC6"/>
+        <a:srgbClr val="A02B93"/>
       </a:accent5>
       <a:accent6>
-        <a:srgbClr val="F79646"/>
+        <a:srgbClr val="4EA72E"/>
       </a:accent6>
       <a:hlink>
-        <a:srgbClr val="0000FF"/>
+        <a:srgbClr val="467886"/>
       </a:hlink>
       <a:folHlink>
-        <a:srgbClr val="800080"/>
+        <a:srgbClr val="96607D"/>
       </a:folHlink>
     </a:clrScheme>
     <a:fontScheme name="Office">
       <a:majorFont>
-        <a:latin typeface="Calibri"/>
+        <a:latin typeface="Aptos Display" panose="02110004020202020204"/>
         <a:ea typeface=""/>
         <a:cs typeface=""/>
-        <a:font script="Jpan" typeface="ＭＳ Ｐゴシック"/>
+        <a:font script="Jpan" typeface="游ゴシック Light"/>
         <a:font script="Hang" typeface="맑은 고딕"/>
-        <a:font script="Hans" typeface="宋体"/>
+        <a:font script="Hans" typeface="等线 Light"/>
         <a:font script="Hant" typeface="新細明體"/>
         <a:font script="Arab" typeface="Times New Roman"/>
         <a:font script="Hebr" typeface="Times New Roman"/>
@@ -13686,14 +13549,31 @@
         <a:font script="Viet" typeface="Times New Roman"/>
         <a:font script="Uigh" typeface="Microsoft Uighur"/>
         <a:font script="Geor" typeface="Sylfaen"/>
+        <a:font script="Armn" typeface="Arial"/>
+        <a:font script="Bugi" typeface="Leelawadee UI"/>
+        <a:font script="Bopo" typeface="Microsoft JhengHei"/>
+        <a:font script="Java" typeface="Javanese Text"/>
+        <a:font script="Lisu" typeface="Segoe UI"/>
+        <a:font script="Mymr" typeface="Myanmar Text"/>
+        <a:font script="Nkoo" typeface="Ebrima"/>
+        <a:font script="Olck" typeface="Nirmala UI"/>
+        <a:font script="Osma" typeface="Ebrima"/>
+        <a:font script="Phag" typeface="Phagspa"/>
+        <a:font script="Syrn" typeface="Estrangelo Edessa"/>
+        <a:font script="Syrj" typeface="Estrangelo Edessa"/>
+        <a:font script="Syre" typeface="Estrangelo Edessa"/>
+        <a:font script="Sora" typeface="Nirmala UI"/>
+        <a:font script="Tale" typeface="Microsoft Tai Le"/>
+        <a:font script="Talu" typeface="Microsoft New Tai Lue"/>
+        <a:font script="Tfng" typeface="Ebrima"/>
       </a:majorFont>
       <a:minorFont>
-        <a:latin typeface="Calibri"/>
+        <a:latin typeface="Aptos" panose="02110004020202020204"/>
         <a:ea typeface=""/>
         <a:cs typeface=""/>
-        <a:font script="Jpan" typeface="ＭＳ Ｐゴシック"/>
+        <a:font script="Jpan" typeface="游ゴシック"/>
         <a:font script="Hang" typeface="맑은 고딕"/>
-        <a:font script="Hans" typeface="宋体"/>
+        <a:font script="Hans" typeface="等线"/>
         <a:font script="Hant" typeface="新細明體"/>
         <a:font script="Arab" typeface="Arial"/>
         <a:font script="Hebr" typeface="Arial"/>
@@ -13721,6 +13601,23 @@
         <a:font script="Viet" typeface="Arial"/>
         <a:font script="Uigh" typeface="Microsoft Uighur"/>
         <a:font script="Geor" typeface="Sylfaen"/>
+        <a:font script="Armn" typeface="Arial"/>
+        <a:font script="Bugi" typeface="Leelawadee UI"/>
+        <a:font script="Bopo" typeface="Microsoft JhengHei"/>
+        <a:font script="Java" typeface="Javanese Text"/>
+        <a:font script="Lisu" typeface="Segoe UI"/>
+        <a:font script="Mymr" typeface="Myanmar Text"/>
+        <a:font script="Nkoo" typeface="Ebrima"/>
+        <a:font script="Olck" typeface="Nirmala UI"/>
+        <a:font script="Osma" typeface="Ebrima"/>
+        <a:font script="Phag" typeface="Phagspa"/>
+        <a:font script="Syrn" typeface="Estrangelo Edessa"/>
+        <a:font script="Syrj" typeface="Estrangelo Edessa"/>
+        <a:font script="Syre" typeface="Estrangelo Edessa"/>
+        <a:font script="Sora" typeface="Nirmala UI"/>
+        <a:font script="Tale" typeface="Microsoft Tai Le"/>
+        <a:font script="Talu" typeface="Microsoft New Tai Lue"/>
+        <a:font script="Tfng" typeface="Ebrima"/>
       </a:minorFont>
     </a:fontScheme>
     <a:fmtScheme name="Office">
@@ -13732,180 +13629,136 @@
           <a:gsLst>
             <a:gs pos="0">
               <a:schemeClr val="phClr">
-                <a:tint val="50000"/>
-                <a:satMod val="300000"/>
+                <a:lumMod val="110000"/>
+                <a:satMod val="105000"/>
+                <a:tint val="67000"/>
               </a:schemeClr>
             </a:gs>
-            <a:gs pos="35000">
+            <a:gs pos="50000">
               <a:schemeClr val="phClr">
-                <a:tint val="37000"/>
-                <a:satMod val="300000"/>
+                <a:lumMod val="105000"/>
+                <a:satMod val="103000"/>
+                <a:tint val="73000"/>
               </a:schemeClr>
             </a:gs>
             <a:gs pos="100000">
               <a:schemeClr val="phClr">
-                <a:tint val="15000"/>
-                <a:satMod val="350000"/>
+                <a:lumMod val="105000"/>
+                <a:satMod val="109000"/>
+                <a:tint val="81000"/>
               </a:schemeClr>
             </a:gs>
           </a:gsLst>
-          <a:lin ang="16200000" scaled="1"/>
+          <a:lin ang="5400000" scaled="0"/>
         </a:gradFill>
         <a:gradFill rotWithShape="1">
           <a:gsLst>
             <a:gs pos="0">
               <a:schemeClr val="phClr">
-                <a:tint val="100000"/>
+                <a:satMod val="103000"/>
+                <a:lumMod val="102000"/>
+                <a:tint val="94000"/>
+              </a:schemeClr>
+            </a:gs>
+            <a:gs pos="50000">
+              <a:schemeClr val="phClr">
+                <a:satMod val="110000"/>
+                <a:lumMod val="100000"/>
                 <a:shade val="100000"/>
-                <a:satMod val="130000"/>
               </a:schemeClr>
             </a:gs>
             <a:gs pos="100000">
               <a:schemeClr val="phClr">
-                <a:tint val="50000"/>
-                <a:shade val="100000"/>
-                <a:satMod val="350000"/>
+                <a:lumMod val="99000"/>
+                <a:satMod val="120000"/>
+                <a:shade val="78000"/>
               </a:schemeClr>
             </a:gs>
           </a:gsLst>
-          <a:lin ang="16200000" scaled="0"/>
+          <a:lin ang="5400000" scaled="0"/>
         </a:gradFill>
       </a:fillStyleLst>
       <a:lnStyleLst>
-        <a:ln w="9525" cap="flat" cmpd="sng" algn="ctr">
+        <a:ln w="12700" cap="flat" cmpd="sng" algn="ctr">
           <a:solidFill>
-            <a:schemeClr val="phClr">
-              <a:shade val="95000"/>
-              <a:satMod val="105000"/>
-            </a:schemeClr>
+            <a:schemeClr val="phClr"/>
           </a:solidFill>
           <a:prstDash val="solid"/>
+          <a:miter lim="800000"/>
+        </a:ln>
+        <a:ln w="19050" cap="flat" cmpd="sng" algn="ctr">
+          <a:solidFill>
+            <a:schemeClr val="phClr"/>
+          </a:solidFill>
+          <a:prstDash val="solid"/>
+          <a:miter lim="800000"/>
         </a:ln>
         <a:ln w="25400" cap="flat" cmpd="sng" algn="ctr">
           <a:solidFill>
             <a:schemeClr val="phClr"/>
           </a:solidFill>
           <a:prstDash val="solid"/>
-        </a:ln>
-        <a:ln w="38100" cap="flat" cmpd="sng" algn="ctr">
-          <a:solidFill>
-            <a:schemeClr val="phClr"/>
-          </a:solidFill>
-          <a:prstDash val="solid"/>
+          <a:miter lim="800000"/>
         </a:ln>
       </a:lnStyleLst>
       <a:effectStyleLst>
         <a:effectStyle>
+          <a:effectLst/>
+        </a:effectStyle>
+        <a:effectStyle>
+          <a:effectLst/>
+        </a:effectStyle>
+        <a:effectStyle>
           <a:effectLst>
-            <a:outerShdw blurRad="40000" dist="20000" dir="5400000" rotWithShape="0">
+            <a:outerShdw blurRad="57150" dist="19050" dir="5400000" algn="ctr" rotWithShape="0">
               <a:srgbClr val="000000">
-                <a:alpha val="38000"/>
+                <a:alpha val="63000"/>
               </a:srgbClr>
             </a:outerShdw>
           </a:effectLst>
-        </a:effectStyle>
-        <a:effectStyle>
-          <a:effectLst>
-            <a:outerShdw blurRad="40000" dist="23000" dir="5400000" rotWithShape="0">
-              <a:srgbClr val="000000">
-                <a:alpha val="35000"/>
-              </a:srgbClr>
-            </a:outerShdw>
-          </a:effectLst>
-        </a:effectStyle>
-        <a:effectStyle>
-          <a:effectLst>
-            <a:outerShdw blurRad="40000" dist="23000" dir="5400000" rotWithShape="0">
-              <a:srgbClr val="000000">
-                <a:alpha val="35000"/>
-              </a:srgbClr>
-            </a:outerShdw>
-          </a:effectLst>
-          <a:scene3d>
-            <a:camera prst="orthographicFront">
-              <a:rot lat="0" lon="0" rev="0"/>
-            </a:camera>
-            <a:lightRig rig="threePt" dir="t">
-              <a:rot lat="0" lon="0" rev="1200000"/>
-            </a:lightRig>
-          </a:scene3d>
-          <a:sp3d>
-            <a:bevelT w="63500" h="25400"/>
-          </a:sp3d>
         </a:effectStyle>
       </a:effectStyleLst>
       <a:bgFillStyleLst>
         <a:solidFill>
           <a:schemeClr val="phClr"/>
         </a:solidFill>
+        <a:solidFill>
+          <a:schemeClr val="phClr">
+            <a:tint val="95000"/>
+            <a:satMod val="170000"/>
+          </a:schemeClr>
+        </a:solidFill>
         <a:gradFill rotWithShape="1">
           <a:gsLst>
             <a:gs pos="0">
               <a:schemeClr val="phClr">
-                <a:tint val="40000"/>
-                <a:satMod val="350000"/>
+                <a:tint val="93000"/>
+                <a:satMod val="150000"/>
+                <a:shade val="98000"/>
+                <a:lumMod val="102000"/>
               </a:schemeClr>
             </a:gs>
-            <a:gs pos="40000">
+            <a:gs pos="50000">
               <a:schemeClr val="phClr">
-                <a:tint val="45000"/>
-                <a:shade val="99000"/>
-                <a:satMod val="350000"/>
+                <a:tint val="98000"/>
+                <a:satMod val="130000"/>
+                <a:shade val="90000"/>
+                <a:lumMod val="103000"/>
               </a:schemeClr>
             </a:gs>
             <a:gs pos="100000">
               <a:schemeClr val="phClr">
-                <a:shade val="20000"/>
-                <a:satMod val="255000"/>
+                <a:shade val="63000"/>
+                <a:satMod val="120000"/>
               </a:schemeClr>
             </a:gs>
           </a:gsLst>
-          <a:path path="circle">
-            <a:fillToRect l="50000" t="-80000" r="50000" b="180000"/>
-          </a:path>
-        </a:gradFill>
-        <a:gradFill rotWithShape="1">
-          <a:gsLst>
-            <a:gs pos="0">
-              <a:schemeClr val="phClr">
-                <a:tint val="80000"/>
-                <a:satMod val="300000"/>
-              </a:schemeClr>
-            </a:gs>
-            <a:gs pos="100000">
-              <a:schemeClr val="phClr">
-                <a:shade val="30000"/>
-                <a:satMod val="200000"/>
-              </a:schemeClr>
-            </a:gs>
-          </a:gsLst>
-          <a:path path="circle">
-            <a:fillToRect l="50000" t="50000" r="50000" b="50000"/>
-          </a:path>
+          <a:lin ang="5400000" scaled="0"/>
         </a:gradFill>
       </a:bgFillStyleLst>
     </a:fmtScheme>
   </a:themeElements>
   <a:objectDefaults>
-    <a:spDef>
-      <a:spPr/>
-      <a:bodyPr/>
-      <a:lstStyle/>
-      <a:style>
-        <a:lnRef idx="1">
-          <a:schemeClr val="accent1"/>
-        </a:lnRef>
-        <a:fillRef idx="3">
-          <a:schemeClr val="accent1"/>
-        </a:fillRef>
-        <a:effectRef idx="2">
-          <a:schemeClr val="accent1"/>
-        </a:effectRef>
-        <a:fontRef idx="minor">
-          <a:schemeClr val="lt1"/>
-        </a:fontRef>
-      </a:style>
-    </a:spDef>
     <a:lnDef>
       <a:spPr/>
       <a:bodyPr/>
@@ -13927,5 +13780,10 @@
     </a:lnDef>
   </a:objectDefaults>
   <a:extraClrSchemeLst/>
+  <a:extLst>
+    <a:ext uri="{05A4C25C-085E-4340-85A3-A5531E510DB2}">
+      <thm15:themeFamily xmlns:thm15="http://schemas.microsoft.com/office/thememl/2012/main" name="Office Theme" id="{2E142A2C-CD16-42D6-873A-C26D2A0506FA}" vid="{1BDDFF52-6CD6-40A5-AB3C-68EB2F1E4D0A}"/>
+    </a:ext>
+  </a:extLst>
 </a:theme>
 </file>